--- a/slides/pico_sensor_intro.pptx
+++ b/slides/pico_sensor_intro.pptx
@@ -2367,7 +2367,7 @@
           <a:lstStyle/>
           <a:p>
             <a:r>
-              <a:t>GP15 を入力にして、PULL_DOWN を使います。本体の LED は GP25 です。最初に30秒のウォームアップをします。つまずきやすい点:30秒間は何も表示されませんが、壊れていないので待ちましょう。</a:t>
+              <a:t>GP15 を入力にして、PULL_DOWN を使います。本体の LED は「LED」という名前で指定します。最初に30秒のウォームアップをします。つまずきやすい点:30秒間は何も表示されませんが、壊れていないので待ちましょう。</a:t>
             </a:r>
           </a:p>
         </p:txBody>
@@ -25240,7 +25240,7 @@
         <p:spPr>
           <a:xfrm>
             <a:off x="548640" y="1234440"/>
-            <a:ext cx="11094415" cy="4762500"/>
+            <a:ext cx="11094415" cy="4546600"/>
           </a:xfrm>
           <a:prstGeom prst="rect">
             <a:avLst/>
@@ -25286,7 +25286,7 @@
         <p:spPr>
           <a:xfrm>
             <a:off x="548640" y="1234440"/>
-            <a:ext cx="11094415" cy="4762500"/>
+            <a:ext cx="11094415" cy="4546600"/>
           </a:xfrm>
           <a:prstGeom prst="rect">
             <a:avLst/>
@@ -25475,7 +25475,7 @@
                 <a:ea typeface="MS Gothic"/>
                 <a:cs typeface="MS Gothic"/>
               </a:rPr>
-              <a:t># Pico 本体に付いているLED(GP25)を出力にする</a:t>
+              <a:t># Pico 本体に付いているLEDを出力にする(番号ではなく "LED" と名前で指定する)</a:t>
             </a:r>
           </a:p>
           <a:p>
@@ -25487,31 +25487,13 @@
             <a:r>
               <a:rPr sz="1400" b="0">
                 <a:solidFill>
-                  <a:srgbClr val="2E7D32"/>
+                  <a:srgbClr val="222222"/>
                 </a:solidFill>
                 <a:latin typeface="MS Gothic"/>
                 <a:ea typeface="MS Gothic"/>
                 <a:cs typeface="MS Gothic"/>
               </a:rPr>
-              <a:t># ※ Pico W の場合は Pin("LED", Pin.OUT) と書く</a:t>
-            </a:r>
-          </a:p>
-          <a:p>
-            <a:pPr algn="l">
-              <a:lnSpc>
-                <a:spcPts val="1700"/>
-              </a:lnSpc>
-            </a:pPr>
-            <a:r>
-              <a:rPr sz="1400" b="0">
-                <a:solidFill>
-                  <a:srgbClr val="222222"/>
-                </a:solidFill>
-                <a:latin typeface="MS Gothic"/>
-                <a:ea typeface="MS Gothic"/>
-                <a:cs typeface="MS Gothic"/>
-              </a:rPr>
-              <a:t>led = Pin(25, Pin.OUT)</a:t>
+              <a:t>led = Pin("LED", Pin.OUT)</a:t>
             </a:r>
           </a:p>
           <a:p>

--- a/slides/pico_sensor_intro.pptx
+++ b/slides/pico_sensor_intro.pptx
@@ -7441,7 +7441,7 @@
         <p:spPr>
           <a:xfrm>
             <a:off x="548640" y="1508760"/>
-            <a:ext cx="7315200" cy="1092200"/>
+            <a:ext cx="7772400" cy="1600200"/>
           </a:xfrm>
           <a:prstGeom prst="rect">
             <a:avLst/>
@@ -7487,7 +7487,7 @@
         <p:spPr>
           <a:xfrm>
             <a:off x="548640" y="1508760"/>
-            <a:ext cx="7315200" cy="1092200"/>
+            <a:ext cx="7772400" cy="1600200"/>
           </a:xfrm>
           <a:prstGeom prst="rect">
             <a:avLst/>
@@ -7502,11 +7502,11 @@
           <a:p>
             <a:pPr algn="l">
               <a:lnSpc>
-                <a:spcPts val="1700"/>
+                <a:spcPts val="2700"/>
               </a:lnSpc>
             </a:pPr>
             <a:r>
-              <a:rPr sz="1400" b="0">
+              <a:rPr sz="2200" b="0">
                 <a:solidFill>
                   <a:srgbClr val="222222"/>
                 </a:solidFill>
@@ -7517,7 +7517,7 @@
               <a:t>if distance &lt; 10:      </a:t>
             </a:r>
             <a:r>
-              <a:rPr sz="1400" b="0">
+              <a:rPr sz="2200" b="0">
                 <a:solidFill>
                   <a:srgbClr val="2E7D32"/>
                 </a:solidFill>
@@ -7531,11 +7531,11 @@
           <a:p>
             <a:pPr algn="l">
               <a:lnSpc>
-                <a:spcPts val="1700"/>
+                <a:spcPts val="2700"/>
               </a:lnSpc>
             </a:pPr>
             <a:r>
-              <a:rPr sz="1400" b="0">
+              <a:rPr sz="2200" b="0">
                 <a:solidFill>
                   <a:srgbClr val="222222"/>
                 </a:solidFill>
@@ -7549,11 +7549,11 @@
           <a:p>
             <a:pPr algn="l">
               <a:lnSpc>
-                <a:spcPts val="1700"/>
+                <a:spcPts val="2700"/>
               </a:lnSpc>
             </a:pPr>
             <a:r>
-              <a:rPr sz="1400" b="0">
+              <a:rPr sz="2200" b="0">
                 <a:solidFill>
                   <a:srgbClr val="222222"/>
                 </a:solidFill>
@@ -7564,7 +7564,7 @@
               <a:t>else:                  </a:t>
             </a:r>
             <a:r>
-              <a:rPr sz="1400" b="0">
+              <a:rPr sz="2200" b="0">
                 <a:solidFill>
                   <a:srgbClr val="2E7D32"/>
                 </a:solidFill>
@@ -7578,11 +7578,11 @@
           <a:p>
             <a:pPr algn="l">
               <a:lnSpc>
-                <a:spcPts val="1700"/>
+                <a:spcPts val="2700"/>
               </a:lnSpc>
             </a:pPr>
             <a:r>
-              <a:rPr sz="1400" b="0">
+              <a:rPr sz="2200" b="0">
                 <a:solidFill>
                   <a:srgbClr val="222222"/>
                 </a:solidFill>
@@ -7604,7 +7604,7 @@
         <p:spPr>
           <a:xfrm>
             <a:off x="640080" y="1605788"/>
-            <a:ext cx="1602740" cy="228600"/>
+            <a:ext cx="2466340" cy="355600"/>
           </a:xfrm>
           <a:prstGeom prst="roundRect">
             <a:avLst/>
@@ -7647,8 +7647,8 @@
         </p:nvSpPr>
         <p:spPr>
           <a:xfrm>
-            <a:off x="640080" y="2037588"/>
-            <a:ext cx="535940" cy="228600"/>
+            <a:off x="640080" y="2291588"/>
+            <a:ext cx="789939" cy="355600"/>
           </a:xfrm>
           <a:prstGeom prst="roundRect">
             <a:avLst/>
@@ -7691,7 +7691,7 @@
         </p:nvSpPr>
         <p:spPr>
           <a:xfrm>
-            <a:off x="548640" y="3017520"/>
+            <a:off x="548640" y="3520440"/>
             <a:ext cx="11094415" cy="2286000"/>
           </a:xfrm>
           <a:prstGeom prst="rect">
@@ -8063,7 +8063,7 @@
         <p:spPr>
           <a:xfrm>
             <a:off x="548640" y="1508760"/>
-            <a:ext cx="9144000" cy="1308100"/>
+            <a:ext cx="9144000" cy="1943100"/>
           </a:xfrm>
           <a:prstGeom prst="rect">
             <a:avLst/>
@@ -8109,7 +8109,7 @@
         <p:spPr>
           <a:xfrm>
             <a:off x="548640" y="1508760"/>
-            <a:ext cx="9144000" cy="1308100"/>
+            <a:ext cx="9144000" cy="1943100"/>
           </a:xfrm>
           <a:prstGeom prst="rect">
             <a:avLst/>
@@ -8124,11 +8124,11 @@
           <a:p>
             <a:pPr algn="l">
               <a:lnSpc>
-                <a:spcPts val="1700"/>
+                <a:spcPts val="2700"/>
               </a:lnSpc>
             </a:pPr>
             <a:r>
-              <a:rPr sz="1400" b="0">
+              <a:rPr sz="2200" b="0">
                 <a:solidFill>
                   <a:srgbClr val="222222"/>
                 </a:solidFill>
@@ -8139,7 +8139,7 @@
               <a:t>for i in range(3):          </a:t>
             </a:r>
             <a:r>
-              <a:rPr sz="1400" b="0">
+              <a:rPr sz="2200" b="0">
                 <a:solidFill>
                   <a:srgbClr val="2E7D32"/>
                 </a:solidFill>
@@ -8153,11 +8153,11 @@
           <a:p>
             <a:pPr algn="l">
               <a:lnSpc>
-                <a:spcPts val="1700"/>
+                <a:spcPts val="2700"/>
               </a:lnSpc>
             </a:pPr>
             <a:r>
-              <a:rPr sz="1400" b="0">
+              <a:rPr sz="2200" b="0">
                 <a:solidFill>
                   <a:srgbClr val="222222"/>
                 </a:solidFill>
@@ -8171,11 +8171,11 @@
           <a:p>
             <a:pPr algn="l">
               <a:lnSpc>
-                <a:spcPts val="1700"/>
+                <a:spcPts val="2700"/>
               </a:lnSpc>
             </a:pPr>
             <a:r>
-              <a:rPr sz="1400" b="0">
+              <a:rPr sz="2200" b="0">
                 <a:solidFill>
                   <a:srgbClr val="222222"/>
                 </a:solidFill>
@@ -8189,11 +8189,11 @@
           <a:p>
             <a:pPr algn="l">
               <a:lnSpc>
-                <a:spcPts val="1700"/>
+                <a:spcPts val="2700"/>
               </a:lnSpc>
             </a:pPr>
             <a:r>
-              <a:rPr sz="1400" b="0">
+              <a:rPr sz="2200" b="0">
                 <a:solidFill>
                   <a:srgbClr val="222222"/>
                 </a:solidFill>
@@ -8204,7 +8204,7 @@
               <a:t>for p in (red, yellow, green):   </a:t>
             </a:r>
             <a:r>
-              <a:rPr sz="1400" b="0">
+              <a:rPr sz="2200" b="0">
                 <a:solidFill>
                   <a:srgbClr val="2E7D32"/>
                 </a:solidFill>
@@ -8218,11 +8218,11 @@
           <a:p>
             <a:pPr algn="l">
               <a:lnSpc>
-                <a:spcPts val="1700"/>
+                <a:spcPts val="2700"/>
               </a:lnSpc>
             </a:pPr>
             <a:r>
-              <a:rPr sz="1400" b="0">
+              <a:rPr sz="2200" b="0">
                 <a:solidFill>
                   <a:srgbClr val="222222"/>
                 </a:solidFill>
@@ -8244,7 +8244,7 @@
         <p:spPr>
           <a:xfrm>
             <a:off x="640080" y="1605788"/>
-            <a:ext cx="1691640" cy="228600"/>
+            <a:ext cx="2606040" cy="355600"/>
           </a:xfrm>
           <a:prstGeom prst="roundRect">
             <a:avLst/>
@@ -8287,8 +8287,8 @@
         </p:nvSpPr>
         <p:spPr>
           <a:xfrm>
-            <a:off x="640080" y="2253488"/>
-            <a:ext cx="2758440" cy="228600"/>
+            <a:off x="640080" y="2634488"/>
+            <a:ext cx="4282439" cy="355600"/>
           </a:xfrm>
           <a:prstGeom prst="roundRect">
             <a:avLst/>
@@ -8331,7 +8331,7 @@
         </p:nvSpPr>
         <p:spPr>
           <a:xfrm>
-            <a:off x="548640" y="3566160"/>
+            <a:off x="548640" y="3886200"/>
             <a:ext cx="11094415" cy="1828800"/>
           </a:xfrm>
           <a:prstGeom prst="rect">
@@ -8685,7 +8685,7 @@
         <p:spPr>
           <a:xfrm>
             <a:off x="548640" y="1508760"/>
-            <a:ext cx="8229600" cy="1092200"/>
+            <a:ext cx="8229600" cy="1600200"/>
           </a:xfrm>
           <a:prstGeom prst="rect">
             <a:avLst/>
@@ -8731,7 +8731,7 @@
         <p:spPr>
           <a:xfrm>
             <a:off x="548640" y="1508760"/>
-            <a:ext cx="8229600" cy="1092200"/>
+            <a:ext cx="8229600" cy="1600200"/>
           </a:xfrm>
           <a:prstGeom prst="rect">
             <a:avLst/>
@@ -8746,11 +8746,11 @@
           <a:p>
             <a:pPr algn="l">
               <a:lnSpc>
-                <a:spcPts val="1700"/>
+                <a:spcPts val="2700"/>
               </a:lnSpc>
             </a:pPr>
             <a:r>
-              <a:rPr sz="1400" b="0">
+              <a:rPr sz="2200" b="0">
                 <a:solidFill>
                   <a:srgbClr val="222222"/>
                 </a:solidFill>
@@ -8764,11 +8764,11 @@
           <a:p>
             <a:pPr algn="l">
               <a:lnSpc>
-                <a:spcPts val="1700"/>
+                <a:spcPts val="2700"/>
               </a:lnSpc>
             </a:pPr>
             <a:r>
-              <a:rPr sz="1400" b="0">
+              <a:rPr sz="2200" b="0">
                 <a:solidFill>
                   <a:srgbClr val="222222"/>
                 </a:solidFill>
@@ -8779,7 +8779,7 @@
               <a:t>    return x * 2       </a:t>
             </a:r>
             <a:r>
-              <a:rPr sz="1400" b="0">
+              <a:rPr sz="2200" b="0">
                 <a:solidFill>
                   <a:srgbClr val="2E7D32"/>
                 </a:solidFill>
@@ -8793,11 +8793,11 @@
           <a:p>
             <a:pPr algn="l">
               <a:lnSpc>
-                <a:spcPts val="1700"/>
+                <a:spcPts val="2700"/>
               </a:lnSpc>
             </a:pPr>
             <a:r>
-              <a:rPr sz="1400" b="0">
+              <a:rPr sz="2200" b="0">
                 <a:solidFill>
                   <a:srgbClr val="222222"/>
                 </a:solidFill>
@@ -8811,11 +8811,11 @@
           <a:p>
             <a:pPr algn="l">
               <a:lnSpc>
-                <a:spcPts val="1700"/>
+                <a:spcPts val="2700"/>
               </a:lnSpc>
             </a:pPr>
             <a:r>
-              <a:rPr sz="1400" b="0">
+              <a:rPr sz="2200" b="0">
                 <a:solidFill>
                   <a:srgbClr val="222222"/>
                 </a:solidFill>
@@ -8826,7 +8826,7 @@
               <a:t>print(double(5))       </a:t>
             </a:r>
             <a:r>
-              <a:rPr sz="1400" b="0">
+              <a:rPr sz="2200" b="0">
                 <a:solidFill>
                   <a:srgbClr val="2E7D32"/>
                 </a:solidFill>
@@ -8848,7 +8848,7 @@
         <p:spPr>
           <a:xfrm>
             <a:off x="640080" y="1605788"/>
-            <a:ext cx="1336040" cy="228600"/>
+            <a:ext cx="2047240" cy="355600"/>
           </a:xfrm>
           <a:prstGeom prst="roundRect">
             <a:avLst/>
@@ -8891,7 +8891,7 @@
         </p:nvSpPr>
         <p:spPr>
           <a:xfrm>
-            <a:off x="548640" y="3017520"/>
+            <a:off x="548640" y="3520440"/>
             <a:ext cx="11094415" cy="2286000"/>
           </a:xfrm>
           <a:prstGeom prst="rect">
@@ -38240,7 +38240,7 @@
         <p:spPr>
           <a:xfrm>
             <a:off x="548640" y="1325880"/>
-            <a:ext cx="11094415" cy="1092200"/>
+            <a:ext cx="11094415" cy="1498600"/>
           </a:xfrm>
           <a:prstGeom prst="rect">
             <a:avLst/>
@@ -38286,7 +38286,7 @@
         <p:spPr>
           <a:xfrm>
             <a:off x="548640" y="1325880"/>
-            <a:ext cx="11094415" cy="1092200"/>
+            <a:ext cx="11094415" cy="1498600"/>
           </a:xfrm>
           <a:prstGeom prst="rect">
             <a:avLst/>
@@ -38301,11 +38301,11 @@
           <a:p>
             <a:pPr algn="l">
               <a:lnSpc>
-                <a:spcPts val="1700"/>
+                <a:spcPts val="2500"/>
               </a:lnSpc>
             </a:pPr>
             <a:r>
-              <a:rPr sz="1400" b="0">
+              <a:rPr sz="2000" b="0">
                 <a:solidFill>
                   <a:srgbClr val="222222"/>
                 </a:solidFill>
@@ -38316,7 +38316,7 @@
               <a:t>from machine import Pin        </a:t>
             </a:r>
             <a:r>
-              <a:rPr sz="1400" b="0">
+              <a:rPr sz="2000" b="0">
                 <a:solidFill>
                   <a:srgbClr val="2E7D32"/>
                 </a:solidFill>
@@ -38330,11 +38330,11 @@
           <a:p>
             <a:pPr algn="l">
               <a:lnSpc>
-                <a:spcPts val="1700"/>
+                <a:spcPts val="2500"/>
               </a:lnSpc>
             </a:pPr>
             <a:r>
-              <a:rPr sz="1400" b="0">
+              <a:rPr sz="2000" b="0">
                 <a:solidFill>
                   <a:srgbClr val="222222"/>
                 </a:solidFill>
@@ -38348,11 +38348,11 @@
           <a:p>
             <a:pPr algn="l">
               <a:lnSpc>
-                <a:spcPts val="1700"/>
+                <a:spcPts val="2500"/>
               </a:lnSpc>
             </a:pPr>
             <a:r>
-              <a:rPr sz="1400" b="0">
+              <a:rPr sz="2000" b="0">
                 <a:solidFill>
                   <a:srgbClr val="222222"/>
                 </a:solidFill>
@@ -38363,7 +38363,7 @@
               <a:t>led = Pin("LED", Pin.OUT)      </a:t>
             </a:r>
             <a:r>
-              <a:rPr sz="1400" b="0">
+              <a:rPr sz="2000" b="0">
                 <a:solidFill>
                   <a:srgbClr val="2E7D32"/>
                 </a:solidFill>
@@ -38377,11 +38377,11 @@
           <a:p>
             <a:pPr algn="l">
               <a:lnSpc>
-                <a:spcPts val="1700"/>
+                <a:spcPts val="2500"/>
               </a:lnSpc>
             </a:pPr>
             <a:r>
-              <a:rPr sz="1400" b="0">
+              <a:rPr sz="2000" b="0">
                 <a:solidFill>
                   <a:srgbClr val="222222"/>
                 </a:solidFill>
@@ -38392,7 +38392,7 @@
               <a:t>led.value(1)                   </a:t>
             </a:r>
             <a:r>
-              <a:rPr sz="1400" b="0">
+              <a:rPr sz="2000" b="0">
                 <a:solidFill>
                   <a:srgbClr val="2E7D32"/>
                 </a:solidFill>
@@ -38413,8 +38413,8 @@
         </p:nvSpPr>
         <p:spPr>
           <a:xfrm>
-            <a:off x="548640" y="2555240"/>
-            <a:ext cx="11094415" cy="2743200"/>
+            <a:off x="548640" y="3053080"/>
+            <a:ext cx="11094415" cy="1828800"/>
           </a:xfrm>
           <a:prstGeom prst="rect">
             <a:avLst/>
@@ -38433,7 +38433,7 @@
               </a:spcAft>
             </a:pPr>
             <a:r>
-              <a:rPr sz="2400" b="0">
+              <a:rPr sz="2200" b="0">
                 <a:solidFill>
                   <a:srgbClr val="222222"/>
                 </a:solidFill>
@@ -38444,7 +38444,7 @@
               <a:t>・</a:t>
             </a:r>
             <a:r>
-              <a:rPr sz="2400" b="0">
+              <a:rPr sz="2200" b="0">
                 <a:solidFill>
                   <a:srgbClr val="C62828"/>
                 </a:solidFill>
@@ -38455,7 +38455,7 @@
               <a:t>Pin("LED", Pin.OUT)</a:t>
             </a:r>
             <a:r>
-              <a:rPr sz="2400" b="0">
+              <a:rPr sz="2200" b="0">
                 <a:solidFill>
                   <a:srgbClr val="222222"/>
                 </a:solidFill>
@@ -38466,7 +38466,7 @@
               <a:t>:本体の LED を </a:t>
             </a:r>
             <a:r>
-              <a:rPr sz="2400" b="1">
+              <a:rPr sz="2200" b="1">
                 <a:solidFill>
                   <a:srgbClr val="1F6FB2"/>
                 </a:solidFill>
@@ -38477,7 +38477,7 @@
               <a:t>出力</a:t>
             </a:r>
             <a:r>
-              <a:rPr sz="2400" b="0">
+              <a:rPr sz="2200" b="0">
                 <a:solidFill>
                   <a:srgbClr val="222222"/>
                 </a:solidFill>
@@ -38495,7 +38495,7 @@
               </a:spcAft>
             </a:pPr>
             <a:r>
-              <a:rPr sz="2400" b="0">
+              <a:rPr sz="2200" b="0">
                 <a:solidFill>
                   <a:srgbClr val="222222"/>
                 </a:solidFill>
@@ -38506,7 +38506,7 @@
               <a:t>・</a:t>
             </a:r>
             <a:r>
-              <a:rPr sz="2400" b="0">
+              <a:rPr sz="2200" b="0">
                 <a:solidFill>
                   <a:srgbClr val="C62828"/>
                 </a:solidFill>
@@ -38517,7 +38517,7 @@
               <a:t>led.value(1)</a:t>
             </a:r>
             <a:r>
-              <a:rPr sz="2400" b="0">
+              <a:rPr sz="2200" b="0">
                 <a:solidFill>
                   <a:srgbClr val="222222"/>
                 </a:solidFill>
@@ -38528,7 +38528,7 @@
               <a:t>:</a:t>
             </a:r>
             <a:r>
-              <a:rPr sz="2400" b="1">
+              <a:rPr sz="2200" b="1">
                 <a:solidFill>
                   <a:srgbClr val="1F6FB2"/>
                 </a:solidFill>
@@ -38546,7 +38546,7 @@
               </a:spcAft>
             </a:pPr>
             <a:r>
-              <a:rPr sz="2400" b="0">
+              <a:rPr sz="2200" b="0">
                 <a:solidFill>
                   <a:srgbClr val="222222"/>
                 </a:solidFill>
@@ -38557,7 +38557,7 @@
               <a:t>・やってみよう:</a:t>
             </a:r>
             <a:r>
-              <a:rPr sz="2400" b="0">
+              <a:rPr sz="2200" b="0">
                 <a:solidFill>
                   <a:srgbClr val="C62828"/>
                 </a:solidFill>
@@ -38568,7 +38568,7 @@
               <a:t>1</a:t>
             </a:r>
             <a:r>
-              <a:rPr sz="2400" b="0">
+              <a:rPr sz="2200" b="0">
                 <a:solidFill>
                   <a:srgbClr val="222222"/>
                 </a:solidFill>
@@ -38579,7 +38579,7 @@
               <a:t> を </a:t>
             </a:r>
             <a:r>
-              <a:rPr sz="2400" b="0">
+              <a:rPr sz="2200" b="0">
                 <a:solidFill>
                   <a:srgbClr val="C62828"/>
                 </a:solidFill>
@@ -38590,7 +38590,7 @@
               <a:t>0</a:t>
             </a:r>
             <a:r>
-              <a:rPr sz="2400" b="0">
+              <a:rPr sz="2200" b="0">
                 <a:solidFill>
                   <a:srgbClr val="222222"/>
                 </a:solidFill>
@@ -38764,7 +38764,7 @@
         <p:spPr>
           <a:xfrm>
             <a:off x="548640" y="1325880"/>
-            <a:ext cx="11094415" cy="1739900"/>
+            <a:ext cx="11094415" cy="2451100"/>
           </a:xfrm>
           <a:prstGeom prst="rect">
             <a:avLst/>
@@ -38810,7 +38810,7 @@
         <p:spPr>
           <a:xfrm>
             <a:off x="548640" y="1325880"/>
-            <a:ext cx="11094415" cy="1739900"/>
+            <a:ext cx="11094415" cy="2451100"/>
           </a:xfrm>
           <a:prstGeom prst="rect">
             <a:avLst/>
@@ -38825,11 +38825,11 @@
           <a:p>
             <a:pPr algn="l">
               <a:lnSpc>
-                <a:spcPts val="1700"/>
+                <a:spcPts val="2500"/>
               </a:lnSpc>
             </a:pPr>
             <a:r>
-              <a:rPr sz="1400" b="0">
+              <a:rPr sz="2000" b="0">
                 <a:solidFill>
                   <a:srgbClr val="222222"/>
                 </a:solidFill>
@@ -38840,7 +38840,7 @@
               <a:t>from machine import Pin        </a:t>
             </a:r>
             <a:r>
-              <a:rPr sz="1400" b="0">
+              <a:rPr sz="2000" b="0">
                 <a:solidFill>
                   <a:srgbClr val="2E7D32"/>
                 </a:solidFill>
@@ -38854,11 +38854,11 @@
           <a:p>
             <a:pPr algn="l">
               <a:lnSpc>
-                <a:spcPts val="1700"/>
+                <a:spcPts val="2500"/>
               </a:lnSpc>
             </a:pPr>
             <a:r>
-              <a:rPr sz="1400" b="0">
+              <a:rPr sz="2000" b="0">
                 <a:solidFill>
                   <a:srgbClr val="222222"/>
                 </a:solidFill>
@@ -38869,7 +38869,7 @@
               <a:t>import time                    </a:t>
             </a:r>
             <a:r>
-              <a:rPr sz="1400" b="0">
+              <a:rPr sz="2000" b="0">
                 <a:solidFill>
                   <a:srgbClr val="2E7D32"/>
                 </a:solidFill>
@@ -38883,11 +38883,11 @@
           <a:p>
             <a:pPr algn="l">
               <a:lnSpc>
-                <a:spcPts val="1700"/>
+                <a:spcPts val="2500"/>
               </a:lnSpc>
             </a:pPr>
             <a:r>
-              <a:rPr sz="1400" b="0">
+              <a:rPr sz="2000" b="0">
                 <a:solidFill>
                   <a:srgbClr val="222222"/>
                 </a:solidFill>
@@ -38901,11 +38901,11 @@
           <a:p>
             <a:pPr algn="l">
               <a:lnSpc>
-                <a:spcPts val="1700"/>
+                <a:spcPts val="2500"/>
               </a:lnSpc>
             </a:pPr>
             <a:r>
-              <a:rPr sz="1400" b="0">
+              <a:rPr sz="2000" b="0">
                 <a:solidFill>
                   <a:srgbClr val="222222"/>
                 </a:solidFill>
@@ -38916,7 +38916,7 @@
               <a:t>led = Pin("LED", Pin.OUT)      </a:t>
             </a:r>
             <a:r>
-              <a:rPr sz="1400" b="0">
+              <a:rPr sz="2000" b="0">
                 <a:solidFill>
                   <a:srgbClr val="2E7D32"/>
                 </a:solidFill>
@@ -38930,11 +38930,11 @@
           <a:p>
             <a:pPr algn="l">
               <a:lnSpc>
-                <a:spcPts val="1700"/>
+                <a:spcPts val="2500"/>
               </a:lnSpc>
             </a:pPr>
             <a:r>
-              <a:rPr sz="1400" b="0">
+              <a:rPr sz="2000" b="0">
                 <a:solidFill>
                   <a:srgbClr val="222222"/>
                 </a:solidFill>
@@ -38945,7 +38945,7 @@
               <a:t>led.value(1)                   </a:t>
             </a:r>
             <a:r>
-              <a:rPr sz="1400" b="0">
+              <a:rPr sz="2000" b="0">
                 <a:solidFill>
                   <a:srgbClr val="2E7D32"/>
                 </a:solidFill>
@@ -38959,11 +38959,11 @@
           <a:p>
             <a:pPr algn="l">
               <a:lnSpc>
-                <a:spcPts val="1700"/>
+                <a:spcPts val="2500"/>
               </a:lnSpc>
             </a:pPr>
             <a:r>
-              <a:rPr sz="1400" b="0">
+              <a:rPr sz="2000" b="0">
                 <a:solidFill>
                   <a:srgbClr val="222222"/>
                 </a:solidFill>
@@ -38974,7 +38974,7 @@
               <a:t>time.sleep(1)                  </a:t>
             </a:r>
             <a:r>
-              <a:rPr sz="1400" b="0">
+              <a:rPr sz="2000" b="0">
                 <a:solidFill>
                   <a:srgbClr val="2E7D32"/>
                 </a:solidFill>
@@ -38988,11 +38988,11 @@
           <a:p>
             <a:pPr algn="l">
               <a:lnSpc>
-                <a:spcPts val="1700"/>
+                <a:spcPts val="2500"/>
               </a:lnSpc>
             </a:pPr>
             <a:r>
-              <a:rPr sz="1400" b="0">
+              <a:rPr sz="2000" b="0">
                 <a:solidFill>
                   <a:srgbClr val="222222"/>
                 </a:solidFill>
@@ -39003,7 +39003,7 @@
               <a:t>led.value(0)                   </a:t>
             </a:r>
             <a:r>
-              <a:rPr sz="1400" b="0">
+              <a:rPr sz="2000" b="0">
                 <a:solidFill>
                   <a:srgbClr val="2E7D32"/>
                 </a:solidFill>
@@ -39024,8 +39024,8 @@
         </p:nvSpPr>
         <p:spPr>
           <a:xfrm>
-            <a:off x="548640" y="3202940"/>
-            <a:ext cx="11094415" cy="2743200"/>
+            <a:off x="548640" y="4005580"/>
+            <a:ext cx="11094415" cy="1828800"/>
           </a:xfrm>
           <a:prstGeom prst="rect">
             <a:avLst/>
@@ -39044,7 +39044,7 @@
               </a:spcAft>
             </a:pPr>
             <a:r>
-              <a:rPr sz="2400" b="0">
+              <a:rPr sz="2200" b="0">
                 <a:solidFill>
                   <a:srgbClr val="222222"/>
                 </a:solidFill>
@@ -39055,7 +39055,7 @@
               <a:t>・</a:t>
             </a:r>
             <a:r>
-              <a:rPr sz="2400" b="0">
+              <a:rPr sz="2200" b="0">
                 <a:solidFill>
                   <a:srgbClr val="C62828"/>
                 </a:solidFill>
@@ -39066,7 +39066,7 @@
               <a:t>time.sleep(1)</a:t>
             </a:r>
             <a:r>
-              <a:rPr sz="2400" b="0">
+              <a:rPr sz="2200" b="0">
                 <a:solidFill>
                   <a:srgbClr val="222222"/>
                 </a:solidFill>
@@ -39077,7 +39077,7 @@
               <a:t>:</a:t>
             </a:r>
             <a:r>
-              <a:rPr sz="2400" b="1">
+              <a:rPr sz="2200" b="1">
                 <a:solidFill>
                   <a:srgbClr val="1F6FB2"/>
                 </a:solidFill>
@@ -39095,7 +39095,7 @@
               </a:spcAft>
             </a:pPr>
             <a:r>
-              <a:rPr sz="2400" b="0">
+              <a:rPr sz="2200" b="0">
                 <a:solidFill>
                   <a:srgbClr val="222222"/>
                 </a:solidFill>
@@ -39113,7 +39113,7 @@
               </a:spcAft>
             </a:pPr>
             <a:r>
-              <a:rPr sz="2400" b="0">
+              <a:rPr sz="2200" b="0">
                 <a:solidFill>
                   <a:srgbClr val="222222"/>
                 </a:solidFill>
@@ -39124,7 +39124,7 @@
               <a:t>・やってみよう:</a:t>
             </a:r>
             <a:r>
-              <a:rPr sz="2400" b="0">
+              <a:rPr sz="2200" b="0">
                 <a:solidFill>
                   <a:srgbClr val="C62828"/>
                 </a:solidFill>
@@ -39135,7 +39135,7 @@
               <a:t>1</a:t>
             </a:r>
             <a:r>
-              <a:rPr sz="2400" b="0">
+              <a:rPr sz="2200" b="0">
                 <a:solidFill>
                   <a:srgbClr val="222222"/>
                 </a:solidFill>
@@ -39146,7 +39146,7 @@
               <a:t> を </a:t>
             </a:r>
             <a:r>
-              <a:rPr sz="2400" b="0">
+              <a:rPr sz="2200" b="0">
                 <a:solidFill>
                   <a:srgbClr val="C62828"/>
                 </a:solidFill>
@@ -39157,7 +39157,7 @@
               <a:t>3</a:t>
             </a:r>
             <a:r>
-              <a:rPr sz="2400" b="0">
+              <a:rPr sz="2200" b="0">
                 <a:solidFill>
                   <a:srgbClr val="222222"/>
                 </a:solidFill>
@@ -39331,7 +39331,7 @@
         <p:spPr>
           <a:xfrm>
             <a:off x="548640" y="1325880"/>
-            <a:ext cx="11094415" cy="2387600"/>
+            <a:ext cx="11094415" cy="3403600"/>
           </a:xfrm>
           <a:prstGeom prst="rect">
             <a:avLst/>
@@ -39377,7 +39377,7 @@
         <p:spPr>
           <a:xfrm>
             <a:off x="548640" y="1325880"/>
-            <a:ext cx="11094415" cy="2387600"/>
+            <a:ext cx="11094415" cy="3403600"/>
           </a:xfrm>
           <a:prstGeom prst="rect">
             <a:avLst/>
@@ -39392,11 +39392,11 @@
           <a:p>
             <a:pPr algn="l">
               <a:lnSpc>
-                <a:spcPts val="1700"/>
+                <a:spcPts val="2500"/>
               </a:lnSpc>
             </a:pPr>
             <a:r>
-              <a:rPr sz="1400" b="0">
+              <a:rPr sz="2000" b="0">
                 <a:solidFill>
                   <a:srgbClr val="222222"/>
                 </a:solidFill>
@@ -39407,7 +39407,7 @@
               <a:t>from machine import Pin        </a:t>
             </a:r>
             <a:r>
-              <a:rPr sz="1400" b="0">
+              <a:rPr sz="2000" b="0">
                 <a:solidFill>
                   <a:srgbClr val="2E7D32"/>
                 </a:solidFill>
@@ -39421,11 +39421,11 @@
           <a:p>
             <a:pPr algn="l">
               <a:lnSpc>
-                <a:spcPts val="1700"/>
+                <a:spcPts val="2500"/>
               </a:lnSpc>
             </a:pPr>
             <a:r>
-              <a:rPr sz="1400" b="0">
+              <a:rPr sz="2000" b="0">
                 <a:solidFill>
                   <a:srgbClr val="222222"/>
                 </a:solidFill>
@@ -39436,7 +39436,7 @@
               <a:t>import time                    </a:t>
             </a:r>
             <a:r>
-              <a:rPr sz="1400" b="0">
+              <a:rPr sz="2000" b="0">
                 <a:solidFill>
                   <a:srgbClr val="2E7D32"/>
                 </a:solidFill>
@@ -39450,11 +39450,11 @@
           <a:p>
             <a:pPr algn="l">
               <a:lnSpc>
-                <a:spcPts val="1700"/>
+                <a:spcPts val="2500"/>
               </a:lnSpc>
             </a:pPr>
             <a:r>
-              <a:rPr sz="1400" b="0">
+              <a:rPr sz="2000" b="0">
                 <a:solidFill>
                   <a:srgbClr val="222222"/>
                 </a:solidFill>
@@ -39468,11 +39468,11 @@
           <a:p>
             <a:pPr algn="l">
               <a:lnSpc>
-                <a:spcPts val="1700"/>
+                <a:spcPts val="2500"/>
               </a:lnSpc>
             </a:pPr>
             <a:r>
-              <a:rPr sz="1400" b="0">
+              <a:rPr sz="2000" b="0">
                 <a:solidFill>
                   <a:srgbClr val="222222"/>
                 </a:solidFill>
@@ -39483,7 +39483,7 @@
               <a:t>led = Pin("LED", Pin.OUT)      </a:t>
             </a:r>
             <a:r>
-              <a:rPr sz="1400" b="0">
+              <a:rPr sz="2000" b="0">
                 <a:solidFill>
                   <a:srgbClr val="2E7D32"/>
                 </a:solidFill>
@@ -39497,11 +39497,11 @@
           <a:p>
             <a:pPr algn="l">
               <a:lnSpc>
-                <a:spcPts val="1700"/>
+                <a:spcPts val="2500"/>
               </a:lnSpc>
             </a:pPr>
             <a:r>
-              <a:rPr sz="1400" b="0">
+              <a:rPr sz="2000" b="0">
                 <a:solidFill>
                   <a:srgbClr val="222222"/>
                 </a:solidFill>
@@ -39515,11 +39515,11 @@
           <a:p>
             <a:pPr algn="l">
               <a:lnSpc>
-                <a:spcPts val="1700"/>
+                <a:spcPts val="2500"/>
               </a:lnSpc>
             </a:pPr>
             <a:r>
-              <a:rPr sz="1400" b="0">
+              <a:rPr sz="2000" b="0">
                 <a:solidFill>
                   <a:srgbClr val="222222"/>
                 </a:solidFill>
@@ -39530,7 +39530,7 @@
               <a:t>while True:                    </a:t>
             </a:r>
             <a:r>
-              <a:rPr sz="1400" b="0">
+              <a:rPr sz="2000" b="0">
                 <a:solidFill>
                   <a:srgbClr val="2E7D32"/>
                 </a:solidFill>
@@ -39544,11 +39544,11 @@
           <a:p>
             <a:pPr algn="l">
               <a:lnSpc>
-                <a:spcPts val="1700"/>
+                <a:spcPts val="2500"/>
               </a:lnSpc>
             </a:pPr>
             <a:r>
-              <a:rPr sz="1400" b="0">
+              <a:rPr sz="2000" b="0">
                 <a:solidFill>
                   <a:srgbClr val="222222"/>
                 </a:solidFill>
@@ -39559,7 +39559,7 @@
               <a:t>    led.value(1)               </a:t>
             </a:r>
             <a:r>
-              <a:rPr sz="1400" b="0">
+              <a:rPr sz="2000" b="0">
                 <a:solidFill>
                   <a:srgbClr val="2E7D32"/>
                 </a:solidFill>
@@ -39573,11 +39573,11 @@
           <a:p>
             <a:pPr algn="l">
               <a:lnSpc>
-                <a:spcPts val="1700"/>
+                <a:spcPts val="2500"/>
               </a:lnSpc>
             </a:pPr>
             <a:r>
-              <a:rPr sz="1400" b="0">
+              <a:rPr sz="2000" b="0">
                 <a:solidFill>
                   <a:srgbClr val="222222"/>
                 </a:solidFill>
@@ -39588,7 +39588,7 @@
               <a:t>    time.sleep(0.5)            </a:t>
             </a:r>
             <a:r>
-              <a:rPr sz="1400" b="0">
+              <a:rPr sz="2000" b="0">
                 <a:solidFill>
                   <a:srgbClr val="2E7D32"/>
                 </a:solidFill>
@@ -39602,11 +39602,11 @@
           <a:p>
             <a:pPr algn="l">
               <a:lnSpc>
-                <a:spcPts val="1700"/>
+                <a:spcPts val="2500"/>
               </a:lnSpc>
             </a:pPr>
             <a:r>
-              <a:rPr sz="1400" b="0">
+              <a:rPr sz="2000" b="0">
                 <a:solidFill>
                   <a:srgbClr val="222222"/>
                 </a:solidFill>
@@ -39617,7 +39617,7 @@
               <a:t>    led.value(0)               </a:t>
             </a:r>
             <a:r>
-              <a:rPr sz="1400" b="0">
+              <a:rPr sz="2000" b="0">
                 <a:solidFill>
                   <a:srgbClr val="2E7D32"/>
                 </a:solidFill>
@@ -39631,11 +39631,11 @@
           <a:p>
             <a:pPr algn="l">
               <a:lnSpc>
-                <a:spcPts val="1700"/>
+                <a:spcPts val="2500"/>
               </a:lnSpc>
             </a:pPr>
             <a:r>
-              <a:rPr sz="1400" b="0">
+              <a:rPr sz="2000" b="0">
                 <a:solidFill>
                   <a:srgbClr val="222222"/>
                 </a:solidFill>
@@ -39646,7 +39646,7 @@
               <a:t>    time.sleep(0.5)            </a:t>
             </a:r>
             <a:r>
-              <a:rPr sz="1400" b="0">
+              <a:rPr sz="2000" b="0">
                 <a:solidFill>
                   <a:srgbClr val="2E7D32"/>
                 </a:solidFill>
@@ -39667,8 +39667,8 @@
         </p:nvSpPr>
         <p:spPr>
           <a:xfrm>
-            <a:off x="640080" y="2502408"/>
-            <a:ext cx="1069340" cy="228600"/>
+            <a:off x="640080" y="3010408"/>
+            <a:ext cx="1488440" cy="330200"/>
           </a:xfrm>
           <a:prstGeom prst="roundRect">
             <a:avLst/>
@@ -39809,8 +39809,8 @@
         </p:nvSpPr>
         <p:spPr>
           <a:xfrm>
-            <a:off x="548640" y="3850640"/>
-            <a:ext cx="11094415" cy="2743200"/>
+            <a:off x="548640" y="4958080"/>
+            <a:ext cx="11094415" cy="1828800"/>
           </a:xfrm>
           <a:prstGeom prst="rect">
             <a:avLst/>
@@ -39829,7 +39829,7 @@
               </a:spcAft>
             </a:pPr>
             <a:r>
-              <a:rPr sz="2400" b="0">
+              <a:rPr sz="2200" b="0">
                 <a:solidFill>
                   <a:srgbClr val="222222"/>
                 </a:solidFill>
@@ -39840,7 +39840,7 @@
               <a:t>・</a:t>
             </a:r>
             <a:r>
-              <a:rPr sz="2400" b="0">
+              <a:rPr sz="2200" b="0">
                 <a:solidFill>
                   <a:srgbClr val="C62828"/>
                 </a:solidFill>
@@ -39851,7 +39851,7 @@
               <a:t>while True:</a:t>
             </a:r>
             <a:r>
-              <a:rPr sz="2400" b="0">
+              <a:rPr sz="2200" b="0">
                 <a:solidFill>
                   <a:srgbClr val="222222"/>
                 </a:solidFill>
@@ -39862,7 +39862,7 @@
               <a:t> の中(字下げした4行)が </a:t>
             </a:r>
             <a:r>
-              <a:rPr sz="2400" b="1">
+              <a:rPr sz="2200" b="1">
                 <a:solidFill>
                   <a:srgbClr val="1F6FB2"/>
                 </a:solidFill>
@@ -39880,7 +39880,7 @@
               </a:spcAft>
             </a:pPr>
             <a:r>
-              <a:rPr sz="2400" b="0">
+              <a:rPr sz="2200" b="0">
                 <a:solidFill>
                   <a:srgbClr val="222222"/>
                 </a:solidFill>
@@ -39891,7 +39891,7 @@
               <a:t>・止めるときは </a:t>
             </a:r>
             <a:r>
-              <a:rPr sz="2400" b="1">
+              <a:rPr sz="2200" b="1">
                 <a:solidFill>
                   <a:srgbClr val="1F6FB2"/>
                 </a:solidFill>
@@ -39909,7 +39909,7 @@
               </a:spcAft>
             </a:pPr>
             <a:r>
-              <a:rPr sz="2400" b="0">
+              <a:rPr sz="2200" b="0">
                 <a:solidFill>
                   <a:srgbClr val="222222"/>
                 </a:solidFill>
@@ -39920,7 +39920,7 @@
               <a:t>・やってみよう:</a:t>
             </a:r>
             <a:r>
-              <a:rPr sz="2400" b="0">
+              <a:rPr sz="2200" b="0">
                 <a:solidFill>
                   <a:srgbClr val="C62828"/>
                 </a:solidFill>
@@ -39931,7 +39931,7 @@
               <a:t>0.5</a:t>
             </a:r>
             <a:r>
-              <a:rPr sz="2400" b="0">
+              <a:rPr sz="2200" b="0">
                 <a:solidFill>
                   <a:srgbClr val="222222"/>
                 </a:solidFill>
@@ -39942,7 +39942,7 @@
               <a:t> を </a:t>
             </a:r>
             <a:r>
-              <a:rPr sz="2400" b="0">
+              <a:rPr sz="2200" b="0">
                 <a:solidFill>
                   <a:srgbClr val="C62828"/>
                 </a:solidFill>
@@ -39953,7 +39953,7 @@
               <a:t>0.1</a:t>
             </a:r>
             <a:r>
-              <a:rPr sz="2400" b="0">
+              <a:rPr sz="2200" b="0">
                 <a:solidFill>
                   <a:srgbClr val="222222"/>
                 </a:solidFill>
@@ -40127,7 +40127,7 @@
         <p:spPr>
           <a:xfrm>
             <a:off x="548640" y="1508760"/>
-            <a:ext cx="6400800" cy="876300"/>
+            <a:ext cx="7589520" cy="1257300"/>
           </a:xfrm>
           <a:prstGeom prst="rect">
             <a:avLst/>
@@ -40173,7 +40173,7 @@
         <p:spPr>
           <a:xfrm>
             <a:off x="548640" y="1508760"/>
-            <a:ext cx="6400800" cy="876300"/>
+            <a:ext cx="7589520" cy="1257300"/>
           </a:xfrm>
           <a:prstGeom prst="rect">
             <a:avLst/>
@@ -40188,11 +40188,11 @@
           <a:p>
             <a:pPr algn="l">
               <a:lnSpc>
-                <a:spcPts val="1700"/>
+                <a:spcPts val="2700"/>
               </a:lnSpc>
             </a:pPr>
             <a:r>
-              <a:rPr sz="1400" b="0">
+              <a:rPr sz="2200" b="0">
                 <a:solidFill>
                   <a:srgbClr val="222222"/>
                 </a:solidFill>
@@ -40206,11 +40206,11 @@
           <a:p>
             <a:pPr algn="l">
               <a:lnSpc>
-                <a:spcPts val="1700"/>
+                <a:spcPts val="2700"/>
               </a:lnSpc>
             </a:pPr>
             <a:r>
-              <a:rPr sz="1400" b="0">
+              <a:rPr sz="2200" b="0">
                 <a:solidFill>
                   <a:srgbClr val="222222"/>
                 </a:solidFill>
@@ -40221,7 +40221,7 @@
               <a:t>print("2行目")   </a:t>
             </a:r>
             <a:r>
-              <a:rPr sz="1400" b="0">
+              <a:rPr sz="2200" b="0">
                 <a:solidFill>
                   <a:srgbClr val="2E7D32"/>
                 </a:solidFill>
@@ -40235,11 +40235,11 @@
           <a:p>
             <a:pPr algn="l">
               <a:lnSpc>
-                <a:spcPts val="1700"/>
+                <a:spcPts val="2700"/>
               </a:lnSpc>
             </a:pPr>
             <a:r>
-              <a:rPr sz="1400" b="0">
+              <a:rPr sz="2200" b="0">
                 <a:solidFill>
                   <a:srgbClr val="222222"/>
                 </a:solidFill>
@@ -40250,7 +40250,7 @@
               <a:t>print("3行目")   </a:t>
             </a:r>
             <a:r>
-              <a:rPr sz="1400" b="0">
+              <a:rPr sz="2200" b="0">
                 <a:solidFill>
                   <a:srgbClr val="2E7D32"/>
                 </a:solidFill>
@@ -40271,8 +40271,8 @@
         </p:nvSpPr>
         <p:spPr>
           <a:xfrm>
-            <a:off x="8412480" y="1417320"/>
-            <a:ext cx="2743200" cy="731520"/>
+            <a:off x="8869680" y="1417320"/>
+            <a:ext cx="2651760" cy="731520"/>
           </a:xfrm>
           <a:prstGeom prst="roundRect">
             <a:avLst/>
@@ -40328,7 +40328,7 @@
         </p:nvCxnSpPr>
         <p:spPr>
           <a:xfrm>
-            <a:off x="9784080" y="2148840"/>
+            <a:off x="10195560" y="2148840"/>
             <a:ext cx="0" cy="365760"/>
           </a:xfrm>
           <a:prstGeom prst="line">
@@ -40363,8 +40363,8 @@
         </p:nvSpPr>
         <p:spPr>
           <a:xfrm>
-            <a:off x="8412480" y="2514600"/>
-            <a:ext cx="2743200" cy="731520"/>
+            <a:off x="8869680" y="2514600"/>
+            <a:ext cx="2651760" cy="731520"/>
           </a:xfrm>
           <a:prstGeom prst="roundRect">
             <a:avLst/>
@@ -40420,7 +40420,7 @@
         </p:nvCxnSpPr>
         <p:spPr>
           <a:xfrm>
-            <a:off x="9784080" y="3246120"/>
+            <a:off x="10195560" y="3246120"/>
             <a:ext cx="0" cy="365760"/>
           </a:xfrm>
           <a:prstGeom prst="line">
@@ -40455,8 +40455,8 @@
         </p:nvSpPr>
         <p:spPr>
           <a:xfrm>
-            <a:off x="8412480" y="3611880"/>
-            <a:ext cx="2743200" cy="731520"/>
+            <a:off x="8869680" y="3611880"/>
+            <a:ext cx="2651760" cy="731520"/>
           </a:xfrm>
           <a:prstGeom prst="roundRect">
             <a:avLst/>
@@ -40844,7 +40844,7 @@
         <p:spPr>
           <a:xfrm>
             <a:off x="548640" y="1508760"/>
-            <a:ext cx="7315200" cy="876300"/>
+            <a:ext cx="7772400" cy="1257300"/>
           </a:xfrm>
           <a:prstGeom prst="rect">
             <a:avLst/>
@@ -40890,7 +40890,7 @@
         <p:spPr>
           <a:xfrm>
             <a:off x="548640" y="1508760"/>
-            <a:ext cx="7315200" cy="876300"/>
+            <a:ext cx="7772400" cy="1257300"/>
           </a:xfrm>
           <a:prstGeom prst="rect">
             <a:avLst/>
@@ -40905,11 +40905,11 @@
           <a:p>
             <a:pPr algn="l">
               <a:lnSpc>
-                <a:spcPts val="1700"/>
+                <a:spcPts val="2700"/>
               </a:lnSpc>
             </a:pPr>
             <a:r>
-              <a:rPr sz="1400" b="0">
+              <a:rPr sz="2200" b="0">
                 <a:solidFill>
                   <a:srgbClr val="222222"/>
                 </a:solidFill>
@@ -40920,7 +40920,7 @@
               <a:t>while True:          </a:t>
             </a:r>
             <a:r>
-              <a:rPr sz="1400" b="0">
+              <a:rPr sz="2200" b="0">
                 <a:solidFill>
                   <a:srgbClr val="2E7D32"/>
                 </a:solidFill>
@@ -40934,11 +40934,11 @@
           <a:p>
             <a:pPr algn="l">
               <a:lnSpc>
-                <a:spcPts val="1700"/>
+                <a:spcPts val="2700"/>
               </a:lnSpc>
             </a:pPr>
             <a:r>
-              <a:rPr sz="1400" b="0">
+              <a:rPr sz="2200" b="0">
                 <a:solidFill>
                   <a:srgbClr val="222222"/>
                 </a:solidFill>
@@ -40952,11 +40952,11 @@
           <a:p>
             <a:pPr algn="l">
               <a:lnSpc>
-                <a:spcPts val="1700"/>
+                <a:spcPts val="2700"/>
               </a:lnSpc>
             </a:pPr>
             <a:r>
-              <a:rPr sz="1400" b="0">
+              <a:rPr sz="2200" b="0">
                 <a:solidFill>
                   <a:srgbClr val="222222"/>
                 </a:solidFill>
@@ -40967,7 +40967,7 @@
               <a:t>    time.sleep(1)    </a:t>
             </a:r>
             <a:r>
-              <a:rPr sz="1400" b="0">
+              <a:rPr sz="2200" b="0">
                 <a:solidFill>
                   <a:srgbClr val="2E7D32"/>
                 </a:solidFill>
@@ -40989,7 +40989,7 @@
         <p:spPr>
           <a:xfrm>
             <a:off x="640080" y="1605788"/>
-            <a:ext cx="1069340" cy="228600"/>
+            <a:ext cx="1628140" cy="355600"/>
           </a:xfrm>
           <a:prstGeom prst="roundRect">
             <a:avLst/>
@@ -41032,7 +41032,7 @@
         </p:nvSpPr>
         <p:spPr>
           <a:xfrm>
-            <a:off x="548640" y="2743200"/>
+            <a:off x="548640" y="3154680"/>
             <a:ext cx="11094415" cy="2286000"/>
           </a:xfrm>
           <a:prstGeom prst="rect">

--- a/slides/pico_sensor_intro.pptx
+++ b/slides/pico_sensor_intro.pptx
@@ -7510,9 +7510,9 @@
                 <a:solidFill>
                   <a:srgbClr val="222222"/>
                 </a:solidFill>
-                <a:latin typeface="MS Gothic"/>
-                <a:ea typeface="MS Gothic"/>
-                <a:cs typeface="MS Gothic"/>
+                <a:latin typeface="Consolas"/>
+                <a:ea typeface="BIZ UDGothic"/>
+                <a:cs typeface="BIZ UDGothic"/>
               </a:rPr>
               <a:t>if distance &lt; 10:      </a:t>
             </a:r>
@@ -7521,9 +7521,9 @@
                 <a:solidFill>
                   <a:srgbClr val="2E7D32"/>
                 </a:solidFill>
-                <a:latin typeface="MS Gothic"/>
-                <a:ea typeface="MS Gothic"/>
-                <a:cs typeface="MS Gothic"/>
+                <a:latin typeface="Consolas"/>
+                <a:ea typeface="BIZ UDGothic"/>
+                <a:cs typeface="BIZ UDGothic"/>
               </a:rPr>
               <a:t># もし距離が10cm未満なら</a:t>
             </a:r>
@@ -7539,9 +7539,9 @@
                 <a:solidFill>
                   <a:srgbClr val="222222"/>
                 </a:solidFill>
-                <a:latin typeface="MS Gothic"/>
-                <a:ea typeface="MS Gothic"/>
-                <a:cs typeface="MS Gothic"/>
+                <a:latin typeface="Consolas"/>
+                <a:ea typeface="BIZ UDGothic"/>
+                <a:cs typeface="BIZ UDGothic"/>
               </a:rPr>
               <a:t>    print("近い!")</a:t>
             </a:r>
@@ -7557,9 +7557,9 @@
                 <a:solidFill>
                   <a:srgbClr val="222222"/>
                 </a:solidFill>
-                <a:latin typeface="MS Gothic"/>
-                <a:ea typeface="MS Gothic"/>
-                <a:cs typeface="MS Gothic"/>
+                <a:latin typeface="Consolas"/>
+                <a:ea typeface="BIZ UDGothic"/>
+                <a:cs typeface="BIZ UDGothic"/>
               </a:rPr>
               <a:t>else:                  </a:t>
             </a:r>
@@ -7568,9 +7568,9 @@
                 <a:solidFill>
                   <a:srgbClr val="2E7D32"/>
                 </a:solidFill>
-                <a:latin typeface="MS Gothic"/>
-                <a:ea typeface="MS Gothic"/>
-                <a:cs typeface="MS Gothic"/>
+                <a:latin typeface="Consolas"/>
+                <a:ea typeface="BIZ UDGothic"/>
+                <a:cs typeface="BIZ UDGothic"/>
               </a:rPr>
               <a:t># そうでなければ</a:t>
             </a:r>
@@ -7586,9 +7586,9 @@
                 <a:solidFill>
                   <a:srgbClr val="222222"/>
                 </a:solidFill>
-                <a:latin typeface="MS Gothic"/>
-                <a:ea typeface="MS Gothic"/>
-                <a:cs typeface="MS Gothic"/>
+                <a:latin typeface="Consolas"/>
+                <a:ea typeface="BIZ UDGothic"/>
+                <a:cs typeface="BIZ UDGothic"/>
               </a:rPr>
               <a:t>    print("遠い")</a:t>
             </a:r>
@@ -7604,7 +7604,7 @@
         <p:spPr>
           <a:xfrm>
             <a:off x="640080" y="1605788"/>
-            <a:ext cx="2466340" cy="355600"/>
+            <a:ext cx="2703830" cy="355600"/>
           </a:xfrm>
           <a:prstGeom prst="roundRect">
             <a:avLst/>
@@ -7648,7 +7648,7 @@
         <p:spPr>
           <a:xfrm>
             <a:off x="640080" y="2291588"/>
-            <a:ext cx="789939" cy="355600"/>
+            <a:ext cx="859790" cy="355600"/>
           </a:xfrm>
           <a:prstGeom prst="roundRect">
             <a:avLst/>
@@ -8132,9 +8132,9 @@
                 <a:solidFill>
                   <a:srgbClr val="222222"/>
                 </a:solidFill>
-                <a:latin typeface="MS Gothic"/>
-                <a:ea typeface="MS Gothic"/>
-                <a:cs typeface="MS Gothic"/>
+                <a:latin typeface="Consolas"/>
+                <a:ea typeface="BIZ UDGothic"/>
+                <a:cs typeface="BIZ UDGothic"/>
               </a:rPr>
               <a:t>for i in range(3):          </a:t>
             </a:r>
@@ -8143,9 +8143,9 @@
                 <a:solidFill>
                   <a:srgbClr val="2E7D32"/>
                 </a:solidFill>
-                <a:latin typeface="MS Gothic"/>
-                <a:ea typeface="MS Gothic"/>
-                <a:cs typeface="MS Gothic"/>
+                <a:latin typeface="Consolas"/>
+                <a:ea typeface="BIZ UDGothic"/>
+                <a:cs typeface="BIZ UDGothic"/>
               </a:rPr>
               <a:t># i に 0, 1, 2 が順に入る</a:t>
             </a:r>
@@ -8161,9 +8161,9 @@
                 <a:solidFill>
                   <a:srgbClr val="222222"/>
                 </a:solidFill>
-                <a:latin typeface="MS Gothic"/>
-                <a:ea typeface="MS Gothic"/>
-                <a:cs typeface="MS Gothic"/>
+                <a:latin typeface="Consolas"/>
+                <a:ea typeface="BIZ UDGothic"/>
+                <a:cs typeface="BIZ UDGothic"/>
               </a:rPr>
               <a:t>    print(i)</a:t>
             </a:r>
@@ -8179,9 +8179,9 @@
                 <a:solidFill>
                   <a:srgbClr val="222222"/>
                 </a:solidFill>
-                <a:latin typeface="MS Gothic"/>
-                <a:ea typeface="MS Gothic"/>
-                <a:cs typeface="MS Gothic"/>
+                <a:latin typeface="Consolas"/>
+                <a:ea typeface="BIZ UDGothic"/>
+                <a:cs typeface="BIZ UDGothic"/>
               </a:rPr>
               <a:t> </a:t>
             </a:r>
@@ -8197,9 +8197,9 @@
                 <a:solidFill>
                   <a:srgbClr val="222222"/>
                 </a:solidFill>
-                <a:latin typeface="MS Gothic"/>
-                <a:ea typeface="MS Gothic"/>
-                <a:cs typeface="MS Gothic"/>
+                <a:latin typeface="Consolas"/>
+                <a:ea typeface="BIZ UDGothic"/>
+                <a:cs typeface="BIZ UDGothic"/>
               </a:rPr>
               <a:t>for p in (red, yellow, green):   </a:t>
             </a:r>
@@ -8208,9 +8208,9 @@
                 <a:solidFill>
                   <a:srgbClr val="2E7D32"/>
                 </a:solidFill>
-                <a:latin typeface="MS Gothic"/>
-                <a:ea typeface="MS Gothic"/>
-                <a:cs typeface="MS Gothic"/>
+                <a:latin typeface="Consolas"/>
+                <a:ea typeface="BIZ UDGothic"/>
+                <a:cs typeface="BIZ UDGothic"/>
               </a:rPr>
               <a:t># LED を1個ずつ取り出す</a:t>
             </a:r>
@@ -8226,9 +8226,9 @@
                 <a:solidFill>
                   <a:srgbClr val="222222"/>
                 </a:solidFill>
-                <a:latin typeface="MS Gothic"/>
-                <a:ea typeface="MS Gothic"/>
-                <a:cs typeface="MS Gothic"/>
+                <a:latin typeface="Consolas"/>
+                <a:ea typeface="BIZ UDGothic"/>
+                <a:cs typeface="BIZ UDGothic"/>
               </a:rPr>
               <a:t>    p.value(1)</a:t>
             </a:r>
@@ -8244,7 +8244,7 @@
         <p:spPr>
           <a:xfrm>
             <a:off x="640080" y="1605788"/>
-            <a:ext cx="2606040" cy="355600"/>
+            <a:ext cx="2857500" cy="355600"/>
           </a:xfrm>
           <a:prstGeom prst="roundRect">
             <a:avLst/>
@@ -8288,7 +8288,7 @@
         <p:spPr>
           <a:xfrm>
             <a:off x="640080" y="2634488"/>
-            <a:ext cx="4282439" cy="355600"/>
+            <a:ext cx="4701540" cy="355600"/>
           </a:xfrm>
           <a:prstGeom prst="roundRect">
             <a:avLst/>
@@ -8754,9 +8754,9 @@
                 <a:solidFill>
                   <a:srgbClr val="222222"/>
                 </a:solidFill>
-                <a:latin typeface="MS Gothic"/>
-                <a:ea typeface="MS Gothic"/>
-                <a:cs typeface="MS Gothic"/>
+                <a:latin typeface="Consolas"/>
+                <a:ea typeface="BIZ UDGothic"/>
+                <a:cs typeface="BIZ UDGothic"/>
               </a:rPr>
               <a:t>def double(x):</a:t>
             </a:r>
@@ -8772,9 +8772,9 @@
                 <a:solidFill>
                   <a:srgbClr val="222222"/>
                 </a:solidFill>
-                <a:latin typeface="MS Gothic"/>
-                <a:ea typeface="MS Gothic"/>
-                <a:cs typeface="MS Gothic"/>
+                <a:latin typeface="Consolas"/>
+                <a:ea typeface="BIZ UDGothic"/>
+                <a:cs typeface="BIZ UDGothic"/>
               </a:rPr>
               <a:t>    return x * 2       </a:t>
             </a:r>
@@ -8783,9 +8783,9 @@
                 <a:solidFill>
                   <a:srgbClr val="2E7D32"/>
                 </a:solidFill>
-                <a:latin typeface="MS Gothic"/>
-                <a:ea typeface="MS Gothic"/>
-                <a:cs typeface="MS Gothic"/>
+                <a:latin typeface="Consolas"/>
+                <a:ea typeface="BIZ UDGothic"/>
+                <a:cs typeface="BIZ UDGothic"/>
               </a:rPr>
               <a:t># x を2倍した結果を返す</a:t>
             </a:r>
@@ -8801,9 +8801,9 @@
                 <a:solidFill>
                   <a:srgbClr val="222222"/>
                 </a:solidFill>
-                <a:latin typeface="MS Gothic"/>
-                <a:ea typeface="MS Gothic"/>
-                <a:cs typeface="MS Gothic"/>
+                <a:latin typeface="Consolas"/>
+                <a:ea typeface="BIZ UDGothic"/>
+                <a:cs typeface="BIZ UDGothic"/>
               </a:rPr>
               <a:t> </a:t>
             </a:r>
@@ -8819,9 +8819,9 @@
                 <a:solidFill>
                   <a:srgbClr val="222222"/>
                 </a:solidFill>
-                <a:latin typeface="MS Gothic"/>
-                <a:ea typeface="MS Gothic"/>
-                <a:cs typeface="MS Gothic"/>
+                <a:latin typeface="Consolas"/>
+                <a:ea typeface="BIZ UDGothic"/>
+                <a:cs typeface="BIZ UDGothic"/>
               </a:rPr>
               <a:t>print(double(5))       </a:t>
             </a:r>
@@ -8830,9 +8830,9 @@
                 <a:solidFill>
                   <a:srgbClr val="2E7D32"/>
                 </a:solidFill>
-                <a:latin typeface="MS Gothic"/>
-                <a:ea typeface="MS Gothic"/>
-                <a:cs typeface="MS Gothic"/>
+                <a:latin typeface="Consolas"/>
+                <a:ea typeface="BIZ UDGothic"/>
+                <a:cs typeface="BIZ UDGothic"/>
               </a:rPr>
               <a:t># 10 と表示される</a:t>
             </a:r>
@@ -8848,7 +8848,7 @@
         <p:spPr>
           <a:xfrm>
             <a:off x="640080" y="1605788"/>
-            <a:ext cx="2047240" cy="355600"/>
+            <a:ext cx="2242820" cy="355600"/>
           </a:xfrm>
           <a:prstGeom prst="roundRect">
             <a:avLst/>
@@ -8955,9 +8955,9 @@
                 <a:solidFill>
                   <a:srgbClr val="C62828"/>
                 </a:solidFill>
-                <a:latin typeface="MS Gothic"/>
-                <a:ea typeface="MS Gothic"/>
-                <a:cs typeface="MS Gothic"/>
+                <a:latin typeface="Consolas"/>
+                <a:ea typeface="BIZ UDGothic"/>
+                <a:cs typeface="BIZ UDGothic"/>
               </a:rPr>
               <a:t>all_off()</a:t>
             </a:r>
@@ -8977,9 +8977,9 @@
                 <a:solidFill>
                   <a:srgbClr val="C62828"/>
                 </a:solidFill>
-                <a:latin typeface="MS Gothic"/>
-                <a:ea typeface="MS Gothic"/>
-                <a:cs typeface="MS Gothic"/>
+                <a:latin typeface="Consolas"/>
+                <a:ea typeface="BIZ UDGothic"/>
+                <a:cs typeface="BIZ UDGothic"/>
               </a:rPr>
               <a:t>read_cm()</a:t>
             </a:r>
@@ -9017,9 +9017,9 @@
                 <a:solidFill>
                   <a:srgbClr val="C62828"/>
                 </a:solidFill>
-                <a:latin typeface="MS Gothic"/>
-                <a:ea typeface="MS Gothic"/>
-                <a:cs typeface="MS Gothic"/>
+                <a:latin typeface="Consolas"/>
+                <a:ea typeface="BIZ UDGothic"/>
+                <a:cs typeface="BIZ UDGothic"/>
               </a:rPr>
               <a:t>return</a:t>
             </a:r>
@@ -9283,9 +9283,9 @@
                           <a:solidFill>
                             <a:srgbClr val="C62828"/>
                           </a:solidFill>
-                          <a:latin typeface="MS Gothic"/>
-                          <a:ea typeface="MS Gothic"/>
-                          <a:cs typeface="MS Gothic"/>
+                          <a:latin typeface="Consolas"/>
+                          <a:ea typeface="BIZ UDGothic"/>
+                          <a:cs typeface="BIZ UDGothic"/>
                         </a:rPr>
                         <a:t>time.sleep(1)</a:t>
                       </a:r>
@@ -9333,9 +9333,9 @@
                           <a:solidFill>
                             <a:srgbClr val="C62828"/>
                           </a:solidFill>
-                          <a:latin typeface="MS Gothic"/>
-                          <a:ea typeface="MS Gothic"/>
-                          <a:cs typeface="MS Gothic"/>
+                          <a:latin typeface="Consolas"/>
+                          <a:ea typeface="BIZ UDGothic"/>
+                          <a:cs typeface="BIZ UDGothic"/>
                         </a:rPr>
                         <a:t>time.sleep_ms(100)</a:t>
                       </a:r>
@@ -9383,9 +9383,9 @@
                           <a:solidFill>
                             <a:srgbClr val="C62828"/>
                           </a:solidFill>
-                          <a:latin typeface="MS Gothic"/>
-                          <a:ea typeface="MS Gothic"/>
-                          <a:cs typeface="MS Gothic"/>
+                          <a:latin typeface="Consolas"/>
+                          <a:ea typeface="BIZ UDGothic"/>
+                          <a:cs typeface="BIZ UDGothic"/>
                         </a:rPr>
                         <a:t>time.sleep_us(10)</a:t>
                       </a:r>
@@ -12613,9 +12613,9 @@
                 <a:solidFill>
                   <a:srgbClr val="2E7D32"/>
                 </a:solidFill>
-                <a:latin typeface="MS Gothic"/>
-                <a:ea typeface="MS Gothic"/>
-                <a:cs typeface="MS Gothic"/>
+                <a:latin typeface="Consolas"/>
+                <a:ea typeface="BIZ UDGothic"/>
+                <a:cs typeface="BIZ UDGothic"/>
               </a:rPr>
               <a:t># ---- 必要な道具(モジュール)を読み込む ----</a:t>
             </a:r>
@@ -12631,9 +12631,9 @@
                 <a:solidFill>
                   <a:srgbClr val="222222"/>
                 </a:solidFill>
-                <a:latin typeface="MS Gothic"/>
-                <a:ea typeface="MS Gothic"/>
-                <a:cs typeface="MS Gothic"/>
+                <a:latin typeface="Consolas"/>
+                <a:ea typeface="BIZ UDGothic"/>
+                <a:cs typeface="BIZ UDGothic"/>
               </a:rPr>
               <a:t>from machine import Pin   </a:t>
             </a:r>
@@ -12642,9 +12642,9 @@
                 <a:solidFill>
                   <a:srgbClr val="2E7D32"/>
                 </a:solidFill>
-                <a:latin typeface="MS Gothic"/>
-                <a:ea typeface="MS Gothic"/>
-                <a:cs typeface="MS Gothic"/>
+                <a:latin typeface="Consolas"/>
+                <a:ea typeface="BIZ UDGothic"/>
+                <a:cs typeface="BIZ UDGothic"/>
               </a:rPr>
               <a:t># Pin:Pico のピンを操作するための道具</a:t>
             </a:r>
@@ -12660,9 +12660,9 @@
                 <a:solidFill>
                   <a:srgbClr val="222222"/>
                 </a:solidFill>
-                <a:latin typeface="MS Gothic"/>
-                <a:ea typeface="MS Gothic"/>
-                <a:cs typeface="MS Gothic"/>
+                <a:latin typeface="Consolas"/>
+                <a:ea typeface="BIZ UDGothic"/>
+                <a:cs typeface="BIZ UDGothic"/>
               </a:rPr>
               <a:t>import time               </a:t>
             </a:r>
@@ -12671,9 +12671,9 @@
                 <a:solidFill>
                   <a:srgbClr val="2E7D32"/>
                 </a:solidFill>
-                <a:latin typeface="MS Gothic"/>
-                <a:ea typeface="MS Gothic"/>
-                <a:cs typeface="MS Gothic"/>
+                <a:latin typeface="Consolas"/>
+                <a:ea typeface="BIZ UDGothic"/>
+                <a:cs typeface="BIZ UDGothic"/>
               </a:rPr>
               <a:t># time:待ち時間を作るための道具</a:t>
             </a:r>
@@ -12689,9 +12689,9 @@
                 <a:solidFill>
                   <a:srgbClr val="222222"/>
                 </a:solidFill>
-                <a:latin typeface="MS Gothic"/>
-                <a:ea typeface="MS Gothic"/>
-                <a:cs typeface="MS Gothic"/>
+                <a:latin typeface="Consolas"/>
+                <a:ea typeface="BIZ UDGothic"/>
+                <a:cs typeface="BIZ UDGothic"/>
               </a:rPr>
               <a:t> </a:t>
             </a:r>
@@ -12707,9 +12707,9 @@
                 <a:solidFill>
                   <a:srgbClr val="2E7D32"/>
                 </a:solidFill>
-                <a:latin typeface="MS Gothic"/>
-                <a:ea typeface="MS Gothic"/>
-                <a:cs typeface="MS Gothic"/>
+                <a:latin typeface="Consolas"/>
+                <a:ea typeface="BIZ UDGothic"/>
+                <a:cs typeface="BIZ UDGothic"/>
               </a:rPr>
               <a:t># ---- ピンの設定 ----</a:t>
             </a:r>
@@ -12725,9 +12725,9 @@
                 <a:solidFill>
                   <a:srgbClr val="2E7D32"/>
                 </a:solidFill>
-                <a:latin typeface="MS Gothic"/>
-                <a:ea typeface="MS Gothic"/>
-                <a:cs typeface="MS Gothic"/>
+                <a:latin typeface="Consolas"/>
+                <a:ea typeface="BIZ UDGothic"/>
+                <a:cs typeface="BIZ UDGothic"/>
               </a:rPr>
               <a:t># Pin(番号, Pin.OUT) で「このピンは電気を出す(出力)」と決める</a:t>
             </a:r>
@@ -12743,9 +12743,9 @@
                 <a:solidFill>
                   <a:srgbClr val="222222"/>
                 </a:solidFill>
-                <a:latin typeface="MS Gothic"/>
-                <a:ea typeface="MS Gothic"/>
-                <a:cs typeface="MS Gothic"/>
+                <a:latin typeface="Consolas"/>
+                <a:ea typeface="BIZ UDGothic"/>
+                <a:cs typeface="BIZ UDGothic"/>
               </a:rPr>
               <a:t>red    = Pin(2, Pin.OUT)   </a:t>
             </a:r>
@@ -12754,9 +12754,9 @@
                 <a:solidFill>
                   <a:srgbClr val="2E7D32"/>
                 </a:solidFill>
-                <a:latin typeface="MS Gothic"/>
-                <a:ea typeface="MS Gothic"/>
-                <a:cs typeface="MS Gothic"/>
+                <a:latin typeface="Consolas"/>
+                <a:ea typeface="BIZ UDGothic"/>
+                <a:cs typeface="BIZ UDGothic"/>
               </a:rPr>
               <a:t># GP2 に赤のLED</a:t>
             </a:r>
@@ -12772,9 +12772,9 @@
                 <a:solidFill>
                   <a:srgbClr val="222222"/>
                 </a:solidFill>
-                <a:latin typeface="MS Gothic"/>
-                <a:ea typeface="MS Gothic"/>
-                <a:cs typeface="MS Gothic"/>
+                <a:latin typeface="Consolas"/>
+                <a:ea typeface="BIZ UDGothic"/>
+                <a:cs typeface="BIZ UDGothic"/>
               </a:rPr>
               <a:t>yellow = Pin(3, Pin.OUT)   </a:t>
             </a:r>
@@ -12783,9 +12783,9 @@
                 <a:solidFill>
                   <a:srgbClr val="2E7D32"/>
                 </a:solidFill>
-                <a:latin typeface="MS Gothic"/>
-                <a:ea typeface="MS Gothic"/>
-                <a:cs typeface="MS Gothic"/>
+                <a:latin typeface="Consolas"/>
+                <a:ea typeface="BIZ UDGothic"/>
+                <a:cs typeface="BIZ UDGothic"/>
               </a:rPr>
               <a:t># GP3 に黄のLED</a:t>
             </a:r>
@@ -12801,9 +12801,9 @@
                 <a:solidFill>
                   <a:srgbClr val="222222"/>
                 </a:solidFill>
-                <a:latin typeface="MS Gothic"/>
-                <a:ea typeface="MS Gothic"/>
-                <a:cs typeface="MS Gothic"/>
+                <a:latin typeface="Consolas"/>
+                <a:ea typeface="BIZ UDGothic"/>
+                <a:cs typeface="BIZ UDGothic"/>
               </a:rPr>
               <a:t>green  = Pin(4, Pin.OUT)   </a:t>
             </a:r>
@@ -12812,9 +12812,9 @@
                 <a:solidFill>
                   <a:srgbClr val="2E7D32"/>
                 </a:solidFill>
-                <a:latin typeface="MS Gothic"/>
-                <a:ea typeface="MS Gothic"/>
-                <a:cs typeface="MS Gothic"/>
+                <a:latin typeface="Consolas"/>
+                <a:ea typeface="BIZ UDGothic"/>
+                <a:cs typeface="BIZ UDGothic"/>
               </a:rPr>
               <a:t># GP4 に緑のLED</a:t>
             </a:r>
@@ -12830,9 +12830,9 @@
                 <a:solidFill>
                   <a:srgbClr val="222222"/>
                 </a:solidFill>
-                <a:latin typeface="MS Gothic"/>
-                <a:ea typeface="MS Gothic"/>
-                <a:cs typeface="MS Gothic"/>
+                <a:latin typeface="Consolas"/>
+                <a:ea typeface="BIZ UDGothic"/>
+                <a:cs typeface="BIZ UDGothic"/>
               </a:rPr>
               <a:t> </a:t>
             </a:r>
@@ -12848,9 +12848,9 @@
                 <a:solidFill>
                   <a:srgbClr val="2E7D32"/>
                 </a:solidFill>
-                <a:latin typeface="MS Gothic"/>
-                <a:ea typeface="MS Gothic"/>
-                <a:cs typeface="MS Gothic"/>
+                <a:latin typeface="Consolas"/>
+                <a:ea typeface="BIZ UDGothic"/>
+                <a:cs typeface="BIZ UDGothic"/>
               </a:rPr>
               <a:t># ---- 関数:全部のLEDを消す ----</a:t>
             </a:r>
@@ -12866,9 +12866,9 @@
                 <a:solidFill>
                   <a:srgbClr val="222222"/>
                 </a:solidFill>
-                <a:latin typeface="MS Gothic"/>
-                <a:ea typeface="MS Gothic"/>
-                <a:cs typeface="MS Gothic"/>
+                <a:latin typeface="Consolas"/>
+                <a:ea typeface="BIZ UDGothic"/>
+                <a:cs typeface="BIZ UDGothic"/>
               </a:rPr>
               <a:t>def all_off():</a:t>
             </a:r>
@@ -12884,9 +12884,9 @@
                 <a:solidFill>
                   <a:srgbClr val="222222"/>
                 </a:solidFill>
-                <a:latin typeface="MS Gothic"/>
-                <a:ea typeface="MS Gothic"/>
-                <a:cs typeface="MS Gothic"/>
+                <a:latin typeface="Consolas"/>
+                <a:ea typeface="BIZ UDGothic"/>
+                <a:cs typeface="BIZ UDGothic"/>
               </a:rPr>
               <a:t>    </a:t>
             </a:r>
@@ -12895,9 +12895,9 @@
                 <a:solidFill>
                   <a:srgbClr val="2E7D32"/>
                 </a:solidFill>
-                <a:latin typeface="MS Gothic"/>
-                <a:ea typeface="MS Gothic"/>
-                <a:cs typeface="MS Gothic"/>
+                <a:latin typeface="Consolas"/>
+                <a:ea typeface="BIZ UDGothic"/>
+                <a:cs typeface="BIZ UDGothic"/>
               </a:rPr>
               <a:t># 赤・黄・緑を1つずつ取り出して p に入れ、順番に消す</a:t>
             </a:r>
@@ -12913,9 +12913,9 @@
                 <a:solidFill>
                   <a:srgbClr val="222222"/>
                 </a:solidFill>
-                <a:latin typeface="MS Gothic"/>
-                <a:ea typeface="MS Gothic"/>
-                <a:cs typeface="MS Gothic"/>
+                <a:latin typeface="Consolas"/>
+                <a:ea typeface="BIZ UDGothic"/>
+                <a:cs typeface="BIZ UDGothic"/>
               </a:rPr>
               <a:t>    for p in (red, yellow, green):</a:t>
             </a:r>
@@ -12931,9 +12931,9 @@
                 <a:solidFill>
                   <a:srgbClr val="222222"/>
                 </a:solidFill>
-                <a:latin typeface="MS Gothic"/>
-                <a:ea typeface="MS Gothic"/>
-                <a:cs typeface="MS Gothic"/>
+                <a:latin typeface="Consolas"/>
+                <a:ea typeface="BIZ UDGothic"/>
+                <a:cs typeface="BIZ UDGothic"/>
               </a:rPr>
               <a:t>        p.value(0)         </a:t>
             </a:r>
@@ -12942,9 +12942,9 @@
                 <a:solidFill>
                   <a:srgbClr val="2E7D32"/>
                 </a:solidFill>
-                <a:latin typeface="MS Gothic"/>
-                <a:ea typeface="MS Gothic"/>
-                <a:cs typeface="MS Gothic"/>
+                <a:latin typeface="Consolas"/>
+                <a:ea typeface="BIZ UDGothic"/>
+                <a:cs typeface="BIZ UDGothic"/>
               </a:rPr>
               <a:t># 0 = 電気を止める = 消灯</a:t>
             </a:r>
@@ -12960,7 +12960,7 @@
         <p:spPr>
           <a:xfrm>
             <a:off x="640080" y="3706368"/>
-            <a:ext cx="1336040" cy="228600"/>
+            <a:ext cx="1460500" cy="228600"/>
           </a:xfrm>
           <a:prstGeom prst="roundRect">
             <a:avLst/>
@@ -13003,8 +13003,8 @@
         </p:nvSpPr>
         <p:spPr>
           <a:xfrm>
-            <a:off x="995680" y="4138168"/>
-            <a:ext cx="2758440" cy="228600"/>
+            <a:off x="1031240" y="4138168"/>
+            <a:ext cx="3025140" cy="228600"/>
           </a:xfrm>
           <a:prstGeom prst="roundRect">
             <a:avLst/>
@@ -13408,9 +13408,9 @@
                 <a:solidFill>
                   <a:srgbClr val="2E7D32"/>
                 </a:solidFill>
-                <a:latin typeface="MS Gothic"/>
-                <a:ea typeface="MS Gothic"/>
-                <a:cs typeface="MS Gothic"/>
+                <a:latin typeface="Consolas"/>
+                <a:ea typeface="BIZ UDGothic"/>
+                <a:cs typeface="BIZ UDGothic"/>
               </a:rPr>
               <a:t># ---- 配線チェック:1個ずつ点灯 ----</a:t>
             </a:r>
@@ -13426,9 +13426,9 @@
                 <a:solidFill>
                   <a:srgbClr val="2E7D32"/>
                 </a:solidFill>
-                <a:latin typeface="MS Gothic"/>
-                <a:ea typeface="MS Gothic"/>
-                <a:cs typeface="MS Gothic"/>
+                <a:latin typeface="Consolas"/>
+                <a:ea typeface="BIZ UDGothic"/>
+                <a:cs typeface="BIZ UDGothic"/>
               </a:rPr>
               <a:t># (名前, ピン) の組を順番に取り出して処理する</a:t>
             </a:r>
@@ -13444,9 +13444,9 @@
                 <a:solidFill>
                   <a:srgbClr val="222222"/>
                 </a:solidFill>
-                <a:latin typeface="MS Gothic"/>
-                <a:ea typeface="MS Gothic"/>
-                <a:cs typeface="MS Gothic"/>
+                <a:latin typeface="Consolas"/>
+                <a:ea typeface="BIZ UDGothic"/>
+                <a:cs typeface="BIZ UDGothic"/>
               </a:rPr>
               <a:t>for name, p in (("赤", red), ("黄", yellow), ("緑", green)):</a:t>
             </a:r>
@@ -13462,9 +13462,9 @@
                 <a:solidFill>
                   <a:srgbClr val="222222"/>
                 </a:solidFill>
-                <a:latin typeface="MS Gothic"/>
-                <a:ea typeface="MS Gothic"/>
-                <a:cs typeface="MS Gothic"/>
+                <a:latin typeface="Consolas"/>
+                <a:ea typeface="BIZ UDGothic"/>
+                <a:cs typeface="BIZ UDGothic"/>
               </a:rPr>
               <a:t>    all_off()              </a:t>
             </a:r>
@@ -13473,9 +13473,9 @@
                 <a:solidFill>
                   <a:srgbClr val="2E7D32"/>
                 </a:solidFill>
-                <a:latin typeface="MS Gothic"/>
-                <a:ea typeface="MS Gothic"/>
-                <a:cs typeface="MS Gothic"/>
+                <a:latin typeface="Consolas"/>
+                <a:ea typeface="BIZ UDGothic"/>
+                <a:cs typeface="BIZ UDGothic"/>
               </a:rPr>
               <a:t># いったん全部消す</a:t>
             </a:r>
@@ -13491,9 +13491,9 @@
                 <a:solidFill>
                   <a:srgbClr val="222222"/>
                 </a:solidFill>
-                <a:latin typeface="MS Gothic"/>
-                <a:ea typeface="MS Gothic"/>
-                <a:cs typeface="MS Gothic"/>
+                <a:latin typeface="Consolas"/>
+                <a:ea typeface="BIZ UDGothic"/>
+                <a:cs typeface="BIZ UDGothic"/>
               </a:rPr>
               <a:t>    print(name, "点灯")    </a:t>
             </a:r>
@@ -13502,9 +13502,9 @@
                 <a:solidFill>
                   <a:srgbClr val="2E7D32"/>
                 </a:solidFill>
-                <a:latin typeface="MS Gothic"/>
-                <a:ea typeface="MS Gothic"/>
-                <a:cs typeface="MS Gothic"/>
+                <a:latin typeface="Consolas"/>
+                <a:ea typeface="BIZ UDGothic"/>
+                <a:cs typeface="BIZ UDGothic"/>
               </a:rPr>
               <a:t># Shell に今どの色かを表示</a:t>
             </a:r>
@@ -13520,9 +13520,9 @@
                 <a:solidFill>
                   <a:srgbClr val="222222"/>
                 </a:solidFill>
-                <a:latin typeface="MS Gothic"/>
-                <a:ea typeface="MS Gothic"/>
-                <a:cs typeface="MS Gothic"/>
+                <a:latin typeface="Consolas"/>
+                <a:ea typeface="BIZ UDGothic"/>
+                <a:cs typeface="BIZ UDGothic"/>
               </a:rPr>
               <a:t>    p.value(1)             </a:t>
             </a:r>
@@ -13531,9 +13531,9 @@
                 <a:solidFill>
                   <a:srgbClr val="2E7D32"/>
                 </a:solidFill>
-                <a:latin typeface="MS Gothic"/>
-                <a:ea typeface="MS Gothic"/>
-                <a:cs typeface="MS Gothic"/>
+                <a:latin typeface="Consolas"/>
+                <a:ea typeface="BIZ UDGothic"/>
+                <a:cs typeface="BIZ UDGothic"/>
               </a:rPr>
               <a:t># 1 = 電気を流す = 点灯</a:t>
             </a:r>
@@ -13549,9 +13549,9 @@
                 <a:solidFill>
                   <a:srgbClr val="222222"/>
                 </a:solidFill>
-                <a:latin typeface="MS Gothic"/>
-                <a:ea typeface="MS Gothic"/>
-                <a:cs typeface="MS Gothic"/>
+                <a:latin typeface="Consolas"/>
+                <a:ea typeface="BIZ UDGothic"/>
+                <a:cs typeface="BIZ UDGothic"/>
               </a:rPr>
               <a:t>    time.sleep(1)          </a:t>
             </a:r>
@@ -13560,9 +13560,9 @@
                 <a:solidFill>
                   <a:srgbClr val="2E7D32"/>
                 </a:solidFill>
-                <a:latin typeface="MS Gothic"/>
-                <a:ea typeface="MS Gothic"/>
-                <a:cs typeface="MS Gothic"/>
+                <a:latin typeface="Consolas"/>
+                <a:ea typeface="BIZ UDGothic"/>
+                <a:cs typeface="BIZ UDGothic"/>
               </a:rPr>
               <a:t># 1秒待つ</a:t>
             </a:r>
@@ -13578,9 +13578,9 @@
                 <a:solidFill>
                   <a:srgbClr val="222222"/>
                 </a:solidFill>
-                <a:latin typeface="MS Gothic"/>
-                <a:ea typeface="MS Gothic"/>
-                <a:cs typeface="MS Gothic"/>
+                <a:latin typeface="Consolas"/>
+                <a:ea typeface="BIZ UDGothic"/>
+                <a:cs typeface="BIZ UDGothic"/>
               </a:rPr>
               <a:t>all_off()                  </a:t>
             </a:r>
@@ -13589,9 +13589,9 @@
                 <a:solidFill>
                   <a:srgbClr val="2E7D32"/>
                 </a:solidFill>
-                <a:latin typeface="MS Gothic"/>
-                <a:ea typeface="MS Gothic"/>
-                <a:cs typeface="MS Gothic"/>
+                <a:latin typeface="Consolas"/>
+                <a:ea typeface="BIZ UDGothic"/>
+                <a:cs typeface="BIZ UDGothic"/>
               </a:rPr>
               <a:t># チェックが終わったら全部消す</a:t>
             </a:r>
@@ -13607,7 +13607,7 @@
         <p:spPr>
           <a:xfrm>
             <a:off x="640080" y="1763268"/>
-            <a:ext cx="5425439" cy="228600"/>
+            <a:ext cx="5905500" cy="228600"/>
           </a:xfrm>
           <a:prstGeom prst="roundRect">
             <a:avLst/>
@@ -14011,9 +14011,9 @@
                 <a:solidFill>
                   <a:srgbClr val="2E7D32"/>
                 </a:solidFill>
-                <a:latin typeface="MS Gothic"/>
-                <a:ea typeface="MS Gothic"/>
-                <a:cs typeface="MS Gothic"/>
+                <a:latin typeface="Consolas"/>
+                <a:ea typeface="BIZ UDGothic"/>
+                <a:cs typeface="BIZ UDGothic"/>
               </a:rPr>
               <a:t># ---- 信号のサイクル(ずっと繰り返す) ----</a:t>
             </a:r>
@@ -14029,9 +14029,9 @@
                 <a:solidFill>
                   <a:srgbClr val="222222"/>
                 </a:solidFill>
-                <a:latin typeface="MS Gothic"/>
-                <a:ea typeface="MS Gothic"/>
-                <a:cs typeface="MS Gothic"/>
+                <a:latin typeface="Consolas"/>
+                <a:ea typeface="BIZ UDGothic"/>
+                <a:cs typeface="BIZ UDGothic"/>
               </a:rPr>
               <a:t>while True:                </a:t>
             </a:r>
@@ -14040,9 +14040,9 @@
                 <a:solidFill>
                   <a:srgbClr val="2E7D32"/>
                 </a:solidFill>
-                <a:latin typeface="MS Gothic"/>
-                <a:ea typeface="MS Gothic"/>
-                <a:cs typeface="MS Gothic"/>
+                <a:latin typeface="Consolas"/>
+                <a:ea typeface="BIZ UDGothic"/>
+                <a:cs typeface="BIZ UDGothic"/>
               </a:rPr>
               <a:t># True なので終わらない(無限ループ)</a:t>
             </a:r>
@@ -14058,9 +14058,9 @@
                 <a:solidFill>
                   <a:srgbClr val="222222"/>
                 </a:solidFill>
-                <a:latin typeface="MS Gothic"/>
-                <a:ea typeface="MS Gothic"/>
-                <a:cs typeface="MS Gothic"/>
+                <a:latin typeface="Consolas"/>
+                <a:ea typeface="BIZ UDGothic"/>
+                <a:cs typeface="BIZ UDGothic"/>
               </a:rPr>
               <a:t>    green.value(1)         </a:t>
             </a:r>
@@ -14069,9 +14069,9 @@
                 <a:solidFill>
                   <a:srgbClr val="2E7D32"/>
                 </a:solidFill>
-                <a:latin typeface="MS Gothic"/>
-                <a:ea typeface="MS Gothic"/>
-                <a:cs typeface="MS Gothic"/>
+                <a:latin typeface="Consolas"/>
+                <a:ea typeface="BIZ UDGothic"/>
+                <a:cs typeface="BIZ UDGothic"/>
               </a:rPr>
               <a:t># 緑を点ける</a:t>
             </a:r>
@@ -14087,9 +14087,9 @@
                 <a:solidFill>
                   <a:srgbClr val="222222"/>
                 </a:solidFill>
-                <a:latin typeface="MS Gothic"/>
-                <a:ea typeface="MS Gothic"/>
-                <a:cs typeface="MS Gothic"/>
+                <a:latin typeface="Consolas"/>
+                <a:ea typeface="BIZ UDGothic"/>
+                <a:cs typeface="BIZ UDGothic"/>
               </a:rPr>
               <a:t>    time.sleep(5)          </a:t>
             </a:r>
@@ -14098,9 +14098,9 @@
                 <a:solidFill>
                   <a:srgbClr val="2E7D32"/>
                 </a:solidFill>
-                <a:latin typeface="MS Gothic"/>
-                <a:ea typeface="MS Gothic"/>
-                <a:cs typeface="MS Gothic"/>
+                <a:latin typeface="Consolas"/>
+                <a:ea typeface="BIZ UDGothic"/>
+                <a:cs typeface="BIZ UDGothic"/>
               </a:rPr>
               <a:t># 5秒待つ</a:t>
             </a:r>
@@ -14116,9 +14116,9 @@
                 <a:solidFill>
                   <a:srgbClr val="222222"/>
                 </a:solidFill>
-                <a:latin typeface="MS Gothic"/>
-                <a:ea typeface="MS Gothic"/>
-                <a:cs typeface="MS Gothic"/>
+                <a:latin typeface="Consolas"/>
+                <a:ea typeface="BIZ UDGothic"/>
+                <a:cs typeface="BIZ UDGothic"/>
               </a:rPr>
               <a:t>    green.value(0)         </a:t>
             </a:r>
@@ -14127,9 +14127,9 @@
                 <a:solidFill>
                   <a:srgbClr val="2E7D32"/>
                 </a:solidFill>
-                <a:latin typeface="MS Gothic"/>
-                <a:ea typeface="MS Gothic"/>
-                <a:cs typeface="MS Gothic"/>
+                <a:latin typeface="Consolas"/>
+                <a:ea typeface="BIZ UDGothic"/>
+                <a:cs typeface="BIZ UDGothic"/>
               </a:rPr>
               <a:t># 緑を消す</a:t>
             </a:r>
@@ -14145,9 +14145,9 @@
                 <a:solidFill>
                   <a:srgbClr val="222222"/>
                 </a:solidFill>
-                <a:latin typeface="MS Gothic"/>
-                <a:ea typeface="MS Gothic"/>
-                <a:cs typeface="MS Gothic"/>
+                <a:latin typeface="Consolas"/>
+                <a:ea typeface="BIZ UDGothic"/>
+                <a:cs typeface="BIZ UDGothic"/>
               </a:rPr>
               <a:t> </a:t>
             </a:r>
@@ -14163,9 +14163,9 @@
                 <a:solidFill>
                   <a:srgbClr val="222222"/>
                 </a:solidFill>
-                <a:latin typeface="MS Gothic"/>
-                <a:ea typeface="MS Gothic"/>
-                <a:cs typeface="MS Gothic"/>
+                <a:latin typeface="Consolas"/>
+                <a:ea typeface="BIZ UDGothic"/>
+                <a:cs typeface="BIZ UDGothic"/>
               </a:rPr>
               <a:t>    yellow.value(1)        </a:t>
             </a:r>
@@ -14174,9 +14174,9 @@
                 <a:solidFill>
                   <a:srgbClr val="2E7D32"/>
                 </a:solidFill>
-                <a:latin typeface="MS Gothic"/>
-                <a:ea typeface="MS Gothic"/>
-                <a:cs typeface="MS Gothic"/>
+                <a:latin typeface="Consolas"/>
+                <a:ea typeface="BIZ UDGothic"/>
+                <a:cs typeface="BIZ UDGothic"/>
               </a:rPr>
               <a:t># 黄を点ける</a:t>
             </a:r>
@@ -14192,9 +14192,9 @@
                 <a:solidFill>
                   <a:srgbClr val="222222"/>
                 </a:solidFill>
-                <a:latin typeface="MS Gothic"/>
-                <a:ea typeface="MS Gothic"/>
-                <a:cs typeface="MS Gothic"/>
+                <a:latin typeface="Consolas"/>
+                <a:ea typeface="BIZ UDGothic"/>
+                <a:cs typeface="BIZ UDGothic"/>
               </a:rPr>
               <a:t>    time.sleep(2)          </a:t>
             </a:r>
@@ -14203,9 +14203,9 @@
                 <a:solidFill>
                   <a:srgbClr val="2E7D32"/>
                 </a:solidFill>
-                <a:latin typeface="MS Gothic"/>
-                <a:ea typeface="MS Gothic"/>
-                <a:cs typeface="MS Gothic"/>
+                <a:latin typeface="Consolas"/>
+                <a:ea typeface="BIZ UDGothic"/>
+                <a:cs typeface="BIZ UDGothic"/>
               </a:rPr>
               <a:t># 2秒待つ</a:t>
             </a:r>
@@ -14221,9 +14221,9 @@
                 <a:solidFill>
                   <a:srgbClr val="222222"/>
                 </a:solidFill>
-                <a:latin typeface="MS Gothic"/>
-                <a:ea typeface="MS Gothic"/>
-                <a:cs typeface="MS Gothic"/>
+                <a:latin typeface="Consolas"/>
+                <a:ea typeface="BIZ UDGothic"/>
+                <a:cs typeface="BIZ UDGothic"/>
               </a:rPr>
               <a:t>    yellow.value(0)        </a:t>
             </a:r>
@@ -14232,9 +14232,9 @@
                 <a:solidFill>
                   <a:srgbClr val="2E7D32"/>
                 </a:solidFill>
-                <a:latin typeface="MS Gothic"/>
-                <a:ea typeface="MS Gothic"/>
-                <a:cs typeface="MS Gothic"/>
+                <a:latin typeface="Consolas"/>
+                <a:ea typeface="BIZ UDGothic"/>
+                <a:cs typeface="BIZ UDGothic"/>
               </a:rPr>
               <a:t># 黄を消す</a:t>
             </a:r>
@@ -14250,9 +14250,9 @@
                 <a:solidFill>
                   <a:srgbClr val="222222"/>
                 </a:solidFill>
-                <a:latin typeface="MS Gothic"/>
-                <a:ea typeface="MS Gothic"/>
-                <a:cs typeface="MS Gothic"/>
+                <a:latin typeface="Consolas"/>
+                <a:ea typeface="BIZ UDGothic"/>
+                <a:cs typeface="BIZ UDGothic"/>
               </a:rPr>
               <a:t> </a:t>
             </a:r>
@@ -14268,9 +14268,9 @@
                 <a:solidFill>
                   <a:srgbClr val="222222"/>
                 </a:solidFill>
-                <a:latin typeface="MS Gothic"/>
-                <a:ea typeface="MS Gothic"/>
-                <a:cs typeface="MS Gothic"/>
+                <a:latin typeface="Consolas"/>
+                <a:ea typeface="BIZ UDGothic"/>
+                <a:cs typeface="BIZ UDGothic"/>
               </a:rPr>
               <a:t>    red.value(1)           </a:t>
             </a:r>
@@ -14279,9 +14279,9 @@
                 <a:solidFill>
                   <a:srgbClr val="2E7D32"/>
                 </a:solidFill>
-                <a:latin typeface="MS Gothic"/>
-                <a:ea typeface="MS Gothic"/>
-                <a:cs typeface="MS Gothic"/>
+                <a:latin typeface="Consolas"/>
+                <a:ea typeface="BIZ UDGothic"/>
+                <a:cs typeface="BIZ UDGothic"/>
               </a:rPr>
               <a:t># 赤を点ける</a:t>
             </a:r>
@@ -14297,9 +14297,9 @@
                 <a:solidFill>
                   <a:srgbClr val="222222"/>
                 </a:solidFill>
-                <a:latin typeface="MS Gothic"/>
-                <a:ea typeface="MS Gothic"/>
-                <a:cs typeface="MS Gothic"/>
+                <a:latin typeface="Consolas"/>
+                <a:ea typeface="BIZ UDGothic"/>
+                <a:cs typeface="BIZ UDGothic"/>
               </a:rPr>
               <a:t>    time.sleep(5)          </a:t>
             </a:r>
@@ -14308,9 +14308,9 @@
                 <a:solidFill>
                   <a:srgbClr val="2E7D32"/>
                 </a:solidFill>
-                <a:latin typeface="MS Gothic"/>
-                <a:ea typeface="MS Gothic"/>
-                <a:cs typeface="MS Gothic"/>
+                <a:latin typeface="Consolas"/>
+                <a:ea typeface="BIZ UDGothic"/>
+                <a:cs typeface="BIZ UDGothic"/>
               </a:rPr>
               <a:t># 5秒待つ</a:t>
             </a:r>
@@ -14326,9 +14326,9 @@
                 <a:solidFill>
                   <a:srgbClr val="222222"/>
                 </a:solidFill>
-                <a:latin typeface="MS Gothic"/>
-                <a:ea typeface="MS Gothic"/>
-                <a:cs typeface="MS Gothic"/>
+                <a:latin typeface="Consolas"/>
+                <a:ea typeface="BIZ UDGothic"/>
+                <a:cs typeface="BIZ UDGothic"/>
               </a:rPr>
               <a:t>    red.value(0)           </a:t>
             </a:r>
@@ -14337,9 +14337,9 @@
                 <a:solidFill>
                   <a:srgbClr val="2E7D32"/>
                 </a:solidFill>
-                <a:latin typeface="MS Gothic"/>
-                <a:ea typeface="MS Gothic"/>
-                <a:cs typeface="MS Gothic"/>
+                <a:latin typeface="Consolas"/>
+                <a:ea typeface="BIZ UDGothic"/>
+                <a:cs typeface="BIZ UDGothic"/>
               </a:rPr>
               <a:t># 赤を消す → また緑に戻る</a:t>
             </a:r>
@@ -14355,7 +14355,7 @@
         <p:spPr>
           <a:xfrm>
             <a:off x="640080" y="1547368"/>
-            <a:ext cx="1069340" cy="228600"/>
+            <a:ext cx="1167130" cy="228600"/>
           </a:xfrm>
           <a:prstGeom prst="roundRect">
             <a:avLst/>
@@ -14762,9 +14762,9 @@
                 <a:solidFill>
                   <a:srgbClr val="C62828"/>
                 </a:solidFill>
-                <a:latin typeface="MS Gothic"/>
-                <a:ea typeface="MS Gothic"/>
-                <a:cs typeface="MS Gothic"/>
+                <a:latin typeface="Consolas"/>
+                <a:ea typeface="BIZ UDGothic"/>
+                <a:cs typeface="BIZ UDGothic"/>
               </a:rPr>
               <a:t>while</a:t>
             </a:r>
@@ -14784,9 +14784,9 @@
                 <a:solidFill>
                   <a:srgbClr val="C62828"/>
                 </a:solidFill>
-                <a:latin typeface="MS Gothic"/>
-                <a:ea typeface="MS Gothic"/>
-                <a:cs typeface="MS Gothic"/>
+                <a:latin typeface="Consolas"/>
+                <a:ea typeface="BIZ UDGothic"/>
+                <a:cs typeface="BIZ UDGothic"/>
               </a:rPr>
               <a:t>if</a:t>
             </a:r>
@@ -14806,9 +14806,9 @@
                 <a:solidFill>
                   <a:srgbClr val="C62828"/>
                 </a:solidFill>
-                <a:latin typeface="MS Gothic"/>
-                <a:ea typeface="MS Gothic"/>
-                <a:cs typeface="MS Gothic"/>
+                <a:latin typeface="Consolas"/>
+                <a:ea typeface="BIZ UDGothic"/>
+                <a:cs typeface="BIZ UDGothic"/>
               </a:rPr>
               <a:t>for</a:t>
             </a:r>
@@ -15181,9 +15181,9 @@
                           <a:solidFill>
                             <a:srgbClr val="C62828"/>
                           </a:solidFill>
-                          <a:latin typeface="MS Gothic"/>
-                          <a:ea typeface="MS Gothic"/>
-                          <a:cs typeface="MS Gothic"/>
+                          <a:latin typeface="Consolas"/>
+                          <a:ea typeface="BIZ UDGothic"/>
+                          <a:cs typeface="BIZ UDGothic"/>
                         </a:rPr>
                         <a:t>Pin(2, Pin.OUT)</a:t>
                       </a:r>
@@ -15253,9 +15253,9 @@
                           <a:solidFill>
                             <a:srgbClr val="C62828"/>
                           </a:solidFill>
-                          <a:latin typeface="MS Gothic"/>
-                          <a:ea typeface="MS Gothic"/>
-                          <a:cs typeface="MS Gothic"/>
+                          <a:latin typeface="Consolas"/>
+                          <a:ea typeface="BIZ UDGothic"/>
+                          <a:cs typeface="BIZ UDGothic"/>
                         </a:rPr>
                         <a:t>def all_off():</a:t>
                       </a:r>
@@ -15275,9 +15275,9 @@
                           <a:solidFill>
                             <a:srgbClr val="C62828"/>
                           </a:solidFill>
-                          <a:latin typeface="MS Gothic"/>
-                          <a:ea typeface="MS Gothic"/>
-                          <a:cs typeface="MS Gothic"/>
+                          <a:latin typeface="Consolas"/>
+                          <a:ea typeface="BIZ UDGothic"/>
+                          <a:cs typeface="BIZ UDGothic"/>
                         </a:rPr>
                         <a:t>for</a:t>
                       </a:r>
@@ -15336,9 +15336,9 @@
                           <a:solidFill>
                             <a:srgbClr val="C62828"/>
                           </a:solidFill>
-                          <a:latin typeface="MS Gothic"/>
-                          <a:ea typeface="MS Gothic"/>
-                          <a:cs typeface="MS Gothic"/>
+                          <a:latin typeface="Consolas"/>
+                          <a:ea typeface="BIZ UDGothic"/>
+                          <a:cs typeface="BIZ UDGothic"/>
                         </a:rPr>
                         <a:t>for name, p in ...</a:t>
                       </a:r>
@@ -15397,9 +15397,9 @@
                           <a:solidFill>
                             <a:srgbClr val="C62828"/>
                           </a:solidFill>
-                          <a:latin typeface="MS Gothic"/>
-                          <a:ea typeface="MS Gothic"/>
-                          <a:cs typeface="MS Gothic"/>
+                          <a:latin typeface="Consolas"/>
+                          <a:ea typeface="BIZ UDGothic"/>
+                          <a:cs typeface="BIZ UDGothic"/>
                         </a:rPr>
                         <a:t>while True:</a:t>
                       </a:r>
@@ -17068,9 +17068,9 @@
                 <a:solidFill>
                   <a:srgbClr val="222222"/>
                 </a:solidFill>
-                <a:latin typeface="MS Gothic"/>
-                <a:ea typeface="MS Gothic"/>
-                <a:cs typeface="MS Gothic"/>
+                <a:latin typeface="Consolas"/>
+                <a:ea typeface="BIZ UDGothic"/>
+                <a:cs typeface="BIZ UDGothic"/>
               </a:rPr>
               <a:t> 3.3V</a:t>
             </a:r>
@@ -17086,9 +17086,9 @@
                 <a:solidFill>
                   <a:srgbClr val="222222"/>
                 </a:solidFill>
-                <a:latin typeface="MS Gothic"/>
-                <a:ea typeface="MS Gothic"/>
-                <a:cs typeface="MS Gothic"/>
+                <a:latin typeface="Consolas"/>
+                <a:ea typeface="BIZ UDGothic"/>
+                <a:cs typeface="BIZ UDGothic"/>
               </a:rPr>
               <a:t>  │</a:t>
             </a:r>
@@ -17104,9 +17104,9 @@
                 <a:solidFill>
                   <a:srgbClr val="222222"/>
                 </a:solidFill>
-                <a:latin typeface="MS Gothic"/>
-                <a:ea typeface="MS Gothic"/>
-                <a:cs typeface="MS Gothic"/>
+                <a:latin typeface="Consolas"/>
+                <a:ea typeface="BIZ UDGothic"/>
+                <a:cs typeface="BIZ UDGothic"/>
               </a:rPr>
               <a:t> [抵抗]  ← Pico の内部にある</a:t>
             </a:r>
@@ -17122,9 +17122,9 @@
                 <a:solidFill>
                   <a:srgbClr val="222222"/>
                 </a:solidFill>
-                <a:latin typeface="MS Gothic"/>
-                <a:ea typeface="MS Gothic"/>
-                <a:cs typeface="MS Gothic"/>
+                <a:latin typeface="Consolas"/>
+                <a:ea typeface="BIZ UDGothic"/>
+                <a:cs typeface="BIZ UDGothic"/>
               </a:rPr>
               <a:t>  │</a:t>
             </a:r>
@@ -17140,9 +17140,9 @@
                 <a:solidFill>
                   <a:srgbClr val="222222"/>
                 </a:solidFill>
-                <a:latin typeface="MS Gothic"/>
-                <a:ea typeface="MS Gothic"/>
-                <a:cs typeface="MS Gothic"/>
+                <a:latin typeface="Consolas"/>
+                <a:ea typeface="BIZ UDGothic"/>
+                <a:cs typeface="BIZ UDGothic"/>
               </a:rPr>
               <a:t>  ├───── GP5(入力)</a:t>
             </a:r>
@@ -17158,9 +17158,9 @@
                 <a:solidFill>
                   <a:srgbClr val="222222"/>
                 </a:solidFill>
-                <a:latin typeface="MS Gothic"/>
-                <a:ea typeface="MS Gothic"/>
-                <a:cs typeface="MS Gothic"/>
+                <a:latin typeface="Consolas"/>
+                <a:ea typeface="BIZ UDGothic"/>
+                <a:cs typeface="BIZ UDGothic"/>
               </a:rPr>
               <a:t>  │</a:t>
             </a:r>
@@ -17176,9 +17176,9 @@
                 <a:solidFill>
                   <a:srgbClr val="222222"/>
                 </a:solidFill>
-                <a:latin typeface="MS Gothic"/>
-                <a:ea typeface="MS Gothic"/>
-                <a:cs typeface="MS Gothic"/>
+                <a:latin typeface="Consolas"/>
+                <a:ea typeface="BIZ UDGothic"/>
+                <a:cs typeface="BIZ UDGothic"/>
               </a:rPr>
               <a:t>  ┴ スイッチ</a:t>
             </a:r>
@@ -17194,9 +17194,9 @@
                 <a:solidFill>
                   <a:srgbClr val="222222"/>
                 </a:solidFill>
-                <a:latin typeface="MS Gothic"/>
-                <a:ea typeface="MS Gothic"/>
-                <a:cs typeface="MS Gothic"/>
+                <a:latin typeface="Consolas"/>
+                <a:ea typeface="BIZ UDGothic"/>
+                <a:cs typeface="BIZ UDGothic"/>
               </a:rPr>
               <a:t>  │</a:t>
             </a:r>
@@ -17212,9 +17212,9 @@
                 <a:solidFill>
                   <a:srgbClr val="222222"/>
                 </a:solidFill>
-                <a:latin typeface="MS Gothic"/>
-                <a:ea typeface="MS Gothic"/>
-                <a:cs typeface="MS Gothic"/>
+                <a:latin typeface="Consolas"/>
+                <a:ea typeface="BIZ UDGothic"/>
+                <a:cs typeface="BIZ UDGothic"/>
               </a:rPr>
               <a:t> GND</a:t>
             </a:r>
@@ -17513,9 +17513,9 @@
                 <a:solidFill>
                   <a:srgbClr val="C62828"/>
                 </a:solidFill>
-                <a:latin typeface="MS Gothic"/>
-                <a:ea typeface="MS Gothic"/>
-                <a:cs typeface="MS Gothic"/>
+                <a:latin typeface="Consolas"/>
+                <a:ea typeface="BIZ UDGothic"/>
+                <a:cs typeface="BIZ UDGothic"/>
               </a:rPr>
               <a:t>Pin.PULL_UP</a:t>
             </a:r>
@@ -18838,9 +18838,9 @@
                 <a:solidFill>
                   <a:srgbClr val="2E7D32"/>
                 </a:solidFill>
-                <a:latin typeface="MS Gothic"/>
-                <a:ea typeface="MS Gothic"/>
-                <a:cs typeface="MS Gothic"/>
+                <a:latin typeface="Consolas"/>
+                <a:ea typeface="BIZ UDGothic"/>
+                <a:cs typeface="BIZ UDGothic"/>
               </a:rPr>
               <a:t># ---- 必要な道具を読み込む ----</a:t>
             </a:r>
@@ -18856,9 +18856,9 @@
                 <a:solidFill>
                   <a:srgbClr val="222222"/>
                 </a:solidFill>
-                <a:latin typeface="MS Gothic"/>
-                <a:ea typeface="MS Gothic"/>
-                <a:cs typeface="MS Gothic"/>
+                <a:latin typeface="Consolas"/>
+                <a:ea typeface="BIZ UDGothic"/>
+                <a:cs typeface="BIZ UDGothic"/>
               </a:rPr>
               <a:t>from machine import Pin</a:t>
             </a:r>
@@ -18874,9 +18874,9 @@
                 <a:solidFill>
                   <a:srgbClr val="222222"/>
                 </a:solidFill>
-                <a:latin typeface="MS Gothic"/>
-                <a:ea typeface="MS Gothic"/>
-                <a:cs typeface="MS Gothic"/>
+                <a:latin typeface="Consolas"/>
+                <a:ea typeface="BIZ UDGothic"/>
+                <a:cs typeface="BIZ UDGothic"/>
               </a:rPr>
               <a:t>import time</a:t>
             </a:r>
@@ -18892,9 +18892,9 @@
                 <a:solidFill>
                   <a:srgbClr val="222222"/>
                 </a:solidFill>
-                <a:latin typeface="MS Gothic"/>
-                <a:ea typeface="MS Gothic"/>
-                <a:cs typeface="MS Gothic"/>
+                <a:latin typeface="Consolas"/>
+                <a:ea typeface="BIZ UDGothic"/>
+                <a:cs typeface="BIZ UDGothic"/>
               </a:rPr>
               <a:t> </a:t>
             </a:r>
@@ -18910,9 +18910,9 @@
                 <a:solidFill>
                   <a:srgbClr val="2E7D32"/>
                 </a:solidFill>
-                <a:latin typeface="MS Gothic"/>
-                <a:ea typeface="MS Gothic"/>
-                <a:cs typeface="MS Gothic"/>
+                <a:latin typeface="Consolas"/>
+                <a:ea typeface="BIZ UDGothic"/>
+                <a:cs typeface="BIZ UDGothic"/>
               </a:rPr>
               <a:t># ---- ピンの設定 ----</a:t>
             </a:r>
@@ -18928,9 +18928,9 @@
                 <a:solidFill>
                   <a:srgbClr val="222222"/>
                 </a:solidFill>
-                <a:latin typeface="MS Gothic"/>
-                <a:ea typeface="MS Gothic"/>
-                <a:cs typeface="MS Gothic"/>
+                <a:latin typeface="Consolas"/>
+                <a:ea typeface="BIZ UDGothic"/>
+                <a:cs typeface="BIZ UDGothic"/>
               </a:rPr>
               <a:t>red    = Pin(2, Pin.OUT)   </a:t>
             </a:r>
@@ -18939,9 +18939,9 @@
                 <a:solidFill>
                   <a:srgbClr val="2E7D32"/>
                 </a:solidFill>
-                <a:latin typeface="MS Gothic"/>
-                <a:ea typeface="MS Gothic"/>
-                <a:cs typeface="MS Gothic"/>
+                <a:latin typeface="Consolas"/>
+                <a:ea typeface="BIZ UDGothic"/>
+                <a:cs typeface="BIZ UDGothic"/>
               </a:rPr>
               <a:t># GP2:赤(出力)</a:t>
             </a:r>
@@ -18957,9 +18957,9 @@
                 <a:solidFill>
                   <a:srgbClr val="222222"/>
                 </a:solidFill>
-                <a:latin typeface="MS Gothic"/>
-                <a:ea typeface="MS Gothic"/>
-                <a:cs typeface="MS Gothic"/>
+                <a:latin typeface="Consolas"/>
+                <a:ea typeface="BIZ UDGothic"/>
+                <a:cs typeface="BIZ UDGothic"/>
               </a:rPr>
               <a:t>yellow = Pin(3, Pin.OUT)   </a:t>
             </a:r>
@@ -18968,9 +18968,9 @@
                 <a:solidFill>
                   <a:srgbClr val="2E7D32"/>
                 </a:solidFill>
-                <a:latin typeface="MS Gothic"/>
-                <a:ea typeface="MS Gothic"/>
-                <a:cs typeface="MS Gothic"/>
+                <a:latin typeface="Consolas"/>
+                <a:ea typeface="BIZ UDGothic"/>
+                <a:cs typeface="BIZ UDGothic"/>
               </a:rPr>
               <a:t># GP3:黄(出力)</a:t>
             </a:r>
@@ -18986,9 +18986,9 @@
                 <a:solidFill>
                   <a:srgbClr val="222222"/>
                 </a:solidFill>
-                <a:latin typeface="MS Gothic"/>
-                <a:ea typeface="MS Gothic"/>
-                <a:cs typeface="MS Gothic"/>
+                <a:latin typeface="Consolas"/>
+                <a:ea typeface="BIZ UDGothic"/>
+                <a:cs typeface="BIZ UDGothic"/>
               </a:rPr>
               <a:t>green  = Pin(4, Pin.OUT)   </a:t>
             </a:r>
@@ -18997,9 +18997,9 @@
                 <a:solidFill>
                   <a:srgbClr val="2E7D32"/>
                 </a:solidFill>
-                <a:latin typeface="MS Gothic"/>
-                <a:ea typeface="MS Gothic"/>
-                <a:cs typeface="MS Gothic"/>
+                <a:latin typeface="Consolas"/>
+                <a:ea typeface="BIZ UDGothic"/>
+                <a:cs typeface="BIZ UDGothic"/>
               </a:rPr>
               <a:t># GP4:緑(出力)</a:t>
             </a:r>
@@ -19015,9 +19015,9 @@
                 <a:solidFill>
                   <a:srgbClr val="222222"/>
                 </a:solidFill>
-                <a:latin typeface="MS Gothic"/>
-                <a:ea typeface="MS Gothic"/>
-                <a:cs typeface="MS Gothic"/>
+                <a:latin typeface="Consolas"/>
+                <a:ea typeface="BIZ UDGothic"/>
+                <a:cs typeface="BIZ UDGothic"/>
               </a:rPr>
               <a:t> </a:t>
             </a:r>
@@ -19033,9 +19033,9 @@
                 <a:solidFill>
                   <a:srgbClr val="2E7D32"/>
                 </a:solidFill>
-                <a:latin typeface="MS Gothic"/>
-                <a:ea typeface="MS Gothic"/>
-                <a:cs typeface="MS Gothic"/>
+                <a:latin typeface="Consolas"/>
+                <a:ea typeface="BIZ UDGothic"/>
+                <a:cs typeface="BIZ UDGothic"/>
               </a:rPr>
               <a:t># GP5 をボタン用の「入力(IN)」にする</a:t>
             </a:r>
@@ -19051,9 +19051,9 @@
                 <a:solidFill>
                   <a:srgbClr val="2E7D32"/>
                 </a:solidFill>
-                <a:latin typeface="MS Gothic"/>
-                <a:ea typeface="MS Gothic"/>
-                <a:cs typeface="MS Gothic"/>
+                <a:latin typeface="Consolas"/>
+                <a:ea typeface="BIZ UDGothic"/>
+                <a:cs typeface="BIZ UDGothic"/>
               </a:rPr>
               <a:t># PULL_UP:内部のプルアップ抵抗を使う</a:t>
             </a:r>
@@ -19069,9 +19069,9 @@
                 <a:solidFill>
                   <a:srgbClr val="2E7D32"/>
                 </a:solidFill>
-                <a:latin typeface="MS Gothic"/>
-                <a:ea typeface="MS Gothic"/>
-                <a:cs typeface="MS Gothic"/>
+                <a:latin typeface="Consolas"/>
+                <a:ea typeface="BIZ UDGothic"/>
+                <a:cs typeface="BIZ UDGothic"/>
               </a:rPr>
               <a:t>#   押していない → 1(HIGH)</a:t>
             </a:r>
@@ -19087,9 +19087,9 @@
                 <a:solidFill>
                   <a:srgbClr val="2E7D32"/>
                 </a:solidFill>
-                <a:latin typeface="MS Gothic"/>
-                <a:ea typeface="MS Gothic"/>
-                <a:cs typeface="MS Gothic"/>
+                <a:latin typeface="Consolas"/>
+                <a:ea typeface="BIZ UDGothic"/>
+                <a:cs typeface="BIZ UDGothic"/>
               </a:rPr>
               <a:t>#   押している   → 0(LOW) ← 押すと 0 になる点に注意!</a:t>
             </a:r>
@@ -19105,9 +19105,9 @@
                 <a:solidFill>
                   <a:srgbClr val="222222"/>
                 </a:solidFill>
-                <a:latin typeface="MS Gothic"/>
-                <a:ea typeface="MS Gothic"/>
-                <a:cs typeface="MS Gothic"/>
+                <a:latin typeface="Consolas"/>
+                <a:ea typeface="BIZ UDGothic"/>
+                <a:cs typeface="BIZ UDGothic"/>
               </a:rPr>
               <a:t>button = Pin(5, Pin.IN, Pin.PULL_UP)</a:t>
             </a:r>
@@ -19123,9 +19123,9 @@
                 <a:solidFill>
                   <a:srgbClr val="222222"/>
                 </a:solidFill>
-                <a:latin typeface="MS Gothic"/>
-                <a:ea typeface="MS Gothic"/>
-                <a:cs typeface="MS Gothic"/>
+                <a:latin typeface="Consolas"/>
+                <a:ea typeface="BIZ UDGothic"/>
+                <a:cs typeface="BIZ UDGothic"/>
               </a:rPr>
               <a:t> </a:t>
             </a:r>
@@ -19141,9 +19141,9 @@
                 <a:solidFill>
                   <a:srgbClr val="2E7D32"/>
                 </a:solidFill>
-                <a:latin typeface="MS Gothic"/>
-                <a:ea typeface="MS Gothic"/>
-                <a:cs typeface="MS Gothic"/>
+                <a:latin typeface="Consolas"/>
+                <a:ea typeface="BIZ UDGothic"/>
+                <a:cs typeface="BIZ UDGothic"/>
               </a:rPr>
               <a:t># ---- 関数:全部のLEDを消す ----</a:t>
             </a:r>
@@ -19159,9 +19159,9 @@
                 <a:solidFill>
                   <a:srgbClr val="222222"/>
                 </a:solidFill>
-                <a:latin typeface="MS Gothic"/>
-                <a:ea typeface="MS Gothic"/>
-                <a:cs typeface="MS Gothic"/>
+                <a:latin typeface="Consolas"/>
+                <a:ea typeface="BIZ UDGothic"/>
+                <a:cs typeface="BIZ UDGothic"/>
               </a:rPr>
               <a:t>def all_off():</a:t>
             </a:r>
@@ -19177,9 +19177,9 @@
                 <a:solidFill>
                   <a:srgbClr val="222222"/>
                 </a:solidFill>
-                <a:latin typeface="MS Gothic"/>
-                <a:ea typeface="MS Gothic"/>
-                <a:cs typeface="MS Gothic"/>
+                <a:latin typeface="Consolas"/>
+                <a:ea typeface="BIZ UDGothic"/>
+                <a:cs typeface="BIZ UDGothic"/>
               </a:rPr>
               <a:t>    for p in (red, yellow, green):</a:t>
             </a:r>
@@ -19195,9 +19195,9 @@
                 <a:solidFill>
                   <a:srgbClr val="222222"/>
                 </a:solidFill>
-                <a:latin typeface="MS Gothic"/>
-                <a:ea typeface="MS Gothic"/>
-                <a:cs typeface="MS Gothic"/>
+                <a:latin typeface="Consolas"/>
+                <a:ea typeface="BIZ UDGothic"/>
+                <a:cs typeface="BIZ UDGothic"/>
               </a:rPr>
               <a:t>        p.value(0)</a:t>
             </a:r>
@@ -19213,7 +19213,7 @@
         <p:spPr>
           <a:xfrm>
             <a:off x="640080" y="4785868"/>
-            <a:ext cx="1336040" cy="228600"/>
+            <a:ext cx="1460500" cy="228600"/>
           </a:xfrm>
           <a:prstGeom prst="roundRect">
             <a:avLst/>
@@ -19256,8 +19256,8 @@
         </p:nvSpPr>
         <p:spPr>
           <a:xfrm>
-            <a:off x="995680" y="5001768"/>
-            <a:ext cx="2758440" cy="228600"/>
+            <a:off x="1031240" y="5001768"/>
+            <a:ext cx="3025140" cy="228600"/>
           </a:xfrm>
           <a:prstGeom prst="roundRect">
             <a:avLst/>
@@ -19718,9 +19718,9 @@
                 <a:solidFill>
                   <a:srgbClr val="2E7D32"/>
                 </a:solidFill>
-                <a:latin typeface="MS Gothic"/>
-                <a:ea typeface="MS Gothic"/>
-                <a:cs typeface="MS Gothic"/>
+                <a:latin typeface="Consolas"/>
+                <a:ea typeface="BIZ UDGothic"/>
+                <a:cs typeface="BIZ UDGothic"/>
               </a:rPr>
               <a:t># ---- スタート時の状態 ----</a:t>
             </a:r>
@@ -19736,9 +19736,9 @@
                 <a:solidFill>
                   <a:srgbClr val="222222"/>
                 </a:solidFill>
-                <a:latin typeface="MS Gothic"/>
-                <a:ea typeface="MS Gothic"/>
-                <a:cs typeface="MS Gothic"/>
+                <a:latin typeface="Consolas"/>
+                <a:ea typeface="BIZ UDGothic"/>
+                <a:cs typeface="BIZ UDGothic"/>
               </a:rPr>
               <a:t>all_off()</a:t>
             </a:r>
@@ -19754,9 +19754,9 @@
                 <a:solidFill>
                   <a:srgbClr val="222222"/>
                 </a:solidFill>
-                <a:latin typeface="MS Gothic"/>
-                <a:ea typeface="MS Gothic"/>
-                <a:cs typeface="MS Gothic"/>
+                <a:latin typeface="Consolas"/>
+                <a:ea typeface="BIZ UDGothic"/>
+                <a:cs typeface="BIZ UDGothic"/>
               </a:rPr>
               <a:t>green.value(1)             </a:t>
             </a:r>
@@ -19765,9 +19765,9 @@
                 <a:solidFill>
                   <a:srgbClr val="2E7D32"/>
                 </a:solidFill>
-                <a:latin typeface="MS Gothic"/>
-                <a:ea typeface="MS Gothic"/>
-                <a:cs typeface="MS Gothic"/>
+                <a:latin typeface="Consolas"/>
+                <a:ea typeface="BIZ UDGothic"/>
+                <a:cs typeface="BIZ UDGothic"/>
               </a:rPr>
               <a:t># 車用の信号は緑で待つ</a:t>
             </a:r>
@@ -19783,9 +19783,9 @@
                 <a:solidFill>
                   <a:srgbClr val="222222"/>
                 </a:solidFill>
-                <a:latin typeface="MS Gothic"/>
-                <a:ea typeface="MS Gothic"/>
-                <a:cs typeface="MS Gothic"/>
+                <a:latin typeface="Consolas"/>
+                <a:ea typeface="BIZ UDGothic"/>
+                <a:cs typeface="BIZ UDGothic"/>
               </a:rPr>
               <a:t>print("待機中(緑)")</a:t>
             </a:r>
@@ -19801,9 +19801,9 @@
                 <a:solidFill>
                   <a:srgbClr val="222222"/>
                 </a:solidFill>
-                <a:latin typeface="MS Gothic"/>
-                <a:ea typeface="MS Gothic"/>
-                <a:cs typeface="MS Gothic"/>
+                <a:latin typeface="Consolas"/>
+                <a:ea typeface="BIZ UDGothic"/>
+                <a:cs typeface="BIZ UDGothic"/>
               </a:rPr>
               <a:t> </a:t>
             </a:r>
@@ -19819,9 +19819,9 @@
                 <a:solidFill>
                   <a:srgbClr val="2E7D32"/>
                 </a:solidFill>
-                <a:latin typeface="MS Gothic"/>
-                <a:ea typeface="MS Gothic"/>
-                <a:cs typeface="MS Gothic"/>
+                <a:latin typeface="Consolas"/>
+                <a:ea typeface="BIZ UDGothic"/>
+                <a:cs typeface="BIZ UDGothic"/>
               </a:rPr>
               <a:t># ---- メインの繰り返し ----</a:t>
             </a:r>
@@ -19837,9 +19837,9 @@
                 <a:solidFill>
                   <a:srgbClr val="222222"/>
                 </a:solidFill>
-                <a:latin typeface="MS Gothic"/>
-                <a:ea typeface="MS Gothic"/>
-                <a:cs typeface="MS Gothic"/>
+                <a:latin typeface="Consolas"/>
+                <a:ea typeface="BIZ UDGothic"/>
+                <a:cs typeface="BIZ UDGothic"/>
               </a:rPr>
               <a:t>while True:</a:t>
             </a:r>
@@ -19855,9 +19855,9 @@
                 <a:solidFill>
                   <a:srgbClr val="222222"/>
                 </a:solidFill>
-                <a:latin typeface="MS Gothic"/>
-                <a:ea typeface="MS Gothic"/>
-                <a:cs typeface="MS Gothic"/>
+                <a:latin typeface="Consolas"/>
+                <a:ea typeface="BIZ UDGothic"/>
+                <a:cs typeface="BIZ UDGothic"/>
               </a:rPr>
               <a:t>    </a:t>
             </a:r>
@@ -19866,9 +19866,9 @@
                 <a:solidFill>
                   <a:srgbClr val="2E7D32"/>
                 </a:solidFill>
-                <a:latin typeface="MS Gothic"/>
-                <a:ea typeface="MS Gothic"/>
-                <a:cs typeface="MS Gothic"/>
+                <a:latin typeface="Consolas"/>
+                <a:ea typeface="BIZ UDGothic"/>
+                <a:cs typeface="BIZ UDGothic"/>
               </a:rPr>
               <a:t># ボタンの状態を読む。0 なら押されている</a:t>
             </a:r>
@@ -19884,9 +19884,9 @@
                 <a:solidFill>
                   <a:srgbClr val="222222"/>
                 </a:solidFill>
-                <a:latin typeface="MS Gothic"/>
-                <a:ea typeface="MS Gothic"/>
-                <a:cs typeface="MS Gothic"/>
+                <a:latin typeface="Consolas"/>
+                <a:ea typeface="BIZ UDGothic"/>
+                <a:cs typeface="BIZ UDGothic"/>
               </a:rPr>
               <a:t>    if button.value() == 0:</a:t>
             </a:r>
@@ -19902,9 +19902,9 @@
                 <a:solidFill>
                   <a:srgbClr val="222222"/>
                 </a:solidFill>
-                <a:latin typeface="MS Gothic"/>
-                <a:ea typeface="MS Gothic"/>
-                <a:cs typeface="MS Gothic"/>
+                <a:latin typeface="Consolas"/>
+                <a:ea typeface="BIZ UDGothic"/>
+                <a:cs typeface="BIZ UDGothic"/>
               </a:rPr>
               <a:t>        time.sleep_ms(20)              </a:t>
             </a:r>
@@ -19913,9 +19913,9 @@
                 <a:solidFill>
                   <a:srgbClr val="2E7D32"/>
                 </a:solidFill>
-                <a:latin typeface="MS Gothic"/>
-                <a:ea typeface="MS Gothic"/>
-                <a:cs typeface="MS Gothic"/>
+                <a:latin typeface="Consolas"/>
+                <a:ea typeface="BIZ UDGothic"/>
+                <a:cs typeface="BIZ UDGothic"/>
               </a:rPr>
               <a:t># 20ミリ秒待つ(チャタリング対策)</a:t>
             </a:r>
@@ -19931,9 +19931,9 @@
                 <a:solidFill>
                   <a:srgbClr val="222222"/>
                 </a:solidFill>
-                <a:latin typeface="MS Gothic"/>
-                <a:ea typeface="MS Gothic"/>
-                <a:cs typeface="MS Gothic"/>
+                <a:latin typeface="Consolas"/>
+                <a:ea typeface="BIZ UDGothic"/>
+                <a:cs typeface="BIZ UDGothic"/>
               </a:rPr>
               <a:t>        if button.value() == 0:        </a:t>
             </a:r>
@@ -19942,9 +19942,9 @@
                 <a:solidFill>
                   <a:srgbClr val="2E7D32"/>
                 </a:solidFill>
-                <a:latin typeface="MS Gothic"/>
-                <a:ea typeface="MS Gothic"/>
-                <a:cs typeface="MS Gothic"/>
+                <a:latin typeface="Consolas"/>
+                <a:ea typeface="BIZ UDGothic"/>
+                <a:cs typeface="BIZ UDGothic"/>
               </a:rPr>
               <a:t># 20ミリ秒後もまだ押されていたら「本当に押した」と判断</a:t>
             </a:r>
@@ -19960,9 +19960,9 @@
                 <a:solidFill>
                   <a:srgbClr val="222222"/>
                 </a:solidFill>
-                <a:latin typeface="MS Gothic"/>
-                <a:ea typeface="MS Gothic"/>
-                <a:cs typeface="MS Gothic"/>
+                <a:latin typeface="Consolas"/>
+                <a:ea typeface="BIZ UDGothic"/>
+                <a:cs typeface="BIZ UDGothic"/>
               </a:rPr>
               <a:t>            print("ボタン押下")</a:t>
             </a:r>
@@ -19978,9 +19978,9 @@
                 <a:solidFill>
                   <a:srgbClr val="222222"/>
                 </a:solidFill>
-                <a:latin typeface="MS Gothic"/>
-                <a:ea typeface="MS Gothic"/>
-                <a:cs typeface="MS Gothic"/>
+                <a:latin typeface="Consolas"/>
+                <a:ea typeface="BIZ UDGothic"/>
+                <a:cs typeface="BIZ UDGothic"/>
               </a:rPr>
               <a:t>            time.sleep(3)              </a:t>
             </a:r>
@@ -19989,9 +19989,9 @@
                 <a:solidFill>
                   <a:srgbClr val="2E7D32"/>
                 </a:solidFill>
-                <a:latin typeface="MS Gothic"/>
-                <a:ea typeface="MS Gothic"/>
-                <a:cs typeface="MS Gothic"/>
+                <a:latin typeface="Consolas"/>
+                <a:ea typeface="BIZ UDGothic"/>
+                <a:cs typeface="BIZ UDGothic"/>
               </a:rPr>
               <a:t># 押してからすぐには変わらず、3秒待つ</a:t>
             </a:r>
@@ -20007,9 +20007,9 @@
                 <a:solidFill>
                   <a:srgbClr val="222222"/>
                 </a:solidFill>
-                <a:latin typeface="MS Gothic"/>
-                <a:ea typeface="MS Gothic"/>
-                <a:cs typeface="MS Gothic"/>
+                <a:latin typeface="Consolas"/>
+                <a:ea typeface="BIZ UDGothic"/>
+                <a:cs typeface="BIZ UDGothic"/>
               </a:rPr>
               <a:t> </a:t>
             </a:r>
@@ -20025,9 +20025,9 @@
                 <a:solidFill>
                   <a:srgbClr val="222222"/>
                 </a:solidFill>
-                <a:latin typeface="MS Gothic"/>
-                <a:ea typeface="MS Gothic"/>
-                <a:cs typeface="MS Gothic"/>
+                <a:latin typeface="Consolas"/>
+                <a:ea typeface="BIZ UDGothic"/>
+                <a:cs typeface="BIZ UDGothic"/>
               </a:rPr>
               <a:t>            </a:t>
             </a:r>
@@ -20036,9 +20036,9 @@
                 <a:solidFill>
                   <a:srgbClr val="2E7D32"/>
                 </a:solidFill>
-                <a:latin typeface="MS Gothic"/>
-                <a:ea typeface="MS Gothic"/>
-                <a:cs typeface="MS Gothic"/>
+                <a:latin typeface="Consolas"/>
+                <a:ea typeface="BIZ UDGothic"/>
+                <a:cs typeface="BIZ UDGothic"/>
               </a:rPr>
               <a:t># 緑 → 黄</a:t>
             </a:r>
@@ -20054,9 +20054,9 @@
                 <a:solidFill>
                   <a:srgbClr val="222222"/>
                 </a:solidFill>
-                <a:latin typeface="MS Gothic"/>
-                <a:ea typeface="MS Gothic"/>
-                <a:cs typeface="MS Gothic"/>
+                <a:latin typeface="Consolas"/>
+                <a:ea typeface="BIZ UDGothic"/>
+                <a:cs typeface="BIZ UDGothic"/>
               </a:rPr>
               <a:t>            green.value(0)</a:t>
             </a:r>
@@ -20072,9 +20072,9 @@
                 <a:solidFill>
                   <a:srgbClr val="222222"/>
                 </a:solidFill>
-                <a:latin typeface="MS Gothic"/>
-                <a:ea typeface="MS Gothic"/>
-                <a:cs typeface="MS Gothic"/>
+                <a:latin typeface="Consolas"/>
+                <a:ea typeface="BIZ UDGothic"/>
+                <a:cs typeface="BIZ UDGothic"/>
               </a:rPr>
               <a:t>            yellow.value(1)</a:t>
             </a:r>
@@ -20090,9 +20090,9 @@
                 <a:solidFill>
                   <a:srgbClr val="222222"/>
                 </a:solidFill>
-                <a:latin typeface="MS Gothic"/>
-                <a:ea typeface="MS Gothic"/>
-                <a:cs typeface="MS Gothic"/>
+                <a:latin typeface="Consolas"/>
+                <a:ea typeface="BIZ UDGothic"/>
+                <a:cs typeface="BIZ UDGothic"/>
               </a:rPr>
               <a:t>            print("黄")</a:t>
             </a:r>
@@ -20108,9 +20108,9 @@
                 <a:solidFill>
                   <a:srgbClr val="222222"/>
                 </a:solidFill>
-                <a:latin typeface="MS Gothic"/>
-                <a:ea typeface="MS Gothic"/>
-                <a:cs typeface="MS Gothic"/>
+                <a:latin typeface="Consolas"/>
+                <a:ea typeface="BIZ UDGothic"/>
+                <a:cs typeface="BIZ UDGothic"/>
               </a:rPr>
               <a:t>            time.sleep(2)              </a:t>
             </a:r>
@@ -20119,9 +20119,9 @@
                 <a:solidFill>
                   <a:srgbClr val="2E7D32"/>
                 </a:solidFill>
-                <a:latin typeface="MS Gothic"/>
-                <a:ea typeface="MS Gothic"/>
-                <a:cs typeface="MS Gothic"/>
+                <a:latin typeface="Consolas"/>
+                <a:ea typeface="BIZ UDGothic"/>
+                <a:cs typeface="BIZ UDGothic"/>
               </a:rPr>
               <a:t># 黄は2秒</a:t>
             </a:r>
@@ -20137,7 +20137,7 @@
         <p:spPr>
           <a:xfrm>
             <a:off x="640080" y="2626868"/>
-            <a:ext cx="1069340" cy="228600"/>
+            <a:ext cx="1167130" cy="228600"/>
           </a:xfrm>
           <a:prstGeom prst="roundRect">
             <a:avLst/>
@@ -20180,8 +20180,8 @@
         </p:nvSpPr>
         <p:spPr>
           <a:xfrm>
-            <a:off x="995680" y="3058668"/>
-            <a:ext cx="2136140" cy="228600"/>
+            <a:off x="1031240" y="3058668"/>
+            <a:ext cx="2340610" cy="228600"/>
           </a:xfrm>
           <a:prstGeom prst="roundRect">
             <a:avLst/>
@@ -20224,8 +20224,8 @@
         </p:nvSpPr>
         <p:spPr>
           <a:xfrm>
-            <a:off x="1351280" y="3490468"/>
-            <a:ext cx="2136140" cy="228600"/>
+            <a:off x="1422400" y="3490468"/>
+            <a:ext cx="2340610" cy="228600"/>
           </a:xfrm>
           <a:prstGeom prst="roundRect">
             <a:avLst/>
@@ -20629,9 +20629,9 @@
                 <a:solidFill>
                   <a:srgbClr val="222222"/>
                 </a:solidFill>
-                <a:latin typeface="MS Gothic"/>
-                <a:ea typeface="MS Gothic"/>
-                <a:cs typeface="MS Gothic"/>
+                <a:latin typeface="Consolas"/>
+                <a:ea typeface="BIZ UDGothic"/>
+                <a:cs typeface="BIZ UDGothic"/>
               </a:rPr>
               <a:t>            </a:t>
             </a:r>
@@ -20640,9 +20640,9 @@
                 <a:solidFill>
                   <a:srgbClr val="2E7D32"/>
                 </a:solidFill>
-                <a:latin typeface="MS Gothic"/>
-                <a:ea typeface="MS Gothic"/>
-                <a:cs typeface="MS Gothic"/>
+                <a:latin typeface="Consolas"/>
+                <a:ea typeface="BIZ UDGothic"/>
+                <a:cs typeface="BIZ UDGothic"/>
               </a:rPr>
               <a:t># 黄 → 赤</a:t>
             </a:r>
@@ -20658,9 +20658,9 @@
                 <a:solidFill>
                   <a:srgbClr val="222222"/>
                 </a:solidFill>
-                <a:latin typeface="MS Gothic"/>
-                <a:ea typeface="MS Gothic"/>
-                <a:cs typeface="MS Gothic"/>
+                <a:latin typeface="Consolas"/>
+                <a:ea typeface="BIZ UDGothic"/>
+                <a:cs typeface="BIZ UDGothic"/>
               </a:rPr>
               <a:t>            yellow.value(0)</a:t>
             </a:r>
@@ -20676,9 +20676,9 @@
                 <a:solidFill>
                   <a:srgbClr val="222222"/>
                 </a:solidFill>
-                <a:latin typeface="MS Gothic"/>
-                <a:ea typeface="MS Gothic"/>
-                <a:cs typeface="MS Gothic"/>
+                <a:latin typeface="Consolas"/>
+                <a:ea typeface="BIZ UDGothic"/>
+                <a:cs typeface="BIZ UDGothic"/>
               </a:rPr>
               <a:t>            red.value(1)</a:t>
             </a:r>
@@ -20694,9 +20694,9 @@
                 <a:solidFill>
                   <a:srgbClr val="222222"/>
                 </a:solidFill>
-                <a:latin typeface="MS Gothic"/>
-                <a:ea typeface="MS Gothic"/>
-                <a:cs typeface="MS Gothic"/>
+                <a:latin typeface="Consolas"/>
+                <a:ea typeface="BIZ UDGothic"/>
+                <a:cs typeface="BIZ UDGothic"/>
               </a:rPr>
               <a:t>            print("赤(歩行者OK)")</a:t>
             </a:r>
@@ -20712,9 +20712,9 @@
                 <a:solidFill>
                   <a:srgbClr val="222222"/>
                 </a:solidFill>
-                <a:latin typeface="MS Gothic"/>
-                <a:ea typeface="MS Gothic"/>
-                <a:cs typeface="MS Gothic"/>
+                <a:latin typeface="Consolas"/>
+                <a:ea typeface="BIZ UDGothic"/>
+                <a:cs typeface="BIZ UDGothic"/>
               </a:rPr>
               <a:t>            time.sleep(5)              </a:t>
             </a:r>
@@ -20723,9 +20723,9 @@
                 <a:solidFill>
                   <a:srgbClr val="2E7D32"/>
                 </a:solidFill>
-                <a:latin typeface="MS Gothic"/>
-                <a:ea typeface="MS Gothic"/>
-                <a:cs typeface="MS Gothic"/>
+                <a:latin typeface="Consolas"/>
+                <a:ea typeface="BIZ UDGothic"/>
+                <a:cs typeface="BIZ UDGothic"/>
               </a:rPr>
               <a:t># 赤は5秒(この間に歩行者がわたる)</a:t>
             </a:r>
@@ -20741,9 +20741,9 @@
                 <a:solidFill>
                   <a:srgbClr val="222222"/>
                 </a:solidFill>
-                <a:latin typeface="MS Gothic"/>
-                <a:ea typeface="MS Gothic"/>
-                <a:cs typeface="MS Gothic"/>
+                <a:latin typeface="Consolas"/>
+                <a:ea typeface="BIZ UDGothic"/>
+                <a:cs typeface="BIZ UDGothic"/>
               </a:rPr>
               <a:t> </a:t>
             </a:r>
@@ -20759,9 +20759,9 @@
                 <a:solidFill>
                   <a:srgbClr val="222222"/>
                 </a:solidFill>
-                <a:latin typeface="MS Gothic"/>
-                <a:ea typeface="MS Gothic"/>
-                <a:cs typeface="MS Gothic"/>
+                <a:latin typeface="Consolas"/>
+                <a:ea typeface="BIZ UDGothic"/>
+                <a:cs typeface="BIZ UDGothic"/>
               </a:rPr>
               <a:t>            </a:t>
             </a:r>
@@ -20770,9 +20770,9 @@
                 <a:solidFill>
                   <a:srgbClr val="2E7D32"/>
                 </a:solidFill>
-                <a:latin typeface="MS Gothic"/>
-                <a:ea typeface="MS Gothic"/>
-                <a:cs typeface="MS Gothic"/>
+                <a:latin typeface="Consolas"/>
+                <a:ea typeface="BIZ UDGothic"/>
+                <a:cs typeface="BIZ UDGothic"/>
               </a:rPr>
               <a:t># 赤 → 緑(元に戻る)</a:t>
             </a:r>
@@ -20788,9 +20788,9 @@
                 <a:solidFill>
                   <a:srgbClr val="222222"/>
                 </a:solidFill>
-                <a:latin typeface="MS Gothic"/>
-                <a:ea typeface="MS Gothic"/>
-                <a:cs typeface="MS Gothic"/>
+                <a:latin typeface="Consolas"/>
+                <a:ea typeface="BIZ UDGothic"/>
+                <a:cs typeface="BIZ UDGothic"/>
               </a:rPr>
               <a:t>            red.value(0)</a:t>
             </a:r>
@@ -20806,9 +20806,9 @@
                 <a:solidFill>
                   <a:srgbClr val="222222"/>
                 </a:solidFill>
-                <a:latin typeface="MS Gothic"/>
-                <a:ea typeface="MS Gothic"/>
-                <a:cs typeface="MS Gothic"/>
+                <a:latin typeface="Consolas"/>
+                <a:ea typeface="BIZ UDGothic"/>
+                <a:cs typeface="BIZ UDGothic"/>
               </a:rPr>
               <a:t>            green.value(1)</a:t>
             </a:r>
@@ -20824,9 +20824,9 @@
                 <a:solidFill>
                   <a:srgbClr val="222222"/>
                 </a:solidFill>
-                <a:latin typeface="MS Gothic"/>
-                <a:ea typeface="MS Gothic"/>
-                <a:cs typeface="MS Gothic"/>
+                <a:latin typeface="Consolas"/>
+                <a:ea typeface="BIZ UDGothic"/>
+                <a:cs typeface="BIZ UDGothic"/>
               </a:rPr>
               <a:t>            print("緑に復帰")</a:t>
             </a:r>
@@ -20842,9 +20842,9 @@
                 <a:solidFill>
                   <a:srgbClr val="222222"/>
                 </a:solidFill>
-                <a:latin typeface="MS Gothic"/>
-                <a:ea typeface="MS Gothic"/>
-                <a:cs typeface="MS Gothic"/>
+                <a:latin typeface="Consolas"/>
+                <a:ea typeface="BIZ UDGothic"/>
+                <a:cs typeface="BIZ UDGothic"/>
               </a:rPr>
               <a:t> </a:t>
             </a:r>
@@ -20860,9 +20860,9 @@
                 <a:solidFill>
                   <a:srgbClr val="222222"/>
                 </a:solidFill>
-                <a:latin typeface="MS Gothic"/>
-                <a:ea typeface="MS Gothic"/>
-                <a:cs typeface="MS Gothic"/>
+                <a:latin typeface="Consolas"/>
+                <a:ea typeface="BIZ UDGothic"/>
+                <a:cs typeface="BIZ UDGothic"/>
               </a:rPr>
               <a:t>            </a:t>
             </a:r>
@@ -20871,9 +20871,9 @@
                 <a:solidFill>
                   <a:srgbClr val="2E7D32"/>
                 </a:solidFill>
-                <a:latin typeface="MS Gothic"/>
-                <a:ea typeface="MS Gothic"/>
-                <a:cs typeface="MS Gothic"/>
+                <a:latin typeface="Consolas"/>
+                <a:ea typeface="BIZ UDGothic"/>
+                <a:cs typeface="BIZ UDGothic"/>
               </a:rPr>
               <a:t># ボタンが押しっぱなしなら、離されるまでここで待つ</a:t>
             </a:r>
@@ -20889,9 +20889,9 @@
                 <a:solidFill>
                   <a:srgbClr val="222222"/>
                 </a:solidFill>
-                <a:latin typeface="MS Gothic"/>
-                <a:ea typeface="MS Gothic"/>
-                <a:cs typeface="MS Gothic"/>
+                <a:latin typeface="Consolas"/>
+                <a:ea typeface="BIZ UDGothic"/>
+                <a:cs typeface="BIZ UDGothic"/>
               </a:rPr>
               <a:t>            </a:t>
             </a:r>
@@ -20900,9 +20900,9 @@
                 <a:solidFill>
                   <a:srgbClr val="2E7D32"/>
                 </a:solidFill>
-                <a:latin typeface="MS Gothic"/>
-                <a:ea typeface="MS Gothic"/>
-                <a:cs typeface="MS Gothic"/>
+                <a:latin typeface="Consolas"/>
+                <a:ea typeface="BIZ UDGothic"/>
+                <a:cs typeface="BIZ UDGothic"/>
               </a:rPr>
               <a:t># (待たないと、すぐに次のサイクルが始まってしまう)</a:t>
             </a:r>
@@ -20918,9 +20918,9 @@
                 <a:solidFill>
                   <a:srgbClr val="222222"/>
                 </a:solidFill>
-                <a:latin typeface="MS Gothic"/>
-                <a:ea typeface="MS Gothic"/>
-                <a:cs typeface="MS Gothic"/>
+                <a:latin typeface="Consolas"/>
+                <a:ea typeface="BIZ UDGothic"/>
+                <a:cs typeface="BIZ UDGothic"/>
               </a:rPr>
               <a:t>            while button.value() == 0:</a:t>
             </a:r>
@@ -20936,9 +20936,9 @@
                 <a:solidFill>
                   <a:srgbClr val="222222"/>
                 </a:solidFill>
-                <a:latin typeface="MS Gothic"/>
-                <a:ea typeface="MS Gothic"/>
-                <a:cs typeface="MS Gothic"/>
+                <a:latin typeface="Consolas"/>
+                <a:ea typeface="BIZ UDGothic"/>
+                <a:cs typeface="BIZ UDGothic"/>
               </a:rPr>
               <a:t>                time.sleep_ms(10)</a:t>
             </a:r>
@@ -20954,9 +20954,9 @@
                 <a:solidFill>
                   <a:srgbClr val="222222"/>
                 </a:solidFill>
-                <a:latin typeface="MS Gothic"/>
-                <a:ea typeface="MS Gothic"/>
-                <a:cs typeface="MS Gothic"/>
+                <a:latin typeface="Consolas"/>
+                <a:ea typeface="BIZ UDGothic"/>
+                <a:cs typeface="BIZ UDGothic"/>
               </a:rPr>
               <a:t> </a:t>
             </a:r>
@@ -20972,9 +20972,9 @@
                 <a:solidFill>
                   <a:srgbClr val="222222"/>
                 </a:solidFill>
-                <a:latin typeface="MS Gothic"/>
-                <a:ea typeface="MS Gothic"/>
-                <a:cs typeface="MS Gothic"/>
+                <a:latin typeface="Consolas"/>
+                <a:ea typeface="BIZ UDGothic"/>
+                <a:cs typeface="BIZ UDGothic"/>
               </a:rPr>
               <a:t>    </a:t>
             </a:r>
@@ -20983,9 +20983,9 @@
                 <a:solidFill>
                   <a:srgbClr val="2E7D32"/>
                 </a:solidFill>
-                <a:latin typeface="MS Gothic"/>
-                <a:ea typeface="MS Gothic"/>
-                <a:cs typeface="MS Gothic"/>
+                <a:latin typeface="Consolas"/>
+                <a:ea typeface="BIZ UDGothic"/>
+                <a:cs typeface="BIZ UDGothic"/>
               </a:rPr>
               <a:t># 10ミリ秒ごとにボタンを見に行く(これがポーリング)</a:t>
             </a:r>
@@ -21001,9 +21001,9 @@
                 <a:solidFill>
                   <a:srgbClr val="222222"/>
                 </a:solidFill>
-                <a:latin typeface="MS Gothic"/>
-                <a:ea typeface="MS Gothic"/>
-                <a:cs typeface="MS Gothic"/>
+                <a:latin typeface="Consolas"/>
+                <a:ea typeface="BIZ UDGothic"/>
+                <a:cs typeface="BIZ UDGothic"/>
               </a:rPr>
               <a:t>    time.sleep_ms(10)</a:t>
             </a:r>
@@ -21018,8 +21018,8 @@
         </p:nvSpPr>
         <p:spPr>
           <a:xfrm>
-            <a:off x="1706880" y="4138168"/>
-            <a:ext cx="2402840" cy="228600"/>
+            <a:off x="1813560" y="4138168"/>
+            <a:ext cx="2633980" cy="228600"/>
           </a:xfrm>
           <a:prstGeom prst="roundRect">
             <a:avLst/>
@@ -21289,9 +21289,9 @@
                 <a:solidFill>
                   <a:srgbClr val="C62828"/>
                 </a:solidFill>
-                <a:latin typeface="MS Gothic"/>
-                <a:ea typeface="MS Gothic"/>
-                <a:cs typeface="MS Gothic"/>
+                <a:latin typeface="Consolas"/>
+                <a:ea typeface="BIZ UDGothic"/>
+                <a:cs typeface="BIZ UDGothic"/>
               </a:rPr>
               <a:t>if</a:t>
             </a:r>
@@ -21311,9 +21311,9 @@
                 <a:solidFill>
                   <a:srgbClr val="C62828"/>
                 </a:solidFill>
-                <a:latin typeface="MS Gothic"/>
-                <a:ea typeface="MS Gothic"/>
-                <a:cs typeface="MS Gothic"/>
+                <a:latin typeface="Consolas"/>
+                <a:ea typeface="BIZ UDGothic"/>
+                <a:cs typeface="BIZ UDGothic"/>
               </a:rPr>
               <a:t>if</a:t>
             </a:r>
@@ -21373,9 +21373,9 @@
                 <a:solidFill>
                   <a:srgbClr val="C62828"/>
                 </a:solidFill>
-                <a:latin typeface="MS Gothic"/>
-                <a:ea typeface="MS Gothic"/>
-                <a:cs typeface="MS Gothic"/>
+                <a:latin typeface="Consolas"/>
+                <a:ea typeface="BIZ UDGothic"/>
+                <a:cs typeface="BIZ UDGothic"/>
               </a:rPr>
               <a:t>while button.value() == 0:</a:t>
             </a:r>
@@ -21476,9 +21476,9 @@
                 <a:solidFill>
                   <a:srgbClr val="C62828"/>
                 </a:solidFill>
-                <a:latin typeface="MS Gothic"/>
-                <a:ea typeface="MS Gothic"/>
-                <a:cs typeface="MS Gothic"/>
+                <a:latin typeface="Consolas"/>
+                <a:ea typeface="BIZ UDGothic"/>
+                <a:cs typeface="BIZ UDGothic"/>
               </a:rPr>
               <a:t>sleep</a:t>
             </a:r>
@@ -21917,9 +21917,9 @@
                 <a:solidFill>
                   <a:srgbClr val="C62828"/>
                 </a:solidFill>
-                <a:latin typeface="MS Gothic"/>
-                <a:ea typeface="MS Gothic"/>
-                <a:cs typeface="MS Gothic"/>
+                <a:latin typeface="Consolas"/>
+                <a:ea typeface="BIZ UDGothic"/>
+                <a:cs typeface="BIZ UDGothic"/>
               </a:rPr>
               <a:t>Pin.IRQ_FALLING</a:t>
             </a:r>
@@ -22508,9 +22508,9 @@
                           <a:solidFill>
                             <a:srgbClr val="C62828"/>
                           </a:solidFill>
-                          <a:latin typeface="MS Gothic"/>
-                          <a:ea typeface="MS Gothic"/>
-                          <a:cs typeface="MS Gothic"/>
+                          <a:latin typeface="Consolas"/>
+                          <a:ea typeface="BIZ UDGothic"/>
+                          <a:cs typeface="BIZ UDGothic"/>
                         </a:rPr>
                         <a:t>Pin(3, Pin.OUT)</a:t>
                       </a:r>
@@ -22997,9 +22997,9 @@
                 <a:solidFill>
                   <a:srgbClr val="2E7D32"/>
                 </a:solidFill>
-                <a:latin typeface="MS Gothic"/>
-                <a:ea typeface="MS Gothic"/>
-                <a:cs typeface="MS Gothic"/>
+                <a:latin typeface="Consolas"/>
+                <a:ea typeface="BIZ UDGothic"/>
+                <a:cs typeface="BIZ UDGothic"/>
               </a:rPr>
               <a:t># ---- 必要な道具を読み込む ----</a:t>
             </a:r>
@@ -23015,9 +23015,9 @@
                 <a:solidFill>
                   <a:srgbClr val="222222"/>
                 </a:solidFill>
-                <a:latin typeface="MS Gothic"/>
-                <a:ea typeface="MS Gothic"/>
-                <a:cs typeface="MS Gothic"/>
+                <a:latin typeface="Consolas"/>
+                <a:ea typeface="BIZ UDGothic"/>
+                <a:cs typeface="BIZ UDGothic"/>
               </a:rPr>
               <a:t>from machine import Pin</a:t>
             </a:r>
@@ -23033,9 +23033,9 @@
                 <a:solidFill>
                   <a:srgbClr val="222222"/>
                 </a:solidFill>
-                <a:latin typeface="MS Gothic"/>
-                <a:ea typeface="MS Gothic"/>
-                <a:cs typeface="MS Gothic"/>
+                <a:latin typeface="Consolas"/>
+                <a:ea typeface="BIZ UDGothic"/>
+                <a:cs typeface="BIZ UDGothic"/>
               </a:rPr>
               <a:t>import time</a:t>
             </a:r>
@@ -23051,9 +23051,9 @@
                 <a:solidFill>
                   <a:srgbClr val="222222"/>
                 </a:solidFill>
-                <a:latin typeface="MS Gothic"/>
-                <a:ea typeface="MS Gothic"/>
-                <a:cs typeface="MS Gothic"/>
+                <a:latin typeface="Consolas"/>
+                <a:ea typeface="BIZ UDGothic"/>
+                <a:cs typeface="BIZ UDGothic"/>
               </a:rPr>
               <a:t> </a:t>
             </a:r>
@@ -23069,9 +23069,9 @@
                 <a:solidFill>
                   <a:srgbClr val="2E7D32"/>
                 </a:solidFill>
-                <a:latin typeface="MS Gothic"/>
-                <a:ea typeface="MS Gothic"/>
-                <a:cs typeface="MS Gothic"/>
+                <a:latin typeface="Consolas"/>
+                <a:ea typeface="BIZ UDGothic"/>
+                <a:cs typeface="BIZ UDGothic"/>
               </a:rPr>
               <a:t># ---- ピンの設定(ポーリング版と同じ) ----</a:t>
             </a:r>
@@ -23087,9 +23087,9 @@
                 <a:solidFill>
                   <a:srgbClr val="222222"/>
                 </a:solidFill>
-                <a:latin typeface="MS Gothic"/>
-                <a:ea typeface="MS Gothic"/>
-                <a:cs typeface="MS Gothic"/>
+                <a:latin typeface="Consolas"/>
+                <a:ea typeface="BIZ UDGothic"/>
+                <a:cs typeface="BIZ UDGothic"/>
               </a:rPr>
               <a:t>red    = Pin(2, Pin.OUT)</a:t>
             </a:r>
@@ -23105,9 +23105,9 @@
                 <a:solidFill>
                   <a:srgbClr val="222222"/>
                 </a:solidFill>
-                <a:latin typeface="MS Gothic"/>
-                <a:ea typeface="MS Gothic"/>
-                <a:cs typeface="MS Gothic"/>
+                <a:latin typeface="Consolas"/>
+                <a:ea typeface="BIZ UDGothic"/>
+                <a:cs typeface="BIZ UDGothic"/>
               </a:rPr>
               <a:t>yellow = Pin(3, Pin.OUT)</a:t>
             </a:r>
@@ -23123,9 +23123,9 @@
                 <a:solidFill>
                   <a:srgbClr val="222222"/>
                 </a:solidFill>
-                <a:latin typeface="MS Gothic"/>
-                <a:ea typeface="MS Gothic"/>
-                <a:cs typeface="MS Gothic"/>
+                <a:latin typeface="Consolas"/>
+                <a:ea typeface="BIZ UDGothic"/>
+                <a:cs typeface="BIZ UDGothic"/>
               </a:rPr>
               <a:t>green  = Pin(4, Pin.OUT)</a:t>
             </a:r>
@@ -23141,9 +23141,9 @@
                 <a:solidFill>
                   <a:srgbClr val="222222"/>
                 </a:solidFill>
-                <a:latin typeface="MS Gothic"/>
-                <a:ea typeface="MS Gothic"/>
-                <a:cs typeface="MS Gothic"/>
+                <a:latin typeface="Consolas"/>
+                <a:ea typeface="BIZ UDGothic"/>
+                <a:cs typeface="BIZ UDGothic"/>
               </a:rPr>
               <a:t>button = Pin(5, Pin.IN, Pin.PULL_UP)   </a:t>
             </a:r>
@@ -23152,9 +23152,9 @@
                 <a:solidFill>
                   <a:srgbClr val="2E7D32"/>
                 </a:solidFill>
-                <a:latin typeface="MS Gothic"/>
-                <a:ea typeface="MS Gothic"/>
-                <a:cs typeface="MS Gothic"/>
+                <a:latin typeface="Consolas"/>
+                <a:ea typeface="BIZ UDGothic"/>
+                <a:cs typeface="BIZ UDGothic"/>
               </a:rPr>
               <a:t># 押すと 0 になる</a:t>
             </a:r>
@@ -23170,9 +23170,9 @@
                 <a:solidFill>
                   <a:srgbClr val="222222"/>
                 </a:solidFill>
-                <a:latin typeface="MS Gothic"/>
-                <a:ea typeface="MS Gothic"/>
-                <a:cs typeface="MS Gothic"/>
+                <a:latin typeface="Consolas"/>
+                <a:ea typeface="BIZ UDGothic"/>
+                <a:cs typeface="BIZ UDGothic"/>
               </a:rPr>
               <a:t> </a:t>
             </a:r>
@@ -23188,9 +23188,9 @@
                 <a:solidFill>
                   <a:srgbClr val="2E7D32"/>
                 </a:solidFill>
-                <a:latin typeface="MS Gothic"/>
-                <a:ea typeface="MS Gothic"/>
-                <a:cs typeface="MS Gothic"/>
+                <a:latin typeface="Consolas"/>
+                <a:ea typeface="BIZ UDGothic"/>
+                <a:cs typeface="BIZ UDGothic"/>
               </a:rPr>
               <a:t># ---- フラグ(目印)の変数 ----</a:t>
             </a:r>
@@ -23206,9 +23206,9 @@
                 <a:solidFill>
                   <a:srgbClr val="2E7D32"/>
                 </a:solidFill>
-                <a:latin typeface="MS Gothic"/>
-                <a:ea typeface="MS Gothic"/>
-                <a:cs typeface="MS Gothic"/>
+                <a:latin typeface="Consolas"/>
+                <a:ea typeface="BIZ UDGothic"/>
+                <a:cs typeface="BIZ UDGothic"/>
               </a:rPr>
               <a:t># ボタンが押されたら True にする。最初は「押されていない」= False</a:t>
             </a:r>
@@ -23224,9 +23224,9 @@
                 <a:solidFill>
                   <a:srgbClr val="222222"/>
                 </a:solidFill>
-                <a:latin typeface="MS Gothic"/>
-                <a:ea typeface="MS Gothic"/>
-                <a:cs typeface="MS Gothic"/>
+                <a:latin typeface="Consolas"/>
+                <a:ea typeface="BIZ UDGothic"/>
+                <a:cs typeface="BIZ UDGothic"/>
               </a:rPr>
               <a:t>pressed = False</a:t>
             </a:r>
@@ -23242,9 +23242,9 @@
                 <a:solidFill>
                   <a:srgbClr val="222222"/>
                 </a:solidFill>
-                <a:latin typeface="MS Gothic"/>
-                <a:ea typeface="MS Gothic"/>
-                <a:cs typeface="MS Gothic"/>
+                <a:latin typeface="Consolas"/>
+                <a:ea typeface="BIZ UDGothic"/>
+                <a:cs typeface="BIZ UDGothic"/>
               </a:rPr>
               <a:t> </a:t>
             </a:r>
@@ -23260,9 +23260,9 @@
                 <a:solidFill>
                   <a:srgbClr val="2E7D32"/>
                 </a:solidFill>
-                <a:latin typeface="MS Gothic"/>
-                <a:ea typeface="MS Gothic"/>
-                <a:cs typeface="MS Gothic"/>
+                <a:latin typeface="Consolas"/>
+                <a:ea typeface="BIZ UDGothic"/>
+                <a:cs typeface="BIZ UDGothic"/>
               </a:rPr>
               <a:t># ---- 割り込みで呼ばれる関数(ハンドラ) ----</a:t>
             </a:r>
@@ -23278,9 +23278,9 @@
                 <a:solidFill>
                   <a:srgbClr val="2E7D32"/>
                 </a:solidFill>
-                <a:latin typeface="MS Gothic"/>
-                <a:ea typeface="MS Gothic"/>
-                <a:cs typeface="MS Gothic"/>
+                <a:latin typeface="Consolas"/>
+                <a:ea typeface="BIZ UDGothic"/>
+                <a:cs typeface="BIZ UDGothic"/>
               </a:rPr>
               <a:t># ボタンが押された瞬間に、Pico が自動でこの関数を呼んでくれる</a:t>
             </a:r>
@@ -23296,9 +23296,9 @@
                 <a:solidFill>
                   <a:srgbClr val="222222"/>
                 </a:solidFill>
-                <a:latin typeface="MS Gothic"/>
-                <a:ea typeface="MS Gothic"/>
-                <a:cs typeface="MS Gothic"/>
+                <a:latin typeface="Consolas"/>
+                <a:ea typeface="BIZ UDGothic"/>
+                <a:cs typeface="BIZ UDGothic"/>
               </a:rPr>
               <a:t>def on_press(pin):</a:t>
             </a:r>
@@ -23314,9 +23314,9 @@
                 <a:solidFill>
                   <a:srgbClr val="222222"/>
                 </a:solidFill>
-                <a:latin typeface="MS Gothic"/>
-                <a:ea typeface="MS Gothic"/>
-                <a:cs typeface="MS Gothic"/>
+                <a:latin typeface="Consolas"/>
+                <a:ea typeface="BIZ UDGothic"/>
+                <a:cs typeface="BIZ UDGothic"/>
               </a:rPr>
               <a:t>    global pressed     </a:t>
             </a:r>
@@ -23325,9 +23325,9 @@
                 <a:solidFill>
                   <a:srgbClr val="2E7D32"/>
                 </a:solidFill>
-                <a:latin typeface="MS Gothic"/>
-                <a:ea typeface="MS Gothic"/>
-                <a:cs typeface="MS Gothic"/>
+                <a:latin typeface="Consolas"/>
+                <a:ea typeface="BIZ UDGothic"/>
+                <a:cs typeface="BIZ UDGothic"/>
               </a:rPr>
               <a:t># 関数の外にある pressed を書き換えるための宣言</a:t>
             </a:r>
@@ -23343,9 +23343,9 @@
                 <a:solidFill>
                   <a:srgbClr val="222222"/>
                 </a:solidFill>
-                <a:latin typeface="MS Gothic"/>
-                <a:ea typeface="MS Gothic"/>
-                <a:cs typeface="MS Gothic"/>
+                <a:latin typeface="Consolas"/>
+                <a:ea typeface="BIZ UDGothic"/>
+                <a:cs typeface="BIZ UDGothic"/>
               </a:rPr>
               <a:t>    pressed = True     </a:t>
             </a:r>
@@ -23354,9 +23354,9 @@
                 <a:solidFill>
                   <a:srgbClr val="2E7D32"/>
                 </a:solidFill>
-                <a:latin typeface="MS Gothic"/>
-                <a:ea typeface="MS Gothic"/>
-                <a:cs typeface="MS Gothic"/>
+                <a:latin typeface="Consolas"/>
+                <a:ea typeface="BIZ UDGothic"/>
+                <a:cs typeface="BIZ UDGothic"/>
               </a:rPr>
               <a:t># 「押されたよ」と目印を立てるだけ(短く書くのが大事)</a:t>
             </a:r>
@@ -23372,7 +23372,7 @@
         <p:spPr>
           <a:xfrm>
             <a:off x="640080" y="4785868"/>
-            <a:ext cx="1691640" cy="228600"/>
+            <a:ext cx="1851660" cy="228600"/>
           </a:xfrm>
           <a:prstGeom prst="roundRect">
             <a:avLst/>
@@ -23947,9 +23947,9 @@
                 <a:solidFill>
                   <a:srgbClr val="2E7D32"/>
                 </a:solidFill>
-                <a:latin typeface="MS Gothic"/>
-                <a:ea typeface="MS Gothic"/>
-                <a:cs typeface="MS Gothic"/>
+                <a:latin typeface="Consolas"/>
+                <a:ea typeface="BIZ UDGothic"/>
+                <a:cs typeface="BIZ UDGothic"/>
               </a:rPr>
               <a:t># ---- 割り込みの登録 ----</a:t>
             </a:r>
@@ -23965,9 +23965,9 @@
                 <a:solidFill>
                   <a:srgbClr val="2E7D32"/>
                 </a:solidFill>
-                <a:latin typeface="MS Gothic"/>
-                <a:ea typeface="MS Gothic"/>
-                <a:cs typeface="MS Gothic"/>
+                <a:latin typeface="Consolas"/>
+                <a:ea typeface="BIZ UDGothic"/>
+                <a:cs typeface="BIZ UDGothic"/>
               </a:rPr>
               <a:t># IRQ_FALLING:1 → 0 に変わった瞬間(=押した瞬間)に on_press を呼ぶ</a:t>
             </a:r>
@@ -23983,9 +23983,9 @@
                 <a:solidFill>
                   <a:srgbClr val="222222"/>
                 </a:solidFill>
-                <a:latin typeface="MS Gothic"/>
-                <a:ea typeface="MS Gothic"/>
-                <a:cs typeface="MS Gothic"/>
+                <a:latin typeface="Consolas"/>
+                <a:ea typeface="BIZ UDGothic"/>
+                <a:cs typeface="BIZ UDGothic"/>
               </a:rPr>
               <a:t>button.irq(trigger=Pin.IRQ_FALLING, handler=on_press)</a:t>
             </a:r>
@@ -24001,9 +24001,9 @@
                 <a:solidFill>
                   <a:srgbClr val="222222"/>
                 </a:solidFill>
-                <a:latin typeface="MS Gothic"/>
-                <a:ea typeface="MS Gothic"/>
-                <a:cs typeface="MS Gothic"/>
+                <a:latin typeface="Consolas"/>
+                <a:ea typeface="BIZ UDGothic"/>
+                <a:cs typeface="BIZ UDGothic"/>
               </a:rPr>
               <a:t> </a:t>
             </a:r>
@@ -24019,9 +24019,9 @@
                 <a:solidFill>
                   <a:srgbClr val="2E7D32"/>
                 </a:solidFill>
-                <a:latin typeface="MS Gothic"/>
-                <a:ea typeface="MS Gothic"/>
-                <a:cs typeface="MS Gothic"/>
+                <a:latin typeface="Consolas"/>
+                <a:ea typeface="BIZ UDGothic"/>
+                <a:cs typeface="BIZ UDGothic"/>
               </a:rPr>
               <a:t># ---- 関数:全部のLEDを消す ----</a:t>
             </a:r>
@@ -24037,9 +24037,9 @@
                 <a:solidFill>
                   <a:srgbClr val="222222"/>
                 </a:solidFill>
-                <a:latin typeface="MS Gothic"/>
-                <a:ea typeface="MS Gothic"/>
-                <a:cs typeface="MS Gothic"/>
+                <a:latin typeface="Consolas"/>
+                <a:ea typeface="BIZ UDGothic"/>
+                <a:cs typeface="BIZ UDGothic"/>
               </a:rPr>
               <a:t>def all_off():</a:t>
             </a:r>
@@ -24055,9 +24055,9 @@
                 <a:solidFill>
                   <a:srgbClr val="222222"/>
                 </a:solidFill>
-                <a:latin typeface="MS Gothic"/>
-                <a:ea typeface="MS Gothic"/>
-                <a:cs typeface="MS Gothic"/>
+                <a:latin typeface="Consolas"/>
+                <a:ea typeface="BIZ UDGothic"/>
+                <a:cs typeface="BIZ UDGothic"/>
               </a:rPr>
               <a:t>    for p in (red, yellow, green):</a:t>
             </a:r>
@@ -24073,9 +24073,9 @@
                 <a:solidFill>
                   <a:srgbClr val="222222"/>
                 </a:solidFill>
-                <a:latin typeface="MS Gothic"/>
-                <a:ea typeface="MS Gothic"/>
-                <a:cs typeface="MS Gothic"/>
+                <a:latin typeface="Consolas"/>
+                <a:ea typeface="BIZ UDGothic"/>
+                <a:cs typeface="BIZ UDGothic"/>
               </a:rPr>
               <a:t>        p.value(0)</a:t>
             </a:r>
@@ -24091,9 +24091,9 @@
                 <a:solidFill>
                   <a:srgbClr val="222222"/>
                 </a:solidFill>
-                <a:latin typeface="MS Gothic"/>
-                <a:ea typeface="MS Gothic"/>
-                <a:cs typeface="MS Gothic"/>
+                <a:latin typeface="Consolas"/>
+                <a:ea typeface="BIZ UDGothic"/>
+                <a:cs typeface="BIZ UDGothic"/>
               </a:rPr>
               <a:t> </a:t>
             </a:r>
@@ -24109,9 +24109,9 @@
                 <a:solidFill>
                   <a:srgbClr val="2E7D32"/>
                 </a:solidFill>
-                <a:latin typeface="MS Gothic"/>
-                <a:ea typeface="MS Gothic"/>
-                <a:cs typeface="MS Gothic"/>
+                <a:latin typeface="Consolas"/>
+                <a:ea typeface="BIZ UDGothic"/>
+                <a:cs typeface="BIZ UDGothic"/>
               </a:rPr>
               <a:t># ---- スタート時の状態 ----</a:t>
             </a:r>
@@ -24127,9 +24127,9 @@
                 <a:solidFill>
                   <a:srgbClr val="222222"/>
                 </a:solidFill>
-                <a:latin typeface="MS Gothic"/>
-                <a:ea typeface="MS Gothic"/>
-                <a:cs typeface="MS Gothic"/>
+                <a:latin typeface="Consolas"/>
+                <a:ea typeface="BIZ UDGothic"/>
+                <a:cs typeface="BIZ UDGothic"/>
               </a:rPr>
               <a:t>all_off()</a:t>
             </a:r>
@@ -24145,9 +24145,9 @@
                 <a:solidFill>
                   <a:srgbClr val="222222"/>
                 </a:solidFill>
-                <a:latin typeface="MS Gothic"/>
-                <a:ea typeface="MS Gothic"/>
-                <a:cs typeface="MS Gothic"/>
+                <a:latin typeface="Consolas"/>
+                <a:ea typeface="BIZ UDGothic"/>
+                <a:cs typeface="BIZ UDGothic"/>
               </a:rPr>
               <a:t>green.value(1)</a:t>
             </a:r>
@@ -24163,9 +24163,9 @@
                 <a:solidFill>
                   <a:srgbClr val="222222"/>
                 </a:solidFill>
-                <a:latin typeface="MS Gothic"/>
-                <a:ea typeface="MS Gothic"/>
-                <a:cs typeface="MS Gothic"/>
+                <a:latin typeface="Consolas"/>
+                <a:ea typeface="BIZ UDGothic"/>
+                <a:cs typeface="BIZ UDGothic"/>
               </a:rPr>
               <a:t>print("待機中(緑)")</a:t>
             </a:r>
@@ -24181,9 +24181,9 @@
                 <a:solidFill>
                   <a:srgbClr val="222222"/>
                 </a:solidFill>
-                <a:latin typeface="MS Gothic"/>
-                <a:ea typeface="MS Gothic"/>
-                <a:cs typeface="MS Gothic"/>
+                <a:latin typeface="Consolas"/>
+                <a:ea typeface="BIZ UDGothic"/>
+                <a:cs typeface="BIZ UDGothic"/>
               </a:rPr>
               <a:t> </a:t>
             </a:r>
@@ -24199,9 +24199,9 @@
                 <a:solidFill>
                   <a:srgbClr val="2E7D32"/>
                 </a:solidFill>
-                <a:latin typeface="MS Gothic"/>
-                <a:ea typeface="MS Gothic"/>
-                <a:cs typeface="MS Gothic"/>
+                <a:latin typeface="Consolas"/>
+                <a:ea typeface="BIZ UDGothic"/>
+                <a:cs typeface="BIZ UDGothic"/>
               </a:rPr>
               <a:t># ---- メインの繰り返し ----</a:t>
             </a:r>
@@ -24217,9 +24217,9 @@
                 <a:solidFill>
                   <a:srgbClr val="222222"/>
                 </a:solidFill>
-                <a:latin typeface="MS Gothic"/>
-                <a:ea typeface="MS Gothic"/>
-                <a:cs typeface="MS Gothic"/>
+                <a:latin typeface="Consolas"/>
+                <a:ea typeface="BIZ UDGothic"/>
+                <a:cs typeface="BIZ UDGothic"/>
               </a:rPr>
               <a:t>while True:</a:t>
             </a:r>
@@ -24235,9 +24235,9 @@
                 <a:solidFill>
                   <a:srgbClr val="222222"/>
                 </a:solidFill>
-                <a:latin typeface="MS Gothic"/>
-                <a:ea typeface="MS Gothic"/>
-                <a:cs typeface="MS Gothic"/>
+                <a:latin typeface="Consolas"/>
+                <a:ea typeface="BIZ UDGothic"/>
+                <a:cs typeface="BIZ UDGothic"/>
               </a:rPr>
               <a:t>    </a:t>
             </a:r>
@@ -24246,9 +24246,9 @@
                 <a:solidFill>
                   <a:srgbClr val="2E7D32"/>
                 </a:solidFill>
-                <a:latin typeface="MS Gothic"/>
-                <a:ea typeface="MS Gothic"/>
-                <a:cs typeface="MS Gothic"/>
+                <a:latin typeface="Consolas"/>
+                <a:ea typeface="BIZ UDGothic"/>
+                <a:cs typeface="BIZ UDGothic"/>
               </a:rPr>
               <a:t># ボタンを直接見に行かず、目印(pressed)を確認する</a:t>
             </a:r>
@@ -24264,9 +24264,9 @@
                 <a:solidFill>
                   <a:srgbClr val="222222"/>
                 </a:solidFill>
-                <a:latin typeface="MS Gothic"/>
-                <a:ea typeface="MS Gothic"/>
-                <a:cs typeface="MS Gothic"/>
+                <a:latin typeface="Consolas"/>
+                <a:ea typeface="BIZ UDGothic"/>
+                <a:cs typeface="BIZ UDGothic"/>
               </a:rPr>
               <a:t>    if pressed:</a:t>
             </a:r>
@@ -24282,9 +24282,9 @@
                 <a:solidFill>
                   <a:srgbClr val="222222"/>
                 </a:solidFill>
-                <a:latin typeface="MS Gothic"/>
-                <a:ea typeface="MS Gothic"/>
-                <a:cs typeface="MS Gothic"/>
+                <a:latin typeface="Consolas"/>
+                <a:ea typeface="BIZ UDGothic"/>
+                <a:cs typeface="BIZ UDGothic"/>
               </a:rPr>
               <a:t>        pressed = False            </a:t>
             </a:r>
@@ -24293,9 +24293,9 @@
                 <a:solidFill>
                   <a:srgbClr val="2E7D32"/>
                 </a:solidFill>
-                <a:latin typeface="MS Gothic"/>
-                <a:ea typeface="MS Gothic"/>
-                <a:cs typeface="MS Gothic"/>
+                <a:latin typeface="Consolas"/>
+                <a:ea typeface="BIZ UDGothic"/>
+                <a:cs typeface="BIZ UDGothic"/>
               </a:rPr>
               <a:t># 目印を下ろしておく</a:t>
             </a:r>
@@ -24311,9 +24311,9 @@
                 <a:solidFill>
                   <a:srgbClr val="222222"/>
                 </a:solidFill>
-                <a:latin typeface="MS Gothic"/>
-                <a:ea typeface="MS Gothic"/>
-                <a:cs typeface="MS Gothic"/>
+                <a:latin typeface="Consolas"/>
+                <a:ea typeface="BIZ UDGothic"/>
+                <a:cs typeface="BIZ UDGothic"/>
               </a:rPr>
               <a:t>        print("ボタン押下")</a:t>
             </a:r>
@@ -24329,9 +24329,9 @@
                 <a:solidFill>
                   <a:srgbClr val="222222"/>
                 </a:solidFill>
-                <a:latin typeface="MS Gothic"/>
-                <a:ea typeface="MS Gothic"/>
-                <a:cs typeface="MS Gothic"/>
+                <a:latin typeface="Consolas"/>
+                <a:ea typeface="BIZ UDGothic"/>
+                <a:cs typeface="BIZ UDGothic"/>
               </a:rPr>
               <a:t>        time.sleep_ms(3000)        </a:t>
             </a:r>
@@ -24340,9 +24340,9 @@
                 <a:solidFill>
                   <a:srgbClr val="2E7D32"/>
                 </a:solidFill>
-                <a:latin typeface="MS Gothic"/>
-                <a:ea typeface="MS Gothic"/>
-                <a:cs typeface="MS Gothic"/>
+                <a:latin typeface="Consolas"/>
+                <a:ea typeface="BIZ UDGothic"/>
+                <a:cs typeface="BIZ UDGothic"/>
               </a:rPr>
               <a:t># 3秒待つ</a:t>
             </a:r>
@@ -24358,7 +24358,7 @@
         <p:spPr>
           <a:xfrm>
             <a:off x="640080" y="2410968"/>
-            <a:ext cx="1336040" cy="228600"/>
+            <a:ext cx="1460500" cy="228600"/>
           </a:xfrm>
           <a:prstGeom prst="roundRect">
             <a:avLst/>
@@ -24401,8 +24401,8 @@
         </p:nvSpPr>
         <p:spPr>
           <a:xfrm>
-            <a:off x="995680" y="2626868"/>
-            <a:ext cx="2758440" cy="228600"/>
+            <a:off x="1031240" y="2626868"/>
+            <a:ext cx="3025140" cy="228600"/>
           </a:xfrm>
           <a:prstGeom prst="roundRect">
             <a:avLst/>
@@ -24446,7 +24446,7 @@
         <p:spPr>
           <a:xfrm>
             <a:off x="640080" y="4569968"/>
-            <a:ext cx="1069340" cy="228600"/>
+            <a:ext cx="1167130" cy="228600"/>
           </a:xfrm>
           <a:prstGeom prst="roundRect">
             <a:avLst/>
@@ -24489,8 +24489,8 @@
         </p:nvSpPr>
         <p:spPr>
           <a:xfrm>
-            <a:off x="995680" y="5001768"/>
-            <a:ext cx="1069340" cy="228600"/>
+            <a:off x="1031240" y="5001768"/>
+            <a:ext cx="1167130" cy="228600"/>
           </a:xfrm>
           <a:prstGeom prst="roundRect">
             <a:avLst/>
@@ -24796,9 +24796,9 @@
                 <a:solidFill>
                   <a:srgbClr val="222222"/>
                 </a:solidFill>
-                <a:latin typeface="MS Gothic"/>
-                <a:ea typeface="MS Gothic"/>
-                <a:cs typeface="MS Gothic"/>
+                <a:latin typeface="Consolas"/>
+                <a:ea typeface="BIZ UDGothic"/>
+                <a:cs typeface="BIZ UDGothic"/>
               </a:rPr>
               <a:t>        </a:t>
             </a:r>
@@ -24807,9 +24807,9 @@
                 <a:solidFill>
                   <a:srgbClr val="2E7D32"/>
                 </a:solidFill>
-                <a:latin typeface="MS Gothic"/>
-                <a:ea typeface="MS Gothic"/>
-                <a:cs typeface="MS Gothic"/>
+                <a:latin typeface="Consolas"/>
+                <a:ea typeface="BIZ UDGothic"/>
+                <a:cs typeface="BIZ UDGothic"/>
               </a:rPr>
               <a:t># 緑 → 黄</a:t>
             </a:r>
@@ -24825,9 +24825,9 @@
                 <a:solidFill>
                   <a:srgbClr val="222222"/>
                 </a:solidFill>
-                <a:latin typeface="MS Gothic"/>
-                <a:ea typeface="MS Gothic"/>
-                <a:cs typeface="MS Gothic"/>
+                <a:latin typeface="Consolas"/>
+                <a:ea typeface="BIZ UDGothic"/>
+                <a:cs typeface="BIZ UDGothic"/>
               </a:rPr>
               <a:t>        green.value(0)</a:t>
             </a:r>
@@ -24843,9 +24843,9 @@
                 <a:solidFill>
                   <a:srgbClr val="222222"/>
                 </a:solidFill>
-                <a:latin typeface="MS Gothic"/>
-                <a:ea typeface="MS Gothic"/>
-                <a:cs typeface="MS Gothic"/>
+                <a:latin typeface="Consolas"/>
+                <a:ea typeface="BIZ UDGothic"/>
+                <a:cs typeface="BIZ UDGothic"/>
               </a:rPr>
               <a:t>        yellow.value(1)</a:t>
             </a:r>
@@ -24861,9 +24861,9 @@
                 <a:solidFill>
                   <a:srgbClr val="222222"/>
                 </a:solidFill>
-                <a:latin typeface="MS Gothic"/>
-                <a:ea typeface="MS Gothic"/>
-                <a:cs typeface="MS Gothic"/>
+                <a:latin typeface="Consolas"/>
+                <a:ea typeface="BIZ UDGothic"/>
+                <a:cs typeface="BIZ UDGothic"/>
               </a:rPr>
               <a:t>        print("黄")</a:t>
             </a:r>
@@ -24879,9 +24879,9 @@
                 <a:solidFill>
                   <a:srgbClr val="222222"/>
                 </a:solidFill>
-                <a:latin typeface="MS Gothic"/>
-                <a:ea typeface="MS Gothic"/>
-                <a:cs typeface="MS Gothic"/>
+                <a:latin typeface="Consolas"/>
+                <a:ea typeface="BIZ UDGothic"/>
+                <a:cs typeface="BIZ UDGothic"/>
               </a:rPr>
               <a:t>        time.sleep_ms(2000)        </a:t>
             </a:r>
@@ -24890,9 +24890,9 @@
                 <a:solidFill>
                   <a:srgbClr val="2E7D32"/>
                 </a:solidFill>
-                <a:latin typeface="MS Gothic"/>
-                <a:ea typeface="MS Gothic"/>
-                <a:cs typeface="MS Gothic"/>
+                <a:latin typeface="Consolas"/>
+                <a:ea typeface="BIZ UDGothic"/>
+                <a:cs typeface="BIZ UDGothic"/>
               </a:rPr>
               <a:t># 黄は2秒</a:t>
             </a:r>
@@ -24908,9 +24908,9 @@
                 <a:solidFill>
                   <a:srgbClr val="222222"/>
                 </a:solidFill>
-                <a:latin typeface="MS Gothic"/>
-                <a:ea typeface="MS Gothic"/>
-                <a:cs typeface="MS Gothic"/>
+                <a:latin typeface="Consolas"/>
+                <a:ea typeface="BIZ UDGothic"/>
+                <a:cs typeface="BIZ UDGothic"/>
               </a:rPr>
               <a:t> </a:t>
             </a:r>
@@ -24926,9 +24926,9 @@
                 <a:solidFill>
                   <a:srgbClr val="222222"/>
                 </a:solidFill>
-                <a:latin typeface="MS Gothic"/>
-                <a:ea typeface="MS Gothic"/>
-                <a:cs typeface="MS Gothic"/>
+                <a:latin typeface="Consolas"/>
+                <a:ea typeface="BIZ UDGothic"/>
+                <a:cs typeface="BIZ UDGothic"/>
               </a:rPr>
               <a:t>        </a:t>
             </a:r>
@@ -24937,9 +24937,9 @@
                 <a:solidFill>
                   <a:srgbClr val="2E7D32"/>
                 </a:solidFill>
-                <a:latin typeface="MS Gothic"/>
-                <a:ea typeface="MS Gothic"/>
-                <a:cs typeface="MS Gothic"/>
+                <a:latin typeface="Consolas"/>
+                <a:ea typeface="BIZ UDGothic"/>
+                <a:cs typeface="BIZ UDGothic"/>
               </a:rPr>
               <a:t># 黄 → 赤</a:t>
             </a:r>
@@ -24955,9 +24955,9 @@
                 <a:solidFill>
                   <a:srgbClr val="222222"/>
                 </a:solidFill>
-                <a:latin typeface="MS Gothic"/>
-                <a:ea typeface="MS Gothic"/>
-                <a:cs typeface="MS Gothic"/>
+                <a:latin typeface="Consolas"/>
+                <a:ea typeface="BIZ UDGothic"/>
+                <a:cs typeface="BIZ UDGothic"/>
               </a:rPr>
               <a:t>        yellow.value(0)</a:t>
             </a:r>
@@ -24973,9 +24973,9 @@
                 <a:solidFill>
                   <a:srgbClr val="222222"/>
                 </a:solidFill>
-                <a:latin typeface="MS Gothic"/>
-                <a:ea typeface="MS Gothic"/>
-                <a:cs typeface="MS Gothic"/>
+                <a:latin typeface="Consolas"/>
+                <a:ea typeface="BIZ UDGothic"/>
+                <a:cs typeface="BIZ UDGothic"/>
               </a:rPr>
               <a:t>        red.value(1)</a:t>
             </a:r>
@@ -24991,9 +24991,9 @@
                 <a:solidFill>
                   <a:srgbClr val="222222"/>
                 </a:solidFill>
-                <a:latin typeface="MS Gothic"/>
-                <a:ea typeface="MS Gothic"/>
-                <a:cs typeface="MS Gothic"/>
+                <a:latin typeface="Consolas"/>
+                <a:ea typeface="BIZ UDGothic"/>
+                <a:cs typeface="BIZ UDGothic"/>
               </a:rPr>
               <a:t>        print("赤(歩行者OK)")</a:t>
             </a:r>
@@ -25009,9 +25009,9 @@
                 <a:solidFill>
                   <a:srgbClr val="222222"/>
                 </a:solidFill>
-                <a:latin typeface="MS Gothic"/>
-                <a:ea typeface="MS Gothic"/>
-                <a:cs typeface="MS Gothic"/>
+                <a:latin typeface="Consolas"/>
+                <a:ea typeface="BIZ UDGothic"/>
+                <a:cs typeface="BIZ UDGothic"/>
               </a:rPr>
               <a:t>        time.sleep_ms(5000)        </a:t>
             </a:r>
@@ -25020,9 +25020,9 @@
                 <a:solidFill>
                   <a:srgbClr val="2E7D32"/>
                 </a:solidFill>
-                <a:latin typeface="MS Gothic"/>
-                <a:ea typeface="MS Gothic"/>
-                <a:cs typeface="MS Gothic"/>
+                <a:latin typeface="Consolas"/>
+                <a:ea typeface="BIZ UDGothic"/>
+                <a:cs typeface="BIZ UDGothic"/>
               </a:rPr>
               <a:t># 赤は5秒</a:t>
             </a:r>
@@ -25300,9 +25300,9 @@
                 <a:solidFill>
                   <a:srgbClr val="222222"/>
                 </a:solidFill>
-                <a:latin typeface="MS Gothic"/>
-                <a:ea typeface="MS Gothic"/>
-                <a:cs typeface="MS Gothic"/>
+                <a:latin typeface="Consolas"/>
+                <a:ea typeface="BIZ UDGothic"/>
+                <a:cs typeface="BIZ UDGothic"/>
               </a:rPr>
               <a:t>        </a:t>
             </a:r>
@@ -25311,9 +25311,9 @@
                 <a:solidFill>
                   <a:srgbClr val="2E7D32"/>
                 </a:solidFill>
-                <a:latin typeface="MS Gothic"/>
-                <a:ea typeface="MS Gothic"/>
-                <a:cs typeface="MS Gothic"/>
+                <a:latin typeface="Consolas"/>
+                <a:ea typeface="BIZ UDGothic"/>
+                <a:cs typeface="BIZ UDGothic"/>
               </a:rPr>
               <a:t># 赤 → 緑</a:t>
             </a:r>
@@ -25329,9 +25329,9 @@
                 <a:solidFill>
                   <a:srgbClr val="222222"/>
                 </a:solidFill>
-                <a:latin typeface="MS Gothic"/>
-                <a:ea typeface="MS Gothic"/>
-                <a:cs typeface="MS Gothic"/>
+                <a:latin typeface="Consolas"/>
+                <a:ea typeface="BIZ UDGothic"/>
+                <a:cs typeface="BIZ UDGothic"/>
               </a:rPr>
               <a:t>        red.value(0)</a:t>
             </a:r>
@@ -25347,9 +25347,9 @@
                 <a:solidFill>
                   <a:srgbClr val="222222"/>
                 </a:solidFill>
-                <a:latin typeface="MS Gothic"/>
-                <a:ea typeface="MS Gothic"/>
-                <a:cs typeface="MS Gothic"/>
+                <a:latin typeface="Consolas"/>
+                <a:ea typeface="BIZ UDGothic"/>
+                <a:cs typeface="BIZ UDGothic"/>
               </a:rPr>
               <a:t>        green.value(1)</a:t>
             </a:r>
@@ -25365,9 +25365,9 @@
                 <a:solidFill>
                   <a:srgbClr val="222222"/>
                 </a:solidFill>
-                <a:latin typeface="MS Gothic"/>
-                <a:ea typeface="MS Gothic"/>
-                <a:cs typeface="MS Gothic"/>
+                <a:latin typeface="Consolas"/>
+                <a:ea typeface="BIZ UDGothic"/>
+                <a:cs typeface="BIZ UDGothic"/>
               </a:rPr>
               <a:t>        print("緑に復帰")</a:t>
             </a:r>
@@ -25383,9 +25383,9 @@
                 <a:solidFill>
                   <a:srgbClr val="222222"/>
                 </a:solidFill>
-                <a:latin typeface="MS Gothic"/>
-                <a:ea typeface="MS Gothic"/>
-                <a:cs typeface="MS Gothic"/>
+                <a:latin typeface="Consolas"/>
+                <a:ea typeface="BIZ UDGothic"/>
+                <a:cs typeface="BIZ UDGothic"/>
               </a:rPr>
               <a:t> </a:t>
             </a:r>
@@ -25401,9 +25401,9 @@
                 <a:solidFill>
                   <a:srgbClr val="222222"/>
                 </a:solidFill>
-                <a:latin typeface="MS Gothic"/>
-                <a:ea typeface="MS Gothic"/>
-                <a:cs typeface="MS Gothic"/>
+                <a:latin typeface="Consolas"/>
+                <a:ea typeface="BIZ UDGothic"/>
+                <a:cs typeface="BIZ UDGothic"/>
               </a:rPr>
               <a:t>        </a:t>
             </a:r>
@@ -25412,9 +25412,9 @@
                 <a:solidFill>
                   <a:srgbClr val="2E7D32"/>
                 </a:solidFill>
-                <a:latin typeface="MS Gothic"/>
-                <a:ea typeface="MS Gothic"/>
-                <a:cs typeface="MS Gothic"/>
+                <a:latin typeface="Consolas"/>
+                <a:ea typeface="BIZ UDGothic"/>
+                <a:cs typeface="BIZ UDGothic"/>
               </a:rPr>
               <a:t># 黄・赤の間に押されていても、割り込みで目印が立っている</a:t>
             </a:r>
@@ -25430,9 +25430,9 @@
                 <a:solidFill>
                   <a:srgbClr val="222222"/>
                 </a:solidFill>
-                <a:latin typeface="MS Gothic"/>
-                <a:ea typeface="MS Gothic"/>
-                <a:cs typeface="MS Gothic"/>
+                <a:latin typeface="Consolas"/>
+                <a:ea typeface="BIZ UDGothic"/>
+                <a:cs typeface="BIZ UDGothic"/>
               </a:rPr>
               <a:t>        </a:t>
             </a:r>
@@ -25441,9 +25441,9 @@
                 <a:solidFill>
                   <a:srgbClr val="2E7D32"/>
                 </a:solidFill>
-                <a:latin typeface="MS Gothic"/>
-                <a:ea typeface="MS Gothic"/>
-                <a:cs typeface="MS Gothic"/>
+                <a:latin typeface="Consolas"/>
+                <a:ea typeface="BIZ UDGothic"/>
+                <a:cs typeface="BIZ UDGothic"/>
               </a:rPr>
               <a:t># ここで False に戻すと「その押下は無視」</a:t>
             </a:r>
@@ -25459,9 +25459,9 @@
                 <a:solidFill>
                   <a:srgbClr val="222222"/>
                 </a:solidFill>
-                <a:latin typeface="MS Gothic"/>
-                <a:ea typeface="MS Gothic"/>
-                <a:cs typeface="MS Gothic"/>
+                <a:latin typeface="Consolas"/>
+                <a:ea typeface="BIZ UDGothic"/>
+                <a:cs typeface="BIZ UDGothic"/>
               </a:rPr>
               <a:t>        </a:t>
             </a:r>
@@ -25470,9 +25470,9 @@
                 <a:solidFill>
                   <a:srgbClr val="2E7D32"/>
                 </a:solidFill>
-                <a:latin typeface="MS Gothic"/>
-                <a:ea typeface="MS Gothic"/>
-                <a:cs typeface="MS Gothic"/>
+                <a:latin typeface="Consolas"/>
+                <a:ea typeface="BIZ UDGothic"/>
+                <a:cs typeface="BIZ UDGothic"/>
               </a:rPr>
               <a:t># この行を消すと「予約」として次のサイクルが始まる</a:t>
             </a:r>
@@ -25488,9 +25488,9 @@
                 <a:solidFill>
                   <a:srgbClr val="222222"/>
                 </a:solidFill>
-                <a:latin typeface="MS Gothic"/>
-                <a:ea typeface="MS Gothic"/>
-                <a:cs typeface="MS Gothic"/>
+                <a:latin typeface="Consolas"/>
+                <a:ea typeface="BIZ UDGothic"/>
+                <a:cs typeface="BIZ UDGothic"/>
               </a:rPr>
               <a:t>        pressed = False</a:t>
             </a:r>
@@ -25506,9 +25506,9 @@
                 <a:solidFill>
                   <a:srgbClr val="222222"/>
                 </a:solidFill>
-                <a:latin typeface="MS Gothic"/>
-                <a:ea typeface="MS Gothic"/>
-                <a:cs typeface="MS Gothic"/>
+                <a:latin typeface="Consolas"/>
+                <a:ea typeface="BIZ UDGothic"/>
+                <a:cs typeface="BIZ UDGothic"/>
               </a:rPr>
               <a:t> </a:t>
             </a:r>
@@ -25524,9 +25524,9 @@
                 <a:solidFill>
                   <a:srgbClr val="222222"/>
                 </a:solidFill>
-                <a:latin typeface="MS Gothic"/>
-                <a:ea typeface="MS Gothic"/>
-                <a:cs typeface="MS Gothic"/>
+                <a:latin typeface="Consolas"/>
+                <a:ea typeface="BIZ UDGothic"/>
+                <a:cs typeface="BIZ UDGothic"/>
               </a:rPr>
               <a:t>    time.sleep_ms(50)              </a:t>
             </a:r>
@@ -25535,9 +25535,9 @@
                 <a:solidFill>
                   <a:srgbClr val="2E7D32"/>
                 </a:solidFill>
-                <a:latin typeface="MS Gothic"/>
-                <a:ea typeface="MS Gothic"/>
-                <a:cs typeface="MS Gothic"/>
+                <a:latin typeface="Consolas"/>
+                <a:ea typeface="BIZ UDGothic"/>
+                <a:cs typeface="BIZ UDGothic"/>
               </a:rPr>
               <a:t># 0.05秒ごとに目印を確認</a:t>
             </a:r>
@@ -25739,9 +25739,9 @@
                 <a:solidFill>
                   <a:srgbClr val="C62828"/>
                 </a:solidFill>
-                <a:latin typeface="MS Gothic"/>
-                <a:ea typeface="MS Gothic"/>
-                <a:cs typeface="MS Gothic"/>
+                <a:latin typeface="Consolas"/>
+                <a:ea typeface="BIZ UDGothic"/>
+                <a:cs typeface="BIZ UDGothic"/>
               </a:rPr>
               <a:t>global pressed</a:t>
             </a:r>
@@ -26129,9 +26129,9 @@
                 <a:solidFill>
                   <a:srgbClr val="C62828"/>
                 </a:solidFill>
-                <a:latin typeface="MS Gothic"/>
-                <a:ea typeface="MS Gothic"/>
-                <a:cs typeface="MS Gothic"/>
+                <a:latin typeface="Consolas"/>
+                <a:ea typeface="BIZ UDGothic"/>
+                <a:cs typeface="BIZ UDGothic"/>
               </a:rPr>
               <a:t>pressed = False</a:t>
             </a:r>
@@ -27388,9 +27388,9 @@
                 <a:solidFill>
                   <a:srgbClr val="2E7D32"/>
                 </a:solidFill>
-                <a:latin typeface="MS Gothic"/>
-                <a:ea typeface="MS Gothic"/>
-                <a:cs typeface="MS Gothic"/>
+                <a:latin typeface="Consolas"/>
+                <a:ea typeface="BIZ UDGothic"/>
+                <a:cs typeface="BIZ UDGothic"/>
               </a:rPr>
               <a:t># ---- 必要な道具を読み込む ----</a:t>
             </a:r>
@@ -27406,9 +27406,9 @@
                 <a:solidFill>
                   <a:srgbClr val="222222"/>
                 </a:solidFill>
-                <a:latin typeface="MS Gothic"/>
-                <a:ea typeface="MS Gothic"/>
-                <a:cs typeface="MS Gothic"/>
+                <a:latin typeface="Consolas"/>
+                <a:ea typeface="BIZ UDGothic"/>
+                <a:cs typeface="BIZ UDGothic"/>
               </a:rPr>
               <a:t>from machine import Pin</a:t>
             </a:r>
@@ -27424,9 +27424,9 @@
                 <a:solidFill>
                   <a:srgbClr val="222222"/>
                 </a:solidFill>
-                <a:latin typeface="MS Gothic"/>
-                <a:ea typeface="MS Gothic"/>
-                <a:cs typeface="MS Gothic"/>
+                <a:latin typeface="Consolas"/>
+                <a:ea typeface="BIZ UDGothic"/>
+                <a:cs typeface="BIZ UDGothic"/>
               </a:rPr>
               <a:t>import time</a:t>
             </a:r>
@@ -27442,9 +27442,9 @@
                 <a:solidFill>
                   <a:srgbClr val="222222"/>
                 </a:solidFill>
-                <a:latin typeface="MS Gothic"/>
-                <a:ea typeface="MS Gothic"/>
-                <a:cs typeface="MS Gothic"/>
+                <a:latin typeface="Consolas"/>
+                <a:ea typeface="BIZ UDGothic"/>
+                <a:cs typeface="BIZ UDGothic"/>
               </a:rPr>
               <a:t> </a:t>
             </a:r>
@@ -27460,9 +27460,9 @@
                 <a:solidFill>
                   <a:srgbClr val="2E7D32"/>
                 </a:solidFill>
-                <a:latin typeface="MS Gothic"/>
-                <a:ea typeface="MS Gothic"/>
-                <a:cs typeface="MS Gothic"/>
+                <a:latin typeface="Consolas"/>
+                <a:ea typeface="BIZ UDGothic"/>
+                <a:cs typeface="BIZ UDGothic"/>
               </a:rPr>
               <a:t># ---- ピンの設定 ----</a:t>
             </a:r>
@@ -27478,9 +27478,9 @@
                 <a:solidFill>
                   <a:srgbClr val="2E7D32"/>
                 </a:solidFill>
-                <a:latin typeface="MS Gothic"/>
-                <a:ea typeface="MS Gothic"/>
-                <a:cs typeface="MS Gothic"/>
+                <a:latin typeface="Consolas"/>
+                <a:ea typeface="BIZ UDGothic"/>
+                <a:cs typeface="BIZ UDGothic"/>
               </a:rPr>
               <a:t># GP15 を人感センサーの入力にする</a:t>
             </a:r>
@@ -27496,9 +27496,9 @@
                 <a:solidFill>
                   <a:srgbClr val="2E7D32"/>
                 </a:solidFill>
-                <a:latin typeface="MS Gothic"/>
-                <a:ea typeface="MS Gothic"/>
-                <a:cs typeface="MS Gothic"/>
+                <a:latin typeface="Consolas"/>
+                <a:ea typeface="BIZ UDGothic"/>
+                <a:cs typeface="BIZ UDGothic"/>
               </a:rPr>
               <a:t># PULL_DOWN:何もつながっていないときは 0(LOW)に固定する</a:t>
             </a:r>
@@ -27514,9 +27514,9 @@
                 <a:solidFill>
                   <a:srgbClr val="222222"/>
                 </a:solidFill>
-                <a:latin typeface="MS Gothic"/>
-                <a:ea typeface="MS Gothic"/>
-                <a:cs typeface="MS Gothic"/>
+                <a:latin typeface="Consolas"/>
+                <a:ea typeface="BIZ UDGothic"/>
+                <a:cs typeface="BIZ UDGothic"/>
               </a:rPr>
               <a:t>pir = Pin(15, Pin.IN, Pin.PULL_DOWN)</a:t>
             </a:r>
@@ -27532,9 +27532,9 @@
                 <a:solidFill>
                   <a:srgbClr val="222222"/>
                 </a:solidFill>
-                <a:latin typeface="MS Gothic"/>
-                <a:ea typeface="MS Gothic"/>
-                <a:cs typeface="MS Gothic"/>
+                <a:latin typeface="Consolas"/>
+                <a:ea typeface="BIZ UDGothic"/>
+                <a:cs typeface="BIZ UDGothic"/>
               </a:rPr>
               <a:t> </a:t>
             </a:r>
@@ -27550,9 +27550,9 @@
                 <a:solidFill>
                   <a:srgbClr val="2E7D32"/>
                 </a:solidFill>
-                <a:latin typeface="MS Gothic"/>
-                <a:ea typeface="MS Gothic"/>
-                <a:cs typeface="MS Gothic"/>
+                <a:latin typeface="Consolas"/>
+                <a:ea typeface="BIZ UDGothic"/>
+                <a:cs typeface="BIZ UDGothic"/>
               </a:rPr>
               <a:t># Pico 本体に付いているLEDを出力にする(番号ではなく "LED" と名前で指定する)</a:t>
             </a:r>
@@ -27568,9 +27568,9 @@
                 <a:solidFill>
                   <a:srgbClr val="222222"/>
                 </a:solidFill>
-                <a:latin typeface="MS Gothic"/>
-                <a:ea typeface="MS Gothic"/>
-                <a:cs typeface="MS Gothic"/>
+                <a:latin typeface="Consolas"/>
+                <a:ea typeface="BIZ UDGothic"/>
+                <a:cs typeface="BIZ UDGothic"/>
               </a:rPr>
               <a:t>led = Pin("LED", Pin.OUT)</a:t>
             </a:r>
@@ -27586,9 +27586,9 @@
                 <a:solidFill>
                   <a:srgbClr val="222222"/>
                 </a:solidFill>
-                <a:latin typeface="MS Gothic"/>
-                <a:ea typeface="MS Gothic"/>
-                <a:cs typeface="MS Gothic"/>
+                <a:latin typeface="Consolas"/>
+                <a:ea typeface="BIZ UDGothic"/>
+                <a:cs typeface="BIZ UDGothic"/>
               </a:rPr>
               <a:t> </a:t>
             </a:r>
@@ -27604,9 +27604,9 @@
                 <a:solidFill>
                   <a:srgbClr val="2E7D32"/>
                 </a:solidFill>
-                <a:latin typeface="MS Gothic"/>
-                <a:ea typeface="MS Gothic"/>
-                <a:cs typeface="MS Gothic"/>
+                <a:latin typeface="Consolas"/>
+                <a:ea typeface="BIZ UDGothic"/>
+                <a:cs typeface="BIZ UDGothic"/>
               </a:rPr>
               <a:t># ---- ウォームアップ ----</a:t>
             </a:r>
@@ -27622,9 +27622,9 @@
                 <a:solidFill>
                   <a:srgbClr val="2E7D32"/>
                 </a:solidFill>
-                <a:latin typeface="MS Gothic"/>
-                <a:ea typeface="MS Gothic"/>
-                <a:cs typeface="MS Gothic"/>
+                <a:latin typeface="Consolas"/>
+                <a:ea typeface="BIZ UDGothic"/>
+                <a:cs typeface="BIZ UDGothic"/>
               </a:rPr>
               <a:t># 電源を入れてすぐはセンサーが不安定なので30秒待つ</a:t>
             </a:r>
@@ -27640,9 +27640,9 @@
                 <a:solidFill>
                   <a:srgbClr val="222222"/>
                 </a:solidFill>
-                <a:latin typeface="MS Gothic"/>
-                <a:ea typeface="MS Gothic"/>
-                <a:cs typeface="MS Gothic"/>
+                <a:latin typeface="Consolas"/>
+                <a:ea typeface="BIZ UDGothic"/>
+                <a:cs typeface="BIZ UDGothic"/>
               </a:rPr>
               <a:t>print("ウォームアップ中...")</a:t>
             </a:r>
@@ -27658,9 +27658,9 @@
                 <a:solidFill>
                   <a:srgbClr val="222222"/>
                 </a:solidFill>
-                <a:latin typeface="MS Gothic"/>
-                <a:ea typeface="MS Gothic"/>
-                <a:cs typeface="MS Gothic"/>
+                <a:latin typeface="Consolas"/>
+                <a:ea typeface="BIZ UDGothic"/>
+                <a:cs typeface="BIZ UDGothic"/>
               </a:rPr>
               <a:t>time.sleep(30)</a:t>
             </a:r>
@@ -27676,9 +27676,9 @@
                 <a:solidFill>
                   <a:srgbClr val="222222"/>
                 </a:solidFill>
-                <a:latin typeface="MS Gothic"/>
-                <a:ea typeface="MS Gothic"/>
-                <a:cs typeface="MS Gothic"/>
+                <a:latin typeface="Consolas"/>
+                <a:ea typeface="BIZ UDGothic"/>
+                <a:cs typeface="BIZ UDGothic"/>
               </a:rPr>
               <a:t>print("開始")</a:t>
             </a:r>
@@ -27694,9 +27694,9 @@
                 <a:solidFill>
                   <a:srgbClr val="222222"/>
                 </a:solidFill>
-                <a:latin typeface="MS Gothic"/>
-                <a:ea typeface="MS Gothic"/>
-                <a:cs typeface="MS Gothic"/>
+                <a:latin typeface="Consolas"/>
+                <a:ea typeface="BIZ UDGothic"/>
+                <a:cs typeface="BIZ UDGothic"/>
               </a:rPr>
               <a:t> </a:t>
             </a:r>
@@ -27712,9 +27712,9 @@
                 <a:solidFill>
                   <a:srgbClr val="2E7D32"/>
                 </a:solidFill>
-                <a:latin typeface="MS Gothic"/>
-                <a:ea typeface="MS Gothic"/>
-                <a:cs typeface="MS Gothic"/>
+                <a:latin typeface="Consolas"/>
+                <a:ea typeface="BIZ UDGothic"/>
+                <a:cs typeface="BIZ UDGothic"/>
               </a:rPr>
               <a:t># ---- 前回の値を覚えておく変数 ----</a:t>
             </a:r>
@@ -27730,9 +27730,9 @@
                 <a:solidFill>
                   <a:srgbClr val="222222"/>
                 </a:solidFill>
-                <a:latin typeface="MS Gothic"/>
-                <a:ea typeface="MS Gothic"/>
-                <a:cs typeface="MS Gothic"/>
+                <a:latin typeface="Consolas"/>
+                <a:ea typeface="BIZ UDGothic"/>
+                <a:cs typeface="BIZ UDGothic"/>
               </a:rPr>
               <a:t>prev = 0   </a:t>
             </a:r>
@@ -27741,9 +27741,9 @@
                 <a:solidFill>
                   <a:srgbClr val="2E7D32"/>
                 </a:solidFill>
-                <a:latin typeface="MS Gothic"/>
-                <a:ea typeface="MS Gothic"/>
-                <a:cs typeface="MS Gothic"/>
+                <a:latin typeface="Consolas"/>
+                <a:ea typeface="BIZ UDGothic"/>
+                <a:cs typeface="BIZ UDGothic"/>
               </a:rPr>
               <a:t># 最初は「検知なし」として始める</a:t>
             </a:r>
@@ -28176,9 +28176,9 @@
                 <a:solidFill>
                   <a:srgbClr val="2E7D32"/>
                 </a:solidFill>
-                <a:latin typeface="MS Gothic"/>
-                <a:ea typeface="MS Gothic"/>
-                <a:cs typeface="MS Gothic"/>
+                <a:latin typeface="Consolas"/>
+                <a:ea typeface="BIZ UDGothic"/>
+                <a:cs typeface="BIZ UDGothic"/>
               </a:rPr>
               <a:t># ---- メインの繰り返し ----</a:t>
             </a:r>
@@ -28194,9 +28194,9 @@
                 <a:solidFill>
                   <a:srgbClr val="222222"/>
                 </a:solidFill>
-                <a:latin typeface="MS Gothic"/>
-                <a:ea typeface="MS Gothic"/>
-                <a:cs typeface="MS Gothic"/>
+                <a:latin typeface="Consolas"/>
+                <a:ea typeface="BIZ UDGothic"/>
+                <a:cs typeface="BIZ UDGothic"/>
               </a:rPr>
               <a:t>while True:</a:t>
             </a:r>
@@ -28212,9 +28212,9 @@
                 <a:solidFill>
                   <a:srgbClr val="222222"/>
                 </a:solidFill>
-                <a:latin typeface="MS Gothic"/>
-                <a:ea typeface="MS Gothic"/>
-                <a:cs typeface="MS Gothic"/>
+                <a:latin typeface="Consolas"/>
+                <a:ea typeface="BIZ UDGothic"/>
+                <a:cs typeface="BIZ UDGothic"/>
               </a:rPr>
               <a:t>    now = pir.value()          </a:t>
             </a:r>
@@ -28223,9 +28223,9 @@
                 <a:solidFill>
                   <a:srgbClr val="2E7D32"/>
                 </a:solidFill>
-                <a:latin typeface="MS Gothic"/>
-                <a:ea typeface="MS Gothic"/>
-                <a:cs typeface="MS Gothic"/>
+                <a:latin typeface="Consolas"/>
+                <a:ea typeface="BIZ UDGothic"/>
+                <a:cs typeface="BIZ UDGothic"/>
               </a:rPr>
               <a:t># 今のセンサーの値(1:検知、0:検知なし)</a:t>
             </a:r>
@@ -28241,9 +28241,9 @@
                 <a:solidFill>
                   <a:srgbClr val="222222"/>
                 </a:solidFill>
-                <a:latin typeface="MS Gothic"/>
-                <a:ea typeface="MS Gothic"/>
-                <a:cs typeface="MS Gothic"/>
+                <a:latin typeface="Consolas"/>
+                <a:ea typeface="BIZ UDGothic"/>
+                <a:cs typeface="BIZ UDGothic"/>
               </a:rPr>
               <a:t> </a:t>
             </a:r>
@@ -28259,9 +28259,9 @@
                 <a:solidFill>
                   <a:srgbClr val="222222"/>
                 </a:solidFill>
-                <a:latin typeface="MS Gothic"/>
-                <a:ea typeface="MS Gothic"/>
-                <a:cs typeface="MS Gothic"/>
+                <a:latin typeface="Consolas"/>
+                <a:ea typeface="BIZ UDGothic"/>
+                <a:cs typeface="BIZ UDGothic"/>
               </a:rPr>
               <a:t>    </a:t>
             </a:r>
@@ -28270,9 +28270,9 @@
                 <a:solidFill>
                   <a:srgbClr val="2E7D32"/>
                 </a:solidFill>
-                <a:latin typeface="MS Gothic"/>
-                <a:ea typeface="MS Gothic"/>
-                <a:cs typeface="MS Gothic"/>
+                <a:latin typeface="Consolas"/>
+                <a:ea typeface="BIZ UDGothic"/>
+                <a:cs typeface="BIZ UDGothic"/>
               </a:rPr>
               <a:t># 前回と値が変わったときだけ表示する</a:t>
             </a:r>
@@ -28288,9 +28288,9 @@
                 <a:solidFill>
                   <a:srgbClr val="222222"/>
                 </a:solidFill>
-                <a:latin typeface="MS Gothic"/>
-                <a:ea typeface="MS Gothic"/>
-                <a:cs typeface="MS Gothic"/>
+                <a:latin typeface="Consolas"/>
+                <a:ea typeface="BIZ UDGothic"/>
+                <a:cs typeface="BIZ UDGothic"/>
               </a:rPr>
               <a:t>    </a:t>
             </a:r>
@@ -28299,9 +28299,9 @@
                 <a:solidFill>
                   <a:srgbClr val="2E7D32"/>
                 </a:solidFill>
-                <a:latin typeface="MS Gothic"/>
-                <a:ea typeface="MS Gothic"/>
-                <a:cs typeface="MS Gothic"/>
+                <a:latin typeface="Consolas"/>
+                <a:ea typeface="BIZ UDGothic"/>
+                <a:cs typeface="BIZ UDGothic"/>
               </a:rPr>
               <a:t># (毎回表示すると Shell が文字だらけになるため)</a:t>
             </a:r>
@@ -28317,9 +28317,9 @@
                 <a:solidFill>
                   <a:srgbClr val="222222"/>
                 </a:solidFill>
-                <a:latin typeface="MS Gothic"/>
-                <a:ea typeface="MS Gothic"/>
-                <a:cs typeface="MS Gothic"/>
+                <a:latin typeface="Consolas"/>
+                <a:ea typeface="BIZ UDGothic"/>
+                <a:cs typeface="BIZ UDGothic"/>
               </a:rPr>
               <a:t>    if now != prev:</a:t>
             </a:r>
@@ -28335,9 +28335,9 @@
                 <a:solidFill>
                   <a:srgbClr val="222222"/>
                 </a:solidFill>
-                <a:latin typeface="MS Gothic"/>
-                <a:ea typeface="MS Gothic"/>
-                <a:cs typeface="MS Gothic"/>
+                <a:latin typeface="Consolas"/>
+                <a:ea typeface="BIZ UDGothic"/>
+                <a:cs typeface="BIZ UDGothic"/>
               </a:rPr>
               <a:t>        if now == 1:</a:t>
             </a:r>
@@ -28353,9 +28353,9 @@
                 <a:solidFill>
                   <a:srgbClr val="222222"/>
                 </a:solidFill>
-                <a:latin typeface="MS Gothic"/>
-                <a:ea typeface="MS Gothic"/>
-                <a:cs typeface="MS Gothic"/>
+                <a:latin typeface="Consolas"/>
+                <a:ea typeface="BIZ UDGothic"/>
+                <a:cs typeface="BIZ UDGothic"/>
               </a:rPr>
               <a:t>            print("検知!")</a:t>
             </a:r>
@@ -28371,9 +28371,9 @@
                 <a:solidFill>
                   <a:srgbClr val="222222"/>
                 </a:solidFill>
-                <a:latin typeface="MS Gothic"/>
-                <a:ea typeface="MS Gothic"/>
-                <a:cs typeface="MS Gothic"/>
+                <a:latin typeface="Consolas"/>
+                <a:ea typeface="BIZ UDGothic"/>
+                <a:cs typeface="BIZ UDGothic"/>
               </a:rPr>
               <a:t>        else:</a:t>
             </a:r>
@@ -28389,9 +28389,9 @@
                 <a:solidFill>
                   <a:srgbClr val="222222"/>
                 </a:solidFill>
-                <a:latin typeface="MS Gothic"/>
-                <a:ea typeface="MS Gothic"/>
-                <a:cs typeface="MS Gothic"/>
+                <a:latin typeface="Consolas"/>
+                <a:ea typeface="BIZ UDGothic"/>
+                <a:cs typeface="BIZ UDGothic"/>
               </a:rPr>
               <a:t>            print("検知なし")</a:t>
             </a:r>
@@ -28407,9 +28407,9 @@
                 <a:solidFill>
                   <a:srgbClr val="222222"/>
                 </a:solidFill>
-                <a:latin typeface="MS Gothic"/>
-                <a:ea typeface="MS Gothic"/>
-                <a:cs typeface="MS Gothic"/>
+                <a:latin typeface="Consolas"/>
+                <a:ea typeface="BIZ UDGothic"/>
+                <a:cs typeface="BIZ UDGothic"/>
               </a:rPr>
               <a:t>        led.value(now)         </a:t>
             </a:r>
@@ -28418,9 +28418,9 @@
                 <a:solidFill>
                   <a:srgbClr val="2E7D32"/>
                 </a:solidFill>
-                <a:latin typeface="MS Gothic"/>
-                <a:ea typeface="MS Gothic"/>
-                <a:cs typeface="MS Gothic"/>
+                <a:latin typeface="Consolas"/>
+                <a:ea typeface="BIZ UDGothic"/>
+                <a:cs typeface="BIZ UDGothic"/>
               </a:rPr>
               <a:t># 検知中は本体LEDを点ける</a:t>
             </a:r>
@@ -28436,9 +28436,9 @@
                 <a:solidFill>
                   <a:srgbClr val="222222"/>
                 </a:solidFill>
-                <a:latin typeface="MS Gothic"/>
-                <a:ea typeface="MS Gothic"/>
-                <a:cs typeface="MS Gothic"/>
+                <a:latin typeface="Consolas"/>
+                <a:ea typeface="BIZ UDGothic"/>
+                <a:cs typeface="BIZ UDGothic"/>
               </a:rPr>
               <a:t>        prev = now             </a:t>
             </a:r>
@@ -28447,9 +28447,9 @@
                 <a:solidFill>
                   <a:srgbClr val="2E7D32"/>
                 </a:solidFill>
-                <a:latin typeface="MS Gothic"/>
-                <a:ea typeface="MS Gothic"/>
-                <a:cs typeface="MS Gothic"/>
+                <a:latin typeface="Consolas"/>
+                <a:ea typeface="BIZ UDGothic"/>
+                <a:cs typeface="BIZ UDGothic"/>
               </a:rPr>
               <a:t># 今の値を「前回の値」として覚える</a:t>
             </a:r>
@@ -28465,9 +28465,9 @@
                 <a:solidFill>
                   <a:srgbClr val="222222"/>
                 </a:solidFill>
-                <a:latin typeface="MS Gothic"/>
-                <a:ea typeface="MS Gothic"/>
-                <a:cs typeface="MS Gothic"/>
+                <a:latin typeface="Consolas"/>
+                <a:ea typeface="BIZ UDGothic"/>
+                <a:cs typeface="BIZ UDGothic"/>
               </a:rPr>
               <a:t> </a:t>
             </a:r>
@@ -28483,9 +28483,9 @@
                 <a:solidFill>
                   <a:srgbClr val="222222"/>
                 </a:solidFill>
-                <a:latin typeface="MS Gothic"/>
-                <a:ea typeface="MS Gothic"/>
-                <a:cs typeface="MS Gothic"/>
+                <a:latin typeface="Consolas"/>
+                <a:ea typeface="BIZ UDGothic"/>
+                <a:cs typeface="BIZ UDGothic"/>
               </a:rPr>
               <a:t>    time.sleep_ms(100)         </a:t>
             </a:r>
@@ -28494,9 +28494,9 @@
                 <a:solidFill>
                   <a:srgbClr val="2E7D32"/>
                 </a:solidFill>
-                <a:latin typeface="MS Gothic"/>
-                <a:ea typeface="MS Gothic"/>
-                <a:cs typeface="MS Gothic"/>
+                <a:latin typeface="Consolas"/>
+                <a:ea typeface="BIZ UDGothic"/>
+                <a:cs typeface="BIZ UDGothic"/>
               </a:rPr>
               <a:t># 0.1秒ごとに確認</a:t>
             </a:r>
@@ -28512,7 +28512,7 @@
         <p:spPr>
           <a:xfrm>
             <a:off x="640080" y="1547368"/>
-            <a:ext cx="1069340" cy="228600"/>
+            <a:ext cx="1167130" cy="228600"/>
           </a:xfrm>
           <a:prstGeom prst="roundRect">
             <a:avLst/>
@@ -28555,8 +28555,8 @@
         </p:nvSpPr>
         <p:spPr>
           <a:xfrm>
-            <a:off x="995680" y="2626868"/>
-            <a:ext cx="1424940" cy="228600"/>
+            <a:off x="1031240" y="2626868"/>
+            <a:ext cx="1558290" cy="228600"/>
           </a:xfrm>
           <a:prstGeom prst="roundRect">
             <a:avLst/>
@@ -28599,8 +28599,8 @@
         </p:nvSpPr>
         <p:spPr>
           <a:xfrm>
-            <a:off x="1351280" y="2842768"/>
-            <a:ext cx="1158240" cy="228600"/>
+            <a:off x="1422400" y="2842768"/>
+            <a:ext cx="1264920" cy="228600"/>
           </a:xfrm>
           <a:prstGeom prst="roundRect">
             <a:avLst/>
@@ -28643,8 +28643,8 @@
         </p:nvSpPr>
         <p:spPr>
           <a:xfrm>
-            <a:off x="1351280" y="3274568"/>
-            <a:ext cx="535939" cy="228600"/>
+            <a:off x="1422400" y="3274568"/>
+            <a:ext cx="580390" cy="228600"/>
           </a:xfrm>
           <a:prstGeom prst="roundRect">
             <a:avLst/>
@@ -29047,9 +29047,9 @@
                           <a:solidFill>
                             <a:srgbClr val="C62828"/>
                           </a:solidFill>
-                          <a:latin typeface="MS Gothic"/>
-                          <a:ea typeface="MS Gothic"/>
-                          <a:cs typeface="MS Gothic"/>
+                          <a:latin typeface="Consolas"/>
+                          <a:ea typeface="BIZ UDGothic"/>
+                          <a:cs typeface="BIZ UDGothic"/>
                         </a:rPr>
                         <a:t>Pin.PULL_UP</a:t>
                       </a:r>
@@ -29071,9 +29071,9 @@
                           <a:solidFill>
                             <a:srgbClr val="C62828"/>
                           </a:solidFill>
-                          <a:latin typeface="MS Gothic"/>
-                          <a:ea typeface="MS Gothic"/>
-                          <a:cs typeface="MS Gothic"/>
+                          <a:latin typeface="Consolas"/>
+                          <a:ea typeface="BIZ UDGothic"/>
+                          <a:cs typeface="BIZ UDGothic"/>
                         </a:rPr>
                         <a:t>Pin.PULL_DOWN</a:t>
                       </a:r>
@@ -29133,9 +29133,9 @@
                 <a:solidFill>
                   <a:srgbClr val="C62828"/>
                 </a:solidFill>
-                <a:latin typeface="MS Gothic"/>
-                <a:ea typeface="MS Gothic"/>
-                <a:cs typeface="MS Gothic"/>
+                <a:latin typeface="Consolas"/>
+                <a:ea typeface="BIZ UDGothic"/>
+                <a:cs typeface="BIZ UDGothic"/>
               </a:rPr>
               <a:t>prev</a:t>
             </a:r>
@@ -29155,9 +29155,9 @@
                 <a:solidFill>
                   <a:srgbClr val="C62828"/>
                 </a:solidFill>
-                <a:latin typeface="MS Gothic"/>
-                <a:ea typeface="MS Gothic"/>
-                <a:cs typeface="MS Gothic"/>
+                <a:latin typeface="Consolas"/>
+                <a:ea typeface="BIZ UDGothic"/>
+                <a:cs typeface="BIZ UDGothic"/>
               </a:rPr>
               <a:t>now</a:t>
             </a:r>
@@ -30104,9 +30104,9 @@
                 <a:solidFill>
                   <a:srgbClr val="C62828"/>
                 </a:solidFill>
-                <a:latin typeface="MS Gothic"/>
-                <a:ea typeface="MS Gothic"/>
-                <a:cs typeface="MS Gothic"/>
+                <a:latin typeface="Consolas"/>
+                <a:ea typeface="BIZ UDGothic"/>
+                <a:cs typeface="BIZ UDGothic"/>
               </a:rPr>
               <a:t>&gt;&gt;&gt;</a:t>
             </a:r>
@@ -30331,9 +30331,9 @@
                           <a:solidFill>
                             <a:srgbClr val="C62828"/>
                           </a:solidFill>
-                          <a:latin typeface="MS Gothic"/>
-                          <a:ea typeface="MS Gothic"/>
-                          <a:cs typeface="MS Gothic"/>
+                          <a:latin typeface="Consolas"/>
+                          <a:ea typeface="BIZ UDGothic"/>
+                          <a:cs typeface="BIZ UDGothic"/>
                         </a:rPr>
                         <a:t>print</a:t>
                       </a:r>
@@ -31411,9 +31411,9 @@
                 <a:solidFill>
                   <a:srgbClr val="C62828"/>
                 </a:solidFill>
-                <a:latin typeface="MS Gothic"/>
-                <a:ea typeface="MS Gothic"/>
-                <a:cs typeface="MS Gothic"/>
+                <a:latin typeface="Consolas"/>
+                <a:ea typeface="BIZ UDGothic"/>
+                <a:cs typeface="BIZ UDGothic"/>
               </a:rPr>
               <a:t>t / 58</a:t>
             </a:r>
@@ -32910,9 +32910,9 @@
                 <a:solidFill>
                   <a:srgbClr val="222222"/>
                 </a:solidFill>
-                <a:latin typeface="MS Gothic"/>
-                <a:ea typeface="MS Gothic"/>
-                <a:cs typeface="MS Gothic"/>
+                <a:latin typeface="Consolas"/>
+                <a:ea typeface="BIZ UDGothic"/>
+                <a:cs typeface="BIZ UDGothic"/>
               </a:rPr>
               <a:t>Echo ──[1kΩ]──┬── GP11</a:t>
             </a:r>
@@ -32928,9 +32928,9 @@
                 <a:solidFill>
                   <a:srgbClr val="222222"/>
                 </a:solidFill>
-                <a:latin typeface="MS Gothic"/>
-                <a:ea typeface="MS Gothic"/>
-                <a:cs typeface="MS Gothic"/>
+                <a:latin typeface="Consolas"/>
+                <a:ea typeface="BIZ UDGothic"/>
+                <a:cs typeface="BIZ UDGothic"/>
               </a:rPr>
               <a:t>              │</a:t>
             </a:r>
@@ -32946,9 +32946,9 @@
                 <a:solidFill>
                   <a:srgbClr val="222222"/>
                 </a:solidFill>
-                <a:latin typeface="MS Gothic"/>
-                <a:ea typeface="MS Gothic"/>
-                <a:cs typeface="MS Gothic"/>
+                <a:latin typeface="Consolas"/>
+                <a:ea typeface="BIZ UDGothic"/>
+                <a:cs typeface="BIZ UDGothic"/>
               </a:rPr>
               <a:t>            [2kΩ]</a:t>
             </a:r>
@@ -32964,9 +32964,9 @@
                 <a:solidFill>
                   <a:srgbClr val="222222"/>
                 </a:solidFill>
-                <a:latin typeface="MS Gothic"/>
-                <a:ea typeface="MS Gothic"/>
-                <a:cs typeface="MS Gothic"/>
+                <a:latin typeface="Consolas"/>
+                <a:ea typeface="BIZ UDGothic"/>
+                <a:cs typeface="BIZ UDGothic"/>
               </a:rPr>
               <a:t>              │</a:t>
             </a:r>
@@ -32982,9 +32982,9 @@
                 <a:solidFill>
                   <a:srgbClr val="222222"/>
                 </a:solidFill>
-                <a:latin typeface="MS Gothic"/>
-                <a:ea typeface="MS Gothic"/>
-                <a:cs typeface="MS Gothic"/>
+                <a:latin typeface="Consolas"/>
+                <a:ea typeface="BIZ UDGothic"/>
+                <a:cs typeface="BIZ UDGothic"/>
               </a:rPr>
               <a:t>             GND</a:t>
             </a:r>
@@ -34541,9 +34541,9 @@
                 <a:solidFill>
                   <a:srgbClr val="2E7D32"/>
                 </a:solidFill>
-                <a:latin typeface="MS Gothic"/>
-                <a:ea typeface="MS Gothic"/>
-                <a:cs typeface="MS Gothic"/>
+                <a:latin typeface="Consolas"/>
+                <a:ea typeface="BIZ UDGothic"/>
+                <a:cs typeface="BIZ UDGothic"/>
               </a:rPr>
               <a:t># ---- 必要な道具を読み込む ----</a:t>
             </a:r>
@@ -34559,9 +34559,9 @@
                 <a:solidFill>
                   <a:srgbClr val="2E7D32"/>
                 </a:solidFill>
-                <a:latin typeface="MS Gothic"/>
-                <a:ea typeface="MS Gothic"/>
-                <a:cs typeface="MS Gothic"/>
+                <a:latin typeface="Consolas"/>
+                <a:ea typeface="BIZ UDGothic"/>
+                <a:cs typeface="BIZ UDGothic"/>
               </a:rPr>
               <a:t># time_pulse_us:ピンが HIGH になっている時間を μs(100万分の1秒)単位で測る道具</a:t>
             </a:r>
@@ -34577,9 +34577,9 @@
                 <a:solidFill>
                   <a:srgbClr val="222222"/>
                 </a:solidFill>
-                <a:latin typeface="MS Gothic"/>
-                <a:ea typeface="MS Gothic"/>
-                <a:cs typeface="MS Gothic"/>
+                <a:latin typeface="Consolas"/>
+                <a:ea typeface="BIZ UDGothic"/>
+                <a:cs typeface="BIZ UDGothic"/>
               </a:rPr>
               <a:t>from machine import Pin, time_pulse_us</a:t>
             </a:r>
@@ -34595,9 +34595,9 @@
                 <a:solidFill>
                   <a:srgbClr val="222222"/>
                 </a:solidFill>
-                <a:latin typeface="MS Gothic"/>
-                <a:ea typeface="MS Gothic"/>
-                <a:cs typeface="MS Gothic"/>
+                <a:latin typeface="Consolas"/>
+                <a:ea typeface="BIZ UDGothic"/>
+                <a:cs typeface="BIZ UDGothic"/>
               </a:rPr>
               <a:t>import time</a:t>
             </a:r>
@@ -34613,9 +34613,9 @@
                 <a:solidFill>
                   <a:srgbClr val="222222"/>
                 </a:solidFill>
-                <a:latin typeface="MS Gothic"/>
-                <a:ea typeface="MS Gothic"/>
-                <a:cs typeface="MS Gothic"/>
+                <a:latin typeface="Consolas"/>
+                <a:ea typeface="BIZ UDGothic"/>
+                <a:cs typeface="BIZ UDGothic"/>
               </a:rPr>
               <a:t> </a:t>
             </a:r>
@@ -34631,9 +34631,9 @@
                 <a:solidFill>
                   <a:srgbClr val="2E7D32"/>
                 </a:solidFill>
-                <a:latin typeface="MS Gothic"/>
-                <a:ea typeface="MS Gothic"/>
-                <a:cs typeface="MS Gothic"/>
+                <a:latin typeface="Consolas"/>
+                <a:ea typeface="BIZ UDGothic"/>
+                <a:cs typeface="BIZ UDGothic"/>
               </a:rPr>
               <a:t># ---- ピンの設定 ----</a:t>
             </a:r>
@@ -34649,9 +34649,9 @@
                 <a:solidFill>
                   <a:srgbClr val="222222"/>
                 </a:solidFill>
-                <a:latin typeface="MS Gothic"/>
-                <a:ea typeface="MS Gothic"/>
-                <a:cs typeface="MS Gothic"/>
+                <a:latin typeface="Consolas"/>
+                <a:ea typeface="BIZ UDGothic"/>
+                <a:cs typeface="BIZ UDGothic"/>
               </a:rPr>
               <a:t>trig = Pin(10, Pin.OUT)   </a:t>
             </a:r>
@@ -34660,9 +34660,9 @@
                 <a:solidFill>
                   <a:srgbClr val="2E7D32"/>
                 </a:solidFill>
-                <a:latin typeface="MS Gothic"/>
-                <a:ea typeface="MS Gothic"/>
-                <a:cs typeface="MS Gothic"/>
+                <a:latin typeface="Consolas"/>
+                <a:ea typeface="BIZ UDGothic"/>
+                <a:cs typeface="BIZ UDGothic"/>
               </a:rPr>
               <a:t># GP10:Trig(音を出す合図を送る → 出力)</a:t>
             </a:r>
@@ -34678,9 +34678,9 @@
                 <a:solidFill>
                   <a:srgbClr val="222222"/>
                 </a:solidFill>
-                <a:latin typeface="MS Gothic"/>
-                <a:ea typeface="MS Gothic"/>
-                <a:cs typeface="MS Gothic"/>
+                <a:latin typeface="Consolas"/>
+                <a:ea typeface="BIZ UDGothic"/>
+                <a:cs typeface="BIZ UDGothic"/>
               </a:rPr>
               <a:t>echo = Pin(11, Pin.IN)    </a:t>
             </a:r>
@@ -34689,9 +34689,9 @@
                 <a:solidFill>
                   <a:srgbClr val="2E7D32"/>
                 </a:solidFill>
-                <a:latin typeface="MS Gothic"/>
-                <a:ea typeface="MS Gothic"/>
-                <a:cs typeface="MS Gothic"/>
+                <a:latin typeface="Consolas"/>
+                <a:ea typeface="BIZ UDGothic"/>
+                <a:cs typeface="BIZ UDGothic"/>
               </a:rPr>
               <a:t># GP11:Echo(返ってきた時間を受け取る → 入力)</a:t>
             </a:r>
@@ -34707,9 +34707,9 @@
                 <a:solidFill>
                   <a:srgbClr val="222222"/>
                 </a:solidFill>
-                <a:latin typeface="MS Gothic"/>
-                <a:ea typeface="MS Gothic"/>
-                <a:cs typeface="MS Gothic"/>
+                <a:latin typeface="Consolas"/>
+                <a:ea typeface="BIZ UDGothic"/>
+                <a:cs typeface="BIZ UDGothic"/>
               </a:rPr>
               <a:t>                          </a:t>
             </a:r>
@@ -34718,9 +34718,9 @@
                 <a:solidFill>
                   <a:srgbClr val="2E7D32"/>
                 </a:solidFill>
-                <a:latin typeface="MS Gothic"/>
-                <a:ea typeface="MS Gothic"/>
-                <a:cs typeface="MS Gothic"/>
+                <a:latin typeface="Consolas"/>
+                <a:ea typeface="BIZ UDGothic"/>
+                <a:cs typeface="BIZ UDGothic"/>
               </a:rPr>
               <a:t># ※ Echo は分圧回路(1kΩ・2kΩ)を通してつなぐ</a:t>
             </a:r>
@@ -34736,9 +34736,9 @@
                 <a:solidFill>
                   <a:srgbClr val="222222"/>
                 </a:solidFill>
-                <a:latin typeface="MS Gothic"/>
-                <a:ea typeface="MS Gothic"/>
-                <a:cs typeface="MS Gothic"/>
+                <a:latin typeface="Consolas"/>
+                <a:ea typeface="BIZ UDGothic"/>
+                <a:cs typeface="BIZ UDGothic"/>
               </a:rPr>
               <a:t> </a:t>
             </a:r>
@@ -34754,9 +34754,9 @@
                 <a:solidFill>
                   <a:srgbClr val="2E7D32"/>
                 </a:solidFill>
-                <a:latin typeface="MS Gothic"/>
-                <a:ea typeface="MS Gothic"/>
-                <a:cs typeface="MS Gothic"/>
+                <a:latin typeface="Consolas"/>
+                <a:ea typeface="BIZ UDGothic"/>
+                <a:cs typeface="BIZ UDGothic"/>
               </a:rPr>
               <a:t># ---- 関数:距離を測って cm で返す ----</a:t>
             </a:r>
@@ -34772,9 +34772,9 @@
                 <a:solidFill>
                   <a:srgbClr val="222222"/>
                 </a:solidFill>
-                <a:latin typeface="MS Gothic"/>
-                <a:ea typeface="MS Gothic"/>
-                <a:cs typeface="MS Gothic"/>
+                <a:latin typeface="Consolas"/>
+                <a:ea typeface="BIZ UDGothic"/>
+                <a:cs typeface="BIZ UDGothic"/>
               </a:rPr>
               <a:t>def read_cm():</a:t>
             </a:r>
@@ -34790,9 +34790,9 @@
                 <a:solidFill>
                   <a:srgbClr val="222222"/>
                 </a:solidFill>
-                <a:latin typeface="MS Gothic"/>
-                <a:ea typeface="MS Gothic"/>
-                <a:cs typeface="MS Gothic"/>
+                <a:latin typeface="Consolas"/>
+                <a:ea typeface="BIZ UDGothic"/>
+                <a:cs typeface="BIZ UDGothic"/>
               </a:rPr>
               <a:t>    </a:t>
             </a:r>
@@ -34801,9 +34801,9 @@
                 <a:solidFill>
                   <a:srgbClr val="2E7D32"/>
                 </a:solidFill>
-                <a:latin typeface="MS Gothic"/>
-                <a:ea typeface="MS Gothic"/>
-                <a:cs typeface="MS Gothic"/>
+                <a:latin typeface="Consolas"/>
+                <a:ea typeface="BIZ UDGothic"/>
+                <a:cs typeface="BIZ UDGothic"/>
               </a:rPr>
               <a:t># 合図の前に、いったん 0 にして落ち着かせる</a:t>
             </a:r>
@@ -34819,9 +34819,9 @@
                 <a:solidFill>
                   <a:srgbClr val="222222"/>
                 </a:solidFill>
-                <a:latin typeface="MS Gothic"/>
-                <a:ea typeface="MS Gothic"/>
-                <a:cs typeface="MS Gothic"/>
+                <a:latin typeface="Consolas"/>
+                <a:ea typeface="BIZ UDGothic"/>
+                <a:cs typeface="BIZ UDGothic"/>
               </a:rPr>
               <a:t>    trig.value(0)</a:t>
             </a:r>
@@ -34837,9 +34837,9 @@
                 <a:solidFill>
                   <a:srgbClr val="222222"/>
                 </a:solidFill>
-                <a:latin typeface="MS Gothic"/>
-                <a:ea typeface="MS Gothic"/>
-                <a:cs typeface="MS Gothic"/>
+                <a:latin typeface="Consolas"/>
+                <a:ea typeface="BIZ UDGothic"/>
+                <a:cs typeface="BIZ UDGothic"/>
               </a:rPr>
               <a:t>    time.sleep_us(2)</a:t>
             </a:r>
@@ -34855,9 +34855,9 @@
                 <a:solidFill>
                   <a:srgbClr val="222222"/>
                 </a:solidFill>
-                <a:latin typeface="MS Gothic"/>
-                <a:ea typeface="MS Gothic"/>
-                <a:cs typeface="MS Gothic"/>
+                <a:latin typeface="Consolas"/>
+                <a:ea typeface="BIZ UDGothic"/>
+                <a:cs typeface="BIZ UDGothic"/>
               </a:rPr>
               <a:t> </a:t>
             </a:r>
@@ -34873,9 +34873,9 @@
                 <a:solidFill>
                   <a:srgbClr val="222222"/>
                 </a:solidFill>
-                <a:latin typeface="MS Gothic"/>
-                <a:ea typeface="MS Gothic"/>
-                <a:cs typeface="MS Gothic"/>
+                <a:latin typeface="Consolas"/>
+                <a:ea typeface="BIZ UDGothic"/>
+                <a:cs typeface="BIZ UDGothic"/>
               </a:rPr>
               <a:t>    </a:t>
             </a:r>
@@ -34884,9 +34884,9 @@
                 <a:solidFill>
                   <a:srgbClr val="2E7D32"/>
                 </a:solidFill>
-                <a:latin typeface="MS Gothic"/>
-                <a:ea typeface="MS Gothic"/>
-                <a:cs typeface="MS Gothic"/>
+                <a:latin typeface="Consolas"/>
+                <a:ea typeface="BIZ UDGothic"/>
+                <a:cs typeface="BIZ UDGothic"/>
               </a:rPr>
               <a:t># 10μs だけ 1 にする → センサーが超音波を出す</a:t>
             </a:r>
@@ -34902,9 +34902,9 @@
                 <a:solidFill>
                   <a:srgbClr val="222222"/>
                 </a:solidFill>
-                <a:latin typeface="MS Gothic"/>
-                <a:ea typeface="MS Gothic"/>
-                <a:cs typeface="MS Gothic"/>
+                <a:latin typeface="Consolas"/>
+                <a:ea typeface="BIZ UDGothic"/>
+                <a:cs typeface="BIZ UDGothic"/>
               </a:rPr>
               <a:t>    trig.value(1)</a:t>
             </a:r>
@@ -34920,9 +34920,9 @@
                 <a:solidFill>
                   <a:srgbClr val="222222"/>
                 </a:solidFill>
-                <a:latin typeface="MS Gothic"/>
-                <a:ea typeface="MS Gothic"/>
-                <a:cs typeface="MS Gothic"/>
+                <a:latin typeface="Consolas"/>
+                <a:ea typeface="BIZ UDGothic"/>
+                <a:cs typeface="BIZ UDGothic"/>
               </a:rPr>
               <a:t>    time.sleep_us(10)</a:t>
             </a:r>
@@ -34938,9 +34938,9 @@
                 <a:solidFill>
                   <a:srgbClr val="222222"/>
                 </a:solidFill>
-                <a:latin typeface="MS Gothic"/>
-                <a:ea typeface="MS Gothic"/>
-                <a:cs typeface="MS Gothic"/>
+                <a:latin typeface="Consolas"/>
+                <a:ea typeface="BIZ UDGothic"/>
+                <a:cs typeface="BIZ UDGothic"/>
               </a:rPr>
               <a:t>    trig.value(0)</a:t>
             </a:r>
@@ -34956,7 +34956,7 @@
         <p:spPr>
           <a:xfrm>
             <a:off x="640080" y="3706368"/>
-            <a:ext cx="1336040" cy="228600"/>
+            <a:ext cx="1460500" cy="228600"/>
           </a:xfrm>
           <a:prstGeom prst="roundRect">
             <a:avLst/>
@@ -35360,9 +35360,9 @@
                 <a:solidFill>
                   <a:srgbClr val="222222"/>
                 </a:solidFill>
-                <a:latin typeface="MS Gothic"/>
-                <a:ea typeface="MS Gothic"/>
-                <a:cs typeface="MS Gothic"/>
+                <a:latin typeface="Consolas"/>
+                <a:ea typeface="BIZ UDGothic"/>
+                <a:cs typeface="BIZ UDGothic"/>
               </a:rPr>
               <a:t>    </a:t>
             </a:r>
@@ -35371,9 +35371,9 @@
                 <a:solidFill>
                   <a:srgbClr val="2E7D32"/>
                 </a:solidFill>
-                <a:latin typeface="MS Gothic"/>
-                <a:ea typeface="MS Gothic"/>
-                <a:cs typeface="MS Gothic"/>
+                <a:latin typeface="Consolas"/>
+                <a:ea typeface="BIZ UDGothic"/>
+                <a:cs typeface="BIZ UDGothic"/>
               </a:rPr>
               <a:t># Echo が 1 になっている時間(音が往復した時間)を測る</a:t>
             </a:r>
@@ -35389,9 +35389,9 @@
                 <a:solidFill>
                   <a:srgbClr val="222222"/>
                 </a:solidFill>
-                <a:latin typeface="MS Gothic"/>
-                <a:ea typeface="MS Gothic"/>
-                <a:cs typeface="MS Gothic"/>
+                <a:latin typeface="Consolas"/>
+                <a:ea typeface="BIZ UDGothic"/>
+                <a:cs typeface="BIZ UDGothic"/>
               </a:rPr>
               <a:t>    </a:t>
             </a:r>
@@ -35400,9 +35400,9 @@
                 <a:solidFill>
                   <a:srgbClr val="2E7D32"/>
                 </a:solidFill>
-                <a:latin typeface="MS Gothic"/>
-                <a:ea typeface="MS Gothic"/>
-                <a:cs typeface="MS Gothic"/>
+                <a:latin typeface="Consolas"/>
+                <a:ea typeface="BIZ UDGothic"/>
+                <a:cs typeface="BIZ UDGothic"/>
               </a:rPr>
               <a:t># 30000μs(=30ミリ秒)待っても返ってこなければあきらめる</a:t>
             </a:r>
@@ -35418,9 +35418,9 @@
                 <a:solidFill>
                   <a:srgbClr val="222222"/>
                 </a:solidFill>
-                <a:latin typeface="MS Gothic"/>
-                <a:ea typeface="MS Gothic"/>
-                <a:cs typeface="MS Gothic"/>
+                <a:latin typeface="Consolas"/>
+                <a:ea typeface="BIZ UDGothic"/>
+                <a:cs typeface="BIZ UDGothic"/>
               </a:rPr>
               <a:t>    t = time_pulse_us(echo, 1, 30000)</a:t>
             </a:r>
@@ -35436,9 +35436,9 @@
                 <a:solidFill>
                   <a:srgbClr val="222222"/>
                 </a:solidFill>
-                <a:latin typeface="MS Gothic"/>
-                <a:ea typeface="MS Gothic"/>
-                <a:cs typeface="MS Gothic"/>
+                <a:latin typeface="Consolas"/>
+                <a:ea typeface="BIZ UDGothic"/>
+                <a:cs typeface="BIZ UDGothic"/>
               </a:rPr>
               <a:t> </a:t>
             </a:r>
@@ -35454,9 +35454,9 @@
                 <a:solidFill>
                   <a:srgbClr val="222222"/>
                 </a:solidFill>
-                <a:latin typeface="MS Gothic"/>
-                <a:ea typeface="MS Gothic"/>
-                <a:cs typeface="MS Gothic"/>
+                <a:latin typeface="Consolas"/>
+                <a:ea typeface="BIZ UDGothic"/>
+                <a:cs typeface="BIZ UDGothic"/>
               </a:rPr>
               <a:t>    </a:t>
             </a:r>
@@ -35465,9 +35465,9 @@
                 <a:solidFill>
                   <a:srgbClr val="2E7D32"/>
                 </a:solidFill>
-                <a:latin typeface="MS Gothic"/>
-                <a:ea typeface="MS Gothic"/>
-                <a:cs typeface="MS Gothic"/>
+                <a:latin typeface="Consolas"/>
+                <a:ea typeface="BIZ UDGothic"/>
+                <a:cs typeface="BIZ UDGothic"/>
               </a:rPr>
               <a:t># 測れなかったとき、t はマイナスの値になる</a:t>
             </a:r>
@@ -35483,9 +35483,9 @@
                 <a:solidFill>
                   <a:srgbClr val="222222"/>
                 </a:solidFill>
-                <a:latin typeface="MS Gothic"/>
-                <a:ea typeface="MS Gothic"/>
-                <a:cs typeface="MS Gothic"/>
+                <a:latin typeface="Consolas"/>
+                <a:ea typeface="BIZ UDGothic"/>
+                <a:cs typeface="BIZ UDGothic"/>
               </a:rPr>
               <a:t>    if t &lt; 0:</a:t>
             </a:r>
@@ -35501,9 +35501,9 @@
                 <a:solidFill>
                   <a:srgbClr val="222222"/>
                 </a:solidFill>
-                <a:latin typeface="MS Gothic"/>
-                <a:ea typeface="MS Gothic"/>
-                <a:cs typeface="MS Gothic"/>
+                <a:latin typeface="Consolas"/>
+                <a:ea typeface="BIZ UDGothic"/>
+                <a:cs typeface="BIZ UDGothic"/>
               </a:rPr>
               <a:t>        return None        </a:t>
             </a:r>
@@ -35512,9 +35512,9 @@
                 <a:solidFill>
                   <a:srgbClr val="2E7D32"/>
                 </a:solidFill>
-                <a:latin typeface="MS Gothic"/>
-                <a:ea typeface="MS Gothic"/>
-                <a:cs typeface="MS Gothic"/>
+                <a:latin typeface="Consolas"/>
+                <a:ea typeface="BIZ UDGothic"/>
+                <a:cs typeface="BIZ UDGothic"/>
               </a:rPr>
               <a:t># None =「値なし」を返す</a:t>
             </a:r>
@@ -35530,9 +35530,9 @@
                 <a:solidFill>
                   <a:srgbClr val="222222"/>
                 </a:solidFill>
-                <a:latin typeface="MS Gothic"/>
-                <a:ea typeface="MS Gothic"/>
-                <a:cs typeface="MS Gothic"/>
+                <a:latin typeface="Consolas"/>
+                <a:ea typeface="BIZ UDGothic"/>
+                <a:cs typeface="BIZ UDGothic"/>
               </a:rPr>
               <a:t> </a:t>
             </a:r>
@@ -35548,9 +35548,9 @@
                 <a:solidFill>
                   <a:srgbClr val="222222"/>
                 </a:solidFill>
-                <a:latin typeface="MS Gothic"/>
-                <a:ea typeface="MS Gothic"/>
-                <a:cs typeface="MS Gothic"/>
+                <a:latin typeface="Consolas"/>
+                <a:ea typeface="BIZ UDGothic"/>
+                <a:cs typeface="BIZ UDGothic"/>
               </a:rPr>
               <a:t>    </a:t>
             </a:r>
@@ -35559,9 +35559,9 @@
                 <a:solidFill>
                   <a:srgbClr val="2E7D32"/>
                 </a:solidFill>
-                <a:latin typeface="MS Gothic"/>
-                <a:ea typeface="MS Gothic"/>
-                <a:cs typeface="MS Gothic"/>
+                <a:latin typeface="Consolas"/>
+                <a:ea typeface="BIZ UDGothic"/>
+                <a:cs typeface="BIZ UDGothic"/>
               </a:rPr>
               <a:t># 時間(μs)を距離(cm)に変える</a:t>
             </a:r>
@@ -35577,9 +35577,9 @@
                 <a:solidFill>
                   <a:srgbClr val="222222"/>
                 </a:solidFill>
-                <a:latin typeface="MS Gothic"/>
-                <a:ea typeface="MS Gothic"/>
-                <a:cs typeface="MS Gothic"/>
+                <a:latin typeface="Consolas"/>
+                <a:ea typeface="BIZ UDGothic"/>
+                <a:cs typeface="BIZ UDGothic"/>
               </a:rPr>
               <a:t>    </a:t>
             </a:r>
@@ -35588,9 +35588,9 @@
                 <a:solidFill>
                   <a:srgbClr val="2E7D32"/>
                 </a:solidFill>
-                <a:latin typeface="MS Gothic"/>
-                <a:ea typeface="MS Gothic"/>
-                <a:cs typeface="MS Gothic"/>
+                <a:latin typeface="Consolas"/>
+                <a:ea typeface="BIZ UDGothic"/>
+                <a:cs typeface="BIZ UDGothic"/>
               </a:rPr>
               <a:t># 音速 0.034cm/μs × 時間 ÷ 2(往復なので)≒ 時間 ÷ 58</a:t>
             </a:r>
@@ -35606,9 +35606,9 @@
                 <a:solidFill>
                   <a:srgbClr val="222222"/>
                 </a:solidFill>
-                <a:latin typeface="MS Gothic"/>
-                <a:ea typeface="MS Gothic"/>
-                <a:cs typeface="MS Gothic"/>
+                <a:latin typeface="Consolas"/>
+                <a:ea typeface="BIZ UDGothic"/>
+                <a:cs typeface="BIZ UDGothic"/>
               </a:rPr>
               <a:t>    return t / 58</a:t>
             </a:r>
@@ -35623,8 +35623,8 @@
         </p:nvSpPr>
         <p:spPr>
           <a:xfrm>
-            <a:off x="995680" y="2410968"/>
-            <a:ext cx="891540" cy="228600"/>
+            <a:off x="1031240" y="2410968"/>
+            <a:ext cx="971550" cy="228600"/>
           </a:xfrm>
           <a:prstGeom prst="roundRect">
             <a:avLst/>
@@ -36085,9 +36085,9 @@
                 <a:solidFill>
                   <a:srgbClr val="2E7D32"/>
                 </a:solidFill>
-                <a:latin typeface="MS Gothic"/>
-                <a:ea typeface="MS Gothic"/>
-                <a:cs typeface="MS Gothic"/>
+                <a:latin typeface="Consolas"/>
+                <a:ea typeface="BIZ UDGothic"/>
+                <a:cs typeface="BIZ UDGothic"/>
               </a:rPr>
               <a:t># ---- メインの繰り返し ----</a:t>
             </a:r>
@@ -36103,9 +36103,9 @@
                 <a:solidFill>
                   <a:srgbClr val="222222"/>
                 </a:solidFill>
-                <a:latin typeface="MS Gothic"/>
-                <a:ea typeface="MS Gothic"/>
-                <a:cs typeface="MS Gothic"/>
+                <a:latin typeface="Consolas"/>
+                <a:ea typeface="BIZ UDGothic"/>
+                <a:cs typeface="BIZ UDGothic"/>
               </a:rPr>
               <a:t>while True:</a:t>
             </a:r>
@@ -36121,9 +36121,9 @@
                 <a:solidFill>
                   <a:srgbClr val="222222"/>
                 </a:solidFill>
-                <a:latin typeface="MS Gothic"/>
-                <a:ea typeface="MS Gothic"/>
-                <a:cs typeface="MS Gothic"/>
+                <a:latin typeface="Consolas"/>
+                <a:ea typeface="BIZ UDGothic"/>
+                <a:cs typeface="BIZ UDGothic"/>
               </a:rPr>
               <a:t>    d = read_cm()          </a:t>
             </a:r>
@@ -36132,9 +36132,9 @@
                 <a:solidFill>
                   <a:srgbClr val="2E7D32"/>
                 </a:solidFill>
-                <a:latin typeface="MS Gothic"/>
-                <a:ea typeface="MS Gothic"/>
-                <a:cs typeface="MS Gothic"/>
+                <a:latin typeface="Consolas"/>
+                <a:ea typeface="BIZ UDGothic"/>
+                <a:cs typeface="BIZ UDGothic"/>
               </a:rPr>
               <a:t># 距離を測る</a:t>
             </a:r>
@@ -36150,9 +36150,9 @@
                 <a:solidFill>
                   <a:srgbClr val="222222"/>
                 </a:solidFill>
-                <a:latin typeface="MS Gothic"/>
-                <a:ea typeface="MS Gothic"/>
-                <a:cs typeface="MS Gothic"/>
+                <a:latin typeface="Consolas"/>
+                <a:ea typeface="BIZ UDGothic"/>
+                <a:cs typeface="BIZ UDGothic"/>
               </a:rPr>
               <a:t> </a:t>
             </a:r>
@@ -36168,9 +36168,9 @@
                 <a:solidFill>
                   <a:srgbClr val="222222"/>
                 </a:solidFill>
-                <a:latin typeface="MS Gothic"/>
-                <a:ea typeface="MS Gothic"/>
-                <a:cs typeface="MS Gothic"/>
+                <a:latin typeface="Consolas"/>
+                <a:ea typeface="BIZ UDGothic"/>
+                <a:cs typeface="BIZ UDGothic"/>
               </a:rPr>
               <a:t>    if d is None:</a:t>
             </a:r>
@@ -36186,9 +36186,9 @@
                 <a:solidFill>
                   <a:srgbClr val="222222"/>
                 </a:solidFill>
-                <a:latin typeface="MS Gothic"/>
-                <a:ea typeface="MS Gothic"/>
-                <a:cs typeface="MS Gothic"/>
+                <a:latin typeface="Consolas"/>
+                <a:ea typeface="BIZ UDGothic"/>
+                <a:cs typeface="BIZ UDGothic"/>
               </a:rPr>
               <a:t>        print("測定不可")</a:t>
             </a:r>
@@ -36204,9 +36204,9 @@
                 <a:solidFill>
                   <a:srgbClr val="222222"/>
                 </a:solidFill>
-                <a:latin typeface="MS Gothic"/>
-                <a:ea typeface="MS Gothic"/>
-                <a:cs typeface="MS Gothic"/>
+                <a:latin typeface="Consolas"/>
+                <a:ea typeface="BIZ UDGothic"/>
+                <a:cs typeface="BIZ UDGothic"/>
               </a:rPr>
               <a:t>    else:</a:t>
             </a:r>
@@ -36222,9 +36222,9 @@
                 <a:solidFill>
                   <a:srgbClr val="222222"/>
                 </a:solidFill>
-                <a:latin typeface="MS Gothic"/>
-                <a:ea typeface="MS Gothic"/>
-                <a:cs typeface="MS Gothic"/>
+                <a:latin typeface="Consolas"/>
+                <a:ea typeface="BIZ UDGothic"/>
+                <a:cs typeface="BIZ UDGothic"/>
               </a:rPr>
               <a:t>        </a:t>
             </a:r>
@@ -36233,9 +36233,9 @@
                 <a:solidFill>
                   <a:srgbClr val="2E7D32"/>
                 </a:solidFill>
-                <a:latin typeface="MS Gothic"/>
-                <a:ea typeface="MS Gothic"/>
-                <a:cs typeface="MS Gothic"/>
+                <a:latin typeface="Consolas"/>
+                <a:ea typeface="BIZ UDGothic"/>
+                <a:cs typeface="BIZ UDGothic"/>
               </a:rPr>
               <a:t># {:.1f} は「小数第1位まで表示する」という意味</a:t>
             </a:r>
@@ -36251,9 +36251,9 @@
                 <a:solidFill>
                   <a:srgbClr val="222222"/>
                 </a:solidFill>
-                <a:latin typeface="MS Gothic"/>
-                <a:ea typeface="MS Gothic"/>
-                <a:cs typeface="MS Gothic"/>
+                <a:latin typeface="Consolas"/>
+                <a:ea typeface="BIZ UDGothic"/>
+                <a:cs typeface="BIZ UDGothic"/>
               </a:rPr>
               <a:t>        print("{:.1f} cm".format(d))</a:t>
             </a:r>
@@ -36269,9 +36269,9 @@
                 <a:solidFill>
                   <a:srgbClr val="222222"/>
                 </a:solidFill>
-                <a:latin typeface="MS Gothic"/>
-                <a:ea typeface="MS Gothic"/>
-                <a:cs typeface="MS Gothic"/>
+                <a:latin typeface="Consolas"/>
+                <a:ea typeface="BIZ UDGothic"/>
+                <a:cs typeface="BIZ UDGothic"/>
               </a:rPr>
               <a:t> </a:t>
             </a:r>
@@ -36287,9 +36287,9 @@
                 <a:solidFill>
                   <a:srgbClr val="222222"/>
                 </a:solidFill>
-                <a:latin typeface="MS Gothic"/>
-                <a:ea typeface="MS Gothic"/>
-                <a:cs typeface="MS Gothic"/>
+                <a:latin typeface="Consolas"/>
+                <a:ea typeface="BIZ UDGothic"/>
+                <a:cs typeface="BIZ UDGothic"/>
               </a:rPr>
               <a:t>    time.sleep_ms(200)     </a:t>
             </a:r>
@@ -36298,9 +36298,9 @@
                 <a:solidFill>
                   <a:srgbClr val="2E7D32"/>
                 </a:solidFill>
-                <a:latin typeface="MS Gothic"/>
-                <a:ea typeface="MS Gothic"/>
-                <a:cs typeface="MS Gothic"/>
+                <a:latin typeface="Consolas"/>
+                <a:ea typeface="BIZ UDGothic"/>
+                <a:cs typeface="BIZ UDGothic"/>
               </a:rPr>
               <a:t># 0.2秒ごとに測る</a:t>
             </a:r>
@@ -36316,7 +36316,7 @@
         <p:spPr>
           <a:xfrm>
             <a:off x="640080" y="1547368"/>
-            <a:ext cx="1069340" cy="228600"/>
+            <a:ext cx="1167130" cy="228600"/>
           </a:xfrm>
           <a:prstGeom prst="roundRect">
             <a:avLst/>
@@ -36359,8 +36359,8 @@
         </p:nvSpPr>
         <p:spPr>
           <a:xfrm>
-            <a:off x="995680" y="2195068"/>
-            <a:ext cx="1247140" cy="228600"/>
+            <a:off x="1031240" y="2195068"/>
+            <a:ext cx="1362710" cy="228600"/>
           </a:xfrm>
           <a:prstGeom prst="roundRect">
             <a:avLst/>
@@ -36403,8 +36403,8 @@
         </p:nvSpPr>
         <p:spPr>
           <a:xfrm>
-            <a:off x="995680" y="2626868"/>
-            <a:ext cx="535940" cy="228600"/>
+            <a:off x="1031240" y="2626868"/>
+            <a:ext cx="580389" cy="228600"/>
           </a:xfrm>
           <a:prstGeom prst="roundRect">
             <a:avLst/>
@@ -36724,9 +36724,9 @@
                           <a:solidFill>
                             <a:srgbClr val="C62828"/>
                           </a:solidFill>
-                          <a:latin typeface="MS Gothic"/>
-                          <a:ea typeface="MS Gothic"/>
-                          <a:cs typeface="MS Gothic"/>
+                          <a:latin typeface="Consolas"/>
+                          <a:ea typeface="BIZ UDGothic"/>
+                          <a:cs typeface="BIZ UDGothic"/>
                         </a:rPr>
                         <a:t>time_pulse_us(echo, 1, 30000)</a:t>
                       </a:r>
@@ -36774,9 +36774,9 @@
                           <a:solidFill>
                             <a:srgbClr val="C62828"/>
                           </a:solidFill>
-                          <a:latin typeface="MS Gothic"/>
-                          <a:ea typeface="MS Gothic"/>
-                          <a:cs typeface="MS Gothic"/>
+                          <a:latin typeface="Consolas"/>
+                          <a:ea typeface="BIZ UDGothic"/>
+                          <a:cs typeface="BIZ UDGothic"/>
                         </a:rPr>
                         <a:t>if t &lt; 0: return None</a:t>
                       </a:r>
@@ -36824,9 +36824,9 @@
                           <a:solidFill>
                             <a:srgbClr val="C62828"/>
                           </a:solidFill>
-                          <a:latin typeface="MS Gothic"/>
-                          <a:ea typeface="MS Gothic"/>
-                          <a:cs typeface="MS Gothic"/>
+                          <a:latin typeface="Consolas"/>
+                          <a:ea typeface="BIZ UDGothic"/>
+                          <a:cs typeface="BIZ UDGothic"/>
                         </a:rPr>
                         <a:t>return t / 58</a:t>
                       </a:r>
@@ -37198,9 +37198,9 @@
                 <a:solidFill>
                   <a:srgbClr val="C62828"/>
                 </a:solidFill>
-                <a:latin typeface="MS Gothic"/>
-                <a:ea typeface="MS Gothic"/>
-                <a:cs typeface="MS Gothic"/>
+                <a:latin typeface="Consolas"/>
+                <a:ea typeface="BIZ UDGothic"/>
+                <a:cs typeface="BIZ UDGothic"/>
               </a:rPr>
               <a:t>while</a:t>
             </a:r>
@@ -37220,9 +37220,9 @@
                 <a:solidFill>
                   <a:srgbClr val="C62828"/>
                 </a:solidFill>
-                <a:latin typeface="MS Gothic"/>
-                <a:ea typeface="MS Gothic"/>
-                <a:cs typeface="MS Gothic"/>
+                <a:latin typeface="Consolas"/>
+                <a:ea typeface="BIZ UDGothic"/>
+                <a:cs typeface="BIZ UDGothic"/>
               </a:rPr>
               <a:t>if</a:t>
             </a:r>
@@ -37242,9 +37242,9 @@
                 <a:solidFill>
                   <a:srgbClr val="C62828"/>
                 </a:solidFill>
-                <a:latin typeface="MS Gothic"/>
-                <a:ea typeface="MS Gothic"/>
-                <a:cs typeface="MS Gothic"/>
+                <a:latin typeface="Consolas"/>
+                <a:ea typeface="BIZ UDGothic"/>
+                <a:cs typeface="BIZ UDGothic"/>
               </a:rPr>
               <a:t>for</a:t>
             </a:r>
@@ -38309,9 +38309,9 @@
                 <a:solidFill>
                   <a:srgbClr val="222222"/>
                 </a:solidFill>
-                <a:latin typeface="MS Gothic"/>
-                <a:ea typeface="MS Gothic"/>
-                <a:cs typeface="MS Gothic"/>
+                <a:latin typeface="Consolas"/>
+                <a:ea typeface="BIZ UDGothic"/>
+                <a:cs typeface="BIZ UDGothic"/>
               </a:rPr>
               <a:t>from machine import Pin        </a:t>
             </a:r>
@@ -38320,9 +38320,9 @@
                 <a:solidFill>
                   <a:srgbClr val="2E7D32"/>
                 </a:solidFill>
-                <a:latin typeface="MS Gothic"/>
-                <a:ea typeface="MS Gothic"/>
-                <a:cs typeface="MS Gothic"/>
+                <a:latin typeface="Consolas"/>
+                <a:ea typeface="BIZ UDGothic"/>
+                <a:cs typeface="BIZ UDGothic"/>
               </a:rPr>
               <a:t># Pin:Pico のピンを操作するための道具</a:t>
             </a:r>
@@ -38338,9 +38338,9 @@
                 <a:solidFill>
                   <a:srgbClr val="222222"/>
                 </a:solidFill>
-                <a:latin typeface="MS Gothic"/>
-                <a:ea typeface="MS Gothic"/>
-                <a:cs typeface="MS Gothic"/>
+                <a:latin typeface="Consolas"/>
+                <a:ea typeface="BIZ UDGothic"/>
+                <a:cs typeface="BIZ UDGothic"/>
               </a:rPr>
               <a:t> </a:t>
             </a:r>
@@ -38356,9 +38356,9 @@
                 <a:solidFill>
                   <a:srgbClr val="222222"/>
                 </a:solidFill>
-                <a:latin typeface="MS Gothic"/>
-                <a:ea typeface="MS Gothic"/>
-                <a:cs typeface="MS Gothic"/>
+                <a:latin typeface="Consolas"/>
+                <a:ea typeface="BIZ UDGothic"/>
+                <a:cs typeface="BIZ UDGothic"/>
               </a:rPr>
               <a:t>led = Pin("LED", Pin.OUT)      </a:t>
             </a:r>
@@ -38367,9 +38367,9 @@
                 <a:solidFill>
                   <a:srgbClr val="2E7D32"/>
                 </a:solidFill>
-                <a:latin typeface="MS Gothic"/>
-                <a:ea typeface="MS Gothic"/>
-                <a:cs typeface="MS Gothic"/>
+                <a:latin typeface="Consolas"/>
+                <a:ea typeface="BIZ UDGothic"/>
+                <a:cs typeface="BIZ UDGothic"/>
               </a:rPr>
               <a:t># 本体のLEDを「出力」にする</a:t>
             </a:r>
@@ -38385,9 +38385,9 @@
                 <a:solidFill>
                   <a:srgbClr val="222222"/>
                 </a:solidFill>
-                <a:latin typeface="MS Gothic"/>
-                <a:ea typeface="MS Gothic"/>
-                <a:cs typeface="MS Gothic"/>
+                <a:latin typeface="Consolas"/>
+                <a:ea typeface="BIZ UDGothic"/>
+                <a:cs typeface="BIZ UDGothic"/>
               </a:rPr>
               <a:t>led.value(1)                   </a:t>
             </a:r>
@@ -38396,9 +38396,9 @@
                 <a:solidFill>
                   <a:srgbClr val="2E7D32"/>
                 </a:solidFill>
-                <a:latin typeface="MS Gothic"/>
-                <a:ea typeface="MS Gothic"/>
-                <a:cs typeface="MS Gothic"/>
+                <a:latin typeface="Consolas"/>
+                <a:ea typeface="BIZ UDGothic"/>
+                <a:cs typeface="BIZ UDGothic"/>
               </a:rPr>
               <a:t># 1 = 点灯</a:t>
             </a:r>
@@ -38448,9 +38448,9 @@
                 <a:solidFill>
                   <a:srgbClr val="C62828"/>
                 </a:solidFill>
-                <a:latin typeface="MS Gothic"/>
-                <a:ea typeface="MS Gothic"/>
-                <a:cs typeface="MS Gothic"/>
+                <a:latin typeface="Consolas"/>
+                <a:ea typeface="BIZ UDGothic"/>
+                <a:cs typeface="BIZ UDGothic"/>
               </a:rPr>
               <a:t>Pin("LED", Pin.OUT)</a:t>
             </a:r>
@@ -38510,9 +38510,9 @@
                 <a:solidFill>
                   <a:srgbClr val="C62828"/>
                 </a:solidFill>
-                <a:latin typeface="MS Gothic"/>
-                <a:ea typeface="MS Gothic"/>
-                <a:cs typeface="MS Gothic"/>
+                <a:latin typeface="Consolas"/>
+                <a:ea typeface="BIZ UDGothic"/>
+                <a:cs typeface="BIZ UDGothic"/>
               </a:rPr>
               <a:t>led.value(1)</a:t>
             </a:r>
@@ -38561,9 +38561,9 @@
                 <a:solidFill>
                   <a:srgbClr val="C62828"/>
                 </a:solidFill>
-                <a:latin typeface="MS Gothic"/>
-                <a:ea typeface="MS Gothic"/>
-                <a:cs typeface="MS Gothic"/>
+                <a:latin typeface="Consolas"/>
+                <a:ea typeface="BIZ UDGothic"/>
+                <a:cs typeface="BIZ UDGothic"/>
               </a:rPr>
               <a:t>1</a:t>
             </a:r>
@@ -38583,9 +38583,9 @@
                 <a:solidFill>
                   <a:srgbClr val="C62828"/>
                 </a:solidFill>
-                <a:latin typeface="MS Gothic"/>
-                <a:ea typeface="MS Gothic"/>
-                <a:cs typeface="MS Gothic"/>
+                <a:latin typeface="Consolas"/>
+                <a:ea typeface="BIZ UDGothic"/>
+                <a:cs typeface="BIZ UDGothic"/>
               </a:rPr>
               <a:t>0</a:t>
             </a:r>
@@ -38833,9 +38833,9 @@
                 <a:solidFill>
                   <a:srgbClr val="222222"/>
                 </a:solidFill>
-                <a:latin typeface="MS Gothic"/>
-                <a:ea typeface="MS Gothic"/>
-                <a:cs typeface="MS Gothic"/>
+                <a:latin typeface="Consolas"/>
+                <a:ea typeface="BIZ UDGothic"/>
+                <a:cs typeface="BIZ UDGothic"/>
               </a:rPr>
               <a:t>from machine import Pin        </a:t>
             </a:r>
@@ -38844,9 +38844,9 @@
                 <a:solidFill>
                   <a:srgbClr val="2E7D32"/>
                 </a:solidFill>
-                <a:latin typeface="MS Gothic"/>
-                <a:ea typeface="MS Gothic"/>
-                <a:cs typeface="MS Gothic"/>
+                <a:latin typeface="Consolas"/>
+                <a:ea typeface="BIZ UDGothic"/>
+                <a:cs typeface="BIZ UDGothic"/>
               </a:rPr>
               <a:t># Pin:Pico のピンを操作するための道具</a:t>
             </a:r>
@@ -38862,9 +38862,9 @@
                 <a:solidFill>
                   <a:srgbClr val="222222"/>
                 </a:solidFill>
-                <a:latin typeface="MS Gothic"/>
-                <a:ea typeface="MS Gothic"/>
-                <a:cs typeface="MS Gothic"/>
+                <a:latin typeface="Consolas"/>
+                <a:ea typeface="BIZ UDGothic"/>
+                <a:cs typeface="BIZ UDGothic"/>
               </a:rPr>
               <a:t>import time                    </a:t>
             </a:r>
@@ -38873,9 +38873,9 @@
                 <a:solidFill>
                   <a:srgbClr val="2E7D32"/>
                 </a:solidFill>
-                <a:latin typeface="MS Gothic"/>
-                <a:ea typeface="MS Gothic"/>
-                <a:cs typeface="MS Gothic"/>
+                <a:latin typeface="Consolas"/>
+                <a:ea typeface="BIZ UDGothic"/>
+                <a:cs typeface="BIZ UDGothic"/>
               </a:rPr>
               <a:t># time:待ち時間を作るための道具</a:t>
             </a:r>
@@ -38891,9 +38891,9 @@
                 <a:solidFill>
                   <a:srgbClr val="222222"/>
                 </a:solidFill>
-                <a:latin typeface="MS Gothic"/>
-                <a:ea typeface="MS Gothic"/>
-                <a:cs typeface="MS Gothic"/>
+                <a:latin typeface="Consolas"/>
+                <a:ea typeface="BIZ UDGothic"/>
+                <a:cs typeface="BIZ UDGothic"/>
               </a:rPr>
               <a:t> </a:t>
             </a:r>
@@ -38909,9 +38909,9 @@
                 <a:solidFill>
                   <a:srgbClr val="222222"/>
                 </a:solidFill>
-                <a:latin typeface="MS Gothic"/>
-                <a:ea typeface="MS Gothic"/>
-                <a:cs typeface="MS Gothic"/>
+                <a:latin typeface="Consolas"/>
+                <a:ea typeface="BIZ UDGothic"/>
+                <a:cs typeface="BIZ UDGothic"/>
               </a:rPr>
               <a:t>led = Pin("LED", Pin.OUT)      </a:t>
             </a:r>
@@ -38920,9 +38920,9 @@
                 <a:solidFill>
                   <a:srgbClr val="2E7D32"/>
                 </a:solidFill>
-                <a:latin typeface="MS Gothic"/>
-                <a:ea typeface="MS Gothic"/>
-                <a:cs typeface="MS Gothic"/>
+                <a:latin typeface="Consolas"/>
+                <a:ea typeface="BIZ UDGothic"/>
+                <a:cs typeface="BIZ UDGothic"/>
               </a:rPr>
               <a:t># 本体のLEDを「出力」にする</a:t>
             </a:r>
@@ -38938,9 +38938,9 @@
                 <a:solidFill>
                   <a:srgbClr val="222222"/>
                 </a:solidFill>
-                <a:latin typeface="MS Gothic"/>
-                <a:ea typeface="MS Gothic"/>
-                <a:cs typeface="MS Gothic"/>
+                <a:latin typeface="Consolas"/>
+                <a:ea typeface="BIZ UDGothic"/>
+                <a:cs typeface="BIZ UDGothic"/>
               </a:rPr>
               <a:t>led.value(1)                   </a:t>
             </a:r>
@@ -38949,9 +38949,9 @@
                 <a:solidFill>
                   <a:srgbClr val="2E7D32"/>
                 </a:solidFill>
-                <a:latin typeface="MS Gothic"/>
-                <a:ea typeface="MS Gothic"/>
-                <a:cs typeface="MS Gothic"/>
+                <a:latin typeface="Consolas"/>
+                <a:ea typeface="BIZ UDGothic"/>
+                <a:cs typeface="BIZ UDGothic"/>
               </a:rPr>
               <a:t># 点灯</a:t>
             </a:r>
@@ -38967,9 +38967,9 @@
                 <a:solidFill>
                   <a:srgbClr val="222222"/>
                 </a:solidFill>
-                <a:latin typeface="MS Gothic"/>
-                <a:ea typeface="MS Gothic"/>
-                <a:cs typeface="MS Gothic"/>
+                <a:latin typeface="Consolas"/>
+                <a:ea typeface="BIZ UDGothic"/>
+                <a:cs typeface="BIZ UDGothic"/>
               </a:rPr>
               <a:t>time.sleep(1)                  </a:t>
             </a:r>
@@ -38978,9 +38978,9 @@
                 <a:solidFill>
                   <a:srgbClr val="2E7D32"/>
                 </a:solidFill>
-                <a:latin typeface="MS Gothic"/>
-                <a:ea typeface="MS Gothic"/>
-                <a:cs typeface="MS Gothic"/>
+                <a:latin typeface="Consolas"/>
+                <a:ea typeface="BIZ UDGothic"/>
+                <a:cs typeface="BIZ UDGothic"/>
               </a:rPr>
               <a:t># 1秒待つ</a:t>
             </a:r>
@@ -38996,9 +38996,9 @@
                 <a:solidFill>
                   <a:srgbClr val="222222"/>
                 </a:solidFill>
-                <a:latin typeface="MS Gothic"/>
-                <a:ea typeface="MS Gothic"/>
-                <a:cs typeface="MS Gothic"/>
+                <a:latin typeface="Consolas"/>
+                <a:ea typeface="BIZ UDGothic"/>
+                <a:cs typeface="BIZ UDGothic"/>
               </a:rPr>
               <a:t>led.value(0)                   </a:t>
             </a:r>
@@ -39007,9 +39007,9 @@
                 <a:solidFill>
                   <a:srgbClr val="2E7D32"/>
                 </a:solidFill>
-                <a:latin typeface="MS Gothic"/>
-                <a:ea typeface="MS Gothic"/>
-                <a:cs typeface="MS Gothic"/>
+                <a:latin typeface="Consolas"/>
+                <a:ea typeface="BIZ UDGothic"/>
+                <a:cs typeface="BIZ UDGothic"/>
               </a:rPr>
               <a:t># 0 = 消灯</a:t>
             </a:r>
@@ -39059,9 +39059,9 @@
                 <a:solidFill>
                   <a:srgbClr val="C62828"/>
                 </a:solidFill>
-                <a:latin typeface="MS Gothic"/>
-                <a:ea typeface="MS Gothic"/>
-                <a:cs typeface="MS Gothic"/>
+                <a:latin typeface="Consolas"/>
+                <a:ea typeface="BIZ UDGothic"/>
+                <a:cs typeface="BIZ UDGothic"/>
               </a:rPr>
               <a:t>time.sleep(1)</a:t>
             </a:r>
@@ -39128,9 +39128,9 @@
                 <a:solidFill>
                   <a:srgbClr val="C62828"/>
                 </a:solidFill>
-                <a:latin typeface="MS Gothic"/>
-                <a:ea typeface="MS Gothic"/>
-                <a:cs typeface="MS Gothic"/>
+                <a:latin typeface="Consolas"/>
+                <a:ea typeface="BIZ UDGothic"/>
+                <a:cs typeface="BIZ UDGothic"/>
               </a:rPr>
               <a:t>1</a:t>
             </a:r>
@@ -39150,9 +39150,9 @@
                 <a:solidFill>
                   <a:srgbClr val="C62828"/>
                 </a:solidFill>
-                <a:latin typeface="MS Gothic"/>
-                <a:ea typeface="MS Gothic"/>
-                <a:cs typeface="MS Gothic"/>
+                <a:latin typeface="Consolas"/>
+                <a:ea typeface="BIZ UDGothic"/>
+                <a:cs typeface="BIZ UDGothic"/>
               </a:rPr>
               <a:t>3</a:t>
             </a:r>
@@ -39400,9 +39400,9 @@
                 <a:solidFill>
                   <a:srgbClr val="222222"/>
                 </a:solidFill>
-                <a:latin typeface="MS Gothic"/>
-                <a:ea typeface="MS Gothic"/>
-                <a:cs typeface="MS Gothic"/>
+                <a:latin typeface="Consolas"/>
+                <a:ea typeface="BIZ UDGothic"/>
+                <a:cs typeface="BIZ UDGothic"/>
               </a:rPr>
               <a:t>from machine import Pin        </a:t>
             </a:r>
@@ -39411,9 +39411,9 @@
                 <a:solidFill>
                   <a:srgbClr val="2E7D32"/>
                 </a:solidFill>
-                <a:latin typeface="MS Gothic"/>
-                <a:ea typeface="MS Gothic"/>
-                <a:cs typeface="MS Gothic"/>
+                <a:latin typeface="Consolas"/>
+                <a:ea typeface="BIZ UDGothic"/>
+                <a:cs typeface="BIZ UDGothic"/>
               </a:rPr>
               <a:t># Pin:Pico のピンを操作するための道具</a:t>
             </a:r>
@@ -39429,9 +39429,9 @@
                 <a:solidFill>
                   <a:srgbClr val="222222"/>
                 </a:solidFill>
-                <a:latin typeface="MS Gothic"/>
-                <a:ea typeface="MS Gothic"/>
-                <a:cs typeface="MS Gothic"/>
+                <a:latin typeface="Consolas"/>
+                <a:ea typeface="BIZ UDGothic"/>
+                <a:cs typeface="BIZ UDGothic"/>
               </a:rPr>
               <a:t>import time                    </a:t>
             </a:r>
@@ -39440,9 +39440,9 @@
                 <a:solidFill>
                   <a:srgbClr val="2E7D32"/>
                 </a:solidFill>
-                <a:latin typeface="MS Gothic"/>
-                <a:ea typeface="MS Gothic"/>
-                <a:cs typeface="MS Gothic"/>
+                <a:latin typeface="Consolas"/>
+                <a:ea typeface="BIZ UDGothic"/>
+                <a:cs typeface="BIZ UDGothic"/>
               </a:rPr>
               <a:t># time:待ち時間を作るための道具</a:t>
             </a:r>
@@ -39458,9 +39458,9 @@
                 <a:solidFill>
                   <a:srgbClr val="222222"/>
                 </a:solidFill>
-                <a:latin typeface="MS Gothic"/>
-                <a:ea typeface="MS Gothic"/>
-                <a:cs typeface="MS Gothic"/>
+                <a:latin typeface="Consolas"/>
+                <a:ea typeface="BIZ UDGothic"/>
+                <a:cs typeface="BIZ UDGothic"/>
               </a:rPr>
               <a:t> </a:t>
             </a:r>
@@ -39476,9 +39476,9 @@
                 <a:solidFill>
                   <a:srgbClr val="222222"/>
                 </a:solidFill>
-                <a:latin typeface="MS Gothic"/>
-                <a:ea typeface="MS Gothic"/>
-                <a:cs typeface="MS Gothic"/>
+                <a:latin typeface="Consolas"/>
+                <a:ea typeface="BIZ UDGothic"/>
+                <a:cs typeface="BIZ UDGothic"/>
               </a:rPr>
               <a:t>led = Pin("LED", Pin.OUT)      </a:t>
             </a:r>
@@ -39487,9 +39487,9 @@
                 <a:solidFill>
                   <a:srgbClr val="2E7D32"/>
                 </a:solidFill>
-                <a:latin typeface="MS Gothic"/>
-                <a:ea typeface="MS Gothic"/>
-                <a:cs typeface="MS Gothic"/>
+                <a:latin typeface="Consolas"/>
+                <a:ea typeface="BIZ UDGothic"/>
+                <a:cs typeface="BIZ UDGothic"/>
               </a:rPr>
               <a:t># 本体のLEDを「出力」にする</a:t>
             </a:r>
@@ -39505,9 +39505,9 @@
                 <a:solidFill>
                   <a:srgbClr val="222222"/>
                 </a:solidFill>
-                <a:latin typeface="MS Gothic"/>
-                <a:ea typeface="MS Gothic"/>
-                <a:cs typeface="MS Gothic"/>
+                <a:latin typeface="Consolas"/>
+                <a:ea typeface="BIZ UDGothic"/>
+                <a:cs typeface="BIZ UDGothic"/>
               </a:rPr>
               <a:t> </a:t>
             </a:r>
@@ -39523,9 +39523,9 @@
                 <a:solidFill>
                   <a:srgbClr val="222222"/>
                 </a:solidFill>
-                <a:latin typeface="MS Gothic"/>
-                <a:ea typeface="MS Gothic"/>
-                <a:cs typeface="MS Gothic"/>
+                <a:latin typeface="Consolas"/>
+                <a:ea typeface="BIZ UDGothic"/>
+                <a:cs typeface="BIZ UDGothic"/>
               </a:rPr>
               <a:t>while True:                    </a:t>
             </a:r>
@@ -39534,9 +39534,9 @@
                 <a:solidFill>
                   <a:srgbClr val="2E7D32"/>
                 </a:solidFill>
-                <a:latin typeface="MS Gothic"/>
-                <a:ea typeface="MS Gothic"/>
-                <a:cs typeface="MS Gothic"/>
+                <a:latin typeface="Consolas"/>
+                <a:ea typeface="BIZ UDGothic"/>
+                <a:cs typeface="BIZ UDGothic"/>
               </a:rPr>
               <a:t># ずっとくり返す(止めるときは停止ボタン)</a:t>
             </a:r>
@@ -39552,9 +39552,9 @@
                 <a:solidFill>
                   <a:srgbClr val="222222"/>
                 </a:solidFill>
-                <a:latin typeface="MS Gothic"/>
-                <a:ea typeface="MS Gothic"/>
-                <a:cs typeface="MS Gothic"/>
+                <a:latin typeface="Consolas"/>
+                <a:ea typeface="BIZ UDGothic"/>
+                <a:cs typeface="BIZ UDGothic"/>
               </a:rPr>
               <a:t>    led.value(1)               </a:t>
             </a:r>
@@ -39563,9 +39563,9 @@
                 <a:solidFill>
                   <a:srgbClr val="2E7D32"/>
                 </a:solidFill>
-                <a:latin typeface="MS Gothic"/>
-                <a:ea typeface="MS Gothic"/>
-                <a:cs typeface="MS Gothic"/>
+                <a:latin typeface="Consolas"/>
+                <a:ea typeface="BIZ UDGothic"/>
+                <a:cs typeface="BIZ UDGothic"/>
               </a:rPr>
               <a:t># 点灯</a:t>
             </a:r>
@@ -39581,9 +39581,9 @@
                 <a:solidFill>
                   <a:srgbClr val="222222"/>
                 </a:solidFill>
-                <a:latin typeface="MS Gothic"/>
-                <a:ea typeface="MS Gothic"/>
-                <a:cs typeface="MS Gothic"/>
+                <a:latin typeface="Consolas"/>
+                <a:ea typeface="BIZ UDGothic"/>
+                <a:cs typeface="BIZ UDGothic"/>
               </a:rPr>
               <a:t>    time.sleep(0.5)            </a:t>
             </a:r>
@@ -39592,9 +39592,9 @@
                 <a:solidFill>
                   <a:srgbClr val="2E7D32"/>
                 </a:solidFill>
-                <a:latin typeface="MS Gothic"/>
-                <a:ea typeface="MS Gothic"/>
-                <a:cs typeface="MS Gothic"/>
+                <a:latin typeface="Consolas"/>
+                <a:ea typeface="BIZ UDGothic"/>
+                <a:cs typeface="BIZ UDGothic"/>
               </a:rPr>
               <a:t># 0.5秒待つ</a:t>
             </a:r>
@@ -39610,9 +39610,9 @@
                 <a:solidFill>
                   <a:srgbClr val="222222"/>
                 </a:solidFill>
-                <a:latin typeface="MS Gothic"/>
-                <a:ea typeface="MS Gothic"/>
-                <a:cs typeface="MS Gothic"/>
+                <a:latin typeface="Consolas"/>
+                <a:ea typeface="BIZ UDGothic"/>
+                <a:cs typeface="BIZ UDGothic"/>
               </a:rPr>
               <a:t>    led.value(0)               </a:t>
             </a:r>
@@ -39621,9 +39621,9 @@
                 <a:solidFill>
                   <a:srgbClr val="2E7D32"/>
                 </a:solidFill>
-                <a:latin typeface="MS Gothic"/>
-                <a:ea typeface="MS Gothic"/>
-                <a:cs typeface="MS Gothic"/>
+                <a:latin typeface="Consolas"/>
+                <a:ea typeface="BIZ UDGothic"/>
+                <a:cs typeface="BIZ UDGothic"/>
               </a:rPr>
               <a:t># 消灯</a:t>
             </a:r>
@@ -39639,9 +39639,9 @@
                 <a:solidFill>
                   <a:srgbClr val="222222"/>
                 </a:solidFill>
-                <a:latin typeface="MS Gothic"/>
-                <a:ea typeface="MS Gothic"/>
-                <a:cs typeface="MS Gothic"/>
+                <a:latin typeface="Consolas"/>
+                <a:ea typeface="BIZ UDGothic"/>
+                <a:cs typeface="BIZ UDGothic"/>
               </a:rPr>
               <a:t>    time.sleep(0.5)            </a:t>
             </a:r>
@@ -39650,9 +39650,9 @@
                 <a:solidFill>
                   <a:srgbClr val="2E7D32"/>
                 </a:solidFill>
-                <a:latin typeface="MS Gothic"/>
-                <a:ea typeface="MS Gothic"/>
-                <a:cs typeface="MS Gothic"/>
+                <a:latin typeface="Consolas"/>
+                <a:ea typeface="BIZ UDGothic"/>
+                <a:cs typeface="BIZ UDGothic"/>
               </a:rPr>
               <a:t># 0.5秒待つ</a:t>
             </a:r>
@@ -39668,7 +39668,7 @@
         <p:spPr>
           <a:xfrm>
             <a:off x="640080" y="3010408"/>
-            <a:ext cx="1488440" cy="330200"/>
+            <a:ext cx="1628140" cy="330200"/>
           </a:xfrm>
           <a:prstGeom prst="roundRect">
             <a:avLst/>
@@ -39844,9 +39844,9 @@
                 <a:solidFill>
                   <a:srgbClr val="C62828"/>
                 </a:solidFill>
-                <a:latin typeface="MS Gothic"/>
-                <a:ea typeface="MS Gothic"/>
-                <a:cs typeface="MS Gothic"/>
+                <a:latin typeface="Consolas"/>
+                <a:ea typeface="BIZ UDGothic"/>
+                <a:cs typeface="BIZ UDGothic"/>
               </a:rPr>
               <a:t>while True:</a:t>
             </a:r>
@@ -39924,9 +39924,9 @@
                 <a:solidFill>
                   <a:srgbClr val="C62828"/>
                 </a:solidFill>
-                <a:latin typeface="MS Gothic"/>
-                <a:ea typeface="MS Gothic"/>
-                <a:cs typeface="MS Gothic"/>
+                <a:latin typeface="Consolas"/>
+                <a:ea typeface="BIZ UDGothic"/>
+                <a:cs typeface="BIZ UDGothic"/>
               </a:rPr>
               <a:t>0.5</a:t>
             </a:r>
@@ -39946,9 +39946,9 @@
                 <a:solidFill>
                   <a:srgbClr val="C62828"/>
                 </a:solidFill>
-                <a:latin typeface="MS Gothic"/>
-                <a:ea typeface="MS Gothic"/>
-                <a:cs typeface="MS Gothic"/>
+                <a:latin typeface="Consolas"/>
+                <a:ea typeface="BIZ UDGothic"/>
+                <a:cs typeface="BIZ UDGothic"/>
               </a:rPr>
               <a:t>0.1</a:t>
             </a:r>
@@ -40196,9 +40196,9 @@
                 <a:solidFill>
                   <a:srgbClr val="222222"/>
                 </a:solidFill>
-                <a:latin typeface="MS Gothic"/>
-                <a:ea typeface="MS Gothic"/>
-                <a:cs typeface="MS Gothic"/>
+                <a:latin typeface="Consolas"/>
+                <a:ea typeface="BIZ UDGothic"/>
+                <a:cs typeface="BIZ UDGothic"/>
               </a:rPr>
               <a:t>print("1行目")</a:t>
             </a:r>
@@ -40214,9 +40214,9 @@
                 <a:solidFill>
                   <a:srgbClr val="222222"/>
                 </a:solidFill>
-                <a:latin typeface="MS Gothic"/>
-                <a:ea typeface="MS Gothic"/>
-                <a:cs typeface="MS Gothic"/>
+                <a:latin typeface="Consolas"/>
+                <a:ea typeface="BIZ UDGothic"/>
+                <a:cs typeface="BIZ UDGothic"/>
               </a:rPr>
               <a:t>print("2行目")   </a:t>
             </a:r>
@@ -40225,9 +40225,9 @@
                 <a:solidFill>
                   <a:srgbClr val="2E7D32"/>
                 </a:solidFill>
-                <a:latin typeface="MS Gothic"/>
-                <a:ea typeface="MS Gothic"/>
-                <a:cs typeface="MS Gothic"/>
+                <a:latin typeface="Consolas"/>
+                <a:ea typeface="BIZ UDGothic"/>
+                <a:cs typeface="BIZ UDGothic"/>
               </a:rPr>
               <a:t># 1行目のあとに実行される</a:t>
             </a:r>
@@ -40243,9 +40243,9 @@
                 <a:solidFill>
                   <a:srgbClr val="222222"/>
                 </a:solidFill>
-                <a:latin typeface="MS Gothic"/>
-                <a:ea typeface="MS Gothic"/>
-                <a:cs typeface="MS Gothic"/>
+                <a:latin typeface="Consolas"/>
+                <a:ea typeface="BIZ UDGothic"/>
+                <a:cs typeface="BIZ UDGothic"/>
               </a:rPr>
               <a:t>print("3行目")   </a:t>
             </a:r>
@@ -40254,9 +40254,9 @@
                 <a:solidFill>
                   <a:srgbClr val="2E7D32"/>
                 </a:solidFill>
-                <a:latin typeface="MS Gothic"/>
-                <a:ea typeface="MS Gothic"/>
-                <a:cs typeface="MS Gothic"/>
+                <a:latin typeface="Consolas"/>
+                <a:ea typeface="BIZ UDGothic"/>
+                <a:cs typeface="BIZ UDGothic"/>
               </a:rPr>
               <a:t># 2行目のあとに実行される</a:t>
             </a:r>
@@ -40913,9 +40913,9 @@
                 <a:solidFill>
                   <a:srgbClr val="222222"/>
                 </a:solidFill>
-                <a:latin typeface="MS Gothic"/>
-                <a:ea typeface="MS Gothic"/>
-                <a:cs typeface="MS Gothic"/>
+                <a:latin typeface="Consolas"/>
+                <a:ea typeface="BIZ UDGothic"/>
+                <a:cs typeface="BIZ UDGothic"/>
               </a:rPr>
               <a:t>while True:          </a:t>
             </a:r>
@@ -40924,9 +40924,9 @@
                 <a:solidFill>
                   <a:srgbClr val="2E7D32"/>
                 </a:solidFill>
-                <a:latin typeface="MS Gothic"/>
-                <a:ea typeface="MS Gothic"/>
-                <a:cs typeface="MS Gothic"/>
+                <a:latin typeface="Consolas"/>
+                <a:ea typeface="BIZ UDGothic"/>
+                <a:cs typeface="BIZ UDGothic"/>
               </a:rPr>
               <a:t># True なので終わらない</a:t>
             </a:r>
@@ -40942,9 +40942,9 @@
                 <a:solidFill>
                   <a:srgbClr val="222222"/>
                 </a:solidFill>
-                <a:latin typeface="MS Gothic"/>
-                <a:ea typeface="MS Gothic"/>
-                <a:cs typeface="MS Gothic"/>
+                <a:latin typeface="Consolas"/>
+                <a:ea typeface="BIZ UDGothic"/>
+                <a:cs typeface="BIZ UDGothic"/>
               </a:rPr>
               <a:t>    print("ずっと表示")</a:t>
             </a:r>
@@ -40960,9 +40960,9 @@
                 <a:solidFill>
                   <a:srgbClr val="222222"/>
                 </a:solidFill>
-                <a:latin typeface="MS Gothic"/>
-                <a:ea typeface="MS Gothic"/>
-                <a:cs typeface="MS Gothic"/>
+                <a:latin typeface="Consolas"/>
+                <a:ea typeface="BIZ UDGothic"/>
+                <a:cs typeface="BIZ UDGothic"/>
               </a:rPr>
               <a:t>    time.sleep(1)    </a:t>
             </a:r>
@@ -40971,9 +40971,9 @@
                 <a:solidFill>
                   <a:srgbClr val="2E7D32"/>
                 </a:solidFill>
-                <a:latin typeface="MS Gothic"/>
-                <a:ea typeface="MS Gothic"/>
-                <a:cs typeface="MS Gothic"/>
+                <a:latin typeface="Consolas"/>
+                <a:ea typeface="BIZ UDGothic"/>
+                <a:cs typeface="BIZ UDGothic"/>
               </a:rPr>
               <a:t># 1秒待つ</a:t>
             </a:r>
@@ -40989,7 +40989,7 @@
         <p:spPr>
           <a:xfrm>
             <a:off x="640080" y="1605788"/>
-            <a:ext cx="1628140" cy="355600"/>
+            <a:ext cx="1781810" cy="355600"/>
           </a:xfrm>
           <a:prstGeom prst="roundRect">
             <a:avLst/>
@@ -41107,9 +41107,9 @@
                 <a:solidFill>
                   <a:srgbClr val="C62828"/>
                 </a:solidFill>
-                <a:latin typeface="MS Gothic"/>
-                <a:ea typeface="MS Gothic"/>
-                <a:cs typeface="MS Gothic"/>
+                <a:latin typeface="Consolas"/>
+                <a:ea typeface="BIZ UDGothic"/>
+                <a:cs typeface="BIZ UDGothic"/>
               </a:rPr>
               <a:t>while True:</a:t>
             </a:r>

--- a/slides/pico_sensor_intro.pptx
+++ b/slides/pico_sensor_intro.pptx
@@ -11650,8 +11650,8 @@
         </p:nvCxnSpPr>
         <p:spPr>
           <a:xfrm>
-            <a:off x="2926080" y="2203704.0"/>
-            <a:ext cx="1280160" cy="0.0"/>
+            <a:off x="2926080" y="2203704"/>
+            <a:ext cx="1280160" cy="0"/>
           </a:xfrm>
           <a:prstGeom prst="line">
             <a:avLst/>
@@ -11767,8 +11767,8 @@
         </p:nvCxnSpPr>
         <p:spPr>
           <a:xfrm>
-            <a:off x="2926080" y="2770632.0"/>
-            <a:ext cx="1280160" cy="0.0"/>
+            <a:off x="2926080" y="2770632"/>
+            <a:ext cx="1280160" cy="0"/>
           </a:xfrm>
           <a:prstGeom prst="line">
             <a:avLst/>
@@ -11884,8 +11884,8 @@
         </p:nvCxnSpPr>
         <p:spPr>
           <a:xfrm>
-            <a:off x="2926080" y="3337560.0"/>
-            <a:ext cx="1280160" cy="0.0"/>
+            <a:off x="2926080" y="3337560"/>
+            <a:ext cx="1280160" cy="0"/>
           </a:xfrm>
           <a:prstGeom prst="line">
             <a:avLst/>
@@ -12001,8 +12001,8 @@
         </p:nvCxnSpPr>
         <p:spPr>
           <a:xfrm>
-            <a:off x="2926080" y="3904488.0"/>
-            <a:ext cx="1280160" cy="0.0"/>
+            <a:off x="2926080" y="3904488"/>
+            <a:ext cx="1280160" cy="0"/>
           </a:xfrm>
           <a:prstGeom prst="line">
             <a:avLst/>
@@ -16051,8 +16051,8 @@
         </p:nvCxnSpPr>
         <p:spPr>
           <a:xfrm>
-            <a:off x="2926080" y="3712464.0"/>
-            <a:ext cx="1280160" cy="0.0"/>
+            <a:off x="2926080" y="3712464"/>
+            <a:ext cx="1280160" cy="0"/>
           </a:xfrm>
           <a:prstGeom prst="line">
             <a:avLst/>
@@ -16168,8 +16168,8 @@
         </p:nvCxnSpPr>
         <p:spPr>
           <a:xfrm>
-            <a:off x="2926080" y="4279392.0"/>
-            <a:ext cx="1280160" cy="0.0"/>
+            <a:off x="2926080" y="4279392"/>
+            <a:ext cx="1280160" cy="0"/>
           </a:xfrm>
           <a:prstGeom prst="line">
             <a:avLst/>
@@ -26818,8 +26818,8 @@
         </p:nvCxnSpPr>
         <p:spPr>
           <a:xfrm>
-            <a:off x="9052560" y="2203704.0"/>
-            <a:ext cx="182880" cy="0.0"/>
+            <a:off x="9052560" y="2203704"/>
+            <a:ext cx="182880" cy="0"/>
           </a:xfrm>
           <a:prstGeom prst="line">
             <a:avLst/>
@@ -26935,8 +26935,8 @@
         </p:nvCxnSpPr>
         <p:spPr>
           <a:xfrm>
-            <a:off x="9052560" y="2770632.0"/>
-            <a:ext cx="182880" cy="0.0"/>
+            <a:off x="9052560" y="2770632"/>
+            <a:ext cx="182880" cy="0"/>
           </a:xfrm>
           <a:prstGeom prst="line">
             <a:avLst/>
@@ -27052,8 +27052,8 @@
         </p:nvCxnSpPr>
         <p:spPr>
           <a:xfrm>
-            <a:off x="9052560" y="3337560.0"/>
-            <a:ext cx="182880" cy="0.0"/>
+            <a:off x="9052560" y="3337560"/>
+            <a:ext cx="182880" cy="0"/>
           </a:xfrm>
           <a:prstGeom prst="line">
             <a:avLst/>
@@ -33622,8 +33622,8 @@
         </p:nvCxnSpPr>
         <p:spPr>
           <a:xfrm>
-            <a:off x="2926080" y="2203704.0"/>
-            <a:ext cx="1828800" cy="0.0"/>
+            <a:off x="2926080" y="2203704"/>
+            <a:ext cx="1828800" cy="0"/>
           </a:xfrm>
           <a:prstGeom prst="line">
             <a:avLst/>
@@ -33739,8 +33739,8 @@
         </p:nvCxnSpPr>
         <p:spPr>
           <a:xfrm>
-            <a:off x="2926080" y="2770632.0"/>
-            <a:ext cx="1828800" cy="0.0"/>
+            <a:off x="2926080" y="2770632"/>
+            <a:ext cx="1828800" cy="0"/>
           </a:xfrm>
           <a:prstGeom prst="line">
             <a:avLst/>
@@ -33856,8 +33856,8 @@
         </p:nvCxnSpPr>
         <p:spPr>
           <a:xfrm>
-            <a:off x="2926080" y="3337560.0"/>
-            <a:ext cx="1828800" cy="0.0"/>
+            <a:off x="2926080" y="3337560"/>
+            <a:ext cx="1828800" cy="0"/>
           </a:xfrm>
           <a:prstGeom prst="line">
             <a:avLst/>
@@ -33973,8 +33973,8 @@
         </p:nvCxnSpPr>
         <p:spPr>
           <a:xfrm>
-            <a:off x="2926080" y="3904488.0"/>
-            <a:ext cx="1828800" cy="0.0"/>
+            <a:off x="2926080" y="3904488"/>
+            <a:ext cx="1828800" cy="0"/>
           </a:xfrm>
           <a:prstGeom prst="line">
             <a:avLst/>

--- a/slides/pico_sensor_intro.pptx
+++ b/slides/pico_sensor_intro.pptx
@@ -10320,7 +10320,7 @@
         </p:nvSpPr>
         <p:spPr>
           <a:xfrm>
-            <a:off x="548640" y="1234440"/>
+            <a:off x="548640" y="1143000"/>
             <a:ext cx="11094415" cy="822960"/>
           </a:xfrm>
           <a:prstGeom prst="rect">
@@ -10336,11 +10336,11 @@
           <a:p>
             <a:pPr algn="l">
               <a:spcAft>
-                <a:spcPts val="600"/>
+                <a:spcPts val="200"/>
               </a:spcAft>
             </a:pPr>
             <a:r>
-              <a:rPr sz="2200" b="1">
+              <a:rPr sz="2000" b="1">
                 <a:solidFill>
                   <a:srgbClr val="1F6FB2"/>
                 </a:solidFill>
@@ -10350,19 +10350,26 @@
               </a:rPr>
               <a:t>オームの法則:V = I × R → I = V ÷ R</a:t>
             </a:r>
-            <a:r>
-              <a:rPr sz="2200" b="0">
-                <a:solidFill>
-                  <a:srgbClr val="222222"/>
-                </a:solidFill>
-                <a:latin typeface="Meiryo"/>
-                <a:ea typeface="Meiryo"/>
-                <a:cs typeface="Meiryo"/>
-              </a:rPr>
-              <a:t>  LED は光るとき約 </a:t>
-            </a:r>
-            <a:r>
-              <a:rPr sz="2200" b="1">
+          </a:p>
+          <a:p>
+            <a:pPr algn="l">
+              <a:spcAft>
+                <a:spcPts val="200"/>
+              </a:spcAft>
+            </a:pPr>
+            <a:r>
+              <a:rPr sz="2000" b="0">
+                <a:solidFill>
+                  <a:srgbClr val="222222"/>
+                </a:solidFill>
+                <a:latin typeface="Meiryo"/>
+                <a:ea typeface="Meiryo"/>
+                <a:cs typeface="Meiryo"/>
+              </a:rPr>
+              <a:t>LED は光るとき約 </a:t>
+            </a:r>
+            <a:r>
+              <a:rPr sz="2000" b="1">
                 <a:solidFill>
                   <a:srgbClr val="1F6FB2"/>
                 </a:solidFill>
@@ -10373,7 +10380,7 @@
               <a:t>2V</a:t>
             </a:r>
             <a:r>
-              <a:rPr sz="2200" b="0">
+              <a:rPr sz="2000" b="0">
                 <a:solidFill>
                   <a:srgbClr val="222222"/>
                 </a:solidFill>
@@ -10394,7 +10401,7 @@
         </p:nvSpPr>
         <p:spPr>
           <a:xfrm>
-            <a:off x="548640" y="1920240"/>
+            <a:off x="548640" y="2011680"/>
             <a:ext cx="5394960" cy="457200"/>
           </a:xfrm>
           <a:prstGeom prst="rect">
@@ -10435,7 +10442,7 @@
         </p:nvSpPr>
         <p:spPr>
           <a:xfrm>
-            <a:off x="548640" y="2423160"/>
+            <a:off x="548640" y="2514600"/>
             <a:ext cx="2011680" cy="566928"/>
           </a:xfrm>
           <a:prstGeom prst="roundRect">
@@ -10492,7 +10499,7 @@
         </p:nvSpPr>
         <p:spPr>
           <a:xfrm>
-            <a:off x="2651760" y="2423160"/>
+            <a:off x="2651760" y="2514600"/>
             <a:ext cx="3291840" cy="566928"/>
           </a:xfrm>
           <a:prstGeom prst="rect">
@@ -10534,7 +10541,7 @@
                 <a:ea typeface="Meiryo"/>
                 <a:cs typeface="Meiryo"/>
               </a:rPr>
-              <a:t>抵抗の電圧 = Pico の電圧 − LED の電圧</a:t>
+              <a:t>電源 − LED の電圧</a:t>
             </a:r>
           </a:p>
         </p:txBody>
@@ -10547,7 +10554,7 @@
         </p:nvSpPr>
         <p:spPr>
           <a:xfrm>
-            <a:off x="548640" y="3099816"/>
+            <a:off x="548640" y="3191256"/>
             <a:ext cx="2011680" cy="566928"/>
           </a:xfrm>
           <a:prstGeom prst="roundRect">
@@ -10604,7 +10611,7 @@
         </p:nvSpPr>
         <p:spPr>
           <a:xfrm>
-            <a:off x="2651760" y="3099816"/>
+            <a:off x="2651760" y="3191256"/>
             <a:ext cx="3291840" cy="566928"/>
           </a:xfrm>
           <a:prstGeom prst="rect">
@@ -10659,7 +10666,7 @@
         </p:nvSpPr>
         <p:spPr>
           <a:xfrm>
-            <a:off x="548640" y="3776472"/>
+            <a:off x="548640" y="3867912"/>
             <a:ext cx="2011680" cy="566928"/>
           </a:xfrm>
           <a:prstGeom prst="roundRect">
@@ -10716,7 +10723,7 @@
         </p:nvSpPr>
         <p:spPr>
           <a:xfrm>
-            <a:off x="2651760" y="3776472"/>
+            <a:off x="2651760" y="3867912"/>
             <a:ext cx="3291840" cy="566928"/>
           </a:xfrm>
           <a:prstGeom prst="rect">
@@ -10771,7 +10778,7 @@
         </p:nvSpPr>
         <p:spPr>
           <a:xfrm>
-            <a:off x="6217920" y="1920240"/>
+            <a:off x="6217920" y="2011680"/>
             <a:ext cx="5394960" cy="457200"/>
           </a:xfrm>
           <a:prstGeom prst="rect">
@@ -10812,7 +10819,7 @@
         </p:nvSpPr>
         <p:spPr>
           <a:xfrm>
-            <a:off x="6217920" y="2423160"/>
+            <a:off x="6217920" y="2514600"/>
             <a:ext cx="2011680" cy="566928"/>
           </a:xfrm>
           <a:prstGeom prst="roundRect">
@@ -10869,7 +10876,7 @@
         </p:nvSpPr>
         <p:spPr>
           <a:xfrm>
-            <a:off x="8321040" y="2423160"/>
+            <a:off x="8321040" y="2514600"/>
             <a:ext cx="3291840" cy="566928"/>
           </a:xfrm>
           <a:prstGeom prst="rect">
@@ -10924,7 +10931,7 @@
         </p:nvSpPr>
         <p:spPr>
           <a:xfrm>
-            <a:off x="6217920" y="3099816"/>
+            <a:off x="6217920" y="3191256"/>
             <a:ext cx="2011680" cy="566928"/>
           </a:xfrm>
           <a:prstGeom prst="roundRect">
@@ -10981,7 +10988,7 @@
         </p:nvSpPr>
         <p:spPr>
           <a:xfrm>
-            <a:off x="8321040" y="3099816"/>
+            <a:off x="8321040" y="3191256"/>
             <a:ext cx="3291840" cy="566928"/>
           </a:xfrm>
           <a:prstGeom prst="rect">
@@ -11036,7 +11043,7 @@
         </p:nvSpPr>
         <p:spPr>
           <a:xfrm>
-            <a:off x="6217920" y="3776472"/>
+            <a:off x="6217920" y="3867912"/>
             <a:ext cx="2011680" cy="566928"/>
           </a:xfrm>
           <a:prstGeom prst="roundRect">
@@ -11093,7 +11100,7 @@
         </p:nvSpPr>
         <p:spPr>
           <a:xfrm>
-            <a:off x="8321040" y="3776472"/>
+            <a:off x="8321040" y="3867912"/>
             <a:ext cx="3291840" cy="566928"/>
           </a:xfrm>
           <a:prstGeom prst="rect">
@@ -12544,7 +12551,7 @@
         <p:spPr>
           <a:xfrm>
             <a:off x="548640" y="1234440"/>
-            <a:ext cx="11094415" cy="3467100"/>
+            <a:ext cx="11094415" cy="4038600"/>
           </a:xfrm>
           <a:prstGeom prst="rect">
             <a:avLst/>
@@ -12590,7 +12597,7 @@
         <p:spPr>
           <a:xfrm>
             <a:off x="548640" y="1234440"/>
-            <a:ext cx="11094415" cy="3467100"/>
+            <a:ext cx="11094415" cy="4038600"/>
           </a:xfrm>
           <a:prstGeom prst="rect">
             <a:avLst/>
@@ -12605,11 +12612,11 @@
           <a:p>
             <a:pPr algn="l">
               <a:lnSpc>
-                <a:spcPts val="1700"/>
+                <a:spcPts val="2000"/>
               </a:lnSpc>
             </a:pPr>
             <a:r>
-              <a:rPr sz="1400" b="0">
+              <a:rPr sz="1600" b="0">
                 <a:solidFill>
                   <a:srgbClr val="2E7D32"/>
                 </a:solidFill>
@@ -12623,11 +12630,11 @@
           <a:p>
             <a:pPr algn="l">
               <a:lnSpc>
-                <a:spcPts val="1700"/>
+                <a:spcPts val="2000"/>
               </a:lnSpc>
             </a:pPr>
             <a:r>
-              <a:rPr sz="1400" b="0">
+              <a:rPr sz="1600" b="0">
                 <a:solidFill>
                   <a:srgbClr val="222222"/>
                 </a:solidFill>
@@ -12638,7 +12645,7 @@
               <a:t>from machine import Pin   </a:t>
             </a:r>
             <a:r>
-              <a:rPr sz="1400" b="0">
+              <a:rPr sz="1600" b="0">
                 <a:solidFill>
                   <a:srgbClr val="2E7D32"/>
                 </a:solidFill>
@@ -12652,11 +12659,11 @@
           <a:p>
             <a:pPr algn="l">
               <a:lnSpc>
-                <a:spcPts val="1700"/>
+                <a:spcPts val="2000"/>
               </a:lnSpc>
             </a:pPr>
             <a:r>
-              <a:rPr sz="1400" b="0">
+              <a:rPr sz="1600" b="0">
                 <a:solidFill>
                   <a:srgbClr val="222222"/>
                 </a:solidFill>
@@ -12667,7 +12674,7 @@
               <a:t>import time               </a:t>
             </a:r>
             <a:r>
-              <a:rPr sz="1400" b="0">
+              <a:rPr sz="1600" b="0">
                 <a:solidFill>
                   <a:srgbClr val="2E7D32"/>
                 </a:solidFill>
@@ -12681,11 +12688,11 @@
           <a:p>
             <a:pPr algn="l">
               <a:lnSpc>
-                <a:spcPts val="1700"/>
+                <a:spcPts val="2000"/>
               </a:lnSpc>
             </a:pPr>
             <a:r>
-              <a:rPr sz="1400" b="0">
+              <a:rPr sz="1600" b="0">
                 <a:solidFill>
                   <a:srgbClr val="222222"/>
                 </a:solidFill>
@@ -12699,11 +12706,11 @@
           <a:p>
             <a:pPr algn="l">
               <a:lnSpc>
-                <a:spcPts val="1700"/>
+                <a:spcPts val="2000"/>
               </a:lnSpc>
             </a:pPr>
             <a:r>
-              <a:rPr sz="1400" b="0">
+              <a:rPr sz="1600" b="0">
                 <a:solidFill>
                   <a:srgbClr val="2E7D32"/>
                 </a:solidFill>
@@ -12717,11 +12724,11 @@
           <a:p>
             <a:pPr algn="l">
               <a:lnSpc>
-                <a:spcPts val="1700"/>
+                <a:spcPts val="2000"/>
               </a:lnSpc>
             </a:pPr>
             <a:r>
-              <a:rPr sz="1400" b="0">
+              <a:rPr sz="1600" b="0">
                 <a:solidFill>
                   <a:srgbClr val="2E7D32"/>
                 </a:solidFill>
@@ -12735,11 +12742,11 @@
           <a:p>
             <a:pPr algn="l">
               <a:lnSpc>
-                <a:spcPts val="1700"/>
+                <a:spcPts val="2000"/>
               </a:lnSpc>
             </a:pPr>
             <a:r>
-              <a:rPr sz="1400" b="0">
+              <a:rPr sz="1600" b="0">
                 <a:solidFill>
                   <a:srgbClr val="222222"/>
                 </a:solidFill>
@@ -12750,7 +12757,7 @@
               <a:t>red    = Pin(2, Pin.OUT)   </a:t>
             </a:r>
             <a:r>
-              <a:rPr sz="1400" b="0">
+              <a:rPr sz="1600" b="0">
                 <a:solidFill>
                   <a:srgbClr val="2E7D32"/>
                 </a:solidFill>
@@ -12764,11 +12771,11 @@
           <a:p>
             <a:pPr algn="l">
               <a:lnSpc>
-                <a:spcPts val="1700"/>
+                <a:spcPts val="2000"/>
               </a:lnSpc>
             </a:pPr>
             <a:r>
-              <a:rPr sz="1400" b="0">
+              <a:rPr sz="1600" b="0">
                 <a:solidFill>
                   <a:srgbClr val="222222"/>
                 </a:solidFill>
@@ -12779,7 +12786,7 @@
               <a:t>yellow = Pin(3, Pin.OUT)   </a:t>
             </a:r>
             <a:r>
-              <a:rPr sz="1400" b="0">
+              <a:rPr sz="1600" b="0">
                 <a:solidFill>
                   <a:srgbClr val="2E7D32"/>
                 </a:solidFill>
@@ -12793,11 +12800,11 @@
           <a:p>
             <a:pPr algn="l">
               <a:lnSpc>
-                <a:spcPts val="1700"/>
+                <a:spcPts val="2000"/>
               </a:lnSpc>
             </a:pPr>
             <a:r>
-              <a:rPr sz="1400" b="0">
+              <a:rPr sz="1600" b="0">
                 <a:solidFill>
                   <a:srgbClr val="222222"/>
                 </a:solidFill>
@@ -12808,7 +12815,7 @@
               <a:t>green  = Pin(4, Pin.OUT)   </a:t>
             </a:r>
             <a:r>
-              <a:rPr sz="1400" b="0">
+              <a:rPr sz="1600" b="0">
                 <a:solidFill>
                   <a:srgbClr val="2E7D32"/>
                 </a:solidFill>
@@ -12822,11 +12829,11 @@
           <a:p>
             <a:pPr algn="l">
               <a:lnSpc>
-                <a:spcPts val="1700"/>
+                <a:spcPts val="2000"/>
               </a:lnSpc>
             </a:pPr>
             <a:r>
-              <a:rPr sz="1400" b="0">
+              <a:rPr sz="1600" b="0">
                 <a:solidFill>
                   <a:srgbClr val="222222"/>
                 </a:solidFill>
@@ -12840,11 +12847,11 @@
           <a:p>
             <a:pPr algn="l">
               <a:lnSpc>
-                <a:spcPts val="1700"/>
+                <a:spcPts val="2000"/>
               </a:lnSpc>
             </a:pPr>
             <a:r>
-              <a:rPr sz="1400" b="0">
+              <a:rPr sz="1600" b="0">
                 <a:solidFill>
                   <a:srgbClr val="2E7D32"/>
                 </a:solidFill>
@@ -12858,11 +12865,11 @@
           <a:p>
             <a:pPr algn="l">
               <a:lnSpc>
-                <a:spcPts val="1700"/>
+                <a:spcPts val="2000"/>
               </a:lnSpc>
             </a:pPr>
             <a:r>
-              <a:rPr sz="1400" b="0">
+              <a:rPr sz="1600" b="0">
                 <a:solidFill>
                   <a:srgbClr val="222222"/>
                 </a:solidFill>
@@ -12876,11 +12883,11 @@
           <a:p>
             <a:pPr algn="l">
               <a:lnSpc>
-                <a:spcPts val="1700"/>
+                <a:spcPts val="2000"/>
               </a:lnSpc>
             </a:pPr>
             <a:r>
-              <a:rPr sz="1400" b="0">
+              <a:rPr sz="1600" b="0">
                 <a:solidFill>
                   <a:srgbClr val="222222"/>
                 </a:solidFill>
@@ -12891,7 +12898,7 @@
               <a:t>    </a:t>
             </a:r>
             <a:r>
-              <a:rPr sz="1400" b="0">
+              <a:rPr sz="1600" b="0">
                 <a:solidFill>
                   <a:srgbClr val="2E7D32"/>
                 </a:solidFill>
@@ -12905,11 +12912,11 @@
           <a:p>
             <a:pPr algn="l">
               <a:lnSpc>
-                <a:spcPts val="1700"/>
+                <a:spcPts val="2000"/>
               </a:lnSpc>
             </a:pPr>
             <a:r>
-              <a:rPr sz="1400" b="0">
+              <a:rPr sz="1600" b="0">
                 <a:solidFill>
                   <a:srgbClr val="222222"/>
                 </a:solidFill>
@@ -12923,11 +12930,11 @@
           <a:p>
             <a:pPr algn="l">
               <a:lnSpc>
-                <a:spcPts val="1700"/>
+                <a:spcPts val="2000"/>
               </a:lnSpc>
             </a:pPr>
             <a:r>
-              <a:rPr sz="1400" b="0">
+              <a:rPr sz="1600" b="0">
                 <a:solidFill>
                   <a:srgbClr val="222222"/>
                 </a:solidFill>
@@ -12938,7 +12945,7 @@
               <a:t>        p.value(0)         </a:t>
             </a:r>
             <a:r>
-              <a:rPr sz="1400" b="0">
+              <a:rPr sz="1600" b="0">
                 <a:solidFill>
                   <a:srgbClr val="2E7D32"/>
                 </a:solidFill>
@@ -12959,8 +12966,8 @@
         </p:nvSpPr>
         <p:spPr>
           <a:xfrm>
-            <a:off x="640080" y="3706368"/>
-            <a:ext cx="1460500" cy="228600"/>
+            <a:off x="640080" y="4125468"/>
+            <a:ext cx="1656080" cy="266700"/>
           </a:xfrm>
           <a:prstGeom prst="roundRect">
             <a:avLst/>
@@ -13003,8 +13010,8 @@
         </p:nvSpPr>
         <p:spPr>
           <a:xfrm>
-            <a:off x="1031240" y="4138168"/>
-            <a:ext cx="3025140" cy="228600"/>
+            <a:off x="1087120" y="4633468"/>
+            <a:ext cx="3444240" cy="266700"/>
           </a:xfrm>
           <a:prstGeom prst="roundRect">
             <a:avLst/>
@@ -13047,8 +13054,8 @@
         </p:nvSpPr>
         <p:spPr>
           <a:xfrm>
-            <a:off x="548640" y="6080760"/>
-            <a:ext cx="11094415" cy="365760"/>
+            <a:off x="548640" y="6446520"/>
+            <a:ext cx="8534095" cy="320040"/>
           </a:xfrm>
           <a:prstGeom prst="rect">
             <a:avLst/>
@@ -13067,7 +13074,7 @@
               </a:spcAft>
             </a:pPr>
             <a:r>
-              <a:rPr sz="1400" b="0">
+              <a:rPr sz="1200" b="0">
                 <a:solidFill>
                   <a:srgbClr val="666666"/>
                 </a:solidFill>
@@ -13339,7 +13346,7 @@
         <p:spPr>
           <a:xfrm>
             <a:off x="548640" y="1234440"/>
-            <a:ext cx="11094415" cy="1955800"/>
+            <a:ext cx="11094415" cy="2260600"/>
           </a:xfrm>
           <a:prstGeom prst="rect">
             <a:avLst/>
@@ -13385,7 +13392,7 @@
         <p:spPr>
           <a:xfrm>
             <a:off x="548640" y="1234440"/>
-            <a:ext cx="11094415" cy="1955800"/>
+            <a:ext cx="11094415" cy="2260600"/>
           </a:xfrm>
           <a:prstGeom prst="rect">
             <a:avLst/>
@@ -13400,11 +13407,11 @@
           <a:p>
             <a:pPr algn="l">
               <a:lnSpc>
-                <a:spcPts val="1700"/>
+                <a:spcPts val="2000"/>
               </a:lnSpc>
             </a:pPr>
             <a:r>
-              <a:rPr sz="1400" b="0">
+              <a:rPr sz="1600" b="0">
                 <a:solidFill>
                   <a:srgbClr val="2E7D32"/>
                 </a:solidFill>
@@ -13418,11 +13425,11 @@
           <a:p>
             <a:pPr algn="l">
               <a:lnSpc>
-                <a:spcPts val="1700"/>
+                <a:spcPts val="2000"/>
               </a:lnSpc>
             </a:pPr>
             <a:r>
-              <a:rPr sz="1400" b="0">
+              <a:rPr sz="1600" b="0">
                 <a:solidFill>
                   <a:srgbClr val="2E7D32"/>
                 </a:solidFill>
@@ -13436,11 +13443,11 @@
           <a:p>
             <a:pPr algn="l">
               <a:lnSpc>
-                <a:spcPts val="1700"/>
+                <a:spcPts val="2000"/>
               </a:lnSpc>
             </a:pPr>
             <a:r>
-              <a:rPr sz="1400" b="0">
+              <a:rPr sz="1600" b="0">
                 <a:solidFill>
                   <a:srgbClr val="222222"/>
                 </a:solidFill>
@@ -13454,11 +13461,11 @@
           <a:p>
             <a:pPr algn="l">
               <a:lnSpc>
-                <a:spcPts val="1700"/>
+                <a:spcPts val="2000"/>
               </a:lnSpc>
             </a:pPr>
             <a:r>
-              <a:rPr sz="1400" b="0">
+              <a:rPr sz="1600" b="0">
                 <a:solidFill>
                   <a:srgbClr val="222222"/>
                 </a:solidFill>
@@ -13469,7 +13476,7 @@
               <a:t>    all_off()              </a:t>
             </a:r>
             <a:r>
-              <a:rPr sz="1400" b="0">
+              <a:rPr sz="1600" b="0">
                 <a:solidFill>
                   <a:srgbClr val="2E7D32"/>
                 </a:solidFill>
@@ -13483,11 +13490,11 @@
           <a:p>
             <a:pPr algn="l">
               <a:lnSpc>
-                <a:spcPts val="1700"/>
+                <a:spcPts val="2000"/>
               </a:lnSpc>
             </a:pPr>
             <a:r>
-              <a:rPr sz="1400" b="0">
+              <a:rPr sz="1600" b="0">
                 <a:solidFill>
                   <a:srgbClr val="222222"/>
                 </a:solidFill>
@@ -13498,7 +13505,7 @@
               <a:t>    print(name, "点灯")    </a:t>
             </a:r>
             <a:r>
-              <a:rPr sz="1400" b="0">
+              <a:rPr sz="1600" b="0">
                 <a:solidFill>
                   <a:srgbClr val="2E7D32"/>
                 </a:solidFill>
@@ -13512,11 +13519,11 @@
           <a:p>
             <a:pPr algn="l">
               <a:lnSpc>
-                <a:spcPts val="1700"/>
+                <a:spcPts val="2000"/>
               </a:lnSpc>
             </a:pPr>
             <a:r>
-              <a:rPr sz="1400" b="0">
+              <a:rPr sz="1600" b="0">
                 <a:solidFill>
                   <a:srgbClr val="222222"/>
                 </a:solidFill>
@@ -13527,7 +13534,7 @@
               <a:t>    p.value(1)             </a:t>
             </a:r>
             <a:r>
-              <a:rPr sz="1400" b="0">
+              <a:rPr sz="1600" b="0">
                 <a:solidFill>
                   <a:srgbClr val="2E7D32"/>
                 </a:solidFill>
@@ -13541,11 +13548,11 @@
           <a:p>
             <a:pPr algn="l">
               <a:lnSpc>
-                <a:spcPts val="1700"/>
+                <a:spcPts val="2000"/>
               </a:lnSpc>
             </a:pPr>
             <a:r>
-              <a:rPr sz="1400" b="0">
+              <a:rPr sz="1600" b="0">
                 <a:solidFill>
                   <a:srgbClr val="222222"/>
                 </a:solidFill>
@@ -13556,7 +13563,7 @@
               <a:t>    time.sleep(1)          </a:t>
             </a:r>
             <a:r>
-              <a:rPr sz="1400" b="0">
+              <a:rPr sz="1600" b="0">
                 <a:solidFill>
                   <a:srgbClr val="2E7D32"/>
                 </a:solidFill>
@@ -13570,11 +13577,11 @@
           <a:p>
             <a:pPr algn="l">
               <a:lnSpc>
-                <a:spcPts val="1700"/>
+                <a:spcPts val="2000"/>
               </a:lnSpc>
             </a:pPr>
             <a:r>
-              <a:rPr sz="1400" b="0">
+              <a:rPr sz="1600" b="0">
                 <a:solidFill>
                   <a:srgbClr val="222222"/>
                 </a:solidFill>
@@ -13585,7 +13592,7 @@
               <a:t>all_off()                  </a:t>
             </a:r>
             <a:r>
-              <a:rPr sz="1400" b="0">
+              <a:rPr sz="1600" b="0">
                 <a:solidFill>
                   <a:srgbClr val="2E7D32"/>
                 </a:solidFill>
@@ -13606,8 +13613,8 @@
         </p:nvSpPr>
         <p:spPr>
           <a:xfrm>
-            <a:off x="640080" y="1763268"/>
-            <a:ext cx="5905500" cy="228600"/>
+            <a:off x="640080" y="1839468"/>
+            <a:ext cx="6736080" cy="266700"/>
           </a:xfrm>
           <a:prstGeom prst="roundRect">
             <a:avLst/>
@@ -13650,8 +13657,8 @@
         </p:nvSpPr>
         <p:spPr>
           <a:xfrm>
-            <a:off x="548640" y="6080760"/>
-            <a:ext cx="11094415" cy="365760"/>
+            <a:off x="548640" y="6446520"/>
+            <a:ext cx="8534095" cy="320040"/>
           </a:xfrm>
           <a:prstGeom prst="rect">
             <a:avLst/>
@@ -13670,7 +13677,7 @@
               </a:spcAft>
             </a:pPr>
             <a:r>
-              <a:rPr sz="1400" b="0">
+              <a:rPr sz="1200" b="0">
                 <a:solidFill>
                   <a:srgbClr val="666666"/>
                 </a:solidFill>
@@ -13942,7 +13949,7 @@
         <p:spPr>
           <a:xfrm>
             <a:off x="548640" y="1234440"/>
-            <a:ext cx="11094415" cy="3035300"/>
+            <a:ext cx="11094415" cy="3530600"/>
           </a:xfrm>
           <a:prstGeom prst="rect">
             <a:avLst/>
@@ -13988,7 +13995,7 @@
         <p:spPr>
           <a:xfrm>
             <a:off x="548640" y="1234440"/>
-            <a:ext cx="11094415" cy="3035300"/>
+            <a:ext cx="11094415" cy="3530600"/>
           </a:xfrm>
           <a:prstGeom prst="rect">
             <a:avLst/>
@@ -14003,11 +14010,11 @@
           <a:p>
             <a:pPr algn="l">
               <a:lnSpc>
-                <a:spcPts val="1700"/>
+                <a:spcPts val="2000"/>
               </a:lnSpc>
             </a:pPr>
             <a:r>
-              <a:rPr sz="1400" b="0">
+              <a:rPr sz="1600" b="0">
                 <a:solidFill>
                   <a:srgbClr val="2E7D32"/>
                 </a:solidFill>
@@ -14021,11 +14028,11 @@
           <a:p>
             <a:pPr algn="l">
               <a:lnSpc>
-                <a:spcPts val="1700"/>
+                <a:spcPts val="2000"/>
               </a:lnSpc>
             </a:pPr>
             <a:r>
-              <a:rPr sz="1400" b="0">
+              <a:rPr sz="1600" b="0">
                 <a:solidFill>
                   <a:srgbClr val="222222"/>
                 </a:solidFill>
@@ -14036,7 +14043,7 @@
               <a:t>while True:                </a:t>
             </a:r>
             <a:r>
-              <a:rPr sz="1400" b="0">
+              <a:rPr sz="1600" b="0">
                 <a:solidFill>
                   <a:srgbClr val="2E7D32"/>
                 </a:solidFill>
@@ -14050,11 +14057,11 @@
           <a:p>
             <a:pPr algn="l">
               <a:lnSpc>
-                <a:spcPts val="1700"/>
+                <a:spcPts val="2000"/>
               </a:lnSpc>
             </a:pPr>
             <a:r>
-              <a:rPr sz="1400" b="0">
+              <a:rPr sz="1600" b="0">
                 <a:solidFill>
                   <a:srgbClr val="222222"/>
                 </a:solidFill>
@@ -14065,7 +14072,7 @@
               <a:t>    green.value(1)         </a:t>
             </a:r>
             <a:r>
-              <a:rPr sz="1400" b="0">
+              <a:rPr sz="1600" b="0">
                 <a:solidFill>
                   <a:srgbClr val="2E7D32"/>
                 </a:solidFill>
@@ -14079,11 +14086,11 @@
           <a:p>
             <a:pPr algn="l">
               <a:lnSpc>
-                <a:spcPts val="1700"/>
+                <a:spcPts val="2000"/>
               </a:lnSpc>
             </a:pPr>
             <a:r>
-              <a:rPr sz="1400" b="0">
+              <a:rPr sz="1600" b="0">
                 <a:solidFill>
                   <a:srgbClr val="222222"/>
                 </a:solidFill>
@@ -14094,7 +14101,7 @@
               <a:t>    time.sleep(5)          </a:t>
             </a:r>
             <a:r>
-              <a:rPr sz="1400" b="0">
+              <a:rPr sz="1600" b="0">
                 <a:solidFill>
                   <a:srgbClr val="2E7D32"/>
                 </a:solidFill>
@@ -14108,11 +14115,11 @@
           <a:p>
             <a:pPr algn="l">
               <a:lnSpc>
-                <a:spcPts val="1700"/>
+                <a:spcPts val="2000"/>
               </a:lnSpc>
             </a:pPr>
             <a:r>
-              <a:rPr sz="1400" b="0">
+              <a:rPr sz="1600" b="0">
                 <a:solidFill>
                   <a:srgbClr val="222222"/>
                 </a:solidFill>
@@ -14123,7 +14130,7 @@
               <a:t>    green.value(0)         </a:t>
             </a:r>
             <a:r>
-              <a:rPr sz="1400" b="0">
+              <a:rPr sz="1600" b="0">
                 <a:solidFill>
                   <a:srgbClr val="2E7D32"/>
                 </a:solidFill>
@@ -14137,11 +14144,11 @@
           <a:p>
             <a:pPr algn="l">
               <a:lnSpc>
-                <a:spcPts val="1700"/>
+                <a:spcPts val="2000"/>
               </a:lnSpc>
             </a:pPr>
             <a:r>
-              <a:rPr sz="1400" b="0">
+              <a:rPr sz="1600" b="0">
                 <a:solidFill>
                   <a:srgbClr val="222222"/>
                 </a:solidFill>
@@ -14155,11 +14162,11 @@
           <a:p>
             <a:pPr algn="l">
               <a:lnSpc>
-                <a:spcPts val="1700"/>
+                <a:spcPts val="2000"/>
               </a:lnSpc>
             </a:pPr>
             <a:r>
-              <a:rPr sz="1400" b="0">
+              <a:rPr sz="1600" b="0">
                 <a:solidFill>
                   <a:srgbClr val="222222"/>
                 </a:solidFill>
@@ -14170,7 +14177,7 @@
               <a:t>    yellow.value(1)        </a:t>
             </a:r>
             <a:r>
-              <a:rPr sz="1400" b="0">
+              <a:rPr sz="1600" b="0">
                 <a:solidFill>
                   <a:srgbClr val="2E7D32"/>
                 </a:solidFill>
@@ -14184,11 +14191,11 @@
           <a:p>
             <a:pPr algn="l">
               <a:lnSpc>
-                <a:spcPts val="1700"/>
+                <a:spcPts val="2000"/>
               </a:lnSpc>
             </a:pPr>
             <a:r>
-              <a:rPr sz="1400" b="0">
+              <a:rPr sz="1600" b="0">
                 <a:solidFill>
                   <a:srgbClr val="222222"/>
                 </a:solidFill>
@@ -14199,7 +14206,7 @@
               <a:t>    time.sleep(2)          </a:t>
             </a:r>
             <a:r>
-              <a:rPr sz="1400" b="0">
+              <a:rPr sz="1600" b="0">
                 <a:solidFill>
                   <a:srgbClr val="2E7D32"/>
                 </a:solidFill>
@@ -14213,11 +14220,11 @@
           <a:p>
             <a:pPr algn="l">
               <a:lnSpc>
-                <a:spcPts val="1700"/>
+                <a:spcPts val="2000"/>
               </a:lnSpc>
             </a:pPr>
             <a:r>
-              <a:rPr sz="1400" b="0">
+              <a:rPr sz="1600" b="0">
                 <a:solidFill>
                   <a:srgbClr val="222222"/>
                 </a:solidFill>
@@ -14228,7 +14235,7 @@
               <a:t>    yellow.value(0)        </a:t>
             </a:r>
             <a:r>
-              <a:rPr sz="1400" b="0">
+              <a:rPr sz="1600" b="0">
                 <a:solidFill>
                   <a:srgbClr val="2E7D32"/>
                 </a:solidFill>
@@ -14242,11 +14249,11 @@
           <a:p>
             <a:pPr algn="l">
               <a:lnSpc>
-                <a:spcPts val="1700"/>
+                <a:spcPts val="2000"/>
               </a:lnSpc>
             </a:pPr>
             <a:r>
-              <a:rPr sz="1400" b="0">
+              <a:rPr sz="1600" b="0">
                 <a:solidFill>
                   <a:srgbClr val="222222"/>
                 </a:solidFill>
@@ -14260,11 +14267,11 @@
           <a:p>
             <a:pPr algn="l">
               <a:lnSpc>
-                <a:spcPts val="1700"/>
+                <a:spcPts val="2000"/>
               </a:lnSpc>
             </a:pPr>
             <a:r>
-              <a:rPr sz="1400" b="0">
+              <a:rPr sz="1600" b="0">
                 <a:solidFill>
                   <a:srgbClr val="222222"/>
                 </a:solidFill>
@@ -14275,7 +14282,7 @@
               <a:t>    red.value(1)           </a:t>
             </a:r>
             <a:r>
-              <a:rPr sz="1400" b="0">
+              <a:rPr sz="1600" b="0">
                 <a:solidFill>
                   <a:srgbClr val="2E7D32"/>
                 </a:solidFill>
@@ -14289,11 +14296,11 @@
           <a:p>
             <a:pPr algn="l">
               <a:lnSpc>
-                <a:spcPts val="1700"/>
+                <a:spcPts val="2000"/>
               </a:lnSpc>
             </a:pPr>
             <a:r>
-              <a:rPr sz="1400" b="0">
+              <a:rPr sz="1600" b="0">
                 <a:solidFill>
                   <a:srgbClr val="222222"/>
                 </a:solidFill>
@@ -14304,7 +14311,7 @@
               <a:t>    time.sleep(5)          </a:t>
             </a:r>
             <a:r>
-              <a:rPr sz="1400" b="0">
+              <a:rPr sz="1600" b="0">
                 <a:solidFill>
                   <a:srgbClr val="2E7D32"/>
                 </a:solidFill>
@@ -14318,11 +14325,11 @@
           <a:p>
             <a:pPr algn="l">
               <a:lnSpc>
-                <a:spcPts val="1700"/>
+                <a:spcPts val="2000"/>
               </a:lnSpc>
             </a:pPr>
             <a:r>
-              <a:rPr sz="1400" b="0">
+              <a:rPr sz="1600" b="0">
                 <a:solidFill>
                   <a:srgbClr val="222222"/>
                 </a:solidFill>
@@ -14333,7 +14340,7 @@
               <a:t>    red.value(0)           </a:t>
             </a:r>
             <a:r>
-              <a:rPr sz="1400" b="0">
+              <a:rPr sz="1600" b="0">
                 <a:solidFill>
                   <a:srgbClr val="2E7D32"/>
                 </a:solidFill>
@@ -14354,8 +14361,8 @@
         </p:nvSpPr>
         <p:spPr>
           <a:xfrm>
-            <a:off x="640080" y="1547368"/>
-            <a:ext cx="1167130" cy="228600"/>
+            <a:off x="640080" y="1585468"/>
+            <a:ext cx="1320800" cy="266700"/>
           </a:xfrm>
           <a:prstGeom prst="roundRect">
             <a:avLst/>
@@ -16999,7 +17006,7 @@
         <p:spPr>
           <a:xfrm>
             <a:off x="548640" y="1325880"/>
-            <a:ext cx="4389120" cy="2171700"/>
+            <a:ext cx="4389120" cy="2743200"/>
           </a:xfrm>
           <a:prstGeom prst="rect">
             <a:avLst/>
@@ -17045,7 +17052,7 @@
         <p:spPr>
           <a:xfrm>
             <a:off x="548640" y="1325880"/>
-            <a:ext cx="4389120" cy="2171700"/>
+            <a:ext cx="4389120" cy="2743200"/>
           </a:xfrm>
           <a:prstGeom prst="rect">
             <a:avLst/>
@@ -17060,11 +17067,11 @@
           <a:p>
             <a:pPr algn="l">
               <a:lnSpc>
-                <a:spcPts val="1700"/>
+                <a:spcPts val="2200"/>
               </a:lnSpc>
             </a:pPr>
             <a:r>
-              <a:rPr sz="1400" b="0">
+              <a:rPr sz="1800" b="0">
                 <a:solidFill>
                   <a:srgbClr val="222222"/>
                 </a:solidFill>
@@ -17078,11 +17085,11 @@
           <a:p>
             <a:pPr algn="l">
               <a:lnSpc>
-                <a:spcPts val="1700"/>
+                <a:spcPts val="2200"/>
               </a:lnSpc>
             </a:pPr>
             <a:r>
-              <a:rPr sz="1400" b="0">
+              <a:rPr sz="1800" b="0">
                 <a:solidFill>
                   <a:srgbClr val="222222"/>
                 </a:solidFill>
@@ -17096,11 +17103,11 @@
           <a:p>
             <a:pPr algn="l">
               <a:lnSpc>
-                <a:spcPts val="1700"/>
+                <a:spcPts val="2200"/>
               </a:lnSpc>
             </a:pPr>
             <a:r>
-              <a:rPr sz="1400" b="0">
+              <a:rPr sz="1800" b="0">
                 <a:solidFill>
                   <a:srgbClr val="222222"/>
                 </a:solidFill>
@@ -17114,11 +17121,11 @@
           <a:p>
             <a:pPr algn="l">
               <a:lnSpc>
-                <a:spcPts val="1700"/>
+                <a:spcPts val="2200"/>
               </a:lnSpc>
             </a:pPr>
             <a:r>
-              <a:rPr sz="1400" b="0">
+              <a:rPr sz="1800" b="0">
                 <a:solidFill>
                   <a:srgbClr val="222222"/>
                 </a:solidFill>
@@ -17132,11 +17139,11 @@
           <a:p>
             <a:pPr algn="l">
               <a:lnSpc>
-                <a:spcPts val="1700"/>
+                <a:spcPts val="2200"/>
               </a:lnSpc>
             </a:pPr>
             <a:r>
-              <a:rPr sz="1400" b="0">
+              <a:rPr sz="1800" b="0">
                 <a:solidFill>
                   <a:srgbClr val="222222"/>
                 </a:solidFill>
@@ -17150,11 +17157,11 @@
           <a:p>
             <a:pPr algn="l">
               <a:lnSpc>
-                <a:spcPts val="1700"/>
+                <a:spcPts val="2200"/>
               </a:lnSpc>
             </a:pPr>
             <a:r>
-              <a:rPr sz="1400" b="0">
+              <a:rPr sz="1800" b="0">
                 <a:solidFill>
                   <a:srgbClr val="222222"/>
                 </a:solidFill>
@@ -17168,11 +17175,11 @@
           <a:p>
             <a:pPr algn="l">
               <a:lnSpc>
-                <a:spcPts val="1700"/>
+                <a:spcPts val="2200"/>
               </a:lnSpc>
             </a:pPr>
             <a:r>
-              <a:rPr sz="1400" b="0">
+              <a:rPr sz="1800" b="0">
                 <a:solidFill>
                   <a:srgbClr val="222222"/>
                 </a:solidFill>
@@ -17186,11 +17193,11 @@
           <a:p>
             <a:pPr algn="l">
               <a:lnSpc>
-                <a:spcPts val="1700"/>
+                <a:spcPts val="2200"/>
               </a:lnSpc>
             </a:pPr>
             <a:r>
-              <a:rPr sz="1400" b="0">
+              <a:rPr sz="1800" b="0">
                 <a:solidFill>
                   <a:srgbClr val="222222"/>
                 </a:solidFill>
@@ -17204,11 +17211,11 @@
           <a:p>
             <a:pPr algn="l">
               <a:lnSpc>
-                <a:spcPts val="1700"/>
+                <a:spcPts val="2200"/>
               </a:lnSpc>
             </a:pPr>
             <a:r>
-              <a:rPr sz="1400" b="0">
+              <a:rPr sz="1800" b="0">
                 <a:solidFill>
                   <a:srgbClr val="222222"/>
                 </a:solidFill>
@@ -18769,7 +18776,7 @@
         <p:spPr>
           <a:xfrm>
             <a:off x="548640" y="1234440"/>
-            <a:ext cx="11094415" cy="4330700"/>
+            <a:ext cx="11094415" cy="5054600"/>
           </a:xfrm>
           <a:prstGeom prst="rect">
             <a:avLst/>
@@ -18815,7 +18822,7 @@
         <p:spPr>
           <a:xfrm>
             <a:off x="548640" y="1234440"/>
-            <a:ext cx="11094415" cy="4330700"/>
+            <a:ext cx="11094415" cy="5054600"/>
           </a:xfrm>
           <a:prstGeom prst="rect">
             <a:avLst/>
@@ -18830,11 +18837,11 @@
           <a:p>
             <a:pPr algn="l">
               <a:lnSpc>
-                <a:spcPts val="1700"/>
+                <a:spcPts val="2000"/>
               </a:lnSpc>
             </a:pPr>
             <a:r>
-              <a:rPr sz="1400" b="0">
+              <a:rPr sz="1600" b="0">
                 <a:solidFill>
                   <a:srgbClr val="2E7D32"/>
                 </a:solidFill>
@@ -18848,11 +18855,11 @@
           <a:p>
             <a:pPr algn="l">
               <a:lnSpc>
-                <a:spcPts val="1700"/>
+                <a:spcPts val="2000"/>
               </a:lnSpc>
             </a:pPr>
             <a:r>
-              <a:rPr sz="1400" b="0">
+              <a:rPr sz="1600" b="0">
                 <a:solidFill>
                   <a:srgbClr val="222222"/>
                 </a:solidFill>
@@ -18866,11 +18873,11 @@
           <a:p>
             <a:pPr algn="l">
               <a:lnSpc>
-                <a:spcPts val="1700"/>
+                <a:spcPts val="2000"/>
               </a:lnSpc>
             </a:pPr>
             <a:r>
-              <a:rPr sz="1400" b="0">
+              <a:rPr sz="1600" b="0">
                 <a:solidFill>
                   <a:srgbClr val="222222"/>
                 </a:solidFill>
@@ -18884,11 +18891,11 @@
           <a:p>
             <a:pPr algn="l">
               <a:lnSpc>
-                <a:spcPts val="1700"/>
+                <a:spcPts val="2000"/>
               </a:lnSpc>
             </a:pPr>
             <a:r>
-              <a:rPr sz="1400" b="0">
+              <a:rPr sz="1600" b="0">
                 <a:solidFill>
                   <a:srgbClr val="222222"/>
                 </a:solidFill>
@@ -18902,11 +18909,11 @@
           <a:p>
             <a:pPr algn="l">
               <a:lnSpc>
-                <a:spcPts val="1700"/>
+                <a:spcPts val="2000"/>
               </a:lnSpc>
             </a:pPr>
             <a:r>
-              <a:rPr sz="1400" b="0">
+              <a:rPr sz="1600" b="0">
                 <a:solidFill>
                   <a:srgbClr val="2E7D32"/>
                 </a:solidFill>
@@ -18920,11 +18927,11 @@
           <a:p>
             <a:pPr algn="l">
               <a:lnSpc>
-                <a:spcPts val="1700"/>
+                <a:spcPts val="2000"/>
               </a:lnSpc>
             </a:pPr>
             <a:r>
-              <a:rPr sz="1400" b="0">
+              <a:rPr sz="1600" b="0">
                 <a:solidFill>
                   <a:srgbClr val="222222"/>
                 </a:solidFill>
@@ -18935,7 +18942,7 @@
               <a:t>red    = Pin(2, Pin.OUT)   </a:t>
             </a:r>
             <a:r>
-              <a:rPr sz="1400" b="0">
+              <a:rPr sz="1600" b="0">
                 <a:solidFill>
                   <a:srgbClr val="2E7D32"/>
                 </a:solidFill>
@@ -18949,11 +18956,11 @@
           <a:p>
             <a:pPr algn="l">
               <a:lnSpc>
-                <a:spcPts val="1700"/>
+                <a:spcPts val="2000"/>
               </a:lnSpc>
             </a:pPr>
             <a:r>
-              <a:rPr sz="1400" b="0">
+              <a:rPr sz="1600" b="0">
                 <a:solidFill>
                   <a:srgbClr val="222222"/>
                 </a:solidFill>
@@ -18964,7 +18971,7 @@
               <a:t>yellow = Pin(3, Pin.OUT)   </a:t>
             </a:r>
             <a:r>
-              <a:rPr sz="1400" b="0">
+              <a:rPr sz="1600" b="0">
                 <a:solidFill>
                   <a:srgbClr val="2E7D32"/>
                 </a:solidFill>
@@ -18978,11 +18985,11 @@
           <a:p>
             <a:pPr algn="l">
               <a:lnSpc>
-                <a:spcPts val="1700"/>
+                <a:spcPts val="2000"/>
               </a:lnSpc>
             </a:pPr>
             <a:r>
-              <a:rPr sz="1400" b="0">
+              <a:rPr sz="1600" b="0">
                 <a:solidFill>
                   <a:srgbClr val="222222"/>
                 </a:solidFill>
@@ -18993,7 +19000,7 @@
               <a:t>green  = Pin(4, Pin.OUT)   </a:t>
             </a:r>
             <a:r>
-              <a:rPr sz="1400" b="0">
+              <a:rPr sz="1600" b="0">
                 <a:solidFill>
                   <a:srgbClr val="2E7D32"/>
                 </a:solidFill>
@@ -19007,11 +19014,11 @@
           <a:p>
             <a:pPr algn="l">
               <a:lnSpc>
-                <a:spcPts val="1700"/>
+                <a:spcPts val="2000"/>
               </a:lnSpc>
             </a:pPr>
             <a:r>
-              <a:rPr sz="1400" b="0">
+              <a:rPr sz="1600" b="0">
                 <a:solidFill>
                   <a:srgbClr val="222222"/>
                 </a:solidFill>
@@ -19025,11 +19032,11 @@
           <a:p>
             <a:pPr algn="l">
               <a:lnSpc>
-                <a:spcPts val="1700"/>
+                <a:spcPts val="2000"/>
               </a:lnSpc>
             </a:pPr>
             <a:r>
-              <a:rPr sz="1400" b="0">
+              <a:rPr sz="1600" b="0">
                 <a:solidFill>
                   <a:srgbClr val="2E7D32"/>
                 </a:solidFill>
@@ -19043,11 +19050,11 @@
           <a:p>
             <a:pPr algn="l">
               <a:lnSpc>
-                <a:spcPts val="1700"/>
+                <a:spcPts val="2000"/>
               </a:lnSpc>
             </a:pPr>
             <a:r>
-              <a:rPr sz="1400" b="0">
+              <a:rPr sz="1600" b="0">
                 <a:solidFill>
                   <a:srgbClr val="2E7D32"/>
                 </a:solidFill>
@@ -19061,11 +19068,11 @@
           <a:p>
             <a:pPr algn="l">
               <a:lnSpc>
-                <a:spcPts val="1700"/>
+                <a:spcPts val="2000"/>
               </a:lnSpc>
             </a:pPr>
             <a:r>
-              <a:rPr sz="1400" b="0">
+              <a:rPr sz="1600" b="0">
                 <a:solidFill>
                   <a:srgbClr val="2E7D32"/>
                 </a:solidFill>
@@ -19079,11 +19086,11 @@
           <a:p>
             <a:pPr algn="l">
               <a:lnSpc>
-                <a:spcPts val="1700"/>
+                <a:spcPts val="2000"/>
               </a:lnSpc>
             </a:pPr>
             <a:r>
-              <a:rPr sz="1400" b="0">
+              <a:rPr sz="1600" b="0">
                 <a:solidFill>
                   <a:srgbClr val="2E7D32"/>
                 </a:solidFill>
@@ -19097,11 +19104,11 @@
           <a:p>
             <a:pPr algn="l">
               <a:lnSpc>
-                <a:spcPts val="1700"/>
+                <a:spcPts val="2000"/>
               </a:lnSpc>
             </a:pPr>
             <a:r>
-              <a:rPr sz="1400" b="0">
+              <a:rPr sz="1600" b="0">
                 <a:solidFill>
                   <a:srgbClr val="222222"/>
                 </a:solidFill>
@@ -19115,11 +19122,11 @@
           <a:p>
             <a:pPr algn="l">
               <a:lnSpc>
-                <a:spcPts val="1700"/>
+                <a:spcPts val="2000"/>
               </a:lnSpc>
             </a:pPr>
             <a:r>
-              <a:rPr sz="1400" b="0">
+              <a:rPr sz="1600" b="0">
                 <a:solidFill>
                   <a:srgbClr val="222222"/>
                 </a:solidFill>
@@ -19133,11 +19140,11 @@
           <a:p>
             <a:pPr algn="l">
               <a:lnSpc>
-                <a:spcPts val="1700"/>
+                <a:spcPts val="2000"/>
               </a:lnSpc>
             </a:pPr>
             <a:r>
-              <a:rPr sz="1400" b="0">
+              <a:rPr sz="1600" b="0">
                 <a:solidFill>
                   <a:srgbClr val="2E7D32"/>
                 </a:solidFill>
@@ -19151,11 +19158,11 @@
           <a:p>
             <a:pPr algn="l">
               <a:lnSpc>
-                <a:spcPts val="1700"/>
+                <a:spcPts val="2000"/>
               </a:lnSpc>
             </a:pPr>
             <a:r>
-              <a:rPr sz="1400" b="0">
+              <a:rPr sz="1600" b="0">
                 <a:solidFill>
                   <a:srgbClr val="222222"/>
                 </a:solidFill>
@@ -19169,11 +19176,11 @@
           <a:p>
             <a:pPr algn="l">
               <a:lnSpc>
-                <a:spcPts val="1700"/>
+                <a:spcPts val="2000"/>
               </a:lnSpc>
             </a:pPr>
             <a:r>
-              <a:rPr sz="1400" b="0">
+              <a:rPr sz="1600" b="0">
                 <a:solidFill>
                   <a:srgbClr val="222222"/>
                 </a:solidFill>
@@ -19187,11 +19194,11 @@
           <a:p>
             <a:pPr algn="l">
               <a:lnSpc>
-                <a:spcPts val="1700"/>
+                <a:spcPts val="2000"/>
               </a:lnSpc>
             </a:pPr>
             <a:r>
-              <a:rPr sz="1400" b="0">
+              <a:rPr sz="1600" b="0">
                 <a:solidFill>
                   <a:srgbClr val="222222"/>
                 </a:solidFill>
@@ -19212,8 +19219,8 @@
         </p:nvSpPr>
         <p:spPr>
           <a:xfrm>
-            <a:off x="640080" y="4785868"/>
-            <a:ext cx="1460500" cy="228600"/>
+            <a:off x="640080" y="5395468"/>
+            <a:ext cx="1656080" cy="266700"/>
           </a:xfrm>
           <a:prstGeom prst="roundRect">
             <a:avLst/>
@@ -19256,8 +19263,8 @@
         </p:nvSpPr>
         <p:spPr>
           <a:xfrm>
-            <a:off x="1031240" y="5001768"/>
-            <a:ext cx="3025140" cy="228600"/>
+            <a:off x="1087120" y="5649468"/>
+            <a:ext cx="3444240" cy="266700"/>
           </a:xfrm>
           <a:prstGeom prst="roundRect">
             <a:avLst/>
@@ -19300,8 +19307,8 @@
         </p:nvSpPr>
         <p:spPr>
           <a:xfrm>
-            <a:off x="548640" y="6080760"/>
-            <a:ext cx="11094415" cy="365760"/>
+            <a:off x="548640" y="6446520"/>
+            <a:ext cx="8534095" cy="320040"/>
           </a:xfrm>
           <a:prstGeom prst="rect">
             <a:avLst/>
@@ -19320,7 +19327,7 @@
               </a:spcAft>
             </a:pPr>
             <a:r>
-              <a:rPr sz="1400" b="0">
+              <a:rPr sz="1200" b="0">
                 <a:solidFill>
                   <a:srgbClr val="666666"/>
                 </a:solidFill>
@@ -19649,7 +19656,7 @@
         <p:spPr>
           <a:xfrm>
             <a:off x="548640" y="1234440"/>
-            <a:ext cx="11094415" cy="4330700"/>
+            <a:ext cx="11094415" cy="5054600"/>
           </a:xfrm>
           <a:prstGeom prst="rect">
             <a:avLst/>
@@ -19695,7 +19702,7 @@
         <p:spPr>
           <a:xfrm>
             <a:off x="548640" y="1234440"/>
-            <a:ext cx="11094415" cy="4330700"/>
+            <a:ext cx="11094415" cy="5054600"/>
           </a:xfrm>
           <a:prstGeom prst="rect">
             <a:avLst/>
@@ -19710,11 +19717,11 @@
           <a:p>
             <a:pPr algn="l">
               <a:lnSpc>
-                <a:spcPts val="1700"/>
+                <a:spcPts val="2000"/>
               </a:lnSpc>
             </a:pPr>
             <a:r>
-              <a:rPr sz="1400" b="0">
+              <a:rPr sz="1600" b="0">
                 <a:solidFill>
                   <a:srgbClr val="2E7D32"/>
                 </a:solidFill>
@@ -19728,11 +19735,11 @@
           <a:p>
             <a:pPr algn="l">
               <a:lnSpc>
-                <a:spcPts val="1700"/>
+                <a:spcPts val="2000"/>
               </a:lnSpc>
             </a:pPr>
             <a:r>
-              <a:rPr sz="1400" b="0">
+              <a:rPr sz="1600" b="0">
                 <a:solidFill>
                   <a:srgbClr val="222222"/>
                 </a:solidFill>
@@ -19746,11 +19753,11 @@
           <a:p>
             <a:pPr algn="l">
               <a:lnSpc>
-                <a:spcPts val="1700"/>
+                <a:spcPts val="2000"/>
               </a:lnSpc>
             </a:pPr>
             <a:r>
-              <a:rPr sz="1400" b="0">
+              <a:rPr sz="1600" b="0">
                 <a:solidFill>
                   <a:srgbClr val="222222"/>
                 </a:solidFill>
@@ -19761,7 +19768,7 @@
               <a:t>green.value(1)             </a:t>
             </a:r>
             <a:r>
-              <a:rPr sz="1400" b="0">
+              <a:rPr sz="1600" b="0">
                 <a:solidFill>
                   <a:srgbClr val="2E7D32"/>
                 </a:solidFill>
@@ -19775,11 +19782,11 @@
           <a:p>
             <a:pPr algn="l">
               <a:lnSpc>
-                <a:spcPts val="1700"/>
+                <a:spcPts val="2000"/>
               </a:lnSpc>
             </a:pPr>
             <a:r>
-              <a:rPr sz="1400" b="0">
+              <a:rPr sz="1600" b="0">
                 <a:solidFill>
                   <a:srgbClr val="222222"/>
                 </a:solidFill>
@@ -19793,11 +19800,11 @@
           <a:p>
             <a:pPr algn="l">
               <a:lnSpc>
-                <a:spcPts val="1700"/>
+                <a:spcPts val="2000"/>
               </a:lnSpc>
             </a:pPr>
             <a:r>
-              <a:rPr sz="1400" b="0">
+              <a:rPr sz="1600" b="0">
                 <a:solidFill>
                   <a:srgbClr val="222222"/>
                 </a:solidFill>
@@ -19811,11 +19818,11 @@
           <a:p>
             <a:pPr algn="l">
               <a:lnSpc>
-                <a:spcPts val="1700"/>
+                <a:spcPts val="2000"/>
               </a:lnSpc>
             </a:pPr>
             <a:r>
-              <a:rPr sz="1400" b="0">
+              <a:rPr sz="1600" b="0">
                 <a:solidFill>
                   <a:srgbClr val="2E7D32"/>
                 </a:solidFill>
@@ -19829,11 +19836,11 @@
           <a:p>
             <a:pPr algn="l">
               <a:lnSpc>
-                <a:spcPts val="1700"/>
+                <a:spcPts val="2000"/>
               </a:lnSpc>
             </a:pPr>
             <a:r>
-              <a:rPr sz="1400" b="0">
+              <a:rPr sz="1600" b="0">
                 <a:solidFill>
                   <a:srgbClr val="222222"/>
                 </a:solidFill>
@@ -19847,11 +19854,11 @@
           <a:p>
             <a:pPr algn="l">
               <a:lnSpc>
-                <a:spcPts val="1700"/>
+                <a:spcPts val="2000"/>
               </a:lnSpc>
             </a:pPr>
             <a:r>
-              <a:rPr sz="1400" b="0">
+              <a:rPr sz="1600" b="0">
                 <a:solidFill>
                   <a:srgbClr val="222222"/>
                 </a:solidFill>
@@ -19862,7 +19869,7 @@
               <a:t>    </a:t>
             </a:r>
             <a:r>
-              <a:rPr sz="1400" b="0">
+              <a:rPr sz="1600" b="0">
                 <a:solidFill>
                   <a:srgbClr val="2E7D32"/>
                 </a:solidFill>
@@ -19876,11 +19883,11 @@
           <a:p>
             <a:pPr algn="l">
               <a:lnSpc>
-                <a:spcPts val="1700"/>
+                <a:spcPts val="2000"/>
               </a:lnSpc>
             </a:pPr>
             <a:r>
-              <a:rPr sz="1400" b="0">
+              <a:rPr sz="1600" b="0">
                 <a:solidFill>
                   <a:srgbClr val="222222"/>
                 </a:solidFill>
@@ -19894,11 +19901,11 @@
           <a:p>
             <a:pPr algn="l">
               <a:lnSpc>
-                <a:spcPts val="1700"/>
+                <a:spcPts val="2000"/>
               </a:lnSpc>
             </a:pPr>
             <a:r>
-              <a:rPr sz="1400" b="0">
+              <a:rPr sz="1600" b="0">
                 <a:solidFill>
                   <a:srgbClr val="222222"/>
                 </a:solidFill>
@@ -19909,7 +19916,7 @@
               <a:t>        time.sleep_ms(20)              </a:t>
             </a:r>
             <a:r>
-              <a:rPr sz="1400" b="0">
+              <a:rPr sz="1600" b="0">
                 <a:solidFill>
                   <a:srgbClr val="2E7D32"/>
                 </a:solidFill>
@@ -19923,11 +19930,11 @@
           <a:p>
             <a:pPr algn="l">
               <a:lnSpc>
-                <a:spcPts val="1700"/>
+                <a:spcPts val="2000"/>
               </a:lnSpc>
             </a:pPr>
             <a:r>
-              <a:rPr sz="1400" b="0">
+              <a:rPr sz="1600" b="0">
                 <a:solidFill>
                   <a:srgbClr val="222222"/>
                 </a:solidFill>
@@ -19938,7 +19945,7 @@
               <a:t>        if button.value() == 0:        </a:t>
             </a:r>
             <a:r>
-              <a:rPr sz="1400" b="0">
+              <a:rPr sz="1600" b="0">
                 <a:solidFill>
                   <a:srgbClr val="2E7D32"/>
                 </a:solidFill>
@@ -19952,11 +19959,11 @@
           <a:p>
             <a:pPr algn="l">
               <a:lnSpc>
-                <a:spcPts val="1700"/>
+                <a:spcPts val="2000"/>
               </a:lnSpc>
             </a:pPr>
             <a:r>
-              <a:rPr sz="1400" b="0">
+              <a:rPr sz="1600" b="0">
                 <a:solidFill>
                   <a:srgbClr val="222222"/>
                 </a:solidFill>
@@ -19970,11 +19977,11 @@
           <a:p>
             <a:pPr algn="l">
               <a:lnSpc>
-                <a:spcPts val="1700"/>
+                <a:spcPts val="2000"/>
               </a:lnSpc>
             </a:pPr>
             <a:r>
-              <a:rPr sz="1400" b="0">
+              <a:rPr sz="1600" b="0">
                 <a:solidFill>
                   <a:srgbClr val="222222"/>
                 </a:solidFill>
@@ -19985,7 +19992,7 @@
               <a:t>            time.sleep(3)              </a:t>
             </a:r>
             <a:r>
-              <a:rPr sz="1400" b="0">
+              <a:rPr sz="1600" b="0">
                 <a:solidFill>
                   <a:srgbClr val="2E7D32"/>
                 </a:solidFill>
@@ -19999,11 +20006,11 @@
           <a:p>
             <a:pPr algn="l">
               <a:lnSpc>
-                <a:spcPts val="1700"/>
+                <a:spcPts val="2000"/>
               </a:lnSpc>
             </a:pPr>
             <a:r>
-              <a:rPr sz="1400" b="0">
+              <a:rPr sz="1600" b="0">
                 <a:solidFill>
                   <a:srgbClr val="222222"/>
                 </a:solidFill>
@@ -20017,11 +20024,11 @@
           <a:p>
             <a:pPr algn="l">
               <a:lnSpc>
-                <a:spcPts val="1700"/>
+                <a:spcPts val="2000"/>
               </a:lnSpc>
             </a:pPr>
             <a:r>
-              <a:rPr sz="1400" b="0">
+              <a:rPr sz="1600" b="0">
                 <a:solidFill>
                   <a:srgbClr val="222222"/>
                 </a:solidFill>
@@ -20032,7 +20039,7 @@
               <a:t>            </a:t>
             </a:r>
             <a:r>
-              <a:rPr sz="1400" b="0">
+              <a:rPr sz="1600" b="0">
                 <a:solidFill>
                   <a:srgbClr val="2E7D32"/>
                 </a:solidFill>
@@ -20046,11 +20053,11 @@
           <a:p>
             <a:pPr algn="l">
               <a:lnSpc>
-                <a:spcPts val="1700"/>
+                <a:spcPts val="2000"/>
               </a:lnSpc>
             </a:pPr>
             <a:r>
-              <a:rPr sz="1400" b="0">
+              <a:rPr sz="1600" b="0">
                 <a:solidFill>
                   <a:srgbClr val="222222"/>
                 </a:solidFill>
@@ -20064,11 +20071,11 @@
           <a:p>
             <a:pPr algn="l">
               <a:lnSpc>
-                <a:spcPts val="1700"/>
+                <a:spcPts val="2000"/>
               </a:lnSpc>
             </a:pPr>
             <a:r>
-              <a:rPr sz="1400" b="0">
+              <a:rPr sz="1600" b="0">
                 <a:solidFill>
                   <a:srgbClr val="222222"/>
                 </a:solidFill>
@@ -20082,11 +20089,11 @@
           <a:p>
             <a:pPr algn="l">
               <a:lnSpc>
-                <a:spcPts val="1700"/>
+                <a:spcPts val="2000"/>
               </a:lnSpc>
             </a:pPr>
             <a:r>
-              <a:rPr sz="1400" b="0">
+              <a:rPr sz="1600" b="0">
                 <a:solidFill>
                   <a:srgbClr val="222222"/>
                 </a:solidFill>
@@ -20100,11 +20107,11 @@
           <a:p>
             <a:pPr algn="l">
               <a:lnSpc>
-                <a:spcPts val="1700"/>
+                <a:spcPts val="2000"/>
               </a:lnSpc>
             </a:pPr>
             <a:r>
-              <a:rPr sz="1400" b="0">
+              <a:rPr sz="1600" b="0">
                 <a:solidFill>
                   <a:srgbClr val="222222"/>
                 </a:solidFill>
@@ -20115,7 +20122,7 @@
               <a:t>            time.sleep(2)              </a:t>
             </a:r>
             <a:r>
-              <a:rPr sz="1400" b="0">
+              <a:rPr sz="1600" b="0">
                 <a:solidFill>
                   <a:srgbClr val="2E7D32"/>
                 </a:solidFill>
@@ -20136,8 +20143,8 @@
         </p:nvSpPr>
         <p:spPr>
           <a:xfrm>
-            <a:off x="640080" y="2626868"/>
-            <a:ext cx="1167130" cy="228600"/>
+            <a:off x="640080" y="2855468"/>
+            <a:ext cx="1320800" cy="266700"/>
           </a:xfrm>
           <a:prstGeom prst="roundRect">
             <a:avLst/>
@@ -20180,8 +20187,8 @@
         </p:nvSpPr>
         <p:spPr>
           <a:xfrm>
-            <a:off x="1031240" y="3058668"/>
-            <a:ext cx="2340610" cy="228600"/>
+            <a:off x="1087120" y="3363468"/>
+            <a:ext cx="2661920" cy="266700"/>
           </a:xfrm>
           <a:prstGeom prst="roundRect">
             <a:avLst/>
@@ -20224,8 +20231,8 @@
         </p:nvSpPr>
         <p:spPr>
           <a:xfrm>
-            <a:off x="1422400" y="3490468"/>
-            <a:ext cx="2340610" cy="228600"/>
+            <a:off x="1534160" y="3871468"/>
+            <a:ext cx="2661920" cy="266700"/>
           </a:xfrm>
           <a:prstGeom prst="roundRect">
             <a:avLst/>
@@ -20268,8 +20275,8 @@
         </p:nvSpPr>
         <p:spPr>
           <a:xfrm>
-            <a:off x="548640" y="6080760"/>
-            <a:ext cx="11094415" cy="365760"/>
+            <a:off x="548640" y="6446520"/>
+            <a:ext cx="8534095" cy="320040"/>
           </a:xfrm>
           <a:prstGeom prst="rect">
             <a:avLst/>
@@ -20288,7 +20295,7 @@
               </a:spcAft>
             </a:pPr>
             <a:r>
-              <a:rPr sz="1400" b="0">
+              <a:rPr sz="1200" b="0">
                 <a:solidFill>
                   <a:srgbClr val="666666"/>
                 </a:solidFill>
@@ -20560,7 +20567,7 @@
         <p:spPr>
           <a:xfrm>
             <a:off x="548640" y="1234440"/>
-            <a:ext cx="11094415" cy="4114800"/>
+            <a:ext cx="11094415" cy="4800600"/>
           </a:xfrm>
           <a:prstGeom prst="rect">
             <a:avLst/>
@@ -20606,7 +20613,7 @@
         <p:spPr>
           <a:xfrm>
             <a:off x="548640" y="1234440"/>
-            <a:ext cx="11094415" cy="4114800"/>
+            <a:ext cx="11094415" cy="4800600"/>
           </a:xfrm>
           <a:prstGeom prst="rect">
             <a:avLst/>
@@ -20621,11 +20628,11 @@
           <a:p>
             <a:pPr algn="l">
               <a:lnSpc>
-                <a:spcPts val="1700"/>
+                <a:spcPts val="2000"/>
               </a:lnSpc>
             </a:pPr>
             <a:r>
-              <a:rPr sz="1400" b="0">
+              <a:rPr sz="1600" b="0">
                 <a:solidFill>
                   <a:srgbClr val="222222"/>
                 </a:solidFill>
@@ -20636,7 +20643,7 @@
               <a:t>            </a:t>
             </a:r>
             <a:r>
-              <a:rPr sz="1400" b="0">
+              <a:rPr sz="1600" b="0">
                 <a:solidFill>
                   <a:srgbClr val="2E7D32"/>
                 </a:solidFill>
@@ -20650,11 +20657,11 @@
           <a:p>
             <a:pPr algn="l">
               <a:lnSpc>
-                <a:spcPts val="1700"/>
+                <a:spcPts val="2000"/>
               </a:lnSpc>
             </a:pPr>
             <a:r>
-              <a:rPr sz="1400" b="0">
+              <a:rPr sz="1600" b="0">
                 <a:solidFill>
                   <a:srgbClr val="222222"/>
                 </a:solidFill>
@@ -20668,11 +20675,11 @@
           <a:p>
             <a:pPr algn="l">
               <a:lnSpc>
-                <a:spcPts val="1700"/>
+                <a:spcPts val="2000"/>
               </a:lnSpc>
             </a:pPr>
             <a:r>
-              <a:rPr sz="1400" b="0">
+              <a:rPr sz="1600" b="0">
                 <a:solidFill>
                   <a:srgbClr val="222222"/>
                 </a:solidFill>
@@ -20686,11 +20693,11 @@
           <a:p>
             <a:pPr algn="l">
               <a:lnSpc>
-                <a:spcPts val="1700"/>
+                <a:spcPts val="2000"/>
               </a:lnSpc>
             </a:pPr>
             <a:r>
-              <a:rPr sz="1400" b="0">
+              <a:rPr sz="1600" b="0">
                 <a:solidFill>
                   <a:srgbClr val="222222"/>
                 </a:solidFill>
@@ -20704,11 +20711,11 @@
           <a:p>
             <a:pPr algn="l">
               <a:lnSpc>
-                <a:spcPts val="1700"/>
+                <a:spcPts val="2000"/>
               </a:lnSpc>
             </a:pPr>
             <a:r>
-              <a:rPr sz="1400" b="0">
+              <a:rPr sz="1600" b="0">
                 <a:solidFill>
                   <a:srgbClr val="222222"/>
                 </a:solidFill>
@@ -20719,7 +20726,7 @@
               <a:t>            time.sleep(5)              </a:t>
             </a:r>
             <a:r>
-              <a:rPr sz="1400" b="0">
+              <a:rPr sz="1600" b="0">
                 <a:solidFill>
                   <a:srgbClr val="2E7D32"/>
                 </a:solidFill>
@@ -20733,11 +20740,11 @@
           <a:p>
             <a:pPr algn="l">
               <a:lnSpc>
-                <a:spcPts val="1700"/>
+                <a:spcPts val="2000"/>
               </a:lnSpc>
             </a:pPr>
             <a:r>
-              <a:rPr sz="1400" b="0">
+              <a:rPr sz="1600" b="0">
                 <a:solidFill>
                   <a:srgbClr val="222222"/>
                 </a:solidFill>
@@ -20751,11 +20758,11 @@
           <a:p>
             <a:pPr algn="l">
               <a:lnSpc>
-                <a:spcPts val="1700"/>
+                <a:spcPts val="2000"/>
               </a:lnSpc>
             </a:pPr>
             <a:r>
-              <a:rPr sz="1400" b="0">
+              <a:rPr sz="1600" b="0">
                 <a:solidFill>
                   <a:srgbClr val="222222"/>
                 </a:solidFill>
@@ -20766,7 +20773,7 @@
               <a:t>            </a:t>
             </a:r>
             <a:r>
-              <a:rPr sz="1400" b="0">
+              <a:rPr sz="1600" b="0">
                 <a:solidFill>
                   <a:srgbClr val="2E7D32"/>
                 </a:solidFill>
@@ -20780,11 +20787,11 @@
           <a:p>
             <a:pPr algn="l">
               <a:lnSpc>
-                <a:spcPts val="1700"/>
+                <a:spcPts val="2000"/>
               </a:lnSpc>
             </a:pPr>
             <a:r>
-              <a:rPr sz="1400" b="0">
+              <a:rPr sz="1600" b="0">
                 <a:solidFill>
                   <a:srgbClr val="222222"/>
                 </a:solidFill>
@@ -20798,11 +20805,11 @@
           <a:p>
             <a:pPr algn="l">
               <a:lnSpc>
-                <a:spcPts val="1700"/>
+                <a:spcPts val="2000"/>
               </a:lnSpc>
             </a:pPr>
             <a:r>
-              <a:rPr sz="1400" b="0">
+              <a:rPr sz="1600" b="0">
                 <a:solidFill>
                   <a:srgbClr val="222222"/>
                 </a:solidFill>
@@ -20816,11 +20823,11 @@
           <a:p>
             <a:pPr algn="l">
               <a:lnSpc>
-                <a:spcPts val="1700"/>
+                <a:spcPts val="2000"/>
               </a:lnSpc>
             </a:pPr>
             <a:r>
-              <a:rPr sz="1400" b="0">
+              <a:rPr sz="1600" b="0">
                 <a:solidFill>
                   <a:srgbClr val="222222"/>
                 </a:solidFill>
@@ -20834,11 +20841,11 @@
           <a:p>
             <a:pPr algn="l">
               <a:lnSpc>
-                <a:spcPts val="1700"/>
+                <a:spcPts val="2000"/>
               </a:lnSpc>
             </a:pPr>
             <a:r>
-              <a:rPr sz="1400" b="0">
+              <a:rPr sz="1600" b="0">
                 <a:solidFill>
                   <a:srgbClr val="222222"/>
                 </a:solidFill>
@@ -20852,11 +20859,11 @@
           <a:p>
             <a:pPr algn="l">
               <a:lnSpc>
-                <a:spcPts val="1700"/>
+                <a:spcPts val="2000"/>
               </a:lnSpc>
             </a:pPr>
             <a:r>
-              <a:rPr sz="1400" b="0">
+              <a:rPr sz="1600" b="0">
                 <a:solidFill>
                   <a:srgbClr val="222222"/>
                 </a:solidFill>
@@ -20867,7 +20874,7 @@
               <a:t>            </a:t>
             </a:r>
             <a:r>
-              <a:rPr sz="1400" b="0">
+              <a:rPr sz="1600" b="0">
                 <a:solidFill>
                   <a:srgbClr val="2E7D32"/>
                 </a:solidFill>
@@ -20881,11 +20888,11 @@
           <a:p>
             <a:pPr algn="l">
               <a:lnSpc>
-                <a:spcPts val="1700"/>
+                <a:spcPts val="2000"/>
               </a:lnSpc>
             </a:pPr>
             <a:r>
-              <a:rPr sz="1400" b="0">
+              <a:rPr sz="1600" b="0">
                 <a:solidFill>
                   <a:srgbClr val="222222"/>
                 </a:solidFill>
@@ -20896,7 +20903,7 @@
               <a:t>            </a:t>
             </a:r>
             <a:r>
-              <a:rPr sz="1400" b="0">
+              <a:rPr sz="1600" b="0">
                 <a:solidFill>
                   <a:srgbClr val="2E7D32"/>
                 </a:solidFill>
@@ -20910,11 +20917,11 @@
           <a:p>
             <a:pPr algn="l">
               <a:lnSpc>
-                <a:spcPts val="1700"/>
+                <a:spcPts val="2000"/>
               </a:lnSpc>
             </a:pPr>
             <a:r>
-              <a:rPr sz="1400" b="0">
+              <a:rPr sz="1600" b="0">
                 <a:solidFill>
                   <a:srgbClr val="222222"/>
                 </a:solidFill>
@@ -20928,11 +20935,11 @@
           <a:p>
             <a:pPr algn="l">
               <a:lnSpc>
-                <a:spcPts val="1700"/>
+                <a:spcPts val="2000"/>
               </a:lnSpc>
             </a:pPr>
             <a:r>
-              <a:rPr sz="1400" b="0">
+              <a:rPr sz="1600" b="0">
                 <a:solidFill>
                   <a:srgbClr val="222222"/>
                 </a:solidFill>
@@ -20946,11 +20953,11 @@
           <a:p>
             <a:pPr algn="l">
               <a:lnSpc>
-                <a:spcPts val="1700"/>
+                <a:spcPts val="2000"/>
               </a:lnSpc>
             </a:pPr>
             <a:r>
-              <a:rPr sz="1400" b="0">
+              <a:rPr sz="1600" b="0">
                 <a:solidFill>
                   <a:srgbClr val="222222"/>
                 </a:solidFill>
@@ -20964,11 +20971,11 @@
           <a:p>
             <a:pPr algn="l">
               <a:lnSpc>
-                <a:spcPts val="1700"/>
+                <a:spcPts val="2000"/>
               </a:lnSpc>
             </a:pPr>
             <a:r>
-              <a:rPr sz="1400" b="0">
+              <a:rPr sz="1600" b="0">
                 <a:solidFill>
                   <a:srgbClr val="222222"/>
                 </a:solidFill>
@@ -20979,7 +20986,7 @@
               <a:t>    </a:t>
             </a:r>
             <a:r>
-              <a:rPr sz="1400" b="0">
+              <a:rPr sz="1600" b="0">
                 <a:solidFill>
                   <a:srgbClr val="2E7D32"/>
                 </a:solidFill>
@@ -20993,11 +21000,11 @@
           <a:p>
             <a:pPr algn="l">
               <a:lnSpc>
-                <a:spcPts val="1700"/>
+                <a:spcPts val="2000"/>
               </a:lnSpc>
             </a:pPr>
             <a:r>
-              <a:rPr sz="1400" b="0">
+              <a:rPr sz="1600" b="0">
                 <a:solidFill>
                   <a:srgbClr val="222222"/>
                 </a:solidFill>
@@ -21018,8 +21025,8 @@
         </p:nvSpPr>
         <p:spPr>
           <a:xfrm>
-            <a:off x="1813560" y="4138168"/>
-            <a:ext cx="2633980" cy="228600"/>
+            <a:off x="1981200" y="4633468"/>
+            <a:ext cx="2997200" cy="266700"/>
           </a:xfrm>
           <a:prstGeom prst="roundRect">
             <a:avLst/>
@@ -22361,7 +22368,7 @@
           <p:nvPr/>
         </p:nvGraphicFramePr>
         <p:xfrm>
-          <a:off x="548640" y="4160520"/>
+          <a:off x="548640" y="4023360"/>
           <a:ext cx="11094413" cy="1371600"/>
         </p:xfrm>
         <a:graphic>
@@ -22620,8 +22627,8 @@
         </p:nvSpPr>
         <p:spPr>
           <a:xfrm>
-            <a:off x="548640" y="5669280"/>
-            <a:ext cx="11094415" cy="594360"/>
+            <a:off x="548640" y="5623560"/>
+            <a:ext cx="11094415" cy="777240"/>
           </a:xfrm>
           <a:prstGeom prst="roundRect">
             <a:avLst/>
@@ -22656,15 +22663,28 @@
           <a:p>
             <a:pPr algn="ctr"/>
             <a:r>
-              <a:rPr sz="2000" b="0">
-                <a:solidFill>
-                  <a:srgbClr val="222222"/>
-                </a:solidFill>
-                <a:latin typeface="Meiryo"/>
-                <a:ea typeface="Meiryo"/>
-                <a:cs typeface="Meiryo"/>
-              </a:rPr>
-              <a:t>⚠ 物理3番は GND であって GP3 ではない! 配布したピン配置図で、GP番号と物理ピン番号の両方を確かめよう</a:t>
+              <a:rPr sz="1800" b="0">
+                <a:solidFill>
+                  <a:srgbClr val="222222"/>
+                </a:solidFill>
+                <a:latin typeface="Meiryo"/>
+                <a:ea typeface="Meiryo"/>
+                <a:cs typeface="Meiryo"/>
+              </a:rPr>
+              <a:t>⚠ 物理3番は GND であって GP3 ではない!</a:t>
+            </a:r>
+          </a:p>
+          <a:p>
+            <a:r>
+              <a:rPr sz="1800" b="0">
+                <a:solidFill>
+                  <a:srgbClr val="222222"/>
+                </a:solidFill>
+                <a:latin typeface="Meiryo"/>
+                <a:ea typeface="Meiryo"/>
+                <a:cs typeface="Meiryo"/>
+              </a:rPr>
+              <a:t>配布したピン配置図で、GP番号と物理ピン番号の両方を確かめよう</a:t>
             </a:r>
           </a:p>
         </p:txBody>
@@ -22928,7 +22948,7 @@
         <p:spPr>
           <a:xfrm>
             <a:off x="548640" y="1234440"/>
-            <a:ext cx="11094415" cy="4330700"/>
+            <a:ext cx="11094415" cy="5054600"/>
           </a:xfrm>
           <a:prstGeom prst="rect">
             <a:avLst/>
@@ -22974,7 +22994,7 @@
         <p:spPr>
           <a:xfrm>
             <a:off x="548640" y="1234440"/>
-            <a:ext cx="11094415" cy="4330700"/>
+            <a:ext cx="11094415" cy="5054600"/>
           </a:xfrm>
           <a:prstGeom prst="rect">
             <a:avLst/>
@@ -22989,11 +23009,11 @@
           <a:p>
             <a:pPr algn="l">
               <a:lnSpc>
-                <a:spcPts val="1700"/>
+                <a:spcPts val="2000"/>
               </a:lnSpc>
             </a:pPr>
             <a:r>
-              <a:rPr sz="1400" b="0">
+              <a:rPr sz="1600" b="0">
                 <a:solidFill>
                   <a:srgbClr val="2E7D32"/>
                 </a:solidFill>
@@ -23007,11 +23027,11 @@
           <a:p>
             <a:pPr algn="l">
               <a:lnSpc>
-                <a:spcPts val="1700"/>
+                <a:spcPts val="2000"/>
               </a:lnSpc>
             </a:pPr>
             <a:r>
-              <a:rPr sz="1400" b="0">
+              <a:rPr sz="1600" b="0">
                 <a:solidFill>
                   <a:srgbClr val="222222"/>
                 </a:solidFill>
@@ -23025,11 +23045,11 @@
           <a:p>
             <a:pPr algn="l">
               <a:lnSpc>
-                <a:spcPts val="1700"/>
+                <a:spcPts val="2000"/>
               </a:lnSpc>
             </a:pPr>
             <a:r>
-              <a:rPr sz="1400" b="0">
+              <a:rPr sz="1600" b="0">
                 <a:solidFill>
                   <a:srgbClr val="222222"/>
                 </a:solidFill>
@@ -23043,11 +23063,11 @@
           <a:p>
             <a:pPr algn="l">
               <a:lnSpc>
-                <a:spcPts val="1700"/>
+                <a:spcPts val="2000"/>
               </a:lnSpc>
             </a:pPr>
             <a:r>
-              <a:rPr sz="1400" b="0">
+              <a:rPr sz="1600" b="0">
                 <a:solidFill>
                   <a:srgbClr val="222222"/>
                 </a:solidFill>
@@ -23061,11 +23081,11 @@
           <a:p>
             <a:pPr algn="l">
               <a:lnSpc>
-                <a:spcPts val="1700"/>
+                <a:spcPts val="2000"/>
               </a:lnSpc>
             </a:pPr>
             <a:r>
-              <a:rPr sz="1400" b="0">
+              <a:rPr sz="1600" b="0">
                 <a:solidFill>
                   <a:srgbClr val="2E7D32"/>
                 </a:solidFill>
@@ -23079,11 +23099,11 @@
           <a:p>
             <a:pPr algn="l">
               <a:lnSpc>
-                <a:spcPts val="1700"/>
+                <a:spcPts val="2000"/>
               </a:lnSpc>
             </a:pPr>
             <a:r>
-              <a:rPr sz="1400" b="0">
+              <a:rPr sz="1600" b="0">
                 <a:solidFill>
                   <a:srgbClr val="222222"/>
                 </a:solidFill>
@@ -23097,11 +23117,11 @@
           <a:p>
             <a:pPr algn="l">
               <a:lnSpc>
-                <a:spcPts val="1700"/>
+                <a:spcPts val="2000"/>
               </a:lnSpc>
             </a:pPr>
             <a:r>
-              <a:rPr sz="1400" b="0">
+              <a:rPr sz="1600" b="0">
                 <a:solidFill>
                   <a:srgbClr val="222222"/>
                 </a:solidFill>
@@ -23115,11 +23135,11 @@
           <a:p>
             <a:pPr algn="l">
               <a:lnSpc>
-                <a:spcPts val="1700"/>
+                <a:spcPts val="2000"/>
               </a:lnSpc>
             </a:pPr>
             <a:r>
-              <a:rPr sz="1400" b="0">
+              <a:rPr sz="1600" b="0">
                 <a:solidFill>
                   <a:srgbClr val="222222"/>
                 </a:solidFill>
@@ -23133,11 +23153,11 @@
           <a:p>
             <a:pPr algn="l">
               <a:lnSpc>
-                <a:spcPts val="1700"/>
+                <a:spcPts val="2000"/>
               </a:lnSpc>
             </a:pPr>
             <a:r>
-              <a:rPr sz="1400" b="0">
+              <a:rPr sz="1600" b="0">
                 <a:solidFill>
                   <a:srgbClr val="222222"/>
                 </a:solidFill>
@@ -23148,7 +23168,7 @@
               <a:t>button = Pin(5, Pin.IN, Pin.PULL_UP)   </a:t>
             </a:r>
             <a:r>
-              <a:rPr sz="1400" b="0">
+              <a:rPr sz="1600" b="0">
                 <a:solidFill>
                   <a:srgbClr val="2E7D32"/>
                 </a:solidFill>
@@ -23162,11 +23182,11 @@
           <a:p>
             <a:pPr algn="l">
               <a:lnSpc>
-                <a:spcPts val="1700"/>
+                <a:spcPts val="2000"/>
               </a:lnSpc>
             </a:pPr>
             <a:r>
-              <a:rPr sz="1400" b="0">
+              <a:rPr sz="1600" b="0">
                 <a:solidFill>
                   <a:srgbClr val="222222"/>
                 </a:solidFill>
@@ -23180,11 +23200,11 @@
           <a:p>
             <a:pPr algn="l">
               <a:lnSpc>
-                <a:spcPts val="1700"/>
+                <a:spcPts val="2000"/>
               </a:lnSpc>
             </a:pPr>
             <a:r>
-              <a:rPr sz="1400" b="0">
+              <a:rPr sz="1600" b="0">
                 <a:solidFill>
                   <a:srgbClr val="2E7D32"/>
                 </a:solidFill>
@@ -23198,11 +23218,11 @@
           <a:p>
             <a:pPr algn="l">
               <a:lnSpc>
-                <a:spcPts val="1700"/>
+                <a:spcPts val="2000"/>
               </a:lnSpc>
             </a:pPr>
             <a:r>
-              <a:rPr sz="1400" b="0">
+              <a:rPr sz="1600" b="0">
                 <a:solidFill>
                   <a:srgbClr val="2E7D32"/>
                 </a:solidFill>
@@ -23216,11 +23236,11 @@
           <a:p>
             <a:pPr algn="l">
               <a:lnSpc>
-                <a:spcPts val="1700"/>
+                <a:spcPts val="2000"/>
               </a:lnSpc>
             </a:pPr>
             <a:r>
-              <a:rPr sz="1400" b="0">
+              <a:rPr sz="1600" b="0">
                 <a:solidFill>
                   <a:srgbClr val="222222"/>
                 </a:solidFill>
@@ -23234,11 +23254,11 @@
           <a:p>
             <a:pPr algn="l">
               <a:lnSpc>
-                <a:spcPts val="1700"/>
+                <a:spcPts val="2000"/>
               </a:lnSpc>
             </a:pPr>
             <a:r>
-              <a:rPr sz="1400" b="0">
+              <a:rPr sz="1600" b="0">
                 <a:solidFill>
                   <a:srgbClr val="222222"/>
                 </a:solidFill>
@@ -23252,11 +23272,11 @@
           <a:p>
             <a:pPr algn="l">
               <a:lnSpc>
-                <a:spcPts val="1700"/>
+                <a:spcPts val="2000"/>
               </a:lnSpc>
             </a:pPr>
             <a:r>
-              <a:rPr sz="1400" b="0">
+              <a:rPr sz="1600" b="0">
                 <a:solidFill>
                   <a:srgbClr val="2E7D32"/>
                 </a:solidFill>
@@ -23270,11 +23290,11 @@
           <a:p>
             <a:pPr algn="l">
               <a:lnSpc>
-                <a:spcPts val="1700"/>
+                <a:spcPts val="2000"/>
               </a:lnSpc>
             </a:pPr>
             <a:r>
-              <a:rPr sz="1400" b="0">
+              <a:rPr sz="1600" b="0">
                 <a:solidFill>
                   <a:srgbClr val="2E7D32"/>
                 </a:solidFill>
@@ -23288,11 +23308,11 @@
           <a:p>
             <a:pPr algn="l">
               <a:lnSpc>
-                <a:spcPts val="1700"/>
+                <a:spcPts val="2000"/>
               </a:lnSpc>
             </a:pPr>
             <a:r>
-              <a:rPr sz="1400" b="0">
+              <a:rPr sz="1600" b="0">
                 <a:solidFill>
                   <a:srgbClr val="222222"/>
                 </a:solidFill>
@@ -23306,11 +23326,11 @@
           <a:p>
             <a:pPr algn="l">
               <a:lnSpc>
-                <a:spcPts val="1700"/>
+                <a:spcPts val="2000"/>
               </a:lnSpc>
             </a:pPr>
             <a:r>
-              <a:rPr sz="1400" b="0">
+              <a:rPr sz="1600" b="0">
                 <a:solidFill>
                   <a:srgbClr val="222222"/>
                 </a:solidFill>
@@ -23321,7 +23341,7 @@
               <a:t>    global pressed     </a:t>
             </a:r>
             <a:r>
-              <a:rPr sz="1400" b="0">
+              <a:rPr sz="1600" b="0">
                 <a:solidFill>
                   <a:srgbClr val="2E7D32"/>
                 </a:solidFill>
@@ -23335,11 +23355,11 @@
           <a:p>
             <a:pPr algn="l">
               <a:lnSpc>
-                <a:spcPts val="1700"/>
+                <a:spcPts val="2000"/>
               </a:lnSpc>
             </a:pPr>
             <a:r>
-              <a:rPr sz="1400" b="0">
+              <a:rPr sz="1600" b="0">
                 <a:solidFill>
                   <a:srgbClr val="222222"/>
                 </a:solidFill>
@@ -23350,7 +23370,7 @@
               <a:t>    pressed = True     </a:t>
             </a:r>
             <a:r>
-              <a:rPr sz="1400" b="0">
+              <a:rPr sz="1600" b="0">
                 <a:solidFill>
                   <a:srgbClr val="2E7D32"/>
                 </a:solidFill>
@@ -23371,8 +23391,8 @@
         </p:nvSpPr>
         <p:spPr>
           <a:xfrm>
-            <a:off x="640080" y="4785868"/>
-            <a:ext cx="1851660" cy="228600"/>
+            <a:off x="640080" y="5395468"/>
+            <a:ext cx="2103120" cy="266700"/>
           </a:xfrm>
           <a:prstGeom prst="roundRect">
             <a:avLst/>
@@ -23415,8 +23435,8 @@
         </p:nvSpPr>
         <p:spPr>
           <a:xfrm>
-            <a:off x="548640" y="6080760"/>
-            <a:ext cx="11094415" cy="365760"/>
+            <a:off x="548640" y="6446520"/>
+            <a:ext cx="8534095" cy="320040"/>
           </a:xfrm>
           <a:prstGeom prst="rect">
             <a:avLst/>
@@ -23435,7 +23455,7 @@
               </a:spcAft>
             </a:pPr>
             <a:r>
-              <a:rPr sz="1400" b="0">
+              <a:rPr sz="1200" b="0">
                 <a:solidFill>
                   <a:srgbClr val="666666"/>
                 </a:solidFill>
@@ -23660,7 +23680,7 @@
           </a:solidFill>
           <a:ln w="19050">
             <a:solidFill>
-              <a:srgbClr val="8E24AA"/>
+              <a:srgbClr val="1E88E5"/>
             </a:solidFill>
           </a:ln>
           <a:effectLst/>
@@ -23687,13 +23707,13 @@
             <a:r>
               <a:rPr sz="1200" b="1">
                 <a:solidFill>
-                  <a:srgbClr val="8E24AA"/>
-                </a:solidFill>
-                <a:latin typeface="Meiryo"/>
-                <a:ea typeface="Meiryo"/>
-                <a:cs typeface="Meiryo"/>
-              </a:rPr>
-              <a:t>while</a:t>
+                  <a:srgbClr val="1E88E5"/>
+                </a:solidFill>
+                <a:latin typeface="Meiryo"/>
+                <a:ea typeface="Meiryo"/>
+                <a:cs typeface="Meiryo"/>
+              </a:rPr>
+              <a:t>for</a:t>
             </a:r>
           </a:p>
         </p:txBody>
@@ -23707,120 +23727,6 @@
         <p:spPr>
           <a:xfrm>
             <a:off x="2651760" y="6419088"/>
-            <a:ext cx="822960" cy="329184"/>
-          </a:xfrm>
-          <a:prstGeom prst="roundRect">
-            <a:avLst/>
-          </a:prstGeom>
-          <a:solidFill>
-            <a:srgbClr val="FFFFFF"/>
-          </a:solidFill>
-          <a:ln w="19050">
-            <a:solidFill>
-              <a:srgbClr val="E53935"/>
-            </a:solidFill>
-          </a:ln>
-          <a:effectLst/>
-        </p:spPr>
-        <p:style>
-          <a:lnRef idx="1">
-            <a:schemeClr val="accent1"/>
-          </a:lnRef>
-          <a:fillRef idx="3">
-            <a:schemeClr val="accent1"/>
-          </a:fillRef>
-          <a:effectRef idx="2">
-            <a:schemeClr val="accent1"/>
-          </a:effectRef>
-          <a:fontRef idx="minor">
-            <a:schemeClr val="lt1"/>
-          </a:fontRef>
-        </p:style>
-        <p:txBody>
-          <a:bodyPr rtlCol="0" anchor="ctr" wrap="square"/>
-          <a:lstStyle/>
-          <a:p>
-            <a:pPr algn="ctr"/>
-            <a:r>
-              <a:rPr sz="1200" b="1">
-                <a:solidFill>
-                  <a:srgbClr val="E53935"/>
-                </a:solidFill>
-                <a:latin typeface="Meiryo"/>
-                <a:ea typeface="Meiryo"/>
-                <a:cs typeface="Meiryo"/>
-              </a:rPr>
-              <a:t>if</a:t>
-            </a:r>
-          </a:p>
-        </p:txBody>
-      </p:sp>
-      <p:sp>
-        <p:nvSpPr>
-          <p:cNvPr id="8" name="Rounded Rectangle 7"/>
-          <p:cNvSpPr/>
-          <p:nvPr/>
-        </p:nvSpPr>
-        <p:spPr>
-          <a:xfrm>
-            <a:off x="3566160" y="6419088"/>
-            <a:ext cx="822960" cy="329184"/>
-          </a:xfrm>
-          <a:prstGeom prst="roundRect">
-            <a:avLst/>
-          </a:prstGeom>
-          <a:solidFill>
-            <a:srgbClr val="FFFFFF"/>
-          </a:solidFill>
-          <a:ln w="19050">
-            <a:solidFill>
-              <a:srgbClr val="1E88E5"/>
-            </a:solidFill>
-          </a:ln>
-          <a:effectLst/>
-        </p:spPr>
-        <p:style>
-          <a:lnRef idx="1">
-            <a:schemeClr val="accent1"/>
-          </a:lnRef>
-          <a:fillRef idx="3">
-            <a:schemeClr val="accent1"/>
-          </a:fillRef>
-          <a:effectRef idx="2">
-            <a:schemeClr val="accent1"/>
-          </a:effectRef>
-          <a:fontRef idx="minor">
-            <a:schemeClr val="lt1"/>
-          </a:fontRef>
-        </p:style>
-        <p:txBody>
-          <a:bodyPr rtlCol="0" anchor="ctr" wrap="square"/>
-          <a:lstStyle/>
-          <a:p>
-            <a:pPr algn="ctr"/>
-            <a:r>
-              <a:rPr sz="1200" b="1">
-                <a:solidFill>
-                  <a:srgbClr val="1E88E5"/>
-                </a:solidFill>
-                <a:latin typeface="Meiryo"/>
-                <a:ea typeface="Meiryo"/>
-                <a:cs typeface="Meiryo"/>
-              </a:rPr>
-              <a:t>for</a:t>
-            </a:r>
-          </a:p>
-        </p:txBody>
-      </p:sp>
-      <p:sp>
-        <p:nvSpPr>
-          <p:cNvPr id="9" name="Rounded Rectangle 8"/>
-          <p:cNvSpPr/>
-          <p:nvPr/>
-        </p:nvSpPr>
-        <p:spPr>
-          <a:xfrm>
-            <a:off x="4480560" y="6419088"/>
             <a:ext cx="822960" cy="329184"/>
           </a:xfrm>
           <a:prstGeom prst="roundRect">
@@ -23871,14 +23777,14 @@
       </p:sp>
       <p:sp>
         <p:nvSpPr>
-          <p:cNvPr id="10" name="Rectangle 9"/>
+          <p:cNvPr id="8" name="Rectangle 7"/>
           <p:cNvSpPr/>
           <p:nvPr/>
         </p:nvSpPr>
         <p:spPr>
           <a:xfrm>
             <a:off x="548640" y="1234440"/>
-            <a:ext cx="11094415" cy="4762500"/>
+            <a:ext cx="11094415" cy="3530600"/>
           </a:xfrm>
           <a:prstGeom prst="rect">
             <a:avLst/>
@@ -23917,14 +23823,14 @@
       </p:sp>
       <p:sp>
         <p:nvSpPr>
-          <p:cNvPr id="11" name="TextBox 10"/>
+          <p:cNvPr id="9" name="TextBox 8"/>
           <p:cNvSpPr txBox="1"/>
           <p:nvPr/>
         </p:nvSpPr>
         <p:spPr>
           <a:xfrm>
             <a:off x="548640" y="1234440"/>
-            <a:ext cx="11094415" cy="4762500"/>
+            <a:ext cx="11094415" cy="3530600"/>
           </a:xfrm>
           <a:prstGeom prst="rect">
             <a:avLst/>
@@ -23939,11 +23845,11 @@
           <a:p>
             <a:pPr algn="l">
               <a:lnSpc>
-                <a:spcPts val="1700"/>
+                <a:spcPts val="2000"/>
               </a:lnSpc>
             </a:pPr>
             <a:r>
-              <a:rPr sz="1400" b="0">
+              <a:rPr sz="1600" b="0">
                 <a:solidFill>
                   <a:srgbClr val="2E7D32"/>
                 </a:solidFill>
@@ -23957,11 +23863,11 @@
           <a:p>
             <a:pPr algn="l">
               <a:lnSpc>
-                <a:spcPts val="1700"/>
+                <a:spcPts val="2000"/>
               </a:lnSpc>
             </a:pPr>
             <a:r>
-              <a:rPr sz="1400" b="0">
+              <a:rPr sz="1600" b="0">
                 <a:solidFill>
                   <a:srgbClr val="2E7D32"/>
                 </a:solidFill>
@@ -23975,11 +23881,11 @@
           <a:p>
             <a:pPr algn="l">
               <a:lnSpc>
-                <a:spcPts val="1700"/>
+                <a:spcPts val="2000"/>
               </a:lnSpc>
             </a:pPr>
             <a:r>
-              <a:rPr sz="1400" b="0">
+              <a:rPr sz="1600" b="0">
                 <a:solidFill>
                   <a:srgbClr val="222222"/>
                 </a:solidFill>
@@ -23993,11 +23899,11 @@
           <a:p>
             <a:pPr algn="l">
               <a:lnSpc>
-                <a:spcPts val="1700"/>
+                <a:spcPts val="2000"/>
               </a:lnSpc>
             </a:pPr>
             <a:r>
-              <a:rPr sz="1400" b="0">
+              <a:rPr sz="1600" b="0">
                 <a:solidFill>
                   <a:srgbClr val="222222"/>
                 </a:solidFill>
@@ -24011,11 +23917,11 @@
           <a:p>
             <a:pPr algn="l">
               <a:lnSpc>
-                <a:spcPts val="1700"/>
+                <a:spcPts val="2000"/>
               </a:lnSpc>
             </a:pPr>
             <a:r>
-              <a:rPr sz="1400" b="0">
+              <a:rPr sz="1600" b="0">
                 <a:solidFill>
                   <a:srgbClr val="2E7D32"/>
                 </a:solidFill>
@@ -24029,11 +23935,11 @@
           <a:p>
             <a:pPr algn="l">
               <a:lnSpc>
-                <a:spcPts val="1700"/>
+                <a:spcPts val="2000"/>
               </a:lnSpc>
             </a:pPr>
             <a:r>
-              <a:rPr sz="1400" b="0">
+              <a:rPr sz="1600" b="0">
                 <a:solidFill>
                   <a:srgbClr val="222222"/>
                 </a:solidFill>
@@ -24047,11 +23953,11 @@
           <a:p>
             <a:pPr algn="l">
               <a:lnSpc>
-                <a:spcPts val="1700"/>
+                <a:spcPts val="2000"/>
               </a:lnSpc>
             </a:pPr>
             <a:r>
-              <a:rPr sz="1400" b="0">
+              <a:rPr sz="1600" b="0">
                 <a:solidFill>
                   <a:srgbClr val="222222"/>
                 </a:solidFill>
@@ -24065,11 +23971,11 @@
           <a:p>
             <a:pPr algn="l">
               <a:lnSpc>
-                <a:spcPts val="1700"/>
+                <a:spcPts val="2000"/>
               </a:lnSpc>
             </a:pPr>
             <a:r>
-              <a:rPr sz="1400" b="0">
+              <a:rPr sz="1600" b="0">
                 <a:solidFill>
                   <a:srgbClr val="222222"/>
                 </a:solidFill>
@@ -24083,11 +23989,11 @@
           <a:p>
             <a:pPr algn="l">
               <a:lnSpc>
-                <a:spcPts val="1700"/>
+                <a:spcPts val="2000"/>
               </a:lnSpc>
             </a:pPr>
             <a:r>
-              <a:rPr sz="1400" b="0">
+              <a:rPr sz="1600" b="0">
                 <a:solidFill>
                   <a:srgbClr val="222222"/>
                 </a:solidFill>
@@ -24101,11 +24007,11 @@
           <a:p>
             <a:pPr algn="l">
               <a:lnSpc>
-                <a:spcPts val="1700"/>
+                <a:spcPts val="2000"/>
               </a:lnSpc>
             </a:pPr>
             <a:r>
-              <a:rPr sz="1400" b="0">
+              <a:rPr sz="1600" b="0">
                 <a:solidFill>
                   <a:srgbClr val="2E7D32"/>
                 </a:solidFill>
@@ -24119,11 +24025,11 @@
           <a:p>
             <a:pPr algn="l">
               <a:lnSpc>
-                <a:spcPts val="1700"/>
+                <a:spcPts val="2000"/>
               </a:lnSpc>
             </a:pPr>
             <a:r>
-              <a:rPr sz="1400" b="0">
+              <a:rPr sz="1600" b="0">
                 <a:solidFill>
                   <a:srgbClr val="222222"/>
                 </a:solidFill>
@@ -24137,11 +24043,11 @@
           <a:p>
             <a:pPr algn="l">
               <a:lnSpc>
-                <a:spcPts val="1700"/>
+                <a:spcPts val="2000"/>
               </a:lnSpc>
             </a:pPr>
             <a:r>
-              <a:rPr sz="1400" b="0">
+              <a:rPr sz="1600" b="0">
                 <a:solidFill>
                   <a:srgbClr val="222222"/>
                 </a:solidFill>
@@ -24155,11 +24061,11 @@
           <a:p>
             <a:pPr algn="l">
               <a:lnSpc>
-                <a:spcPts val="1700"/>
+                <a:spcPts val="2000"/>
               </a:lnSpc>
             </a:pPr>
             <a:r>
-              <a:rPr sz="1400" b="0">
+              <a:rPr sz="1600" b="0">
                 <a:solidFill>
                   <a:srgbClr val="222222"/>
                 </a:solidFill>
@@ -24170,195 +24076,18 @@
               <a:t>print("待機中(緑)")</a:t>
             </a:r>
           </a:p>
-          <a:p>
-            <a:pPr algn="l">
-              <a:lnSpc>
-                <a:spcPts val="1700"/>
-              </a:lnSpc>
-            </a:pPr>
-            <a:r>
-              <a:rPr sz="1400" b="0">
-                <a:solidFill>
-                  <a:srgbClr val="222222"/>
-                </a:solidFill>
-                <a:latin typeface="Consolas"/>
-                <a:ea typeface="BIZ UDGothic"/>
-                <a:cs typeface="BIZ UDGothic"/>
-              </a:rPr>
-              <a:t> </a:t>
-            </a:r>
-          </a:p>
-          <a:p>
-            <a:pPr algn="l">
-              <a:lnSpc>
-                <a:spcPts val="1700"/>
-              </a:lnSpc>
-            </a:pPr>
-            <a:r>
-              <a:rPr sz="1400" b="0">
-                <a:solidFill>
-                  <a:srgbClr val="2E7D32"/>
-                </a:solidFill>
-                <a:latin typeface="Consolas"/>
-                <a:ea typeface="BIZ UDGothic"/>
-                <a:cs typeface="BIZ UDGothic"/>
-              </a:rPr>
-              <a:t># ---- メインの繰り返し ----</a:t>
-            </a:r>
-          </a:p>
-          <a:p>
-            <a:pPr algn="l">
-              <a:lnSpc>
-                <a:spcPts val="1700"/>
-              </a:lnSpc>
-            </a:pPr>
-            <a:r>
-              <a:rPr sz="1400" b="0">
-                <a:solidFill>
-                  <a:srgbClr val="222222"/>
-                </a:solidFill>
-                <a:latin typeface="Consolas"/>
-                <a:ea typeface="BIZ UDGothic"/>
-                <a:cs typeface="BIZ UDGothic"/>
-              </a:rPr>
-              <a:t>while True:</a:t>
-            </a:r>
-          </a:p>
-          <a:p>
-            <a:pPr algn="l">
-              <a:lnSpc>
-                <a:spcPts val="1700"/>
-              </a:lnSpc>
-            </a:pPr>
-            <a:r>
-              <a:rPr sz="1400" b="0">
-                <a:solidFill>
-                  <a:srgbClr val="222222"/>
-                </a:solidFill>
-                <a:latin typeface="Consolas"/>
-                <a:ea typeface="BIZ UDGothic"/>
-                <a:cs typeface="BIZ UDGothic"/>
-              </a:rPr>
-              <a:t>    </a:t>
-            </a:r>
-            <a:r>
-              <a:rPr sz="1400" b="0">
-                <a:solidFill>
-                  <a:srgbClr val="2E7D32"/>
-                </a:solidFill>
-                <a:latin typeface="Consolas"/>
-                <a:ea typeface="BIZ UDGothic"/>
-                <a:cs typeface="BIZ UDGothic"/>
-              </a:rPr>
-              <a:t># ボタンを直接見に行かず、目印(pressed)を確認する</a:t>
-            </a:r>
-          </a:p>
-          <a:p>
-            <a:pPr algn="l">
-              <a:lnSpc>
-                <a:spcPts val="1700"/>
-              </a:lnSpc>
-            </a:pPr>
-            <a:r>
-              <a:rPr sz="1400" b="0">
-                <a:solidFill>
-                  <a:srgbClr val="222222"/>
-                </a:solidFill>
-                <a:latin typeface="Consolas"/>
-                <a:ea typeface="BIZ UDGothic"/>
-                <a:cs typeface="BIZ UDGothic"/>
-              </a:rPr>
-              <a:t>    if pressed:</a:t>
-            </a:r>
-          </a:p>
-          <a:p>
-            <a:pPr algn="l">
-              <a:lnSpc>
-                <a:spcPts val="1700"/>
-              </a:lnSpc>
-            </a:pPr>
-            <a:r>
-              <a:rPr sz="1400" b="0">
-                <a:solidFill>
-                  <a:srgbClr val="222222"/>
-                </a:solidFill>
-                <a:latin typeface="Consolas"/>
-                <a:ea typeface="BIZ UDGothic"/>
-                <a:cs typeface="BIZ UDGothic"/>
-              </a:rPr>
-              <a:t>        pressed = False            </a:t>
-            </a:r>
-            <a:r>
-              <a:rPr sz="1400" b="0">
-                <a:solidFill>
-                  <a:srgbClr val="2E7D32"/>
-                </a:solidFill>
-                <a:latin typeface="Consolas"/>
-                <a:ea typeface="BIZ UDGothic"/>
-                <a:cs typeface="BIZ UDGothic"/>
-              </a:rPr>
-              <a:t># 目印を下ろしておく</a:t>
-            </a:r>
-          </a:p>
-          <a:p>
-            <a:pPr algn="l">
-              <a:lnSpc>
-                <a:spcPts val="1700"/>
-              </a:lnSpc>
-            </a:pPr>
-            <a:r>
-              <a:rPr sz="1400" b="0">
-                <a:solidFill>
-                  <a:srgbClr val="222222"/>
-                </a:solidFill>
-                <a:latin typeface="Consolas"/>
-                <a:ea typeface="BIZ UDGothic"/>
-                <a:cs typeface="BIZ UDGothic"/>
-              </a:rPr>
-              <a:t>        print("ボタン押下")</a:t>
-            </a:r>
-          </a:p>
-          <a:p>
-            <a:pPr algn="l">
-              <a:lnSpc>
-                <a:spcPts val="1700"/>
-              </a:lnSpc>
-            </a:pPr>
-            <a:r>
-              <a:rPr sz="1400" b="0">
-                <a:solidFill>
-                  <a:srgbClr val="222222"/>
-                </a:solidFill>
-                <a:latin typeface="Consolas"/>
-                <a:ea typeface="BIZ UDGothic"/>
-                <a:cs typeface="BIZ UDGothic"/>
-              </a:rPr>
-              <a:t>        time.sleep_ms(3000)        </a:t>
-            </a:r>
-            <a:r>
-              <a:rPr sz="1400" b="0">
-                <a:solidFill>
-                  <a:srgbClr val="2E7D32"/>
-                </a:solidFill>
-                <a:latin typeface="Consolas"/>
-                <a:ea typeface="BIZ UDGothic"/>
-                <a:cs typeface="BIZ UDGothic"/>
-              </a:rPr>
-              <a:t># 3秒待つ</a:t>
-            </a:r>
-          </a:p>
-        </p:txBody>
-      </p:sp>
-      <p:sp>
-        <p:nvSpPr>
-          <p:cNvPr id="12" name="Rounded Rectangle 11"/>
+        </p:txBody>
+      </p:sp>
+      <p:sp>
+        <p:nvSpPr>
+          <p:cNvPr id="10" name="Rounded Rectangle 9"/>
           <p:cNvSpPr/>
           <p:nvPr/>
         </p:nvSpPr>
         <p:spPr>
           <a:xfrm>
-            <a:off x="640080" y="2410968"/>
-            <a:ext cx="1460500" cy="228600"/>
+            <a:off x="640080" y="2601468"/>
+            <a:ext cx="1656080" cy="266700"/>
           </a:xfrm>
           <a:prstGeom prst="roundRect">
             <a:avLst/>
@@ -24395,14 +24124,14 @@
       </p:sp>
       <p:sp>
         <p:nvSpPr>
-          <p:cNvPr id="13" name="Rounded Rectangle 12"/>
+          <p:cNvPr id="11" name="Rounded Rectangle 10"/>
           <p:cNvSpPr/>
           <p:nvPr/>
         </p:nvSpPr>
         <p:spPr>
           <a:xfrm>
-            <a:off x="1031240" y="2626868"/>
-            <a:ext cx="3025140" cy="228600"/>
+            <a:off x="1087120" y="2855468"/>
+            <a:ext cx="3444240" cy="266700"/>
           </a:xfrm>
           <a:prstGeom prst="roundRect">
             <a:avLst/>
@@ -24439,102 +24168,14 @@
       </p:sp>
       <p:sp>
         <p:nvSpPr>
-          <p:cNvPr id="14" name="Rounded Rectangle 13"/>
-          <p:cNvSpPr/>
-          <p:nvPr/>
-        </p:nvSpPr>
-        <p:spPr>
-          <a:xfrm>
-            <a:off x="640080" y="4569968"/>
-            <a:ext cx="1167130" cy="228600"/>
-          </a:xfrm>
-          <a:prstGeom prst="roundRect">
-            <a:avLst/>
-          </a:prstGeom>
-          <a:noFill/>
-          <a:ln w="25400">
-            <a:solidFill>
-              <a:srgbClr val="8E24AA"/>
-            </a:solidFill>
-          </a:ln>
-          <a:effectLst/>
-        </p:spPr>
-        <p:style>
-          <a:lnRef idx="1">
-            <a:schemeClr val="accent1"/>
-          </a:lnRef>
-          <a:fillRef idx="3">
-            <a:schemeClr val="accent1"/>
-          </a:fillRef>
-          <a:effectRef idx="2">
-            <a:schemeClr val="accent1"/>
-          </a:effectRef>
-          <a:fontRef idx="minor">
-            <a:schemeClr val="lt1"/>
-          </a:fontRef>
-        </p:style>
-        <p:txBody>
-          <a:bodyPr rtlCol="0" anchor="ctr"/>
-          <a:lstStyle/>
-          <a:p>
-            <a:pPr algn="ctr"/>
-          </a:p>
-        </p:txBody>
-      </p:sp>
-      <p:sp>
-        <p:nvSpPr>
-          <p:cNvPr id="15" name="Rounded Rectangle 14"/>
-          <p:cNvSpPr/>
-          <p:nvPr/>
-        </p:nvSpPr>
-        <p:spPr>
-          <a:xfrm>
-            <a:off x="1031240" y="5001768"/>
-            <a:ext cx="1167130" cy="228600"/>
-          </a:xfrm>
-          <a:prstGeom prst="roundRect">
-            <a:avLst/>
-          </a:prstGeom>
-          <a:noFill/>
-          <a:ln w="25400">
-            <a:solidFill>
-              <a:srgbClr val="E53935"/>
-            </a:solidFill>
-          </a:ln>
-          <a:effectLst/>
-        </p:spPr>
-        <p:style>
-          <a:lnRef idx="1">
-            <a:schemeClr val="accent1"/>
-          </a:lnRef>
-          <a:fillRef idx="3">
-            <a:schemeClr val="accent1"/>
-          </a:fillRef>
-          <a:effectRef idx="2">
-            <a:schemeClr val="accent1"/>
-          </a:effectRef>
-          <a:fontRef idx="minor">
-            <a:schemeClr val="lt1"/>
-          </a:fontRef>
-        </p:style>
-        <p:txBody>
-          <a:bodyPr rtlCol="0" anchor="ctr"/>
-          <a:lstStyle/>
-          <a:p>
-            <a:pPr algn="ctr"/>
-          </a:p>
-        </p:txBody>
-      </p:sp>
-      <p:sp>
-        <p:nvSpPr>
-          <p:cNvPr id="16" name="TextBox 15"/>
+          <p:cNvPr id="12" name="TextBox 11"/>
           <p:cNvSpPr txBox="1"/>
           <p:nvPr/>
         </p:nvSpPr>
         <p:spPr>
           <a:xfrm>
-            <a:off x="548640" y="6080760"/>
-            <a:ext cx="11094415" cy="365760"/>
+            <a:off x="548640" y="6446520"/>
+            <a:ext cx="8534095" cy="320040"/>
           </a:xfrm>
           <a:prstGeom prst="rect">
             <a:avLst/>
@@ -24553,7 +24194,7 @@
               </a:spcAft>
             </a:pPr>
             <a:r>
-              <a:rPr sz="1400" b="0">
+              <a:rPr sz="1200" b="0">
                 <a:solidFill>
                   <a:srgbClr val="666666"/>
                 </a:solidFill>
@@ -24720,14 +24361,169 @@
       </p:sp>
       <p:sp>
         <p:nvSpPr>
-          <p:cNvPr id="5" name="Rectangle 4"/>
+          <p:cNvPr id="5" name="TextBox 4"/>
+          <p:cNvSpPr txBox="1"/>
+          <p:nvPr/>
+        </p:nvSpPr>
+        <p:spPr>
+          <a:xfrm>
+            <a:off x="548640" y="6400800"/>
+            <a:ext cx="1280160" cy="365760"/>
+          </a:xfrm>
+          <a:prstGeom prst="rect">
+            <a:avLst/>
+          </a:prstGeom>
+          <a:noFill/>
+        </p:spPr>
+        <p:txBody>
+          <a:bodyPr wrap="square" anchor="ctr">
+            <a:spAutoFit/>
+          </a:bodyPr>
+          <a:lstStyle/>
+          <a:p>
+            <a:pPr algn="l">
+              <a:spcAft>
+                <a:spcPts val="600"/>
+              </a:spcAft>
+            </a:pPr>
+            <a:r>
+              <a:rPr sz="1200" b="0">
+                <a:solidFill>
+                  <a:srgbClr val="666666"/>
+                </a:solidFill>
+                <a:latin typeface="Meiryo"/>
+                <a:ea typeface="Meiryo"/>
+                <a:cs typeface="Meiryo"/>
+              </a:rPr>
+              <a:t>色付き枠:</a:t>
+            </a:r>
+          </a:p>
+        </p:txBody>
+      </p:sp>
+      <p:sp>
+        <p:nvSpPr>
+          <p:cNvPr id="6" name="Rounded Rectangle 5"/>
           <p:cNvSpPr/>
           <p:nvPr/>
         </p:nvSpPr>
         <p:spPr>
           <a:xfrm>
+            <a:off x="1737360" y="6419088"/>
+            <a:ext cx="822960" cy="329184"/>
+          </a:xfrm>
+          <a:prstGeom prst="roundRect">
+            <a:avLst/>
+          </a:prstGeom>
+          <a:solidFill>
+            <a:srgbClr val="FFFFFF"/>
+          </a:solidFill>
+          <a:ln w="19050">
+            <a:solidFill>
+              <a:srgbClr val="8E24AA"/>
+            </a:solidFill>
+          </a:ln>
+          <a:effectLst/>
+        </p:spPr>
+        <p:style>
+          <a:lnRef idx="1">
+            <a:schemeClr val="accent1"/>
+          </a:lnRef>
+          <a:fillRef idx="3">
+            <a:schemeClr val="accent1"/>
+          </a:fillRef>
+          <a:effectRef idx="2">
+            <a:schemeClr val="accent1"/>
+          </a:effectRef>
+          <a:fontRef idx="minor">
+            <a:schemeClr val="lt1"/>
+          </a:fontRef>
+        </p:style>
+        <p:txBody>
+          <a:bodyPr rtlCol="0" anchor="ctr" wrap="square"/>
+          <a:lstStyle/>
+          <a:p>
+            <a:pPr algn="ctr"/>
+            <a:r>
+              <a:rPr sz="1200" b="1">
+                <a:solidFill>
+                  <a:srgbClr val="8E24AA"/>
+                </a:solidFill>
+                <a:latin typeface="Meiryo"/>
+                <a:ea typeface="Meiryo"/>
+                <a:cs typeface="Meiryo"/>
+              </a:rPr>
+              <a:t>while</a:t>
+            </a:r>
+          </a:p>
+        </p:txBody>
+      </p:sp>
+      <p:sp>
+        <p:nvSpPr>
+          <p:cNvPr id="7" name="Rounded Rectangle 6"/>
+          <p:cNvSpPr/>
+          <p:nvPr/>
+        </p:nvSpPr>
+        <p:spPr>
+          <a:xfrm>
+            <a:off x="2651760" y="6419088"/>
+            <a:ext cx="822960" cy="329184"/>
+          </a:xfrm>
+          <a:prstGeom prst="roundRect">
+            <a:avLst/>
+          </a:prstGeom>
+          <a:solidFill>
+            <a:srgbClr val="FFFFFF"/>
+          </a:solidFill>
+          <a:ln w="19050">
+            <a:solidFill>
+              <a:srgbClr val="E53935"/>
+            </a:solidFill>
+          </a:ln>
+          <a:effectLst/>
+        </p:spPr>
+        <p:style>
+          <a:lnRef idx="1">
+            <a:schemeClr val="accent1"/>
+          </a:lnRef>
+          <a:fillRef idx="3">
+            <a:schemeClr val="accent1"/>
+          </a:fillRef>
+          <a:effectRef idx="2">
+            <a:schemeClr val="accent1"/>
+          </a:effectRef>
+          <a:fontRef idx="minor">
+            <a:schemeClr val="lt1"/>
+          </a:fontRef>
+        </p:style>
+        <p:txBody>
+          <a:bodyPr rtlCol="0" anchor="ctr" wrap="square"/>
+          <a:lstStyle/>
+          <a:p>
+            <a:pPr algn="ctr"/>
+            <a:r>
+              <a:rPr sz="1200" b="1">
+                <a:solidFill>
+                  <a:srgbClr val="E53935"/>
+                </a:solidFill>
+                <a:latin typeface="Meiryo"/>
+                <a:ea typeface="Meiryo"/>
+                <a:cs typeface="Meiryo"/>
+              </a:rPr>
+              <a:t>if</a:t>
+            </a:r>
+          </a:p>
+        </p:txBody>
+      </p:sp>
+      <p:sp>
+        <p:nvSpPr>
+          <p:cNvPr id="8" name="Rectangle 7"/>
+          <p:cNvSpPr/>
+          <p:nvPr/>
+        </p:nvSpPr>
+        <p:spPr>
+          <a:xfrm>
             <a:off x="548640" y="1234440"/>
-            <a:ext cx="11094415" cy="2603500"/>
+            <a:ext cx="11094415" cy="5054600"/>
           </a:xfrm>
           <a:prstGeom prst="rect">
             <a:avLst/>
@@ -24766,14 +24562,14 @@
       </p:sp>
       <p:sp>
         <p:nvSpPr>
-          <p:cNvPr id="6" name="TextBox 5"/>
+          <p:cNvPr id="9" name="TextBox 8"/>
           <p:cNvSpPr txBox="1"/>
           <p:nvPr/>
         </p:nvSpPr>
         <p:spPr>
           <a:xfrm>
             <a:off x="548640" y="1234440"/>
-            <a:ext cx="11094415" cy="2603500"/>
+            <a:ext cx="11094415" cy="5054600"/>
           </a:xfrm>
           <a:prstGeom prst="rect">
             <a:avLst/>
@@ -24788,40 +24584,47 @@
           <a:p>
             <a:pPr algn="l">
               <a:lnSpc>
-                <a:spcPts val="1700"/>
+                <a:spcPts val="2000"/>
               </a:lnSpc>
             </a:pPr>
             <a:r>
-              <a:rPr sz="1400" b="0">
-                <a:solidFill>
-                  <a:srgbClr val="222222"/>
+              <a:rPr sz="1600" b="0">
+                <a:solidFill>
+                  <a:srgbClr val="2E7D32"/>
                 </a:solidFill>
                 <a:latin typeface="Consolas"/>
                 <a:ea typeface="BIZ UDGothic"/>
                 <a:cs typeface="BIZ UDGothic"/>
               </a:rPr>
-              <a:t>        </a:t>
-            </a:r>
-            <a:r>
-              <a:rPr sz="1400" b="0">
-                <a:solidFill>
-                  <a:srgbClr val="2E7D32"/>
+              <a:t># ---- メインの繰り返し ----</a:t>
+            </a:r>
+          </a:p>
+          <a:p>
+            <a:pPr algn="l">
+              <a:lnSpc>
+                <a:spcPts val="2000"/>
+              </a:lnSpc>
+            </a:pPr>
+            <a:r>
+              <a:rPr sz="1600" b="0">
+                <a:solidFill>
+                  <a:srgbClr val="222222"/>
                 </a:solidFill>
                 <a:latin typeface="Consolas"/>
                 <a:ea typeface="BIZ UDGothic"/>
                 <a:cs typeface="BIZ UDGothic"/>
               </a:rPr>
-              <a:t># 緑 → 黄</a:t>
+              <a:t>while True:</a:t>
             </a:r>
           </a:p>
           <a:p>
             <a:pPr algn="l">
               <a:lnSpc>
-                <a:spcPts val="1700"/>
+                <a:spcPts val="2000"/>
               </a:lnSpc>
             </a:pPr>
             <a:r>
-              <a:rPr sz="1400" b="0">
+              <a:rPr sz="1600" b="0">
                 <a:solidFill>
                   <a:srgbClr val="222222"/>
                 </a:solidFill>
@@ -24829,35 +24632,28 @@
                 <a:ea typeface="BIZ UDGothic"/>
                 <a:cs typeface="BIZ UDGothic"/>
               </a:rPr>
-              <a:t>        green.value(0)</a:t>
-            </a:r>
-          </a:p>
-          <a:p>
-            <a:pPr algn="l">
-              <a:lnSpc>
-                <a:spcPts val="1700"/>
-              </a:lnSpc>
-            </a:pPr>
-            <a:r>
-              <a:rPr sz="1400" b="0">
-                <a:solidFill>
-                  <a:srgbClr val="222222"/>
+              <a:t>    </a:t>
+            </a:r>
+            <a:r>
+              <a:rPr sz="1600" b="0">
+                <a:solidFill>
+                  <a:srgbClr val="2E7D32"/>
                 </a:solidFill>
                 <a:latin typeface="Consolas"/>
                 <a:ea typeface="BIZ UDGothic"/>
                 <a:cs typeface="BIZ UDGothic"/>
               </a:rPr>
-              <a:t>        yellow.value(1)</a:t>
+              <a:t># ボタンを直接見に行かず、目印(pressed)を確認する</a:t>
             </a:r>
           </a:p>
           <a:p>
             <a:pPr algn="l">
               <a:lnSpc>
-                <a:spcPts val="1700"/>
+                <a:spcPts val="2000"/>
               </a:lnSpc>
             </a:pPr>
             <a:r>
-              <a:rPr sz="1400" b="0">
+              <a:rPr sz="1600" b="0">
                 <a:solidFill>
                   <a:srgbClr val="222222"/>
                 </a:solidFill>
@@ -24865,17 +24661,17 @@
                 <a:ea typeface="BIZ UDGothic"/>
                 <a:cs typeface="BIZ UDGothic"/>
               </a:rPr>
-              <a:t>        print("黄")</a:t>
+              <a:t>    if pressed:</a:t>
             </a:r>
           </a:p>
           <a:p>
             <a:pPr algn="l">
               <a:lnSpc>
-                <a:spcPts val="1700"/>
+                <a:spcPts val="2000"/>
               </a:lnSpc>
             </a:pPr>
             <a:r>
-              <a:rPr sz="1400" b="0">
+              <a:rPr sz="1600" b="0">
                 <a:solidFill>
                   <a:srgbClr val="222222"/>
                 </a:solidFill>
@@ -24883,10 +24679,10 @@
                 <a:ea typeface="BIZ UDGothic"/>
                 <a:cs typeface="BIZ UDGothic"/>
               </a:rPr>
-              <a:t>        time.sleep_ms(2000)        </a:t>
-            </a:r>
-            <a:r>
-              <a:rPr sz="1400" b="0">
+              <a:t>        pressed = False            </a:t>
+            </a:r>
+            <a:r>
+              <a:rPr sz="1600" b="0">
                 <a:solidFill>
                   <a:srgbClr val="2E7D32"/>
                 </a:solidFill>
@@ -24894,17 +24690,17 @@
                 <a:ea typeface="BIZ UDGothic"/>
                 <a:cs typeface="BIZ UDGothic"/>
               </a:rPr>
-              <a:t># 黄は2秒</a:t>
+              <a:t># 目印を下ろしておく</a:t>
             </a:r>
           </a:p>
           <a:p>
             <a:pPr algn="l">
               <a:lnSpc>
-                <a:spcPts val="1700"/>
+                <a:spcPts val="2000"/>
               </a:lnSpc>
             </a:pPr>
             <a:r>
-              <a:rPr sz="1400" b="0">
+              <a:rPr sz="1600" b="0">
                 <a:solidFill>
                   <a:srgbClr val="222222"/>
                 </a:solidFill>
@@ -24912,17 +24708,17 @@
                 <a:ea typeface="BIZ UDGothic"/>
                 <a:cs typeface="BIZ UDGothic"/>
               </a:rPr>
-              <a:t> </a:t>
+              <a:t>        print("ボタン押下")</a:t>
             </a:r>
           </a:p>
           <a:p>
             <a:pPr algn="l">
               <a:lnSpc>
-                <a:spcPts val="1700"/>
+                <a:spcPts val="2000"/>
               </a:lnSpc>
             </a:pPr>
             <a:r>
-              <a:rPr sz="1400" b="0">
+              <a:rPr sz="1600" b="0">
                 <a:solidFill>
                   <a:srgbClr val="222222"/>
                 </a:solidFill>
@@ -24930,10 +24726,10 @@
                 <a:ea typeface="BIZ UDGothic"/>
                 <a:cs typeface="BIZ UDGothic"/>
               </a:rPr>
-              <a:t>        </a:t>
-            </a:r>
-            <a:r>
-              <a:rPr sz="1400" b="0">
+              <a:t>        time.sleep_ms(3000)        </a:t>
+            </a:r>
+            <a:r>
+              <a:rPr sz="1600" b="0">
                 <a:solidFill>
                   <a:srgbClr val="2E7D32"/>
                 </a:solidFill>
@@ -24941,17 +24737,17 @@
                 <a:ea typeface="BIZ UDGothic"/>
                 <a:cs typeface="BIZ UDGothic"/>
               </a:rPr>
-              <a:t># 黄 → 赤</a:t>
+              <a:t># 3秒待つ</a:t>
             </a:r>
           </a:p>
           <a:p>
             <a:pPr algn="l">
               <a:lnSpc>
-                <a:spcPts val="1700"/>
+                <a:spcPts val="2000"/>
               </a:lnSpc>
             </a:pPr>
             <a:r>
-              <a:rPr sz="1400" b="0">
+              <a:rPr sz="1600" b="0">
                 <a:solidFill>
                   <a:srgbClr val="222222"/>
                 </a:solidFill>
@@ -24959,17 +24755,17 @@
                 <a:ea typeface="BIZ UDGothic"/>
                 <a:cs typeface="BIZ UDGothic"/>
               </a:rPr>
-              <a:t>        yellow.value(0)</a:t>
+              <a:t> </a:t>
             </a:r>
           </a:p>
           <a:p>
             <a:pPr algn="l">
               <a:lnSpc>
-                <a:spcPts val="1700"/>
+                <a:spcPts val="2000"/>
               </a:lnSpc>
             </a:pPr>
             <a:r>
-              <a:rPr sz="1400" b="0">
+              <a:rPr sz="1600" b="0">
                 <a:solidFill>
                   <a:srgbClr val="222222"/>
                 </a:solidFill>
@@ -24977,35 +24773,28 @@
                 <a:ea typeface="BIZ UDGothic"/>
                 <a:cs typeface="BIZ UDGothic"/>
               </a:rPr>
-              <a:t>        red.value(1)</a:t>
-            </a:r>
-          </a:p>
-          <a:p>
-            <a:pPr algn="l">
-              <a:lnSpc>
-                <a:spcPts val="1700"/>
-              </a:lnSpc>
-            </a:pPr>
-            <a:r>
-              <a:rPr sz="1400" b="0">
-                <a:solidFill>
-                  <a:srgbClr val="222222"/>
+              <a:t>        </a:t>
+            </a:r>
+            <a:r>
+              <a:rPr sz="1600" b="0">
+                <a:solidFill>
+                  <a:srgbClr val="2E7D32"/>
                 </a:solidFill>
                 <a:latin typeface="Consolas"/>
                 <a:ea typeface="BIZ UDGothic"/>
                 <a:cs typeface="BIZ UDGothic"/>
               </a:rPr>
-              <a:t>        print("赤(歩行者OK)")</a:t>
+              <a:t># 緑 → 黄</a:t>
             </a:r>
           </a:p>
           <a:p>
             <a:pPr algn="l">
               <a:lnSpc>
-                <a:spcPts val="1700"/>
+                <a:spcPts val="2000"/>
               </a:lnSpc>
             </a:pPr>
             <a:r>
-              <a:rPr sz="1400" b="0">
+              <a:rPr sz="1600" b="0">
                 <a:solidFill>
                   <a:srgbClr val="222222"/>
                 </a:solidFill>
@@ -25013,17 +24802,201 @@
                 <a:ea typeface="BIZ UDGothic"/>
                 <a:cs typeface="BIZ UDGothic"/>
               </a:rPr>
-              <a:t>        time.sleep_ms(5000)        </a:t>
-            </a:r>
-            <a:r>
-              <a:rPr sz="1400" b="0">
-                <a:solidFill>
-                  <a:srgbClr val="2E7D32"/>
+              <a:t>        green.value(0)</a:t>
+            </a:r>
+          </a:p>
+          <a:p>
+            <a:pPr algn="l">
+              <a:lnSpc>
+                <a:spcPts val="2000"/>
+              </a:lnSpc>
+            </a:pPr>
+            <a:r>
+              <a:rPr sz="1600" b="0">
+                <a:solidFill>
+                  <a:srgbClr val="222222"/>
                 </a:solidFill>
                 <a:latin typeface="Consolas"/>
                 <a:ea typeface="BIZ UDGothic"/>
                 <a:cs typeface="BIZ UDGothic"/>
               </a:rPr>
+              <a:t>        yellow.value(1)</a:t>
+            </a:r>
+          </a:p>
+          <a:p>
+            <a:pPr algn="l">
+              <a:lnSpc>
+                <a:spcPts val="2000"/>
+              </a:lnSpc>
+            </a:pPr>
+            <a:r>
+              <a:rPr sz="1600" b="0">
+                <a:solidFill>
+                  <a:srgbClr val="222222"/>
+                </a:solidFill>
+                <a:latin typeface="Consolas"/>
+                <a:ea typeface="BIZ UDGothic"/>
+                <a:cs typeface="BIZ UDGothic"/>
+              </a:rPr>
+              <a:t>        print("黄")</a:t>
+            </a:r>
+          </a:p>
+          <a:p>
+            <a:pPr algn="l">
+              <a:lnSpc>
+                <a:spcPts val="2000"/>
+              </a:lnSpc>
+            </a:pPr>
+            <a:r>
+              <a:rPr sz="1600" b="0">
+                <a:solidFill>
+                  <a:srgbClr val="222222"/>
+                </a:solidFill>
+                <a:latin typeface="Consolas"/>
+                <a:ea typeface="BIZ UDGothic"/>
+                <a:cs typeface="BIZ UDGothic"/>
+              </a:rPr>
+              <a:t>        time.sleep_ms(2000)        </a:t>
+            </a:r>
+            <a:r>
+              <a:rPr sz="1600" b="0">
+                <a:solidFill>
+                  <a:srgbClr val="2E7D32"/>
+                </a:solidFill>
+                <a:latin typeface="Consolas"/>
+                <a:ea typeface="BIZ UDGothic"/>
+                <a:cs typeface="BIZ UDGothic"/>
+              </a:rPr>
+              <a:t># 黄は2秒</a:t>
+            </a:r>
+          </a:p>
+          <a:p>
+            <a:pPr algn="l">
+              <a:lnSpc>
+                <a:spcPts val="2000"/>
+              </a:lnSpc>
+            </a:pPr>
+            <a:r>
+              <a:rPr sz="1600" b="0">
+                <a:solidFill>
+                  <a:srgbClr val="222222"/>
+                </a:solidFill>
+                <a:latin typeface="Consolas"/>
+                <a:ea typeface="BIZ UDGothic"/>
+                <a:cs typeface="BIZ UDGothic"/>
+              </a:rPr>
+              <a:t> </a:t>
+            </a:r>
+          </a:p>
+          <a:p>
+            <a:pPr algn="l">
+              <a:lnSpc>
+                <a:spcPts val="2000"/>
+              </a:lnSpc>
+            </a:pPr>
+            <a:r>
+              <a:rPr sz="1600" b="0">
+                <a:solidFill>
+                  <a:srgbClr val="222222"/>
+                </a:solidFill>
+                <a:latin typeface="Consolas"/>
+                <a:ea typeface="BIZ UDGothic"/>
+                <a:cs typeface="BIZ UDGothic"/>
+              </a:rPr>
+              <a:t>        </a:t>
+            </a:r>
+            <a:r>
+              <a:rPr sz="1600" b="0">
+                <a:solidFill>
+                  <a:srgbClr val="2E7D32"/>
+                </a:solidFill>
+                <a:latin typeface="Consolas"/>
+                <a:ea typeface="BIZ UDGothic"/>
+                <a:cs typeface="BIZ UDGothic"/>
+              </a:rPr>
+              <a:t># 黄 → 赤</a:t>
+            </a:r>
+          </a:p>
+          <a:p>
+            <a:pPr algn="l">
+              <a:lnSpc>
+                <a:spcPts val="2000"/>
+              </a:lnSpc>
+            </a:pPr>
+            <a:r>
+              <a:rPr sz="1600" b="0">
+                <a:solidFill>
+                  <a:srgbClr val="222222"/>
+                </a:solidFill>
+                <a:latin typeface="Consolas"/>
+                <a:ea typeface="BIZ UDGothic"/>
+                <a:cs typeface="BIZ UDGothic"/>
+              </a:rPr>
+              <a:t>        yellow.value(0)</a:t>
+            </a:r>
+          </a:p>
+          <a:p>
+            <a:pPr algn="l">
+              <a:lnSpc>
+                <a:spcPts val="2000"/>
+              </a:lnSpc>
+            </a:pPr>
+            <a:r>
+              <a:rPr sz="1600" b="0">
+                <a:solidFill>
+                  <a:srgbClr val="222222"/>
+                </a:solidFill>
+                <a:latin typeface="Consolas"/>
+                <a:ea typeface="BIZ UDGothic"/>
+                <a:cs typeface="BIZ UDGothic"/>
+              </a:rPr>
+              <a:t>        red.value(1)</a:t>
+            </a:r>
+          </a:p>
+          <a:p>
+            <a:pPr algn="l">
+              <a:lnSpc>
+                <a:spcPts val="2000"/>
+              </a:lnSpc>
+            </a:pPr>
+            <a:r>
+              <a:rPr sz="1600" b="0">
+                <a:solidFill>
+                  <a:srgbClr val="222222"/>
+                </a:solidFill>
+                <a:latin typeface="Consolas"/>
+                <a:ea typeface="BIZ UDGothic"/>
+                <a:cs typeface="BIZ UDGothic"/>
+              </a:rPr>
+              <a:t>        print("赤(歩行者OK)")</a:t>
+            </a:r>
+          </a:p>
+          <a:p>
+            <a:pPr algn="l">
+              <a:lnSpc>
+                <a:spcPts val="2000"/>
+              </a:lnSpc>
+            </a:pPr>
+            <a:r>
+              <a:rPr sz="1600" b="0">
+                <a:solidFill>
+                  <a:srgbClr val="222222"/>
+                </a:solidFill>
+                <a:latin typeface="Consolas"/>
+                <a:ea typeface="BIZ UDGothic"/>
+                <a:cs typeface="BIZ UDGothic"/>
+              </a:rPr>
+              <a:t>        time.sleep_ms(5000)        </a:t>
+            </a:r>
+            <a:r>
+              <a:rPr sz="1600" b="0">
+                <a:solidFill>
+                  <a:srgbClr val="2E7D32"/>
+                </a:solidFill>
+                <a:latin typeface="Consolas"/>
+                <a:ea typeface="BIZ UDGothic"/>
+                <a:cs typeface="BIZ UDGothic"/>
+              </a:rPr>
               <a:t># 赤は5秒</a:t>
             </a:r>
           </a:p>
@@ -25031,14 +25004,102 @@
       </p:sp>
       <p:sp>
         <p:nvSpPr>
-          <p:cNvPr id="7" name="TextBox 6"/>
+          <p:cNvPr id="10" name="Rounded Rectangle 9"/>
+          <p:cNvSpPr/>
+          <p:nvPr/>
+        </p:nvSpPr>
+        <p:spPr>
+          <a:xfrm>
+            <a:off x="640080" y="1585468"/>
+            <a:ext cx="1320800" cy="266700"/>
+          </a:xfrm>
+          <a:prstGeom prst="roundRect">
+            <a:avLst/>
+          </a:prstGeom>
+          <a:noFill/>
+          <a:ln w="25400">
+            <a:solidFill>
+              <a:srgbClr val="8E24AA"/>
+            </a:solidFill>
+          </a:ln>
+          <a:effectLst/>
+        </p:spPr>
+        <p:style>
+          <a:lnRef idx="1">
+            <a:schemeClr val="accent1"/>
+          </a:lnRef>
+          <a:fillRef idx="3">
+            <a:schemeClr val="accent1"/>
+          </a:fillRef>
+          <a:effectRef idx="2">
+            <a:schemeClr val="accent1"/>
+          </a:effectRef>
+          <a:fontRef idx="minor">
+            <a:schemeClr val="lt1"/>
+          </a:fontRef>
+        </p:style>
+        <p:txBody>
+          <a:bodyPr rtlCol="0" anchor="ctr"/>
+          <a:lstStyle/>
+          <a:p>
+            <a:pPr algn="ctr"/>
+          </a:p>
+        </p:txBody>
+      </p:sp>
+      <p:sp>
+        <p:nvSpPr>
+          <p:cNvPr id="11" name="Rounded Rectangle 10"/>
+          <p:cNvSpPr/>
+          <p:nvPr/>
+        </p:nvSpPr>
+        <p:spPr>
+          <a:xfrm>
+            <a:off x="1087120" y="2093468"/>
+            <a:ext cx="1320800" cy="266700"/>
+          </a:xfrm>
+          <a:prstGeom prst="roundRect">
+            <a:avLst/>
+          </a:prstGeom>
+          <a:noFill/>
+          <a:ln w="25400">
+            <a:solidFill>
+              <a:srgbClr val="E53935"/>
+            </a:solidFill>
+          </a:ln>
+          <a:effectLst/>
+        </p:spPr>
+        <p:style>
+          <a:lnRef idx="1">
+            <a:schemeClr val="accent1"/>
+          </a:lnRef>
+          <a:fillRef idx="3">
+            <a:schemeClr val="accent1"/>
+          </a:fillRef>
+          <a:effectRef idx="2">
+            <a:schemeClr val="accent1"/>
+          </a:effectRef>
+          <a:fontRef idx="minor">
+            <a:schemeClr val="lt1"/>
+          </a:fontRef>
+        </p:style>
+        <p:txBody>
+          <a:bodyPr rtlCol="0" anchor="ctr"/>
+          <a:lstStyle/>
+          <a:p>
+            <a:pPr algn="ctr"/>
+          </a:p>
+        </p:txBody>
+      </p:sp>
+      <p:sp>
+        <p:nvSpPr>
+          <p:cNvPr id="12" name="TextBox 11"/>
           <p:cNvSpPr txBox="1"/>
           <p:nvPr/>
         </p:nvSpPr>
         <p:spPr>
           <a:xfrm>
-            <a:off x="548640" y="6080760"/>
-            <a:ext cx="11094415" cy="365760"/>
+            <a:off x="548640" y="6446520"/>
+            <a:ext cx="8534095" cy="320040"/>
           </a:xfrm>
           <a:prstGeom prst="rect">
             <a:avLst/>
@@ -25057,7 +25118,7 @@
               </a:spcAft>
             </a:pPr>
             <a:r>
-              <a:rPr sz="1400" b="0">
+              <a:rPr sz="1200" b="0">
                 <a:solidFill>
                   <a:srgbClr val="666666"/>
                 </a:solidFill>
@@ -25231,7 +25292,7 @@
         <p:spPr>
           <a:xfrm>
             <a:off x="548640" y="1234440"/>
-            <a:ext cx="11094415" cy="2603500"/>
+            <a:ext cx="11094415" cy="3022600"/>
           </a:xfrm>
           <a:prstGeom prst="rect">
             <a:avLst/>
@@ -25277,7 +25338,7 @@
         <p:spPr>
           <a:xfrm>
             <a:off x="548640" y="1234440"/>
-            <a:ext cx="11094415" cy="2603500"/>
+            <a:ext cx="11094415" cy="3022600"/>
           </a:xfrm>
           <a:prstGeom prst="rect">
             <a:avLst/>
@@ -25292,11 +25353,11 @@
           <a:p>
             <a:pPr algn="l">
               <a:lnSpc>
-                <a:spcPts val="1700"/>
+                <a:spcPts val="2000"/>
               </a:lnSpc>
             </a:pPr>
             <a:r>
-              <a:rPr sz="1400" b="0">
+              <a:rPr sz="1600" b="0">
                 <a:solidFill>
                   <a:srgbClr val="222222"/>
                 </a:solidFill>
@@ -25307,7 +25368,7 @@
               <a:t>        </a:t>
             </a:r>
             <a:r>
-              <a:rPr sz="1400" b="0">
+              <a:rPr sz="1600" b="0">
                 <a:solidFill>
                   <a:srgbClr val="2E7D32"/>
                 </a:solidFill>
@@ -25321,11 +25382,11 @@
           <a:p>
             <a:pPr algn="l">
               <a:lnSpc>
-                <a:spcPts val="1700"/>
+                <a:spcPts val="2000"/>
               </a:lnSpc>
             </a:pPr>
             <a:r>
-              <a:rPr sz="1400" b="0">
+              <a:rPr sz="1600" b="0">
                 <a:solidFill>
                   <a:srgbClr val="222222"/>
                 </a:solidFill>
@@ -25339,11 +25400,11 @@
           <a:p>
             <a:pPr algn="l">
               <a:lnSpc>
-                <a:spcPts val="1700"/>
+                <a:spcPts val="2000"/>
               </a:lnSpc>
             </a:pPr>
             <a:r>
-              <a:rPr sz="1400" b="0">
+              <a:rPr sz="1600" b="0">
                 <a:solidFill>
                   <a:srgbClr val="222222"/>
                 </a:solidFill>
@@ -25357,11 +25418,11 @@
           <a:p>
             <a:pPr algn="l">
               <a:lnSpc>
-                <a:spcPts val="1700"/>
+                <a:spcPts val="2000"/>
               </a:lnSpc>
             </a:pPr>
             <a:r>
-              <a:rPr sz="1400" b="0">
+              <a:rPr sz="1600" b="0">
                 <a:solidFill>
                   <a:srgbClr val="222222"/>
                 </a:solidFill>
@@ -25375,11 +25436,11 @@
           <a:p>
             <a:pPr algn="l">
               <a:lnSpc>
-                <a:spcPts val="1700"/>
+                <a:spcPts val="2000"/>
               </a:lnSpc>
             </a:pPr>
             <a:r>
-              <a:rPr sz="1400" b="0">
+              <a:rPr sz="1600" b="0">
                 <a:solidFill>
                   <a:srgbClr val="222222"/>
                 </a:solidFill>
@@ -25393,11 +25454,11 @@
           <a:p>
             <a:pPr algn="l">
               <a:lnSpc>
-                <a:spcPts val="1700"/>
+                <a:spcPts val="2000"/>
               </a:lnSpc>
             </a:pPr>
             <a:r>
-              <a:rPr sz="1400" b="0">
+              <a:rPr sz="1600" b="0">
                 <a:solidFill>
                   <a:srgbClr val="222222"/>
                 </a:solidFill>
@@ -25408,7 +25469,7 @@
               <a:t>        </a:t>
             </a:r>
             <a:r>
-              <a:rPr sz="1400" b="0">
+              <a:rPr sz="1600" b="0">
                 <a:solidFill>
                   <a:srgbClr val="2E7D32"/>
                 </a:solidFill>
@@ -25422,11 +25483,11 @@
           <a:p>
             <a:pPr algn="l">
               <a:lnSpc>
-                <a:spcPts val="1700"/>
+                <a:spcPts val="2000"/>
               </a:lnSpc>
             </a:pPr>
             <a:r>
-              <a:rPr sz="1400" b="0">
+              <a:rPr sz="1600" b="0">
                 <a:solidFill>
                   <a:srgbClr val="222222"/>
                 </a:solidFill>
@@ -25437,7 +25498,7 @@
               <a:t>        </a:t>
             </a:r>
             <a:r>
-              <a:rPr sz="1400" b="0">
+              <a:rPr sz="1600" b="0">
                 <a:solidFill>
                   <a:srgbClr val="2E7D32"/>
                 </a:solidFill>
@@ -25451,11 +25512,11 @@
           <a:p>
             <a:pPr algn="l">
               <a:lnSpc>
-                <a:spcPts val="1700"/>
+                <a:spcPts val="2000"/>
               </a:lnSpc>
             </a:pPr>
             <a:r>
-              <a:rPr sz="1400" b="0">
+              <a:rPr sz="1600" b="0">
                 <a:solidFill>
                   <a:srgbClr val="222222"/>
                 </a:solidFill>
@@ -25466,7 +25527,7 @@
               <a:t>        </a:t>
             </a:r>
             <a:r>
-              <a:rPr sz="1400" b="0">
+              <a:rPr sz="1600" b="0">
                 <a:solidFill>
                   <a:srgbClr val="2E7D32"/>
                 </a:solidFill>
@@ -25480,11 +25541,11 @@
           <a:p>
             <a:pPr algn="l">
               <a:lnSpc>
-                <a:spcPts val="1700"/>
+                <a:spcPts val="2000"/>
               </a:lnSpc>
             </a:pPr>
             <a:r>
-              <a:rPr sz="1400" b="0">
+              <a:rPr sz="1600" b="0">
                 <a:solidFill>
                   <a:srgbClr val="222222"/>
                 </a:solidFill>
@@ -25498,11 +25559,11 @@
           <a:p>
             <a:pPr algn="l">
               <a:lnSpc>
-                <a:spcPts val="1700"/>
+                <a:spcPts val="2000"/>
               </a:lnSpc>
             </a:pPr>
             <a:r>
-              <a:rPr sz="1400" b="0">
+              <a:rPr sz="1600" b="0">
                 <a:solidFill>
                   <a:srgbClr val="222222"/>
                 </a:solidFill>
@@ -25516,11 +25577,11 @@
           <a:p>
             <a:pPr algn="l">
               <a:lnSpc>
-                <a:spcPts val="1700"/>
+                <a:spcPts val="2000"/>
               </a:lnSpc>
             </a:pPr>
             <a:r>
-              <a:rPr sz="1400" b="0">
+              <a:rPr sz="1600" b="0">
                 <a:solidFill>
                   <a:srgbClr val="222222"/>
                 </a:solidFill>
@@ -25531,7 +25592,7 @@
               <a:t>    time.sleep_ms(50)              </a:t>
             </a:r>
             <a:r>
-              <a:rPr sz="1400" b="0">
+              <a:rPr sz="1600" b="0">
                 <a:solidFill>
                   <a:srgbClr val="2E7D32"/>
                 </a:solidFill>
@@ -26345,7 +26406,7 @@
         <p:spPr>
           <a:xfrm>
             <a:off x="548640" y="1234440"/>
-            <a:ext cx="6035040" cy="3657600"/>
+            <a:ext cx="6035040" cy="3840480"/>
           </a:xfrm>
           <a:prstGeom prst="rect">
             <a:avLst/>
@@ -26372,7 +26433,7 @@
                 <a:ea typeface="Meiryo"/>
                 <a:cs typeface="Meiryo"/>
               </a:rPr>
-              <a:t>・人の体から出る </a:t>
+              <a:t>・人の体の </a:t>
             </a:r>
             <a:r>
               <a:rPr sz="2200" b="1">
@@ -26394,7 +26455,7 @@
                 <a:ea typeface="Meiryo"/>
                 <a:cs typeface="Meiryo"/>
               </a:rPr>
-              <a:t> を感じ取る</a:t>
+              <a:t> を感じる</a:t>
             </a:r>
           </a:p>
           <a:p>
@@ -26412,7 +26473,7 @@
                 <a:ea typeface="Meiryo"/>
                 <a:cs typeface="Meiryo"/>
               </a:rPr>
-              <a:t>・検知すると OUT が </a:t>
+              <a:t>・検知 → OUT が </a:t>
             </a:r>
             <a:r>
               <a:rPr sz="2200" b="1">
@@ -26424,28 +26485,6 @@
                 <a:cs typeface="Meiryo"/>
               </a:rPr>
               <a:t>HIGH</a:t>
-            </a:r>
-            <a:r>
-              <a:rPr sz="2200" b="0">
-                <a:solidFill>
-                  <a:srgbClr val="222222"/>
-                </a:solidFill>
-                <a:latin typeface="Meiryo"/>
-                <a:ea typeface="Meiryo"/>
-                <a:cs typeface="Meiryo"/>
-              </a:rPr>
-              <a:t>、いなくなると </a:t>
-            </a:r>
-            <a:r>
-              <a:rPr sz="2200" b="1">
-                <a:solidFill>
-                  <a:srgbClr val="1F6FB2"/>
-                </a:solidFill>
-                <a:latin typeface="Meiryo"/>
-                <a:ea typeface="Meiryo"/>
-                <a:cs typeface="Meiryo"/>
-              </a:rPr>
-              <a:t>LOW</a:t>
             </a:r>
           </a:p>
           <a:p>
@@ -26463,7 +26502,7 @@
                 <a:ea typeface="Meiryo"/>
                 <a:cs typeface="Meiryo"/>
               </a:rPr>
-              <a:t>・電源を入れて数十秒は不安定(</a:t>
+              <a:t>・いなくなる → </a:t>
             </a:r>
             <a:r>
               <a:rPr sz="2200" b="1">
@@ -26474,18 +26513,7 @@
                 <a:ea typeface="Meiryo"/>
                 <a:cs typeface="Meiryo"/>
               </a:rPr>
-              <a:t>ウォームアップ</a:t>
-            </a:r>
-            <a:r>
-              <a:rPr sz="2200" b="0">
-                <a:solidFill>
-                  <a:srgbClr val="222222"/>
-                </a:solidFill>
-                <a:latin typeface="Meiryo"/>
-                <a:ea typeface="Meiryo"/>
-                <a:cs typeface="Meiryo"/>
-              </a:rPr>
-              <a:t>)</a:t>
+              <a:t>LOW</a:t>
             </a:r>
           </a:p>
           <a:p>
@@ -26503,10 +26531,28 @@
                 <a:ea typeface="Meiryo"/>
                 <a:cs typeface="Meiryo"/>
               </a:rPr>
-              <a:t>・検知後しばらく HIGH が続く(</a:t>
-            </a:r>
-            <a:r>
-              <a:rPr sz="2200" b="1">
+              <a:t>・電源を入れて数十秒は不安定</a:t>
+            </a:r>
+          </a:p>
+          <a:p>
+            <a:pPr algn="l">
+              <a:spcAft>
+                <a:spcPts val="1000"/>
+              </a:spcAft>
+            </a:pPr>
+            <a:r>
+              <a:rPr sz="2000" b="0">
+                <a:solidFill>
+                  <a:srgbClr val="222222"/>
+                </a:solidFill>
+                <a:latin typeface="Meiryo"/>
+                <a:ea typeface="Meiryo"/>
+                <a:cs typeface="Meiryo"/>
+              </a:rPr>
+              <a:t>　　– → </a:t>
+            </a:r>
+            <a:r>
+              <a:rPr sz="2000" b="1">
                 <a:solidFill>
                   <a:srgbClr val="1F6FB2"/>
                 </a:solidFill>
@@ -26514,18 +26560,65 @@
                 <a:ea typeface="Meiryo"/>
                 <a:cs typeface="Meiryo"/>
               </a:rPr>
+              <a:t>ウォームアップ</a:t>
+            </a:r>
+            <a:r>
+              <a:rPr sz="2000" b="0">
+                <a:solidFill>
+                  <a:srgbClr val="222222"/>
+                </a:solidFill>
+                <a:latin typeface="Meiryo"/>
+                <a:ea typeface="Meiryo"/>
+                <a:cs typeface="Meiryo"/>
+              </a:rPr>
+              <a:t> が必要</a:t>
+            </a:r>
+          </a:p>
+          <a:p>
+            <a:pPr algn="l">
+              <a:spcAft>
+                <a:spcPts val="1000"/>
+              </a:spcAft>
+            </a:pPr>
+            <a:r>
+              <a:rPr sz="2200" b="0">
+                <a:solidFill>
+                  <a:srgbClr val="222222"/>
+                </a:solidFill>
+                <a:latin typeface="Meiryo"/>
+                <a:ea typeface="Meiryo"/>
+                <a:cs typeface="Meiryo"/>
+              </a:rPr>
+              <a:t>・検知後しばらく HIGH が続く</a:t>
+            </a:r>
+          </a:p>
+          <a:p>
+            <a:pPr algn="l">
+              <a:spcAft>
+                <a:spcPts val="1000"/>
+              </a:spcAft>
+            </a:pPr>
+            <a:r>
+              <a:rPr sz="2000" b="0">
+                <a:solidFill>
+                  <a:srgbClr val="222222"/>
+                </a:solidFill>
+                <a:latin typeface="Meiryo"/>
+                <a:ea typeface="Meiryo"/>
+                <a:cs typeface="Meiryo"/>
+              </a:rPr>
+              <a:t>　　– → </a:t>
+            </a:r>
+            <a:r>
+              <a:rPr sz="2000" b="1">
+                <a:solidFill>
+                  <a:srgbClr val="1F6FB2"/>
+                </a:solidFill>
+                <a:latin typeface="Meiryo"/>
+                <a:ea typeface="Meiryo"/>
+                <a:cs typeface="Meiryo"/>
+              </a:rPr>
               <a:t>ホールド時間</a:t>
-            </a:r>
-            <a:r>
-              <a:rPr sz="2200" b="0">
-                <a:solidFill>
-                  <a:srgbClr val="222222"/>
-                </a:solidFill>
-                <a:latin typeface="Meiryo"/>
-                <a:ea typeface="Meiryo"/>
-                <a:cs typeface="Meiryo"/>
-              </a:rPr>
-              <a:t>)</a:t>
             </a:r>
           </a:p>
         </p:txBody>
@@ -27380,11 +27473,11 @@
           <a:p>
             <a:pPr algn="l">
               <a:lnSpc>
-                <a:spcPts val="1700"/>
+                <a:spcPts val="2000"/>
               </a:lnSpc>
             </a:pPr>
             <a:r>
-              <a:rPr sz="1400" b="0">
+              <a:rPr sz="1600" b="0">
                 <a:solidFill>
                   <a:srgbClr val="2E7D32"/>
                 </a:solidFill>
@@ -27398,11 +27491,11 @@
           <a:p>
             <a:pPr algn="l">
               <a:lnSpc>
-                <a:spcPts val="1700"/>
+                <a:spcPts val="2000"/>
               </a:lnSpc>
             </a:pPr>
             <a:r>
-              <a:rPr sz="1400" b="0">
+              <a:rPr sz="1600" b="0">
                 <a:solidFill>
                   <a:srgbClr val="222222"/>
                 </a:solidFill>
@@ -27416,11 +27509,11 @@
           <a:p>
             <a:pPr algn="l">
               <a:lnSpc>
-                <a:spcPts val="1700"/>
+                <a:spcPts val="2000"/>
               </a:lnSpc>
             </a:pPr>
             <a:r>
-              <a:rPr sz="1400" b="0">
+              <a:rPr sz="1600" b="0">
                 <a:solidFill>
                   <a:srgbClr val="222222"/>
                 </a:solidFill>
@@ -27434,11 +27527,11 @@
           <a:p>
             <a:pPr algn="l">
               <a:lnSpc>
-                <a:spcPts val="1700"/>
+                <a:spcPts val="2000"/>
               </a:lnSpc>
             </a:pPr>
             <a:r>
-              <a:rPr sz="1400" b="0">
+              <a:rPr sz="1600" b="0">
                 <a:solidFill>
                   <a:srgbClr val="222222"/>
                 </a:solidFill>
@@ -27452,11 +27545,11 @@
           <a:p>
             <a:pPr algn="l">
               <a:lnSpc>
-                <a:spcPts val="1700"/>
+                <a:spcPts val="2000"/>
               </a:lnSpc>
             </a:pPr>
             <a:r>
-              <a:rPr sz="1400" b="0">
+              <a:rPr sz="1600" b="0">
                 <a:solidFill>
                   <a:srgbClr val="2E7D32"/>
                 </a:solidFill>
@@ -27470,11 +27563,11 @@
           <a:p>
             <a:pPr algn="l">
               <a:lnSpc>
-                <a:spcPts val="1700"/>
+                <a:spcPts val="2000"/>
               </a:lnSpc>
             </a:pPr>
             <a:r>
-              <a:rPr sz="1400" b="0">
+              <a:rPr sz="1600" b="0">
                 <a:solidFill>
                   <a:srgbClr val="2E7D32"/>
                 </a:solidFill>
@@ -27488,11 +27581,11 @@
           <a:p>
             <a:pPr algn="l">
               <a:lnSpc>
-                <a:spcPts val="1700"/>
+                <a:spcPts val="2000"/>
               </a:lnSpc>
             </a:pPr>
             <a:r>
-              <a:rPr sz="1400" b="0">
+              <a:rPr sz="1600" b="0">
                 <a:solidFill>
                   <a:srgbClr val="2E7D32"/>
                 </a:solidFill>
@@ -27506,11 +27599,11 @@
           <a:p>
             <a:pPr algn="l">
               <a:lnSpc>
-                <a:spcPts val="1700"/>
+                <a:spcPts val="2000"/>
               </a:lnSpc>
             </a:pPr>
             <a:r>
-              <a:rPr sz="1400" b="0">
+              <a:rPr sz="1600" b="0">
                 <a:solidFill>
                   <a:srgbClr val="222222"/>
                 </a:solidFill>
@@ -27524,11 +27617,11 @@
           <a:p>
             <a:pPr algn="l">
               <a:lnSpc>
-                <a:spcPts val="1700"/>
+                <a:spcPts val="2000"/>
               </a:lnSpc>
             </a:pPr>
             <a:r>
-              <a:rPr sz="1400" b="0">
+              <a:rPr sz="1600" b="0">
                 <a:solidFill>
                   <a:srgbClr val="222222"/>
                 </a:solidFill>
@@ -27542,11 +27635,11 @@
           <a:p>
             <a:pPr algn="l">
               <a:lnSpc>
-                <a:spcPts val="1700"/>
+                <a:spcPts val="2000"/>
               </a:lnSpc>
             </a:pPr>
             <a:r>
-              <a:rPr sz="1400" b="0">
+              <a:rPr sz="1600" b="0">
                 <a:solidFill>
                   <a:srgbClr val="2E7D32"/>
                 </a:solidFill>
@@ -27560,11 +27653,11 @@
           <a:p>
             <a:pPr algn="l">
               <a:lnSpc>
-                <a:spcPts val="1700"/>
+                <a:spcPts val="2000"/>
               </a:lnSpc>
             </a:pPr>
             <a:r>
-              <a:rPr sz="1400" b="0">
+              <a:rPr sz="1600" b="0">
                 <a:solidFill>
                   <a:srgbClr val="222222"/>
                 </a:solidFill>
@@ -27578,11 +27671,11 @@
           <a:p>
             <a:pPr algn="l">
               <a:lnSpc>
-                <a:spcPts val="1700"/>
+                <a:spcPts val="2000"/>
               </a:lnSpc>
             </a:pPr>
             <a:r>
-              <a:rPr sz="1400" b="0">
+              <a:rPr sz="1600" b="0">
                 <a:solidFill>
                   <a:srgbClr val="222222"/>
                 </a:solidFill>
@@ -27596,11 +27689,11 @@
           <a:p>
             <a:pPr algn="l">
               <a:lnSpc>
-                <a:spcPts val="1700"/>
+                <a:spcPts val="2000"/>
               </a:lnSpc>
             </a:pPr>
             <a:r>
-              <a:rPr sz="1400" b="0">
+              <a:rPr sz="1600" b="0">
                 <a:solidFill>
                   <a:srgbClr val="2E7D32"/>
                 </a:solidFill>
@@ -27614,11 +27707,11 @@
           <a:p>
             <a:pPr algn="l">
               <a:lnSpc>
-                <a:spcPts val="1700"/>
+                <a:spcPts val="2000"/>
               </a:lnSpc>
             </a:pPr>
             <a:r>
-              <a:rPr sz="1400" b="0">
+              <a:rPr sz="1600" b="0">
                 <a:solidFill>
                   <a:srgbClr val="2E7D32"/>
                 </a:solidFill>
@@ -27632,11 +27725,11 @@
           <a:p>
             <a:pPr algn="l">
               <a:lnSpc>
-                <a:spcPts val="1700"/>
+                <a:spcPts val="2000"/>
               </a:lnSpc>
             </a:pPr>
             <a:r>
-              <a:rPr sz="1400" b="0">
+              <a:rPr sz="1600" b="0">
                 <a:solidFill>
                   <a:srgbClr val="222222"/>
                 </a:solidFill>
@@ -27650,11 +27743,11 @@
           <a:p>
             <a:pPr algn="l">
               <a:lnSpc>
-                <a:spcPts val="1700"/>
+                <a:spcPts val="2000"/>
               </a:lnSpc>
             </a:pPr>
             <a:r>
-              <a:rPr sz="1400" b="0">
+              <a:rPr sz="1600" b="0">
                 <a:solidFill>
                   <a:srgbClr val="222222"/>
                 </a:solidFill>
@@ -27668,11 +27761,11 @@
           <a:p>
             <a:pPr algn="l">
               <a:lnSpc>
-                <a:spcPts val="1700"/>
+                <a:spcPts val="2000"/>
               </a:lnSpc>
             </a:pPr>
             <a:r>
-              <a:rPr sz="1400" b="0">
+              <a:rPr sz="1600" b="0">
                 <a:solidFill>
                   <a:srgbClr val="222222"/>
                 </a:solidFill>
@@ -27683,71 +27776,6 @@
               <a:t>print("開始")</a:t>
             </a:r>
           </a:p>
-          <a:p>
-            <a:pPr algn="l">
-              <a:lnSpc>
-                <a:spcPts val="1700"/>
-              </a:lnSpc>
-            </a:pPr>
-            <a:r>
-              <a:rPr sz="1400" b="0">
-                <a:solidFill>
-                  <a:srgbClr val="222222"/>
-                </a:solidFill>
-                <a:latin typeface="Consolas"/>
-                <a:ea typeface="BIZ UDGothic"/>
-                <a:cs typeface="BIZ UDGothic"/>
-              </a:rPr>
-              <a:t> </a:t>
-            </a:r>
-          </a:p>
-          <a:p>
-            <a:pPr algn="l">
-              <a:lnSpc>
-                <a:spcPts val="1700"/>
-              </a:lnSpc>
-            </a:pPr>
-            <a:r>
-              <a:rPr sz="1400" b="0">
-                <a:solidFill>
-                  <a:srgbClr val="2E7D32"/>
-                </a:solidFill>
-                <a:latin typeface="Consolas"/>
-                <a:ea typeface="BIZ UDGothic"/>
-                <a:cs typeface="BIZ UDGothic"/>
-              </a:rPr>
-              <a:t># ---- 前回の値を覚えておく変数 ----</a:t>
-            </a:r>
-          </a:p>
-          <a:p>
-            <a:pPr algn="l">
-              <a:lnSpc>
-                <a:spcPts val="1700"/>
-              </a:lnSpc>
-            </a:pPr>
-            <a:r>
-              <a:rPr sz="1400" b="0">
-                <a:solidFill>
-                  <a:srgbClr val="222222"/>
-                </a:solidFill>
-                <a:latin typeface="Consolas"/>
-                <a:ea typeface="BIZ UDGothic"/>
-                <a:cs typeface="BIZ UDGothic"/>
-              </a:rPr>
-              <a:t>prev = 0   </a:t>
-            </a:r>
-            <a:r>
-              <a:rPr sz="1400" b="0">
-                <a:solidFill>
-                  <a:srgbClr val="2E7D32"/>
-                </a:solidFill>
-                <a:latin typeface="Consolas"/>
-                <a:ea typeface="BIZ UDGothic"/>
-                <a:cs typeface="BIZ UDGothic"/>
-              </a:rPr>
-              <a:t># 最初は「検知なし」として始める</a:t>
-            </a:r>
-          </a:p>
         </p:txBody>
       </p:sp>
       <p:sp>
@@ -27758,8 +27786,8 @@
         </p:nvSpPr>
         <p:spPr>
           <a:xfrm>
-            <a:off x="548640" y="6080760"/>
-            <a:ext cx="11094415" cy="365760"/>
+            <a:off x="548640" y="6446520"/>
+            <a:ext cx="8534095" cy="320040"/>
           </a:xfrm>
           <a:prstGeom prst="rect">
             <a:avLst/>
@@ -27778,7 +27806,7 @@
               </a:spcAft>
             </a:pPr>
             <a:r>
-              <a:rPr sz="1400" b="0">
+              <a:rPr sz="1200" b="0">
                 <a:solidFill>
                   <a:srgbClr val="666666"/>
                 </a:solidFill>
@@ -28107,7 +28135,7 @@
         <p:spPr>
           <a:xfrm>
             <a:off x="548640" y="1234440"/>
-            <a:ext cx="11094415" cy="3467100"/>
+            <a:ext cx="11094415" cy="4800600"/>
           </a:xfrm>
           <a:prstGeom prst="rect">
             <a:avLst/>
@@ -28153,7 +28181,7 @@
         <p:spPr>
           <a:xfrm>
             <a:off x="548640" y="1234440"/>
-            <a:ext cx="11094415" cy="3467100"/>
+            <a:ext cx="11094415" cy="4800600"/>
           </a:xfrm>
           <a:prstGeom prst="rect">
             <a:avLst/>
@@ -28168,11 +28196,11 @@
           <a:p>
             <a:pPr algn="l">
               <a:lnSpc>
-                <a:spcPts val="1700"/>
+                <a:spcPts val="2000"/>
               </a:lnSpc>
             </a:pPr>
             <a:r>
-              <a:rPr sz="1400" b="0">
+              <a:rPr sz="1600" b="0">
                 <a:solidFill>
                   <a:srgbClr val="2E7D32"/>
                 </a:solidFill>
@@ -28180,17 +28208,17 @@
                 <a:ea typeface="BIZ UDGothic"/>
                 <a:cs typeface="BIZ UDGothic"/>
               </a:rPr>
-              <a:t># ---- メインの繰り返し ----</a:t>
+              <a:t># ---- 前回の値を覚えておく変数 ----</a:t>
             </a:r>
           </a:p>
           <a:p>
             <a:pPr algn="l">
               <a:lnSpc>
-                <a:spcPts val="1700"/>
+                <a:spcPts val="2000"/>
               </a:lnSpc>
             </a:pPr>
             <a:r>
-              <a:rPr sz="1400" b="0">
+              <a:rPr sz="1600" b="0">
                 <a:solidFill>
                   <a:srgbClr val="222222"/>
                 </a:solidFill>
@@ -28198,64 +28226,64 @@
                 <a:ea typeface="BIZ UDGothic"/>
                 <a:cs typeface="BIZ UDGothic"/>
               </a:rPr>
-              <a:t>while True:</a:t>
-            </a:r>
-          </a:p>
-          <a:p>
-            <a:pPr algn="l">
-              <a:lnSpc>
-                <a:spcPts val="1700"/>
-              </a:lnSpc>
-            </a:pPr>
-            <a:r>
-              <a:rPr sz="1400" b="0">
-                <a:solidFill>
-                  <a:srgbClr val="222222"/>
+              <a:t>prev = 0   </a:t>
+            </a:r>
+            <a:r>
+              <a:rPr sz="1600" b="0">
+                <a:solidFill>
+                  <a:srgbClr val="2E7D32"/>
                 </a:solidFill>
                 <a:latin typeface="Consolas"/>
                 <a:ea typeface="BIZ UDGothic"/>
                 <a:cs typeface="BIZ UDGothic"/>
               </a:rPr>
-              <a:t>    now = pir.value()          </a:t>
-            </a:r>
-            <a:r>
-              <a:rPr sz="1400" b="0">
-                <a:solidFill>
-                  <a:srgbClr val="2E7D32"/>
+              <a:t># 最初は「検知なし」として始める</a:t>
+            </a:r>
+          </a:p>
+          <a:p>
+            <a:pPr algn="l">
+              <a:lnSpc>
+                <a:spcPts val="2000"/>
+              </a:lnSpc>
+            </a:pPr>
+            <a:r>
+              <a:rPr sz="1600" b="0">
+                <a:solidFill>
+                  <a:srgbClr val="222222"/>
                 </a:solidFill>
                 <a:latin typeface="Consolas"/>
                 <a:ea typeface="BIZ UDGothic"/>
                 <a:cs typeface="BIZ UDGothic"/>
               </a:rPr>
-              <a:t># 今のセンサーの値(1:検知、0:検知なし)</a:t>
+              <a:t> </a:t>
             </a:r>
           </a:p>
           <a:p>
             <a:pPr algn="l">
               <a:lnSpc>
-                <a:spcPts val="1700"/>
+                <a:spcPts val="2000"/>
               </a:lnSpc>
             </a:pPr>
             <a:r>
-              <a:rPr sz="1400" b="0">
-                <a:solidFill>
-                  <a:srgbClr val="222222"/>
+              <a:rPr sz="1600" b="0">
+                <a:solidFill>
+                  <a:srgbClr val="2E7D32"/>
                 </a:solidFill>
                 <a:latin typeface="Consolas"/>
                 <a:ea typeface="BIZ UDGothic"/>
                 <a:cs typeface="BIZ UDGothic"/>
               </a:rPr>
-              <a:t> </a:t>
+              <a:t># ---- メインの繰り返し ----</a:t>
             </a:r>
           </a:p>
           <a:p>
             <a:pPr algn="l">
               <a:lnSpc>
-                <a:spcPts val="1700"/>
+                <a:spcPts val="2000"/>
               </a:lnSpc>
             </a:pPr>
             <a:r>
-              <a:rPr sz="1400" b="0">
+              <a:rPr sz="1600" b="0">
                 <a:solidFill>
                   <a:srgbClr val="222222"/>
                 </a:solidFill>
@@ -28263,57 +28291,64 @@
                 <a:ea typeface="BIZ UDGothic"/>
                 <a:cs typeface="BIZ UDGothic"/>
               </a:rPr>
-              <a:t>    </a:t>
-            </a:r>
-            <a:r>
-              <a:rPr sz="1400" b="0">
-                <a:solidFill>
-                  <a:srgbClr val="2E7D32"/>
+              <a:t>while True:</a:t>
+            </a:r>
+          </a:p>
+          <a:p>
+            <a:pPr algn="l">
+              <a:lnSpc>
+                <a:spcPts val="2000"/>
+              </a:lnSpc>
+            </a:pPr>
+            <a:r>
+              <a:rPr sz="1600" b="0">
+                <a:solidFill>
+                  <a:srgbClr val="222222"/>
                 </a:solidFill>
                 <a:latin typeface="Consolas"/>
                 <a:ea typeface="BIZ UDGothic"/>
                 <a:cs typeface="BIZ UDGothic"/>
               </a:rPr>
-              <a:t># 前回と値が変わったときだけ表示する</a:t>
-            </a:r>
-          </a:p>
-          <a:p>
-            <a:pPr algn="l">
-              <a:lnSpc>
-                <a:spcPts val="1700"/>
-              </a:lnSpc>
-            </a:pPr>
-            <a:r>
-              <a:rPr sz="1400" b="0">
-                <a:solidFill>
-                  <a:srgbClr val="222222"/>
+              <a:t>    now = pir.value()          </a:t>
+            </a:r>
+            <a:r>
+              <a:rPr sz="1600" b="0">
+                <a:solidFill>
+                  <a:srgbClr val="2E7D32"/>
                 </a:solidFill>
                 <a:latin typeface="Consolas"/>
                 <a:ea typeface="BIZ UDGothic"/>
                 <a:cs typeface="BIZ UDGothic"/>
               </a:rPr>
-              <a:t>    </a:t>
-            </a:r>
-            <a:r>
-              <a:rPr sz="1400" b="0">
-                <a:solidFill>
-                  <a:srgbClr val="2E7D32"/>
+              <a:t># 今のセンサーの値(1:検知、0:検知なし)</a:t>
+            </a:r>
+          </a:p>
+          <a:p>
+            <a:pPr algn="l">
+              <a:lnSpc>
+                <a:spcPts val="2000"/>
+              </a:lnSpc>
+            </a:pPr>
+            <a:r>
+              <a:rPr sz="1600" b="0">
+                <a:solidFill>
+                  <a:srgbClr val="222222"/>
                 </a:solidFill>
                 <a:latin typeface="Consolas"/>
                 <a:ea typeface="BIZ UDGothic"/>
                 <a:cs typeface="BIZ UDGothic"/>
               </a:rPr>
-              <a:t># (毎回表示すると Shell が文字だらけになるため)</a:t>
+              <a:t> </a:t>
             </a:r>
           </a:p>
           <a:p>
             <a:pPr algn="l">
               <a:lnSpc>
-                <a:spcPts val="1700"/>
+                <a:spcPts val="2000"/>
               </a:lnSpc>
             </a:pPr>
             <a:r>
-              <a:rPr sz="1400" b="0">
+              <a:rPr sz="1600" b="0">
                 <a:solidFill>
                   <a:srgbClr val="222222"/>
                 </a:solidFill>
@@ -28321,35 +28356,28 @@
                 <a:ea typeface="BIZ UDGothic"/>
                 <a:cs typeface="BIZ UDGothic"/>
               </a:rPr>
-              <a:t>    if now != prev:</a:t>
-            </a:r>
-          </a:p>
-          <a:p>
-            <a:pPr algn="l">
-              <a:lnSpc>
-                <a:spcPts val="1700"/>
-              </a:lnSpc>
-            </a:pPr>
-            <a:r>
-              <a:rPr sz="1400" b="0">
-                <a:solidFill>
-                  <a:srgbClr val="222222"/>
+              <a:t>    </a:t>
+            </a:r>
+            <a:r>
+              <a:rPr sz="1600" b="0">
+                <a:solidFill>
+                  <a:srgbClr val="2E7D32"/>
                 </a:solidFill>
                 <a:latin typeface="Consolas"/>
                 <a:ea typeface="BIZ UDGothic"/>
                 <a:cs typeface="BIZ UDGothic"/>
               </a:rPr>
-              <a:t>        if now == 1:</a:t>
+              <a:t># 前回と値が変わったときだけ表示する</a:t>
             </a:r>
           </a:p>
           <a:p>
             <a:pPr algn="l">
               <a:lnSpc>
-                <a:spcPts val="1700"/>
+                <a:spcPts val="2000"/>
               </a:lnSpc>
             </a:pPr>
             <a:r>
-              <a:rPr sz="1400" b="0">
+              <a:rPr sz="1600" b="0">
                 <a:solidFill>
                   <a:srgbClr val="222222"/>
                 </a:solidFill>
@@ -28357,35 +28385,28 @@
                 <a:ea typeface="BIZ UDGothic"/>
                 <a:cs typeface="BIZ UDGothic"/>
               </a:rPr>
-              <a:t>            print("検知!")</a:t>
-            </a:r>
-          </a:p>
-          <a:p>
-            <a:pPr algn="l">
-              <a:lnSpc>
-                <a:spcPts val="1700"/>
-              </a:lnSpc>
-            </a:pPr>
-            <a:r>
-              <a:rPr sz="1400" b="0">
-                <a:solidFill>
-                  <a:srgbClr val="222222"/>
+              <a:t>    </a:t>
+            </a:r>
+            <a:r>
+              <a:rPr sz="1600" b="0">
+                <a:solidFill>
+                  <a:srgbClr val="2E7D32"/>
                 </a:solidFill>
                 <a:latin typeface="Consolas"/>
                 <a:ea typeface="BIZ UDGothic"/>
                 <a:cs typeface="BIZ UDGothic"/>
               </a:rPr>
-              <a:t>        else:</a:t>
+              <a:t># (毎回表示すると Shell が文字だらけになるため)</a:t>
             </a:r>
           </a:p>
           <a:p>
             <a:pPr algn="l">
               <a:lnSpc>
-                <a:spcPts val="1700"/>
+                <a:spcPts val="2000"/>
               </a:lnSpc>
             </a:pPr>
             <a:r>
-              <a:rPr sz="1400" b="0">
+              <a:rPr sz="1600" b="0">
                 <a:solidFill>
                   <a:srgbClr val="222222"/>
                 </a:solidFill>
@@ -28393,17 +28414,17 @@
                 <a:ea typeface="BIZ UDGothic"/>
                 <a:cs typeface="BIZ UDGothic"/>
               </a:rPr>
-              <a:t>            print("検知なし")</a:t>
+              <a:t>    if now != prev:</a:t>
             </a:r>
           </a:p>
           <a:p>
             <a:pPr algn="l">
               <a:lnSpc>
-                <a:spcPts val="1700"/>
+                <a:spcPts val="2000"/>
               </a:lnSpc>
             </a:pPr>
             <a:r>
-              <a:rPr sz="1400" b="0">
+              <a:rPr sz="1600" b="0">
                 <a:solidFill>
                   <a:srgbClr val="222222"/>
                 </a:solidFill>
@@ -28411,28 +28432,35 @@
                 <a:ea typeface="BIZ UDGothic"/>
                 <a:cs typeface="BIZ UDGothic"/>
               </a:rPr>
-              <a:t>        led.value(now)         </a:t>
-            </a:r>
-            <a:r>
-              <a:rPr sz="1400" b="0">
-                <a:solidFill>
-                  <a:srgbClr val="2E7D32"/>
+              <a:t>        if now == 1:</a:t>
+            </a:r>
+          </a:p>
+          <a:p>
+            <a:pPr algn="l">
+              <a:lnSpc>
+                <a:spcPts val="2000"/>
+              </a:lnSpc>
+            </a:pPr>
+            <a:r>
+              <a:rPr sz="1600" b="0">
+                <a:solidFill>
+                  <a:srgbClr val="222222"/>
                 </a:solidFill>
                 <a:latin typeface="Consolas"/>
                 <a:ea typeface="BIZ UDGothic"/>
                 <a:cs typeface="BIZ UDGothic"/>
               </a:rPr>
-              <a:t># 検知中は本体LEDを点ける</a:t>
+              <a:t>            print("検知!")</a:t>
             </a:r>
           </a:p>
           <a:p>
             <a:pPr algn="l">
               <a:lnSpc>
-                <a:spcPts val="1700"/>
+                <a:spcPts val="2000"/>
               </a:lnSpc>
             </a:pPr>
             <a:r>
-              <a:rPr sz="1400" b="0">
+              <a:rPr sz="1600" b="0">
                 <a:solidFill>
                   <a:srgbClr val="222222"/>
                 </a:solidFill>
@@ -28440,28 +28468,35 @@
                 <a:ea typeface="BIZ UDGothic"/>
                 <a:cs typeface="BIZ UDGothic"/>
               </a:rPr>
-              <a:t>        prev = now             </a:t>
-            </a:r>
-            <a:r>
-              <a:rPr sz="1400" b="0">
-                <a:solidFill>
-                  <a:srgbClr val="2E7D32"/>
+              <a:t>        else:</a:t>
+            </a:r>
+          </a:p>
+          <a:p>
+            <a:pPr algn="l">
+              <a:lnSpc>
+                <a:spcPts val="2000"/>
+              </a:lnSpc>
+            </a:pPr>
+            <a:r>
+              <a:rPr sz="1600" b="0">
+                <a:solidFill>
+                  <a:srgbClr val="222222"/>
                 </a:solidFill>
                 <a:latin typeface="Consolas"/>
                 <a:ea typeface="BIZ UDGothic"/>
                 <a:cs typeface="BIZ UDGothic"/>
               </a:rPr>
-              <a:t># 今の値を「前回の値」として覚える</a:t>
+              <a:t>            print("検知なし")</a:t>
             </a:r>
           </a:p>
           <a:p>
             <a:pPr algn="l">
               <a:lnSpc>
-                <a:spcPts val="1700"/>
+                <a:spcPts val="2000"/>
               </a:lnSpc>
             </a:pPr>
             <a:r>
-              <a:rPr sz="1400" b="0">
+              <a:rPr sz="1600" b="0">
                 <a:solidFill>
                   <a:srgbClr val="222222"/>
                 </a:solidFill>
@@ -28469,35 +28504,93 @@
                 <a:ea typeface="BIZ UDGothic"/>
                 <a:cs typeface="BIZ UDGothic"/>
               </a:rPr>
-              <a:t> </a:t>
-            </a:r>
-          </a:p>
-          <a:p>
-            <a:pPr algn="l">
-              <a:lnSpc>
-                <a:spcPts val="1700"/>
-              </a:lnSpc>
-            </a:pPr>
-            <a:r>
-              <a:rPr sz="1400" b="0">
-                <a:solidFill>
-                  <a:srgbClr val="222222"/>
+              <a:t>        led.value(now)         </a:t>
+            </a:r>
+            <a:r>
+              <a:rPr sz="1600" b="0">
+                <a:solidFill>
+                  <a:srgbClr val="2E7D32"/>
                 </a:solidFill>
                 <a:latin typeface="Consolas"/>
                 <a:ea typeface="BIZ UDGothic"/>
                 <a:cs typeface="BIZ UDGothic"/>
               </a:rPr>
-              <a:t>    time.sleep_ms(100)         </a:t>
-            </a:r>
-            <a:r>
-              <a:rPr sz="1400" b="0">
-                <a:solidFill>
-                  <a:srgbClr val="2E7D32"/>
+              <a:t># 検知中は本体LEDを点ける</a:t>
+            </a:r>
+          </a:p>
+          <a:p>
+            <a:pPr algn="l">
+              <a:lnSpc>
+                <a:spcPts val="2000"/>
+              </a:lnSpc>
+            </a:pPr>
+            <a:r>
+              <a:rPr sz="1600" b="0">
+                <a:solidFill>
+                  <a:srgbClr val="222222"/>
                 </a:solidFill>
                 <a:latin typeface="Consolas"/>
                 <a:ea typeface="BIZ UDGothic"/>
                 <a:cs typeface="BIZ UDGothic"/>
               </a:rPr>
+              <a:t>        prev = now             </a:t>
+            </a:r>
+            <a:r>
+              <a:rPr sz="1600" b="0">
+                <a:solidFill>
+                  <a:srgbClr val="2E7D32"/>
+                </a:solidFill>
+                <a:latin typeface="Consolas"/>
+                <a:ea typeface="BIZ UDGothic"/>
+                <a:cs typeface="BIZ UDGothic"/>
+              </a:rPr>
+              <a:t># 今の値を「前回の値」として覚える</a:t>
+            </a:r>
+          </a:p>
+          <a:p>
+            <a:pPr algn="l">
+              <a:lnSpc>
+                <a:spcPts val="2000"/>
+              </a:lnSpc>
+            </a:pPr>
+            <a:r>
+              <a:rPr sz="1600" b="0">
+                <a:solidFill>
+                  <a:srgbClr val="222222"/>
+                </a:solidFill>
+                <a:latin typeface="Consolas"/>
+                <a:ea typeface="BIZ UDGothic"/>
+                <a:cs typeface="BIZ UDGothic"/>
+              </a:rPr>
+              <a:t> </a:t>
+            </a:r>
+          </a:p>
+          <a:p>
+            <a:pPr algn="l">
+              <a:lnSpc>
+                <a:spcPts val="2000"/>
+              </a:lnSpc>
+            </a:pPr>
+            <a:r>
+              <a:rPr sz="1600" b="0">
+                <a:solidFill>
+                  <a:srgbClr val="222222"/>
+                </a:solidFill>
+                <a:latin typeface="Consolas"/>
+                <a:ea typeface="BIZ UDGothic"/>
+                <a:cs typeface="BIZ UDGothic"/>
+              </a:rPr>
+              <a:t>    time.sleep_ms(100)         </a:t>
+            </a:r>
+            <a:r>
+              <a:rPr sz="1600" b="0">
+                <a:solidFill>
+                  <a:srgbClr val="2E7D32"/>
+                </a:solidFill>
+                <a:latin typeface="Consolas"/>
+                <a:ea typeface="BIZ UDGothic"/>
+                <a:cs typeface="BIZ UDGothic"/>
+              </a:rPr>
               <a:t># 0.1秒ごとに確認</a:t>
             </a:r>
           </a:p>
@@ -28511,8 +28604,8 @@
         </p:nvSpPr>
         <p:spPr>
           <a:xfrm>
-            <a:off x="640080" y="1547368"/>
-            <a:ext cx="1167130" cy="228600"/>
+            <a:off x="640080" y="2347468"/>
+            <a:ext cx="1320800" cy="266700"/>
           </a:xfrm>
           <a:prstGeom prst="roundRect">
             <a:avLst/>
@@ -28555,8 +28648,8 @@
         </p:nvSpPr>
         <p:spPr>
           <a:xfrm>
-            <a:off x="1031240" y="2626868"/>
-            <a:ext cx="1558290" cy="228600"/>
+            <a:off x="1087120" y="3617468"/>
+            <a:ext cx="1767840" cy="266700"/>
           </a:xfrm>
           <a:prstGeom prst="roundRect">
             <a:avLst/>
@@ -28599,8 +28692,8 @@
         </p:nvSpPr>
         <p:spPr>
           <a:xfrm>
-            <a:off x="1422400" y="2842768"/>
-            <a:ext cx="1264920" cy="228600"/>
+            <a:off x="1534160" y="3871468"/>
+            <a:ext cx="1432560" cy="266700"/>
           </a:xfrm>
           <a:prstGeom prst="roundRect">
             <a:avLst/>
@@ -28643,8 +28736,8 @@
         </p:nvSpPr>
         <p:spPr>
           <a:xfrm>
-            <a:off x="1422400" y="3274568"/>
-            <a:ext cx="580390" cy="228600"/>
+            <a:off x="1534160" y="4379468"/>
+            <a:ext cx="650240" cy="266700"/>
           </a:xfrm>
           <a:prstGeom prst="roundRect">
             <a:avLst/>
@@ -31292,7 +31385,7 @@
                 <a:ea typeface="Meiryo"/>
                 <a:cs typeface="Meiryo"/>
               </a:rPr>
-              <a:t>= 時間 × 0.017 = 時間 ÷ 58.8…</a:t>
+              <a:t>時間 × 0.017(= ÷ 58.8)</a:t>
             </a:r>
           </a:p>
         </p:txBody>
@@ -32841,7 +32934,7 @@
         <p:spPr>
           <a:xfrm>
             <a:off x="7863840" y="1234440"/>
-            <a:ext cx="3749039" cy="1308100"/>
+            <a:ext cx="3749039" cy="1625600"/>
           </a:xfrm>
           <a:prstGeom prst="rect">
             <a:avLst/>
@@ -32887,7 +32980,7 @@
         <p:spPr>
           <a:xfrm>
             <a:off x="7863840" y="1234440"/>
-            <a:ext cx="3749039" cy="1308100"/>
+            <a:ext cx="3749039" cy="1625600"/>
           </a:xfrm>
           <a:prstGeom prst="rect">
             <a:avLst/>
@@ -32902,11 +32995,11 @@
           <a:p>
             <a:pPr algn="l">
               <a:lnSpc>
-                <a:spcPts val="1700"/>
+                <a:spcPts val="2200"/>
               </a:lnSpc>
             </a:pPr>
             <a:r>
-              <a:rPr sz="1400" b="0">
+              <a:rPr sz="1800" b="0">
                 <a:solidFill>
                   <a:srgbClr val="222222"/>
                 </a:solidFill>
@@ -32920,11 +33013,11 @@
           <a:p>
             <a:pPr algn="l">
               <a:lnSpc>
-                <a:spcPts val="1700"/>
+                <a:spcPts val="2200"/>
               </a:lnSpc>
             </a:pPr>
             <a:r>
-              <a:rPr sz="1400" b="0">
+              <a:rPr sz="1800" b="0">
                 <a:solidFill>
                   <a:srgbClr val="222222"/>
                 </a:solidFill>
@@ -32938,11 +33031,11 @@
           <a:p>
             <a:pPr algn="l">
               <a:lnSpc>
-                <a:spcPts val="1700"/>
+                <a:spcPts val="2200"/>
               </a:lnSpc>
             </a:pPr>
             <a:r>
-              <a:rPr sz="1400" b="0">
+              <a:rPr sz="1800" b="0">
                 <a:solidFill>
                   <a:srgbClr val="222222"/>
                 </a:solidFill>
@@ -32956,11 +33049,11 @@
           <a:p>
             <a:pPr algn="l">
               <a:lnSpc>
-                <a:spcPts val="1700"/>
+                <a:spcPts val="2200"/>
               </a:lnSpc>
             </a:pPr>
             <a:r>
-              <a:rPr sz="1400" b="0">
+              <a:rPr sz="1800" b="0">
                 <a:solidFill>
                   <a:srgbClr val="222222"/>
                 </a:solidFill>
@@ -32974,11 +33067,11 @@
           <a:p>
             <a:pPr algn="l">
               <a:lnSpc>
-                <a:spcPts val="1700"/>
+                <a:spcPts val="2200"/>
               </a:lnSpc>
             </a:pPr>
             <a:r>
-              <a:rPr sz="1400" b="0">
+              <a:rPr sz="1800" b="0">
                 <a:solidFill>
                   <a:srgbClr val="222222"/>
                 </a:solidFill>
@@ -32999,8 +33092,8 @@
         </p:nvSpPr>
         <p:spPr>
           <a:xfrm>
-            <a:off x="7863840" y="2651760"/>
-            <a:ext cx="3749039" cy="1280160"/>
+            <a:off x="7863840" y="2926080"/>
+            <a:ext cx="3749039" cy="822960"/>
           </a:xfrm>
           <a:prstGeom prst="rect">
             <a:avLst/>
@@ -34472,7 +34565,7 @@
         <p:spPr>
           <a:xfrm>
             <a:off x="548640" y="1234440"/>
-            <a:ext cx="11094415" cy="4546600"/>
+            <a:ext cx="11094415" cy="4038600"/>
           </a:xfrm>
           <a:prstGeom prst="rect">
             <a:avLst/>
@@ -34518,7 +34611,7 @@
         <p:spPr>
           <a:xfrm>
             <a:off x="548640" y="1234440"/>
-            <a:ext cx="11094415" cy="4546600"/>
+            <a:ext cx="11094415" cy="4038600"/>
           </a:xfrm>
           <a:prstGeom prst="rect">
             <a:avLst/>
@@ -34533,11 +34626,11 @@
           <a:p>
             <a:pPr algn="l">
               <a:lnSpc>
-                <a:spcPts val="1700"/>
+                <a:spcPts val="2000"/>
               </a:lnSpc>
             </a:pPr>
             <a:r>
-              <a:rPr sz="1400" b="0">
+              <a:rPr sz="1600" b="0">
                 <a:solidFill>
                   <a:srgbClr val="2E7D32"/>
                 </a:solidFill>
@@ -34551,11 +34644,11 @@
           <a:p>
             <a:pPr algn="l">
               <a:lnSpc>
-                <a:spcPts val="1700"/>
+                <a:spcPts val="2000"/>
               </a:lnSpc>
             </a:pPr>
             <a:r>
-              <a:rPr sz="1400" b="0">
+              <a:rPr sz="1600" b="0">
                 <a:solidFill>
                   <a:srgbClr val="2E7D32"/>
                 </a:solidFill>
@@ -34569,11 +34662,11 @@
           <a:p>
             <a:pPr algn="l">
               <a:lnSpc>
-                <a:spcPts val="1700"/>
+                <a:spcPts val="2000"/>
               </a:lnSpc>
             </a:pPr>
             <a:r>
-              <a:rPr sz="1400" b="0">
+              <a:rPr sz="1600" b="0">
                 <a:solidFill>
                   <a:srgbClr val="222222"/>
                 </a:solidFill>
@@ -34587,11 +34680,11 @@
           <a:p>
             <a:pPr algn="l">
               <a:lnSpc>
-                <a:spcPts val="1700"/>
+                <a:spcPts val="2000"/>
               </a:lnSpc>
             </a:pPr>
             <a:r>
-              <a:rPr sz="1400" b="0">
+              <a:rPr sz="1600" b="0">
                 <a:solidFill>
                   <a:srgbClr val="222222"/>
                 </a:solidFill>
@@ -34605,11 +34698,11 @@
           <a:p>
             <a:pPr algn="l">
               <a:lnSpc>
-                <a:spcPts val="1700"/>
+                <a:spcPts val="2000"/>
               </a:lnSpc>
             </a:pPr>
             <a:r>
-              <a:rPr sz="1400" b="0">
+              <a:rPr sz="1600" b="0">
                 <a:solidFill>
                   <a:srgbClr val="222222"/>
                 </a:solidFill>
@@ -34623,11 +34716,11 @@
           <a:p>
             <a:pPr algn="l">
               <a:lnSpc>
-                <a:spcPts val="1700"/>
+                <a:spcPts val="2000"/>
               </a:lnSpc>
             </a:pPr>
             <a:r>
-              <a:rPr sz="1400" b="0">
+              <a:rPr sz="1600" b="0">
                 <a:solidFill>
                   <a:srgbClr val="2E7D32"/>
                 </a:solidFill>
@@ -34641,11 +34734,11 @@
           <a:p>
             <a:pPr algn="l">
               <a:lnSpc>
-                <a:spcPts val="1700"/>
+                <a:spcPts val="2000"/>
               </a:lnSpc>
             </a:pPr>
             <a:r>
-              <a:rPr sz="1400" b="0">
+              <a:rPr sz="1600" b="0">
                 <a:solidFill>
                   <a:srgbClr val="222222"/>
                 </a:solidFill>
@@ -34656,7 +34749,7 @@
               <a:t>trig = Pin(10, Pin.OUT)   </a:t>
             </a:r>
             <a:r>
-              <a:rPr sz="1400" b="0">
+              <a:rPr sz="1600" b="0">
                 <a:solidFill>
                   <a:srgbClr val="2E7D32"/>
                 </a:solidFill>
@@ -34670,11 +34763,11 @@
           <a:p>
             <a:pPr algn="l">
               <a:lnSpc>
-                <a:spcPts val="1700"/>
+                <a:spcPts val="2000"/>
               </a:lnSpc>
             </a:pPr>
             <a:r>
-              <a:rPr sz="1400" b="0">
+              <a:rPr sz="1600" b="0">
                 <a:solidFill>
                   <a:srgbClr val="222222"/>
                 </a:solidFill>
@@ -34685,7 +34778,7 @@
               <a:t>echo = Pin(11, Pin.IN)    </a:t>
             </a:r>
             <a:r>
-              <a:rPr sz="1400" b="0">
+              <a:rPr sz="1600" b="0">
                 <a:solidFill>
                   <a:srgbClr val="2E7D32"/>
                 </a:solidFill>
@@ -34699,11 +34792,11 @@
           <a:p>
             <a:pPr algn="l">
               <a:lnSpc>
-                <a:spcPts val="1700"/>
+                <a:spcPts val="2000"/>
               </a:lnSpc>
             </a:pPr>
             <a:r>
-              <a:rPr sz="1400" b="0">
+              <a:rPr sz="1600" b="0">
                 <a:solidFill>
                   <a:srgbClr val="222222"/>
                 </a:solidFill>
@@ -34714,7 +34807,7 @@
               <a:t>                          </a:t>
             </a:r>
             <a:r>
-              <a:rPr sz="1400" b="0">
+              <a:rPr sz="1600" b="0">
                 <a:solidFill>
                   <a:srgbClr val="2E7D32"/>
                 </a:solidFill>
@@ -34728,11 +34821,11 @@
           <a:p>
             <a:pPr algn="l">
               <a:lnSpc>
-                <a:spcPts val="1700"/>
+                <a:spcPts val="2000"/>
               </a:lnSpc>
             </a:pPr>
             <a:r>
-              <a:rPr sz="1400" b="0">
+              <a:rPr sz="1600" b="0">
                 <a:solidFill>
                   <a:srgbClr val="222222"/>
                 </a:solidFill>
@@ -34746,11 +34839,11 @@
           <a:p>
             <a:pPr algn="l">
               <a:lnSpc>
-                <a:spcPts val="1700"/>
+                <a:spcPts val="2000"/>
               </a:lnSpc>
             </a:pPr>
             <a:r>
-              <a:rPr sz="1400" b="0">
+              <a:rPr sz="1600" b="0">
                 <a:solidFill>
                   <a:srgbClr val="2E7D32"/>
                 </a:solidFill>
@@ -34764,11 +34857,11 @@
           <a:p>
             <a:pPr algn="l">
               <a:lnSpc>
-                <a:spcPts val="1700"/>
+                <a:spcPts val="2000"/>
               </a:lnSpc>
             </a:pPr>
             <a:r>
-              <a:rPr sz="1400" b="0">
+              <a:rPr sz="1600" b="0">
                 <a:solidFill>
                   <a:srgbClr val="222222"/>
                 </a:solidFill>
@@ -34782,11 +34875,11 @@
           <a:p>
             <a:pPr algn="l">
               <a:lnSpc>
-                <a:spcPts val="1700"/>
+                <a:spcPts val="2000"/>
               </a:lnSpc>
             </a:pPr>
             <a:r>
-              <a:rPr sz="1400" b="0">
+              <a:rPr sz="1600" b="0">
                 <a:solidFill>
                   <a:srgbClr val="222222"/>
                 </a:solidFill>
@@ -34797,7 +34890,7 @@
               <a:t>    </a:t>
             </a:r>
             <a:r>
-              <a:rPr sz="1400" b="0">
+              <a:rPr sz="1600" b="0">
                 <a:solidFill>
                   <a:srgbClr val="2E7D32"/>
                 </a:solidFill>
@@ -34811,11 +34904,11 @@
           <a:p>
             <a:pPr algn="l">
               <a:lnSpc>
-                <a:spcPts val="1700"/>
+                <a:spcPts val="2000"/>
               </a:lnSpc>
             </a:pPr>
             <a:r>
-              <a:rPr sz="1400" b="0">
+              <a:rPr sz="1600" b="0">
                 <a:solidFill>
                   <a:srgbClr val="222222"/>
                 </a:solidFill>
@@ -34829,11 +34922,11 @@
           <a:p>
             <a:pPr algn="l">
               <a:lnSpc>
-                <a:spcPts val="1700"/>
+                <a:spcPts val="2000"/>
               </a:lnSpc>
             </a:pPr>
             <a:r>
-              <a:rPr sz="1400" b="0">
+              <a:rPr sz="1600" b="0">
                 <a:solidFill>
                   <a:srgbClr val="222222"/>
                 </a:solidFill>
@@ -34844,107 +34937,6 @@
               <a:t>    time.sleep_us(2)</a:t>
             </a:r>
           </a:p>
-          <a:p>
-            <a:pPr algn="l">
-              <a:lnSpc>
-                <a:spcPts val="1700"/>
-              </a:lnSpc>
-            </a:pPr>
-            <a:r>
-              <a:rPr sz="1400" b="0">
-                <a:solidFill>
-                  <a:srgbClr val="222222"/>
-                </a:solidFill>
-                <a:latin typeface="Consolas"/>
-                <a:ea typeface="BIZ UDGothic"/>
-                <a:cs typeface="BIZ UDGothic"/>
-              </a:rPr>
-              <a:t> </a:t>
-            </a:r>
-          </a:p>
-          <a:p>
-            <a:pPr algn="l">
-              <a:lnSpc>
-                <a:spcPts val="1700"/>
-              </a:lnSpc>
-            </a:pPr>
-            <a:r>
-              <a:rPr sz="1400" b="0">
-                <a:solidFill>
-                  <a:srgbClr val="222222"/>
-                </a:solidFill>
-                <a:latin typeface="Consolas"/>
-                <a:ea typeface="BIZ UDGothic"/>
-                <a:cs typeface="BIZ UDGothic"/>
-              </a:rPr>
-              <a:t>    </a:t>
-            </a:r>
-            <a:r>
-              <a:rPr sz="1400" b="0">
-                <a:solidFill>
-                  <a:srgbClr val="2E7D32"/>
-                </a:solidFill>
-                <a:latin typeface="Consolas"/>
-                <a:ea typeface="BIZ UDGothic"/>
-                <a:cs typeface="BIZ UDGothic"/>
-              </a:rPr>
-              <a:t># 10μs だけ 1 にする → センサーが超音波を出す</a:t>
-            </a:r>
-          </a:p>
-          <a:p>
-            <a:pPr algn="l">
-              <a:lnSpc>
-                <a:spcPts val="1700"/>
-              </a:lnSpc>
-            </a:pPr>
-            <a:r>
-              <a:rPr sz="1400" b="0">
-                <a:solidFill>
-                  <a:srgbClr val="222222"/>
-                </a:solidFill>
-                <a:latin typeface="Consolas"/>
-                <a:ea typeface="BIZ UDGothic"/>
-                <a:cs typeface="BIZ UDGothic"/>
-              </a:rPr>
-              <a:t>    trig.value(1)</a:t>
-            </a:r>
-          </a:p>
-          <a:p>
-            <a:pPr algn="l">
-              <a:lnSpc>
-                <a:spcPts val="1700"/>
-              </a:lnSpc>
-            </a:pPr>
-            <a:r>
-              <a:rPr sz="1400" b="0">
-                <a:solidFill>
-                  <a:srgbClr val="222222"/>
-                </a:solidFill>
-                <a:latin typeface="Consolas"/>
-                <a:ea typeface="BIZ UDGothic"/>
-                <a:cs typeface="BIZ UDGothic"/>
-              </a:rPr>
-              <a:t>    time.sleep_us(10)</a:t>
-            </a:r>
-          </a:p>
-          <a:p>
-            <a:pPr algn="l">
-              <a:lnSpc>
-                <a:spcPts val="1700"/>
-              </a:lnSpc>
-            </a:pPr>
-            <a:r>
-              <a:rPr sz="1400" b="0">
-                <a:solidFill>
-                  <a:srgbClr val="222222"/>
-                </a:solidFill>
-                <a:latin typeface="Consolas"/>
-                <a:ea typeface="BIZ UDGothic"/>
-                <a:cs typeface="BIZ UDGothic"/>
-              </a:rPr>
-              <a:t>    trig.value(0)</a:t>
-            </a:r>
-          </a:p>
         </p:txBody>
       </p:sp>
       <p:sp>
@@ -34955,8 +34947,8 @@
         </p:nvSpPr>
         <p:spPr>
           <a:xfrm>
-            <a:off x="640080" y="3706368"/>
-            <a:ext cx="1460500" cy="228600"/>
+            <a:off x="640080" y="4125468"/>
+            <a:ext cx="1656080" cy="266700"/>
           </a:xfrm>
           <a:prstGeom prst="roundRect">
             <a:avLst/>
@@ -34999,8 +34991,8 @@
         </p:nvSpPr>
         <p:spPr>
           <a:xfrm>
-            <a:off x="548640" y="6080760"/>
-            <a:ext cx="11094415" cy="365760"/>
+            <a:off x="548640" y="6446520"/>
+            <a:ext cx="8534095" cy="320040"/>
           </a:xfrm>
           <a:prstGeom prst="rect">
             <a:avLst/>
@@ -35019,7 +35011,7 @@
               </a:spcAft>
             </a:pPr>
             <a:r>
-              <a:rPr sz="1400" b="0">
+              <a:rPr sz="1200" b="0">
                 <a:solidFill>
                   <a:srgbClr val="666666"/>
                 </a:solidFill>
@@ -35291,7 +35283,7 @@
         <p:spPr>
           <a:xfrm>
             <a:off x="548640" y="1234440"/>
-            <a:ext cx="11094415" cy="2603500"/>
+            <a:ext cx="11094415" cy="4292600"/>
           </a:xfrm>
           <a:prstGeom prst="rect">
             <a:avLst/>
@@ -35337,7 +35329,7 @@
         <p:spPr>
           <a:xfrm>
             <a:off x="548640" y="1234440"/>
-            <a:ext cx="11094415" cy="2603500"/>
+            <a:ext cx="11094415" cy="4292600"/>
           </a:xfrm>
           <a:prstGeom prst="rect">
             <a:avLst/>
@@ -35352,11 +35344,11 @@
           <a:p>
             <a:pPr algn="l">
               <a:lnSpc>
-                <a:spcPts val="1700"/>
+                <a:spcPts val="2000"/>
               </a:lnSpc>
             </a:pPr>
             <a:r>
-              <a:rPr sz="1400" b="0">
+              <a:rPr sz="1600" b="0">
                 <a:solidFill>
                   <a:srgbClr val="222222"/>
                 </a:solidFill>
@@ -35367,7 +35359,7 @@
               <a:t>    </a:t>
             </a:r>
             <a:r>
-              <a:rPr sz="1400" b="0">
+              <a:rPr sz="1600" b="0">
                 <a:solidFill>
                   <a:srgbClr val="2E7D32"/>
                 </a:solidFill>
@@ -35375,17 +35367,17 @@
                 <a:ea typeface="BIZ UDGothic"/>
                 <a:cs typeface="BIZ UDGothic"/>
               </a:rPr>
-              <a:t># Echo が 1 になっている時間(音が往復した時間)を測る</a:t>
+              <a:t># 10μs だけ 1 にする → センサーが超音波を出す</a:t>
             </a:r>
           </a:p>
           <a:p>
             <a:pPr algn="l">
               <a:lnSpc>
-                <a:spcPts val="1700"/>
+                <a:spcPts val="2000"/>
               </a:lnSpc>
             </a:pPr>
             <a:r>
-              <a:rPr sz="1400" b="0">
+              <a:rPr sz="1600" b="0">
                 <a:solidFill>
                   <a:srgbClr val="222222"/>
                 </a:solidFill>
@@ -35393,28 +35385,35 @@
                 <a:ea typeface="BIZ UDGothic"/>
                 <a:cs typeface="BIZ UDGothic"/>
               </a:rPr>
-              <a:t>    </a:t>
-            </a:r>
-            <a:r>
-              <a:rPr sz="1400" b="0">
-                <a:solidFill>
-                  <a:srgbClr val="2E7D32"/>
+              <a:t>    trig.value(1)</a:t>
+            </a:r>
+          </a:p>
+          <a:p>
+            <a:pPr algn="l">
+              <a:lnSpc>
+                <a:spcPts val="2000"/>
+              </a:lnSpc>
+            </a:pPr>
+            <a:r>
+              <a:rPr sz="1600" b="0">
+                <a:solidFill>
+                  <a:srgbClr val="222222"/>
                 </a:solidFill>
                 <a:latin typeface="Consolas"/>
                 <a:ea typeface="BIZ UDGothic"/>
                 <a:cs typeface="BIZ UDGothic"/>
               </a:rPr>
-              <a:t># 30000μs(=30ミリ秒)待っても返ってこなければあきらめる</a:t>
+              <a:t>    time.sleep_us(10)</a:t>
             </a:r>
           </a:p>
           <a:p>
             <a:pPr algn="l">
               <a:lnSpc>
-                <a:spcPts val="1700"/>
+                <a:spcPts val="2000"/>
               </a:lnSpc>
             </a:pPr>
             <a:r>
-              <a:rPr sz="1400" b="0">
+              <a:rPr sz="1600" b="0">
                 <a:solidFill>
                   <a:srgbClr val="222222"/>
                 </a:solidFill>
@@ -35422,17 +35421,17 @@
                 <a:ea typeface="BIZ UDGothic"/>
                 <a:cs typeface="BIZ UDGothic"/>
               </a:rPr>
-              <a:t>    t = time_pulse_us(echo, 1, 30000)</a:t>
+              <a:t>    trig.value(0)</a:t>
             </a:r>
           </a:p>
           <a:p>
             <a:pPr algn="l">
               <a:lnSpc>
-                <a:spcPts val="1700"/>
+                <a:spcPts val="2000"/>
               </a:lnSpc>
             </a:pPr>
             <a:r>
-              <a:rPr sz="1400" b="0">
+              <a:rPr sz="1600" b="0">
                 <a:solidFill>
                   <a:srgbClr val="222222"/>
                 </a:solidFill>
@@ -35446,11 +35445,11 @@
           <a:p>
             <a:pPr algn="l">
               <a:lnSpc>
-                <a:spcPts val="1700"/>
+                <a:spcPts val="2000"/>
               </a:lnSpc>
             </a:pPr>
             <a:r>
-              <a:rPr sz="1400" b="0">
+              <a:rPr sz="1600" b="0">
                 <a:solidFill>
                   <a:srgbClr val="222222"/>
                 </a:solidFill>
@@ -35461,7 +35460,7 @@
               <a:t>    </a:t>
             </a:r>
             <a:r>
-              <a:rPr sz="1400" b="0">
+              <a:rPr sz="1600" b="0">
                 <a:solidFill>
                   <a:srgbClr val="2E7D32"/>
                 </a:solidFill>
@@ -35469,17 +35468,17 @@
                 <a:ea typeface="BIZ UDGothic"/>
                 <a:cs typeface="BIZ UDGothic"/>
               </a:rPr>
-              <a:t># 測れなかったとき、t はマイナスの値になる</a:t>
+              <a:t># Echo が 1 になっている時間(音が往復した時間)を測る</a:t>
             </a:r>
           </a:p>
           <a:p>
             <a:pPr algn="l">
               <a:lnSpc>
-                <a:spcPts val="1700"/>
+                <a:spcPts val="2000"/>
               </a:lnSpc>
             </a:pPr>
             <a:r>
-              <a:rPr sz="1400" b="0">
+              <a:rPr sz="1600" b="0">
                 <a:solidFill>
                   <a:srgbClr val="222222"/>
                 </a:solidFill>
@@ -35487,46 +35486,46 @@
                 <a:ea typeface="BIZ UDGothic"/>
                 <a:cs typeface="BIZ UDGothic"/>
               </a:rPr>
-              <a:t>    if t &lt; 0:</a:t>
-            </a:r>
-          </a:p>
-          <a:p>
-            <a:pPr algn="l">
-              <a:lnSpc>
-                <a:spcPts val="1700"/>
-              </a:lnSpc>
-            </a:pPr>
-            <a:r>
-              <a:rPr sz="1400" b="0">
-                <a:solidFill>
-                  <a:srgbClr val="222222"/>
+              <a:t>    </a:t>
+            </a:r>
+            <a:r>
+              <a:rPr sz="1600" b="0">
+                <a:solidFill>
+                  <a:srgbClr val="2E7D32"/>
                 </a:solidFill>
                 <a:latin typeface="Consolas"/>
                 <a:ea typeface="BIZ UDGothic"/>
                 <a:cs typeface="BIZ UDGothic"/>
               </a:rPr>
-              <a:t>        return None        </a:t>
-            </a:r>
-            <a:r>
-              <a:rPr sz="1400" b="0">
-                <a:solidFill>
-                  <a:srgbClr val="2E7D32"/>
+              <a:t># 30000μs(=30ミリ秒)待っても返ってこなければあきらめる</a:t>
+            </a:r>
+          </a:p>
+          <a:p>
+            <a:pPr algn="l">
+              <a:lnSpc>
+                <a:spcPts val="2000"/>
+              </a:lnSpc>
+            </a:pPr>
+            <a:r>
+              <a:rPr sz="1600" b="0">
+                <a:solidFill>
+                  <a:srgbClr val="222222"/>
                 </a:solidFill>
                 <a:latin typeface="Consolas"/>
                 <a:ea typeface="BIZ UDGothic"/>
                 <a:cs typeface="BIZ UDGothic"/>
               </a:rPr>
-              <a:t># None =「値なし」を返す</a:t>
+              <a:t>    t = time_pulse_us(echo, 1, 30000)</a:t>
             </a:r>
           </a:p>
           <a:p>
             <a:pPr algn="l">
               <a:lnSpc>
-                <a:spcPts val="1700"/>
+                <a:spcPts val="2000"/>
               </a:lnSpc>
             </a:pPr>
             <a:r>
-              <a:rPr sz="1400" b="0">
+              <a:rPr sz="1600" b="0">
                 <a:solidFill>
                   <a:srgbClr val="222222"/>
                 </a:solidFill>
@@ -35540,11 +35539,11 @@
           <a:p>
             <a:pPr algn="l">
               <a:lnSpc>
-                <a:spcPts val="1700"/>
+                <a:spcPts val="2000"/>
               </a:lnSpc>
             </a:pPr>
             <a:r>
-              <a:rPr sz="1400" b="0">
+              <a:rPr sz="1600" b="0">
                 <a:solidFill>
                   <a:srgbClr val="222222"/>
                 </a:solidFill>
@@ -35555,7 +35554,7 @@
               <a:t>    </a:t>
             </a:r>
             <a:r>
-              <a:rPr sz="1400" b="0">
+              <a:rPr sz="1600" b="0">
                 <a:solidFill>
                   <a:srgbClr val="2E7D32"/>
                 </a:solidFill>
@@ -35563,17 +35562,17 @@
                 <a:ea typeface="BIZ UDGothic"/>
                 <a:cs typeface="BIZ UDGothic"/>
               </a:rPr>
-              <a:t># 時間(μs)を距離(cm)に変える</a:t>
+              <a:t># 測れなかったとき、t はマイナスの値になる</a:t>
             </a:r>
           </a:p>
           <a:p>
             <a:pPr algn="l">
               <a:lnSpc>
-                <a:spcPts val="1700"/>
+                <a:spcPts val="2000"/>
               </a:lnSpc>
             </a:pPr>
             <a:r>
-              <a:rPr sz="1400" b="0">
+              <a:rPr sz="1600" b="0">
                 <a:solidFill>
                   <a:srgbClr val="222222"/>
                 </a:solidFill>
@@ -35581,35 +35580,129 @@
                 <a:ea typeface="BIZ UDGothic"/>
                 <a:cs typeface="BIZ UDGothic"/>
               </a:rPr>
-              <a:t>    </a:t>
-            </a:r>
-            <a:r>
-              <a:rPr sz="1400" b="0">
-                <a:solidFill>
-                  <a:srgbClr val="2E7D32"/>
+              <a:t>    if t &lt; 0:</a:t>
+            </a:r>
+          </a:p>
+          <a:p>
+            <a:pPr algn="l">
+              <a:lnSpc>
+                <a:spcPts val="2000"/>
+              </a:lnSpc>
+            </a:pPr>
+            <a:r>
+              <a:rPr sz="1600" b="0">
+                <a:solidFill>
+                  <a:srgbClr val="222222"/>
                 </a:solidFill>
                 <a:latin typeface="Consolas"/>
                 <a:ea typeface="BIZ UDGothic"/>
                 <a:cs typeface="BIZ UDGothic"/>
               </a:rPr>
-              <a:t># 音速 0.034cm/μs × 時間 ÷ 2(往復なので)≒ 時間 ÷ 58</a:t>
-            </a:r>
-          </a:p>
-          <a:p>
-            <a:pPr algn="l">
-              <a:lnSpc>
-                <a:spcPts val="1700"/>
-              </a:lnSpc>
-            </a:pPr>
-            <a:r>
-              <a:rPr sz="1400" b="0">
-                <a:solidFill>
-                  <a:srgbClr val="222222"/>
+              <a:t>        return None        </a:t>
+            </a:r>
+            <a:r>
+              <a:rPr sz="1600" b="0">
+                <a:solidFill>
+                  <a:srgbClr val="2E7D32"/>
                 </a:solidFill>
                 <a:latin typeface="Consolas"/>
                 <a:ea typeface="BIZ UDGothic"/>
                 <a:cs typeface="BIZ UDGothic"/>
               </a:rPr>
+              <a:t># None =「値なし」を返す</a:t>
+            </a:r>
+          </a:p>
+          <a:p>
+            <a:pPr algn="l">
+              <a:lnSpc>
+                <a:spcPts val="2000"/>
+              </a:lnSpc>
+            </a:pPr>
+            <a:r>
+              <a:rPr sz="1600" b="0">
+                <a:solidFill>
+                  <a:srgbClr val="222222"/>
+                </a:solidFill>
+                <a:latin typeface="Consolas"/>
+                <a:ea typeface="BIZ UDGothic"/>
+                <a:cs typeface="BIZ UDGothic"/>
+              </a:rPr>
+              <a:t> </a:t>
+            </a:r>
+          </a:p>
+          <a:p>
+            <a:pPr algn="l">
+              <a:lnSpc>
+                <a:spcPts val="2000"/>
+              </a:lnSpc>
+            </a:pPr>
+            <a:r>
+              <a:rPr sz="1600" b="0">
+                <a:solidFill>
+                  <a:srgbClr val="222222"/>
+                </a:solidFill>
+                <a:latin typeface="Consolas"/>
+                <a:ea typeface="BIZ UDGothic"/>
+                <a:cs typeface="BIZ UDGothic"/>
+              </a:rPr>
+              <a:t>    </a:t>
+            </a:r>
+            <a:r>
+              <a:rPr sz="1600" b="0">
+                <a:solidFill>
+                  <a:srgbClr val="2E7D32"/>
+                </a:solidFill>
+                <a:latin typeface="Consolas"/>
+                <a:ea typeface="BIZ UDGothic"/>
+                <a:cs typeface="BIZ UDGothic"/>
+              </a:rPr>
+              <a:t># 時間(μs)を距離(cm)に変える</a:t>
+            </a:r>
+          </a:p>
+          <a:p>
+            <a:pPr algn="l">
+              <a:lnSpc>
+                <a:spcPts val="2000"/>
+              </a:lnSpc>
+            </a:pPr>
+            <a:r>
+              <a:rPr sz="1600" b="0">
+                <a:solidFill>
+                  <a:srgbClr val="222222"/>
+                </a:solidFill>
+                <a:latin typeface="Consolas"/>
+                <a:ea typeface="BIZ UDGothic"/>
+                <a:cs typeface="BIZ UDGothic"/>
+              </a:rPr>
+              <a:t>    </a:t>
+            </a:r>
+            <a:r>
+              <a:rPr sz="1600" b="0">
+                <a:solidFill>
+                  <a:srgbClr val="2E7D32"/>
+                </a:solidFill>
+                <a:latin typeface="Consolas"/>
+                <a:ea typeface="BIZ UDGothic"/>
+                <a:cs typeface="BIZ UDGothic"/>
+              </a:rPr>
+              <a:t># 音速 0.034cm/μs × 時間 ÷ 2(往復なので)≒ 時間 ÷ 58</a:t>
+            </a:r>
+          </a:p>
+          <a:p>
+            <a:pPr algn="l">
+              <a:lnSpc>
+                <a:spcPts val="2000"/>
+              </a:lnSpc>
+            </a:pPr>
+            <a:r>
+              <a:rPr sz="1600" b="0">
+                <a:solidFill>
+                  <a:srgbClr val="222222"/>
+                </a:solidFill>
+                <a:latin typeface="Consolas"/>
+                <a:ea typeface="BIZ UDGothic"/>
+                <a:cs typeface="BIZ UDGothic"/>
+              </a:rPr>
               <a:t>    return t / 58</a:t>
             </a:r>
           </a:p>
@@ -35623,8 +35716,8 @@
         </p:nvSpPr>
         <p:spPr>
           <a:xfrm>
-            <a:off x="1031240" y="2410968"/>
-            <a:ext cx="971550" cy="228600"/>
+            <a:off x="1087120" y="3871468"/>
+            <a:ext cx="1097280" cy="266700"/>
           </a:xfrm>
           <a:prstGeom prst="roundRect">
             <a:avLst/>
@@ -35667,8 +35760,8 @@
         </p:nvSpPr>
         <p:spPr>
           <a:xfrm>
-            <a:off x="548640" y="6080760"/>
-            <a:ext cx="11094415" cy="365760"/>
+            <a:off x="548640" y="6446520"/>
+            <a:ext cx="8534095" cy="320040"/>
           </a:xfrm>
           <a:prstGeom prst="rect">
             <a:avLst/>
@@ -35687,7 +35780,7 @@
               </a:spcAft>
             </a:pPr>
             <a:r>
-              <a:rPr sz="1400" b="0">
+              <a:rPr sz="1200" b="0">
                 <a:solidFill>
                   <a:srgbClr val="666666"/>
                 </a:solidFill>
@@ -36016,7 +36109,7 @@
         <p:spPr>
           <a:xfrm>
             <a:off x="548640" y="1234440"/>
-            <a:ext cx="11094415" cy="2603500"/>
+            <a:ext cx="11094415" cy="3022600"/>
           </a:xfrm>
           <a:prstGeom prst="rect">
             <a:avLst/>
@@ -36062,7 +36155,7 @@
         <p:spPr>
           <a:xfrm>
             <a:off x="548640" y="1234440"/>
-            <a:ext cx="11094415" cy="2603500"/>
+            <a:ext cx="11094415" cy="3022600"/>
           </a:xfrm>
           <a:prstGeom prst="rect">
             <a:avLst/>
@@ -36077,11 +36170,11 @@
           <a:p>
             <a:pPr algn="l">
               <a:lnSpc>
-                <a:spcPts val="1700"/>
+                <a:spcPts val="2000"/>
               </a:lnSpc>
             </a:pPr>
             <a:r>
-              <a:rPr sz="1400" b="0">
+              <a:rPr sz="1600" b="0">
                 <a:solidFill>
                   <a:srgbClr val="2E7D32"/>
                 </a:solidFill>
@@ -36095,11 +36188,11 @@
           <a:p>
             <a:pPr algn="l">
               <a:lnSpc>
-                <a:spcPts val="1700"/>
+                <a:spcPts val="2000"/>
               </a:lnSpc>
             </a:pPr>
             <a:r>
-              <a:rPr sz="1400" b="0">
+              <a:rPr sz="1600" b="0">
                 <a:solidFill>
                   <a:srgbClr val="222222"/>
                 </a:solidFill>
@@ -36113,11 +36206,11 @@
           <a:p>
             <a:pPr algn="l">
               <a:lnSpc>
-                <a:spcPts val="1700"/>
+                <a:spcPts val="2000"/>
               </a:lnSpc>
             </a:pPr>
             <a:r>
-              <a:rPr sz="1400" b="0">
+              <a:rPr sz="1600" b="0">
                 <a:solidFill>
                   <a:srgbClr val="222222"/>
                 </a:solidFill>
@@ -36128,7 +36221,7 @@
               <a:t>    d = read_cm()          </a:t>
             </a:r>
             <a:r>
-              <a:rPr sz="1400" b="0">
+              <a:rPr sz="1600" b="0">
                 <a:solidFill>
                   <a:srgbClr val="2E7D32"/>
                 </a:solidFill>
@@ -36142,11 +36235,11 @@
           <a:p>
             <a:pPr algn="l">
               <a:lnSpc>
-                <a:spcPts val="1700"/>
+                <a:spcPts val="2000"/>
               </a:lnSpc>
             </a:pPr>
             <a:r>
-              <a:rPr sz="1400" b="0">
+              <a:rPr sz="1600" b="0">
                 <a:solidFill>
                   <a:srgbClr val="222222"/>
                 </a:solidFill>
@@ -36160,11 +36253,11 @@
           <a:p>
             <a:pPr algn="l">
               <a:lnSpc>
-                <a:spcPts val="1700"/>
+                <a:spcPts val="2000"/>
               </a:lnSpc>
             </a:pPr>
             <a:r>
-              <a:rPr sz="1400" b="0">
+              <a:rPr sz="1600" b="0">
                 <a:solidFill>
                   <a:srgbClr val="222222"/>
                 </a:solidFill>
@@ -36178,11 +36271,11 @@
           <a:p>
             <a:pPr algn="l">
               <a:lnSpc>
-                <a:spcPts val="1700"/>
+                <a:spcPts val="2000"/>
               </a:lnSpc>
             </a:pPr>
             <a:r>
-              <a:rPr sz="1400" b="0">
+              <a:rPr sz="1600" b="0">
                 <a:solidFill>
                   <a:srgbClr val="222222"/>
                 </a:solidFill>
@@ -36196,11 +36289,11 @@
           <a:p>
             <a:pPr algn="l">
               <a:lnSpc>
-                <a:spcPts val="1700"/>
+                <a:spcPts val="2000"/>
               </a:lnSpc>
             </a:pPr>
             <a:r>
-              <a:rPr sz="1400" b="0">
+              <a:rPr sz="1600" b="0">
                 <a:solidFill>
                   <a:srgbClr val="222222"/>
                 </a:solidFill>
@@ -36214,11 +36307,11 @@
           <a:p>
             <a:pPr algn="l">
               <a:lnSpc>
-                <a:spcPts val="1700"/>
+                <a:spcPts val="2000"/>
               </a:lnSpc>
             </a:pPr>
             <a:r>
-              <a:rPr sz="1400" b="0">
+              <a:rPr sz="1600" b="0">
                 <a:solidFill>
                   <a:srgbClr val="222222"/>
                 </a:solidFill>
@@ -36229,7 +36322,7 @@
               <a:t>        </a:t>
             </a:r>
             <a:r>
-              <a:rPr sz="1400" b="0">
+              <a:rPr sz="1600" b="0">
                 <a:solidFill>
                   <a:srgbClr val="2E7D32"/>
                 </a:solidFill>
@@ -36243,11 +36336,11 @@
           <a:p>
             <a:pPr algn="l">
               <a:lnSpc>
-                <a:spcPts val="1700"/>
+                <a:spcPts val="2000"/>
               </a:lnSpc>
             </a:pPr>
             <a:r>
-              <a:rPr sz="1400" b="0">
+              <a:rPr sz="1600" b="0">
                 <a:solidFill>
                   <a:srgbClr val="222222"/>
                 </a:solidFill>
@@ -36261,11 +36354,11 @@
           <a:p>
             <a:pPr algn="l">
               <a:lnSpc>
-                <a:spcPts val="1700"/>
+                <a:spcPts val="2000"/>
               </a:lnSpc>
             </a:pPr>
             <a:r>
-              <a:rPr sz="1400" b="0">
+              <a:rPr sz="1600" b="0">
                 <a:solidFill>
                   <a:srgbClr val="222222"/>
                 </a:solidFill>
@@ -36279,11 +36372,11 @@
           <a:p>
             <a:pPr algn="l">
               <a:lnSpc>
-                <a:spcPts val="1700"/>
+                <a:spcPts val="2000"/>
               </a:lnSpc>
             </a:pPr>
             <a:r>
-              <a:rPr sz="1400" b="0">
+              <a:rPr sz="1600" b="0">
                 <a:solidFill>
                   <a:srgbClr val="222222"/>
                 </a:solidFill>
@@ -36294,7 +36387,7 @@
               <a:t>    time.sleep_ms(200)     </a:t>
             </a:r>
             <a:r>
-              <a:rPr sz="1400" b="0">
+              <a:rPr sz="1600" b="0">
                 <a:solidFill>
                   <a:srgbClr val="2E7D32"/>
                 </a:solidFill>
@@ -36315,8 +36408,8 @@
         </p:nvSpPr>
         <p:spPr>
           <a:xfrm>
-            <a:off x="640080" y="1547368"/>
-            <a:ext cx="1167130" cy="228600"/>
+            <a:off x="640080" y="1585468"/>
+            <a:ext cx="1320800" cy="266700"/>
           </a:xfrm>
           <a:prstGeom prst="roundRect">
             <a:avLst/>
@@ -36359,8 +36452,8 @@
         </p:nvSpPr>
         <p:spPr>
           <a:xfrm>
-            <a:off x="1031240" y="2195068"/>
-            <a:ext cx="1362710" cy="228600"/>
+            <a:off x="1087120" y="2347468"/>
+            <a:ext cx="1544320" cy="266700"/>
           </a:xfrm>
           <a:prstGeom prst="roundRect">
             <a:avLst/>
@@ -36403,8 +36496,8 @@
         </p:nvSpPr>
         <p:spPr>
           <a:xfrm>
-            <a:off x="1031240" y="2626868"/>
-            <a:ext cx="580389" cy="228600"/>
+            <a:off x="1087120" y="2855468"/>
+            <a:ext cx="650240" cy="266700"/>
           </a:xfrm>
           <a:prstGeom prst="roundRect">
             <a:avLst/>

--- a/slides/pico_sensor_intro.pptx
+++ b/slides/pico_sensor_intro.pptx
@@ -57,6 +57,12 @@
     <p:sldId id="305" r:id="rId57"/>
     <p:sldId id="306" r:id="rId58"/>
     <p:sldId id="307" r:id="rId59"/>
+    <p:sldId id="308" r:id="rId60"/>
+    <p:sldId id="309" r:id="rId61"/>
+    <p:sldId id="310" r:id="rId62"/>
+    <p:sldId id="311" r:id="rId63"/>
+    <p:sldId id="312" r:id="rId64"/>
+    <p:sldId id="313" r:id="rId65"/>
   </p:sldIdLst>
   <p:sldSz cx="12191695" cy="6858000" type="screen4x3"/>
   <p:notesSz cx="6858000" cy="9144000"/>
@@ -3773,7 +3779,7 @@
           <a:lstStyle/>
           <a:p>
             <a:r>
-              <a:t>今日学んだことをふり返りましょう。制御構造は順次・while・if・for・関数。電気では、LED には電流制限抵抗、プルアップとプルダウン、分圧。センサーは、人感センサーが赤外線、超音波センサーが音速かける時間割る2。ボタンはポーリングと割り込みでした。</a:t>
+              <a:t>ここからは発展です。OLED は1つ1つの点が自分で光る画面で、今回のものは横128、縦64ドットです。左上が0,0で、右に x、下に y が増えます。標準の文字は8×8ドットなので、1行16文字、8行まで書けます。OLED とは I2C という、SDA と SCL の2本の線でやりとりします。SSD1306 のアドレスはふつう0x3C、10進数で60です。</a:t>
             </a:r>
           </a:p>
         </p:txBody>
@@ -3799,6 +3805,426 @@
 </file>
 
 <file path=ppt/notesSlides/notesSlide52.xml><?xml version="1.0" encoding="utf-8"?>
+<p:notes xmlns:a="http://schemas.openxmlformats.org/drawingml/2006/main" xmlns:p="http://schemas.openxmlformats.org/presentationml/2006/main" xmlns:r="http://schemas.openxmlformats.org/officeDocument/2006/relationships">
+  <p:cSld>
+    <p:spTree>
+      <p:nvGrpSpPr>
+        <p:cNvPr id="1" name=""/>
+        <p:cNvGrpSpPr/>
+        <p:nvPr/>
+      </p:nvGrpSpPr>
+      <p:grpSpPr>
+        <a:xfrm>
+          <a:off x="0" y="0"/>
+          <a:ext cx="0" cy="0"/>
+          <a:chOff x="0" y="0"/>
+          <a:chExt cx="0" cy="0"/>
+        </a:xfrm>
+      </p:grpSpPr>
+      <p:sp>
+        <p:nvSpPr>
+          <p:cNvPr id="2" name="Slide Image Placeholder 1"/>
+          <p:cNvSpPr>
+            <a:spLocks noGrp="1"/>
+          </p:cNvSpPr>
+          <p:nvPr>
+            <p:ph type="sldImg" idx="2"/>
+          </p:nvPr>
+        </p:nvSpPr>
+        <p:spPr/>
+      </p:sp>
+      <p:sp>
+        <p:nvSpPr>
+          <p:cNvPr id="3" name="Notes Placeholder 2"/>
+          <p:cNvSpPr>
+            <a:spLocks noGrp="1"/>
+          </p:cNvSpPr>
+          <p:nvPr>
+            <p:ph type="body" idx="3" sz="quarter"/>
+          </p:nvPr>
+        </p:nvSpPr>
+        <p:spPr/>
+        <p:txBody>
+          <a:bodyPr/>
+          <a:lstStyle/>
+          <a:p>
+            <a:r>
+              <a:t>OLED を動かすには ssd1306 というライブラリが必要です。Thonny のツール、パッケージを管理から入れます。Pico の中に lib/ssd1306.py ができていれば OK です。つまずきやすい点:Pico をつないで、右下が MicroPython になっている状態でインストールしましょう。</a:t>
+            </a:r>
+          </a:p>
+        </p:txBody>
+      </p:sp>
+      <p:sp>
+        <p:nvSpPr>
+          <p:cNvPr id="4" name="Slide Number Placeholder 3"/>
+          <p:cNvSpPr>
+            <a:spLocks noGrp="1"/>
+          </p:cNvSpPr>
+          <p:nvPr>
+            <p:ph type="sldNum" idx="5" sz="quarter"/>
+          </p:nvPr>
+        </p:nvSpPr>
+        <p:spPr/>
+      </p:sp>
+    </p:spTree>
+  </p:cSld>
+  <p:clrMapOvr>
+    <a:masterClrMapping/>
+  </p:clrMapOvr>
+</p:notes>
+</file>
+
+<file path=ppt/notesSlides/notesSlide53.xml><?xml version="1.0" encoding="utf-8"?>
+<p:notes xmlns:a="http://schemas.openxmlformats.org/drawingml/2006/main" xmlns:p="http://schemas.openxmlformats.org/presentationml/2006/main" xmlns:r="http://schemas.openxmlformats.org/officeDocument/2006/relationships">
+  <p:cSld>
+    <p:spTree>
+      <p:nvGrpSpPr>
+        <p:cNvPr id="1" name=""/>
+        <p:cNvGrpSpPr/>
+        <p:nvPr/>
+      </p:nvGrpSpPr>
+      <p:grpSpPr>
+        <a:xfrm>
+          <a:off x="0" y="0"/>
+          <a:ext cx="0" cy="0"/>
+          <a:chOff x="0" y="0"/>
+          <a:chExt cx="0" cy="0"/>
+        </a:xfrm>
+      </p:grpSpPr>
+      <p:sp>
+        <p:nvSpPr>
+          <p:cNvPr id="2" name="Slide Image Placeholder 1"/>
+          <p:cNvSpPr>
+            <a:spLocks noGrp="1"/>
+          </p:cNvSpPr>
+          <p:nvPr>
+            <p:ph type="sldImg" idx="2"/>
+          </p:nvPr>
+        </p:nvSpPr>
+        <p:spPr/>
+      </p:sp>
+      <p:sp>
+        <p:nvSpPr>
+          <p:cNvPr id="3" name="Notes Placeholder 2"/>
+          <p:cNvSpPr>
+            <a:spLocks noGrp="1"/>
+          </p:cNvSpPr>
+          <p:nvPr>
+            <p:ph type="body" idx="3" sz="quarter"/>
+          </p:nvPr>
+        </p:nvSpPr>
+        <p:spPr/>
+        <p:txBody>
+          <a:bodyPr/>
+          <a:lstStyle/>
+          <a:p>
+            <a:r>
+              <a:t>配線です。GND は23番、VCC は3V3の36番、SCL は GP19 の25番、SDA は GP18 の24番です。信号機やボタンとピンが重ならないように、I2C1 の GP18 と GP19 を使います。つまずきやすい点:端子の並びは製品によって違うので、OLED に書いてある文字を必ず見ましょう。</a:t>
+            </a:r>
+          </a:p>
+        </p:txBody>
+      </p:sp>
+      <p:sp>
+        <p:nvSpPr>
+          <p:cNvPr id="4" name="Slide Number Placeholder 3"/>
+          <p:cNvSpPr>
+            <a:spLocks noGrp="1"/>
+          </p:cNvSpPr>
+          <p:nvPr>
+            <p:ph type="sldNum" idx="5" sz="quarter"/>
+          </p:nvPr>
+        </p:nvSpPr>
+        <p:spPr/>
+      </p:sp>
+    </p:spTree>
+  </p:cSld>
+  <p:clrMapOvr>
+    <a:masterClrMapping/>
+  </p:clrMapOvr>
+</p:notes>
+</file>
+
+<file path=ppt/notesSlides/notesSlide54.xml><?xml version="1.0" encoding="utf-8"?>
+<p:notes xmlns:a="http://schemas.openxmlformats.org/drawingml/2006/main" xmlns:p="http://schemas.openxmlformats.org/presentationml/2006/main" xmlns:r="http://schemas.openxmlformats.org/officeDocument/2006/relationships">
+  <p:cSld>
+    <p:spTree>
+      <p:nvGrpSpPr>
+        <p:cNvPr id="1" name=""/>
+        <p:cNvGrpSpPr/>
+        <p:nvPr/>
+      </p:nvGrpSpPr>
+      <p:grpSpPr>
+        <a:xfrm>
+          <a:off x="0" y="0"/>
+          <a:ext cx="0" cy="0"/>
+          <a:chOff x="0" y="0"/>
+          <a:chExt cx="0" cy="0"/>
+        </a:xfrm>
+      </p:grpSpPr>
+      <p:sp>
+        <p:nvSpPr>
+          <p:cNvPr id="2" name="Slide Image Placeholder 1"/>
+          <p:cNvSpPr>
+            <a:spLocks noGrp="1"/>
+          </p:cNvSpPr>
+          <p:nvPr>
+            <p:ph type="sldImg" idx="2"/>
+          </p:nvPr>
+        </p:nvSpPr>
+        <p:spPr/>
+      </p:sp>
+      <p:sp>
+        <p:nvSpPr>
+          <p:cNvPr id="3" name="Notes Placeholder 2"/>
+          <p:cNvSpPr>
+            <a:spLocks noGrp="1"/>
+          </p:cNvSpPr>
+          <p:nvPr>
+            <p:ph type="body" idx="3" sz="quarter"/>
+          </p:nvPr>
+        </p:nvSpPr>
+        <p:spPr/>
+        <p:txBody>
+          <a:bodyPr/>
+          <a:lstStyle/>
+          <a:p>
+            <a:r>
+              <a:t>I2C1 を GP18 と GP19 で使う準備をして、i2c.scan() でつながっている部品を調べます。60と出れば OK です。text で文字、rect で四角を描き、最後に show で画面に送ります。</a:t>
+            </a:r>
+          </a:p>
+        </p:txBody>
+      </p:sp>
+      <p:sp>
+        <p:nvSpPr>
+          <p:cNvPr id="4" name="Slide Number Placeholder 3"/>
+          <p:cNvSpPr>
+            <a:spLocks noGrp="1"/>
+          </p:cNvSpPr>
+          <p:nvPr>
+            <p:ph type="sldNum" idx="5" sz="quarter"/>
+          </p:nvPr>
+        </p:nvSpPr>
+        <p:spPr/>
+      </p:sp>
+    </p:spTree>
+  </p:cSld>
+  <p:clrMapOvr>
+    <a:masterClrMapping/>
+  </p:clrMapOvr>
+</p:notes>
+</file>
+
+<file path=ppt/notesSlides/notesSlide55.xml><?xml version="1.0" encoding="utf-8"?>
+<p:notes xmlns:a="http://schemas.openxmlformats.org/drawingml/2006/main" xmlns:p="http://schemas.openxmlformats.org/presentationml/2006/main" xmlns:r="http://schemas.openxmlformats.org/officeDocument/2006/relationships">
+  <p:cSld>
+    <p:spTree>
+      <p:nvGrpSpPr>
+        <p:cNvPr id="1" name=""/>
+        <p:cNvGrpSpPr/>
+        <p:nvPr/>
+      </p:nvGrpSpPr>
+      <p:grpSpPr>
+        <a:xfrm>
+          <a:off x="0" y="0"/>
+          <a:ext cx="0" cy="0"/>
+          <a:chOff x="0" y="0"/>
+          <a:chExt cx="0" cy="0"/>
+        </a:xfrm>
+      </p:grpSpPr>
+      <p:sp>
+        <p:nvSpPr>
+          <p:cNvPr id="2" name="Slide Image Placeholder 1"/>
+          <p:cNvSpPr>
+            <a:spLocks noGrp="1"/>
+          </p:cNvSpPr>
+          <p:nvPr>
+            <p:ph type="sldImg" idx="2"/>
+          </p:nvPr>
+        </p:nvSpPr>
+        <p:spPr/>
+      </p:sp>
+      <p:sp>
+        <p:nvSpPr>
+          <p:cNvPr id="3" name="Notes Placeholder 2"/>
+          <p:cNvSpPr>
+            <a:spLocks noGrp="1"/>
+          </p:cNvSpPr>
+          <p:nvPr>
+            <p:ph type="body" idx="3" sz="quarter"/>
+          </p:nvPr>
+        </p:nvSpPr>
+        <p:spPr/>
+        <p:txBody>
+          <a:bodyPr/>
+          <a:lstStyle/>
+          <a:p>
+            <a:r>
+              <a:t>while True の中で、消す、描く、show をくり返して数字を書きかえます。つまずきやすい点:show を忘れると何も表示されません。</a:t>
+            </a:r>
+          </a:p>
+        </p:txBody>
+      </p:sp>
+      <p:sp>
+        <p:nvSpPr>
+          <p:cNvPr id="4" name="Slide Number Placeholder 3"/>
+          <p:cNvSpPr>
+            <a:spLocks noGrp="1"/>
+          </p:cNvSpPr>
+          <p:nvPr>
+            <p:ph type="sldNum" idx="5" sz="quarter"/>
+          </p:nvPr>
+        </p:nvSpPr>
+        <p:spPr/>
+      </p:sp>
+    </p:spTree>
+  </p:cSld>
+  <p:clrMapOvr>
+    <a:masterClrMapping/>
+  </p:clrMapOvr>
+</p:notes>
+</file>
+
+<file path=ppt/notesSlides/notesSlide56.xml><?xml version="1.0" encoding="utf-8"?>
+<p:notes xmlns:a="http://schemas.openxmlformats.org/drawingml/2006/main" xmlns:p="http://schemas.openxmlformats.org/presentationml/2006/main" xmlns:r="http://schemas.openxmlformats.org/officeDocument/2006/relationships">
+  <p:cSld>
+    <p:spTree>
+      <p:nvGrpSpPr>
+        <p:cNvPr id="1" name=""/>
+        <p:cNvGrpSpPr/>
+        <p:nvPr/>
+      </p:nvGrpSpPr>
+      <p:grpSpPr>
+        <a:xfrm>
+          <a:off x="0" y="0"/>
+          <a:ext cx="0" cy="0"/>
+          <a:chOff x="0" y="0"/>
+          <a:chExt cx="0" cy="0"/>
+        </a:xfrm>
+      </p:grpSpPr>
+      <p:sp>
+        <p:nvSpPr>
+          <p:cNvPr id="2" name="Slide Image Placeholder 1"/>
+          <p:cNvSpPr>
+            <a:spLocks noGrp="1"/>
+          </p:cNvSpPr>
+          <p:nvPr>
+            <p:ph type="sldImg" idx="2"/>
+          </p:nvPr>
+        </p:nvSpPr>
+        <p:spPr/>
+      </p:sp>
+      <p:sp>
+        <p:nvSpPr>
+          <p:cNvPr id="3" name="Notes Placeholder 2"/>
+          <p:cNvSpPr>
+            <a:spLocks noGrp="1"/>
+          </p:cNvSpPr>
+          <p:nvPr>
+            <p:ph type="body" idx="3" sz="quarter"/>
+          </p:nvPr>
+        </p:nvSpPr>
+        <p:spPr/>
+        <p:txBody>
+          <a:bodyPr/>
+          <a:lstStyle/>
+          <a:p>
+            <a:r>
+              <a:t>大事なのは、text や rect は下書きに描くだけで、show を呼んだときにはじめて画面に出ることです。表示を書きかえるときは fill(0) で消してから描きます。数は str で文字に変えてから text に渡します。scan の結果が空っぽなら、SDA と SCL が逆になっていないか確認しましょう。</a:t>
+            </a:r>
+          </a:p>
+        </p:txBody>
+      </p:sp>
+      <p:sp>
+        <p:nvSpPr>
+          <p:cNvPr id="4" name="Slide Number Placeholder 3"/>
+          <p:cNvSpPr>
+            <a:spLocks noGrp="1"/>
+          </p:cNvSpPr>
+          <p:nvPr>
+            <p:ph type="sldNum" idx="5" sz="quarter"/>
+          </p:nvPr>
+        </p:nvSpPr>
+        <p:spPr/>
+      </p:sp>
+    </p:spTree>
+  </p:cSld>
+  <p:clrMapOvr>
+    <a:masterClrMapping/>
+  </p:clrMapOvr>
+</p:notes>
+</file>
+
+<file path=ppt/notesSlides/notesSlide57.xml><?xml version="1.0" encoding="utf-8"?>
+<p:notes xmlns:a="http://schemas.openxmlformats.org/drawingml/2006/main" xmlns:p="http://schemas.openxmlformats.org/presentationml/2006/main" xmlns:r="http://schemas.openxmlformats.org/officeDocument/2006/relationships">
+  <p:cSld>
+    <p:spTree>
+      <p:nvGrpSpPr>
+        <p:cNvPr id="1" name=""/>
+        <p:cNvGrpSpPr/>
+        <p:nvPr/>
+      </p:nvGrpSpPr>
+      <p:grpSpPr>
+        <a:xfrm>
+          <a:off x="0" y="0"/>
+          <a:ext cx="0" cy="0"/>
+          <a:chOff x="0" y="0"/>
+          <a:chExt cx="0" cy="0"/>
+        </a:xfrm>
+      </p:grpSpPr>
+      <p:sp>
+        <p:nvSpPr>
+          <p:cNvPr id="2" name="Slide Image Placeholder 1"/>
+          <p:cNvSpPr>
+            <a:spLocks noGrp="1"/>
+          </p:cNvSpPr>
+          <p:nvPr>
+            <p:ph type="sldImg" idx="2"/>
+          </p:nvPr>
+        </p:nvSpPr>
+        <p:spPr/>
+      </p:sp>
+      <p:sp>
+        <p:nvSpPr>
+          <p:cNvPr id="3" name="Notes Placeholder 2"/>
+          <p:cNvSpPr>
+            <a:spLocks noGrp="1"/>
+          </p:cNvSpPr>
+          <p:nvPr>
+            <p:ph type="body" idx="3" sz="quarter"/>
+          </p:nvPr>
+        </p:nvSpPr>
+        <p:spPr/>
+        <p:txBody>
+          <a:bodyPr/>
+          <a:lstStyle/>
+          <a:p>
+            <a:r>
+              <a:t>今日学んだことをふり返りましょう。制御構造は順次・while・if・for・関数。電気では、LED には電流制限抵抗、プルアップとプルダウン、分圧。センサーは、人感センサーが赤外線、超音波センサーが音速かける時間割る2。ボタンはポーリングと割り込みでした。</a:t>
+            </a:r>
+          </a:p>
+        </p:txBody>
+      </p:sp>
+      <p:sp>
+        <p:nvSpPr>
+          <p:cNvPr id="4" name="Slide Number Placeholder 3"/>
+          <p:cNvSpPr>
+            <a:spLocks noGrp="1"/>
+          </p:cNvSpPr>
+          <p:nvPr>
+            <p:ph type="sldNum" idx="5" sz="quarter"/>
+          </p:nvPr>
+        </p:nvSpPr>
+        <p:spPr/>
+      </p:sp>
+    </p:spTree>
+  </p:cSld>
+  <p:clrMapOvr>
+    <a:masterClrMapping/>
+  </p:clrMapOvr>
+</p:notes>
+</file>
+
+<file path=ppt/notesSlides/notesSlide58.xml><?xml version="1.0" encoding="utf-8"?>
 <p:notes xmlns:a="http://schemas.openxmlformats.org/drawingml/2006/main" xmlns:p="http://schemas.openxmlformats.org/presentationml/2006/main" xmlns:r="http://schemas.openxmlformats.org/officeDocument/2006/relationships">
   <p:cSld>
     <p:spTree>
@@ -38467,7 +38893,7 @@
                 <a:ea typeface="Meiryo"/>
                 <a:cs typeface="Meiryo"/>
               </a:rPr>
-              <a:t>今日のまとめ</a:t>
+              <a:t>OLED ディスプレイと I2C</a:t>
             </a:r>
           </a:p>
         </p:txBody>
@@ -38552,31 +38978,397 @@
                 <a:ea typeface="Meiryo"/>
                 <a:cs typeface="Meiryo"/>
               </a:rPr>
-              <a:t>第7部 まとめ  |  51</a:t>
-            </a:r>
-          </a:p>
-        </p:txBody>
-      </p:sp>
-      <p:sp>
-        <p:nvSpPr>
-          <p:cNvPr id="5" name="Rounded Rectangle 4"/>
+              <a:t>第7部 OLED(発展)  |  51</a:t>
+            </a:r>
+          </a:p>
+        </p:txBody>
+      </p:sp>
+      <p:sp>
+        <p:nvSpPr>
+          <p:cNvPr id="5" name="TextBox 4"/>
+          <p:cNvSpPr txBox="1"/>
+          <p:nvPr/>
+        </p:nvSpPr>
+        <p:spPr>
+          <a:xfrm>
+            <a:off x="548640" y="1234440"/>
+            <a:ext cx="11094415" cy="3291840"/>
+          </a:xfrm>
+          <a:prstGeom prst="rect">
+            <a:avLst/>
+          </a:prstGeom>
+          <a:noFill/>
+        </p:spPr>
+        <p:txBody>
+          <a:bodyPr wrap="square" anchor="t">
+            <a:spAutoFit/>
+          </a:bodyPr>
+          <a:lstStyle/>
+          <a:p>
+            <a:pPr algn="l">
+              <a:spcAft>
+                <a:spcPts val="1000"/>
+              </a:spcAft>
+            </a:pPr>
+            <a:r>
+              <a:rPr sz="2400" b="0">
+                <a:solidFill>
+                  <a:srgbClr val="222222"/>
+                </a:solidFill>
+                <a:latin typeface="Meiryo"/>
+                <a:ea typeface="Meiryo"/>
+                <a:cs typeface="Meiryo"/>
+              </a:rPr>
+              <a:t>・OLED:</a:t>
+            </a:r>
+            <a:r>
+              <a:rPr sz="2400" b="1">
+                <a:solidFill>
+                  <a:srgbClr val="1F6FB2"/>
+                </a:solidFill>
+                <a:latin typeface="Meiryo"/>
+                <a:ea typeface="Meiryo"/>
+                <a:cs typeface="Meiryo"/>
+              </a:rPr>
+              <a:t>1つ1つの点が自分で光る</a:t>
+            </a:r>
+            <a:r>
+              <a:rPr sz="2400" b="0">
+                <a:solidFill>
+                  <a:srgbClr val="222222"/>
+                </a:solidFill>
+                <a:latin typeface="Meiryo"/>
+                <a:ea typeface="Meiryo"/>
+                <a:cs typeface="Meiryo"/>
+              </a:rPr>
+              <a:t> 画面(横 </a:t>
+            </a:r>
+            <a:r>
+              <a:rPr sz="2400" b="1">
+                <a:solidFill>
+                  <a:srgbClr val="1F6FB2"/>
+                </a:solidFill>
+                <a:latin typeface="Meiryo"/>
+                <a:ea typeface="Meiryo"/>
+                <a:cs typeface="Meiryo"/>
+              </a:rPr>
+              <a:t>128</a:t>
+            </a:r>
+            <a:r>
+              <a:rPr sz="2400" b="0">
+                <a:solidFill>
+                  <a:srgbClr val="222222"/>
+                </a:solidFill>
+                <a:latin typeface="Meiryo"/>
+                <a:ea typeface="Meiryo"/>
+                <a:cs typeface="Meiryo"/>
+              </a:rPr>
+              <a:t> × 縦 </a:t>
+            </a:r>
+            <a:r>
+              <a:rPr sz="2400" b="1">
+                <a:solidFill>
+                  <a:srgbClr val="1F6FB2"/>
+                </a:solidFill>
+                <a:latin typeface="Meiryo"/>
+                <a:ea typeface="Meiryo"/>
+                <a:cs typeface="Meiryo"/>
+              </a:rPr>
+              <a:t>64</a:t>
+            </a:r>
+            <a:r>
+              <a:rPr sz="2400" b="0">
+                <a:solidFill>
+                  <a:srgbClr val="222222"/>
+                </a:solidFill>
+                <a:latin typeface="Meiryo"/>
+                <a:ea typeface="Meiryo"/>
+                <a:cs typeface="Meiryo"/>
+              </a:rPr>
+              <a:t> ドット)</a:t>
+            </a:r>
+          </a:p>
+          <a:p>
+            <a:pPr algn="l">
+              <a:spcAft>
+                <a:spcPts val="1000"/>
+              </a:spcAft>
+            </a:pPr>
+            <a:r>
+              <a:rPr sz="2400" b="0">
+                <a:solidFill>
+                  <a:srgbClr val="222222"/>
+                </a:solidFill>
+                <a:latin typeface="Meiryo"/>
+                <a:ea typeface="Meiryo"/>
+                <a:cs typeface="Meiryo"/>
+              </a:rPr>
+              <a:t>・左上が </a:t>
+            </a:r>
+            <a:r>
+              <a:rPr sz="2400" b="1">
+                <a:solidFill>
+                  <a:srgbClr val="1F6FB2"/>
+                </a:solidFill>
+                <a:latin typeface="Meiryo"/>
+                <a:ea typeface="Meiryo"/>
+                <a:cs typeface="Meiryo"/>
+              </a:rPr>
+              <a:t>(0, 0)</a:t>
+            </a:r>
+            <a:r>
+              <a:rPr sz="2400" b="0">
+                <a:solidFill>
+                  <a:srgbClr val="222222"/>
+                </a:solidFill>
+                <a:latin typeface="Meiryo"/>
+                <a:ea typeface="Meiryo"/>
+                <a:cs typeface="Meiryo"/>
+              </a:rPr>
+              <a:t>。右へ x、下へ y が増える</a:t>
+            </a:r>
+          </a:p>
+          <a:p>
+            <a:pPr algn="l">
+              <a:spcAft>
+                <a:spcPts val="1000"/>
+              </a:spcAft>
+            </a:pPr>
+            <a:r>
+              <a:rPr sz="2400" b="0">
+                <a:solidFill>
+                  <a:srgbClr val="222222"/>
+                </a:solidFill>
+                <a:latin typeface="Meiryo"/>
+                <a:ea typeface="Meiryo"/>
+                <a:cs typeface="Meiryo"/>
+              </a:rPr>
+              <a:t>・文字は </a:t>
+            </a:r>
+            <a:r>
+              <a:rPr sz="2400" b="1">
+                <a:solidFill>
+                  <a:srgbClr val="1F6FB2"/>
+                </a:solidFill>
+                <a:latin typeface="Meiryo"/>
+                <a:ea typeface="Meiryo"/>
+                <a:cs typeface="Meiryo"/>
+              </a:rPr>
+              <a:t>8×8 ドット</a:t>
+            </a:r>
+            <a:r>
+              <a:rPr sz="2400" b="0">
+                <a:solidFill>
+                  <a:srgbClr val="222222"/>
+                </a:solidFill>
+                <a:latin typeface="Meiryo"/>
+                <a:ea typeface="Meiryo"/>
+                <a:cs typeface="Meiryo"/>
+              </a:rPr>
+              <a:t> → 1行 </a:t>
+            </a:r>
+            <a:r>
+              <a:rPr sz="2400" b="1">
+                <a:solidFill>
+                  <a:srgbClr val="1F6FB2"/>
+                </a:solidFill>
+                <a:latin typeface="Meiryo"/>
+                <a:ea typeface="Meiryo"/>
+                <a:cs typeface="Meiryo"/>
+              </a:rPr>
+              <a:t>16文字</a:t>
+            </a:r>
+            <a:r>
+              <a:rPr sz="2400" b="0">
+                <a:solidFill>
+                  <a:srgbClr val="222222"/>
+                </a:solidFill>
+                <a:latin typeface="Meiryo"/>
+                <a:ea typeface="Meiryo"/>
+                <a:cs typeface="Meiryo"/>
+              </a:rPr>
+              <a:t>・</a:t>
+            </a:r>
+            <a:r>
+              <a:rPr sz="2400" b="1">
+                <a:solidFill>
+                  <a:srgbClr val="1F6FB2"/>
+                </a:solidFill>
+                <a:latin typeface="Meiryo"/>
+                <a:ea typeface="Meiryo"/>
+                <a:cs typeface="Meiryo"/>
+              </a:rPr>
+              <a:t>8行</a:t>
+            </a:r>
+            <a:r>
+              <a:rPr sz="2400" b="0">
+                <a:solidFill>
+                  <a:srgbClr val="222222"/>
+                </a:solidFill>
+                <a:latin typeface="Meiryo"/>
+                <a:ea typeface="Meiryo"/>
+                <a:cs typeface="Meiryo"/>
+              </a:rPr>
+              <a:t> まで(英数字のみ)</a:t>
+            </a:r>
+          </a:p>
+          <a:p>
+            <a:pPr algn="l">
+              <a:spcAft>
+                <a:spcPts val="1000"/>
+              </a:spcAft>
+            </a:pPr>
+            <a:r>
+              <a:rPr sz="2400" b="0">
+                <a:solidFill>
+                  <a:srgbClr val="222222"/>
+                </a:solidFill>
+                <a:latin typeface="Meiryo"/>
+                <a:ea typeface="Meiryo"/>
+                <a:cs typeface="Meiryo"/>
+              </a:rPr>
+              <a:t>・</a:t>
+            </a:r>
+            <a:r>
+              <a:rPr sz="2400" b="1">
+                <a:solidFill>
+                  <a:srgbClr val="1F6FB2"/>
+                </a:solidFill>
+                <a:latin typeface="Meiryo"/>
+                <a:ea typeface="Meiryo"/>
+                <a:cs typeface="Meiryo"/>
+              </a:rPr>
+              <a:t>I2C</a:t>
+            </a:r>
+            <a:r>
+              <a:rPr sz="2400" b="0">
+                <a:solidFill>
+                  <a:srgbClr val="222222"/>
+                </a:solidFill>
+                <a:latin typeface="Meiryo"/>
+                <a:ea typeface="Meiryo"/>
+                <a:cs typeface="Meiryo"/>
+              </a:rPr>
+              <a:t>:</a:t>
+            </a:r>
+            <a:r>
+              <a:rPr sz="2400" b="1">
+                <a:solidFill>
+                  <a:srgbClr val="1F6FB2"/>
+                </a:solidFill>
+                <a:latin typeface="Meiryo"/>
+                <a:ea typeface="Meiryo"/>
+                <a:cs typeface="Meiryo"/>
+              </a:rPr>
+              <a:t>SDA</a:t>
+            </a:r>
+            <a:r>
+              <a:rPr sz="2400" b="0">
+                <a:solidFill>
+                  <a:srgbClr val="222222"/>
+                </a:solidFill>
+                <a:latin typeface="Meiryo"/>
+                <a:ea typeface="Meiryo"/>
+                <a:cs typeface="Meiryo"/>
+              </a:rPr>
+              <a:t>(データ)と </a:t>
+            </a:r>
+            <a:r>
+              <a:rPr sz="2400" b="1">
+                <a:solidFill>
+                  <a:srgbClr val="1F6FB2"/>
+                </a:solidFill>
+                <a:latin typeface="Meiryo"/>
+                <a:ea typeface="Meiryo"/>
+                <a:cs typeface="Meiryo"/>
+              </a:rPr>
+              <a:t>SCL</a:t>
+            </a:r>
+            <a:r>
+              <a:rPr sz="2400" b="0">
+                <a:solidFill>
+                  <a:srgbClr val="222222"/>
+                </a:solidFill>
+                <a:latin typeface="Meiryo"/>
+                <a:ea typeface="Meiryo"/>
+                <a:cs typeface="Meiryo"/>
+              </a:rPr>
+              <a:t>(合図)の </a:t>
+            </a:r>
+            <a:r>
+              <a:rPr sz="2400" b="1">
+                <a:solidFill>
+                  <a:srgbClr val="1F6FB2"/>
+                </a:solidFill>
+                <a:latin typeface="Meiryo"/>
+                <a:ea typeface="Meiryo"/>
+                <a:cs typeface="Meiryo"/>
+              </a:rPr>
+              <a:t>2本の線</a:t>
+            </a:r>
+            <a:r>
+              <a:rPr sz="2400" b="0">
+                <a:solidFill>
+                  <a:srgbClr val="222222"/>
+                </a:solidFill>
+                <a:latin typeface="Meiryo"/>
+                <a:ea typeface="Meiryo"/>
+                <a:cs typeface="Meiryo"/>
+              </a:rPr>
+              <a:t> でやりとり</a:t>
+            </a:r>
+          </a:p>
+          <a:p>
+            <a:pPr algn="l">
+              <a:spcAft>
+                <a:spcPts val="1000"/>
+              </a:spcAft>
+            </a:pPr>
+            <a:r>
+              <a:rPr sz="2400" b="0">
+                <a:solidFill>
+                  <a:srgbClr val="222222"/>
+                </a:solidFill>
+                <a:latin typeface="Meiryo"/>
+                <a:ea typeface="Meiryo"/>
+                <a:cs typeface="Meiryo"/>
+              </a:rPr>
+              <a:t>・SSD1306 のアドレスはふつう </a:t>
+            </a:r>
+            <a:r>
+              <a:rPr sz="2400" b="1">
+                <a:solidFill>
+                  <a:srgbClr val="1F6FB2"/>
+                </a:solidFill>
+                <a:latin typeface="Meiryo"/>
+                <a:ea typeface="Meiryo"/>
+                <a:cs typeface="Meiryo"/>
+              </a:rPr>
+              <a:t>0x3C(= 60)</a:t>
+            </a:r>
+          </a:p>
+        </p:txBody>
+      </p:sp>
+      <p:sp>
+        <p:nvSpPr>
+          <p:cNvPr id="6" name="Rectangle 5"/>
           <p:cNvSpPr/>
           <p:nvPr/>
         </p:nvSpPr>
         <p:spPr>
           <a:xfrm>
-            <a:off x="548640" y="1417320"/>
-            <a:ext cx="2377440" cy="914400"/>
-          </a:xfrm>
-          <a:prstGeom prst="roundRect">
+            <a:off x="548640" y="4572000"/>
+            <a:ext cx="5120640" cy="1346200"/>
+          </a:xfrm>
+          <a:prstGeom prst="rect">
             <a:avLst/>
           </a:prstGeom>
           <a:solidFill>
-            <a:srgbClr val="1F6FB2"/>
+            <a:srgbClr val="F4F6F8"/>
           </a:solidFill>
-          <a:ln w="19050">
+          <a:ln w="12700">
             <a:solidFill>
-              <a:srgbClr val="1F6FB2"/>
+              <a:srgbClr val="D0D7DE"/>
             </a:solidFill>
           </a:ln>
           <a:effectLst/>
@@ -38596,34 +39388,23 @@
           </a:fontRef>
         </p:style>
         <p:txBody>
-          <a:bodyPr rtlCol="0" anchor="ctr" wrap="square"/>
+          <a:bodyPr rtlCol="0" anchor="ctr"/>
           <a:lstStyle/>
           <a:p>
             <a:pPr algn="ctr"/>
-            <a:r>
-              <a:rPr sz="2400" b="1">
-                <a:solidFill>
-                  <a:srgbClr val="FFFFFF"/>
-                </a:solidFill>
-                <a:latin typeface="Meiryo"/>
-                <a:ea typeface="Meiryo"/>
-                <a:cs typeface="Meiryo"/>
-              </a:rPr>
-              <a:t>制御構造</a:t>
-            </a:r>
-          </a:p>
-        </p:txBody>
-      </p:sp>
-      <p:sp>
-        <p:nvSpPr>
-          <p:cNvPr id="6" name="TextBox 5"/>
+          </a:p>
+        </p:txBody>
+      </p:sp>
+      <p:sp>
+        <p:nvSpPr>
+          <p:cNvPr id="7" name="TextBox 6"/>
           <p:cNvSpPr txBox="1"/>
           <p:nvPr/>
         </p:nvSpPr>
         <p:spPr>
           <a:xfrm>
-            <a:off x="3200400" y="1417320"/>
-            <a:ext cx="8442655" cy="914400"/>
+            <a:off x="548640" y="4572000"/>
+            <a:ext cx="5120640" cy="1346200"/>
           </a:xfrm>
           <a:prstGeom prst="rect">
             <a:avLst/>
@@ -38631,386 +39412,80 @@
           <a:noFill/>
         </p:spPr>
         <p:txBody>
-          <a:bodyPr wrap="square" anchor="ctr">
+          <a:bodyPr wrap="square" lIns="137160" rIns="137160" tIns="109728" bIns="109728">
             <a:spAutoFit/>
           </a:bodyPr>
           <a:lstStyle/>
           <a:p>
             <a:pPr algn="l">
-              <a:spcAft>
-                <a:spcPts val="600"/>
-              </a:spcAft>
-            </a:pPr>
-            <a:r>
-              <a:rPr sz="2400" b="0">
-                <a:solidFill>
-                  <a:srgbClr val="222222"/>
-                </a:solidFill>
-                <a:latin typeface="Meiryo"/>
-                <a:ea typeface="Meiryo"/>
-                <a:cs typeface="Meiryo"/>
-              </a:rPr>
-              <a:t>順次・</a:t>
-            </a:r>
-            <a:r>
-              <a:rPr sz="2400" b="0">
-                <a:solidFill>
-                  <a:srgbClr val="C62828"/>
+              <a:lnSpc>
+                <a:spcPts val="2200"/>
+              </a:lnSpc>
+            </a:pPr>
+            <a:r>
+              <a:rPr sz="1800" b="0">
+                <a:solidFill>
+                  <a:srgbClr val="222222"/>
                 </a:solidFill>
                 <a:latin typeface="Consolas"/>
                 <a:ea typeface="BIZ UDGothic"/>
                 <a:cs typeface="BIZ UDGothic"/>
               </a:rPr>
-              <a:t>while</a:t>
-            </a:r>
-            <a:r>
-              <a:rPr sz="2400" b="0">
-                <a:solidFill>
-                  <a:srgbClr val="222222"/>
-                </a:solidFill>
-                <a:latin typeface="Meiryo"/>
-                <a:ea typeface="Meiryo"/>
-                <a:cs typeface="Meiryo"/>
-              </a:rPr>
-              <a:t>・</a:t>
-            </a:r>
-            <a:r>
-              <a:rPr sz="2400" b="0">
-                <a:solidFill>
-                  <a:srgbClr val="C62828"/>
+              <a:t>(0,0) ──────▶ x (0〜127)</a:t>
+            </a:r>
+          </a:p>
+          <a:p>
+            <a:pPr algn="l">
+              <a:lnSpc>
+                <a:spcPts val="2200"/>
+              </a:lnSpc>
+            </a:pPr>
+            <a:r>
+              <a:rPr sz="1800" b="0">
+                <a:solidFill>
+                  <a:srgbClr val="222222"/>
                 </a:solidFill>
                 <a:latin typeface="Consolas"/>
                 <a:ea typeface="BIZ UDGothic"/>
                 <a:cs typeface="BIZ UDGothic"/>
               </a:rPr>
-              <a:t>if</a:t>
-            </a:r>
-            <a:r>
-              <a:rPr sz="2400" b="0">
-                <a:solidFill>
-                  <a:srgbClr val="222222"/>
-                </a:solidFill>
-                <a:latin typeface="Meiryo"/>
-                <a:ea typeface="Meiryo"/>
-                <a:cs typeface="Meiryo"/>
-              </a:rPr>
-              <a:t>・</a:t>
-            </a:r>
-            <a:r>
-              <a:rPr sz="2400" b="0">
-                <a:solidFill>
-                  <a:srgbClr val="C62828"/>
+              <a:t>  │</a:t>
+            </a:r>
+          </a:p>
+          <a:p>
+            <a:pPr algn="l">
+              <a:lnSpc>
+                <a:spcPts val="2200"/>
+              </a:lnSpc>
+            </a:pPr>
+            <a:r>
+              <a:rPr sz="1800" b="0">
+                <a:solidFill>
+                  <a:srgbClr val="222222"/>
                 </a:solidFill>
                 <a:latin typeface="Consolas"/>
                 <a:ea typeface="BIZ UDGothic"/>
                 <a:cs typeface="BIZ UDGothic"/>
               </a:rPr>
-              <a:t>for</a:t>
-            </a:r>
-            <a:r>
-              <a:rPr sz="2400" b="0">
-                <a:solidFill>
-                  <a:srgbClr val="222222"/>
-                </a:solidFill>
-                <a:latin typeface="Meiryo"/>
-                <a:ea typeface="Meiryo"/>
-                <a:cs typeface="Meiryo"/>
-              </a:rPr>
-              <a:t>・関数</a:t>
-            </a:r>
-          </a:p>
-        </p:txBody>
-      </p:sp>
-      <p:sp>
-        <p:nvSpPr>
-          <p:cNvPr id="7" name="Rounded Rectangle 6"/>
-          <p:cNvSpPr/>
-          <p:nvPr/>
-        </p:nvSpPr>
-        <p:spPr>
-          <a:xfrm>
-            <a:off x="548640" y="2606040"/>
-            <a:ext cx="2377440" cy="914400"/>
-          </a:xfrm>
-          <a:prstGeom prst="roundRect">
-            <a:avLst/>
-          </a:prstGeom>
-          <a:solidFill>
-            <a:srgbClr val="1F6FB2"/>
-          </a:solidFill>
-          <a:ln w="19050">
-            <a:solidFill>
-              <a:srgbClr val="1F6FB2"/>
-            </a:solidFill>
-          </a:ln>
-          <a:effectLst/>
-        </p:spPr>
-        <p:style>
-          <a:lnRef idx="1">
-            <a:schemeClr val="accent1"/>
-          </a:lnRef>
-          <a:fillRef idx="3">
-            <a:schemeClr val="accent1"/>
-          </a:fillRef>
-          <a:effectRef idx="2">
-            <a:schemeClr val="accent1"/>
-          </a:effectRef>
-          <a:fontRef idx="minor">
-            <a:schemeClr val="lt1"/>
-          </a:fontRef>
-        </p:style>
-        <p:txBody>
-          <a:bodyPr rtlCol="0" anchor="ctr" wrap="square"/>
-          <a:lstStyle/>
-          <a:p>
-            <a:pPr algn="ctr"/>
-            <a:r>
-              <a:rPr sz="2400" b="1">
-                <a:solidFill>
-                  <a:srgbClr val="FFFFFF"/>
-                </a:solidFill>
-                <a:latin typeface="Meiryo"/>
-                <a:ea typeface="Meiryo"/>
-                <a:cs typeface="Meiryo"/>
-              </a:rPr>
-              <a:t>電気の基本</a:t>
-            </a:r>
-          </a:p>
-        </p:txBody>
-      </p:sp>
-      <p:sp>
-        <p:nvSpPr>
-          <p:cNvPr id="8" name="TextBox 7"/>
-          <p:cNvSpPr txBox="1"/>
-          <p:nvPr/>
-        </p:nvSpPr>
-        <p:spPr>
-          <a:xfrm>
-            <a:off x="3200400" y="2606040"/>
-            <a:ext cx="8442655" cy="914400"/>
-          </a:xfrm>
-          <a:prstGeom prst="rect">
-            <a:avLst/>
-          </a:prstGeom>
-          <a:noFill/>
-        </p:spPr>
-        <p:txBody>
-          <a:bodyPr wrap="square" anchor="ctr">
-            <a:spAutoFit/>
-          </a:bodyPr>
-          <a:lstStyle/>
-          <a:p>
-            <a:pPr algn="l">
-              <a:spcAft>
-                <a:spcPts val="600"/>
-              </a:spcAft>
-            </a:pPr>
-            <a:r>
-              <a:rPr sz="2400" b="0">
-                <a:solidFill>
-                  <a:srgbClr val="222222"/>
-                </a:solidFill>
-                <a:latin typeface="Meiryo"/>
-                <a:ea typeface="Meiryo"/>
-                <a:cs typeface="Meiryo"/>
-              </a:rPr>
-              <a:t>LED には電流制限抵抗(220Ω程度)/プルアップ・プルダウン/分圧</a:t>
-            </a:r>
-          </a:p>
-        </p:txBody>
-      </p:sp>
-      <p:sp>
-        <p:nvSpPr>
-          <p:cNvPr id="9" name="Rounded Rectangle 8"/>
-          <p:cNvSpPr/>
-          <p:nvPr/>
-        </p:nvSpPr>
-        <p:spPr>
-          <a:xfrm>
-            <a:off x="548640" y="3794760"/>
-            <a:ext cx="2377440" cy="914400"/>
-          </a:xfrm>
-          <a:prstGeom prst="roundRect">
-            <a:avLst/>
-          </a:prstGeom>
-          <a:solidFill>
-            <a:srgbClr val="1F6FB2"/>
-          </a:solidFill>
-          <a:ln w="19050">
-            <a:solidFill>
-              <a:srgbClr val="1F6FB2"/>
-            </a:solidFill>
-          </a:ln>
-          <a:effectLst/>
-        </p:spPr>
-        <p:style>
-          <a:lnRef idx="1">
-            <a:schemeClr val="accent1"/>
-          </a:lnRef>
-          <a:fillRef idx="3">
-            <a:schemeClr val="accent1"/>
-          </a:fillRef>
-          <a:effectRef idx="2">
-            <a:schemeClr val="accent1"/>
-          </a:effectRef>
-          <a:fontRef idx="minor">
-            <a:schemeClr val="lt1"/>
-          </a:fontRef>
-        </p:style>
-        <p:txBody>
-          <a:bodyPr rtlCol="0" anchor="ctr" wrap="square"/>
-          <a:lstStyle/>
-          <a:p>
-            <a:pPr algn="ctr"/>
-            <a:r>
-              <a:rPr sz="2400" b="1">
-                <a:solidFill>
-                  <a:srgbClr val="FFFFFF"/>
-                </a:solidFill>
-                <a:latin typeface="Meiryo"/>
-                <a:ea typeface="Meiryo"/>
-                <a:cs typeface="Meiryo"/>
-              </a:rPr>
-              <a:t>センサー</a:t>
-            </a:r>
-          </a:p>
-        </p:txBody>
-      </p:sp>
-      <p:sp>
-        <p:nvSpPr>
-          <p:cNvPr id="10" name="TextBox 9"/>
-          <p:cNvSpPr txBox="1"/>
-          <p:nvPr/>
-        </p:nvSpPr>
-        <p:spPr>
-          <a:xfrm>
-            <a:off x="3200400" y="3794760"/>
-            <a:ext cx="8442655" cy="914400"/>
-          </a:xfrm>
-          <a:prstGeom prst="rect">
-            <a:avLst/>
-          </a:prstGeom>
-          <a:noFill/>
-        </p:spPr>
-        <p:txBody>
-          <a:bodyPr wrap="square" anchor="ctr">
-            <a:spAutoFit/>
-          </a:bodyPr>
-          <a:lstStyle/>
-          <a:p>
-            <a:pPr algn="l">
-              <a:spcAft>
-                <a:spcPts val="600"/>
-              </a:spcAft>
-            </a:pPr>
-            <a:r>
-              <a:rPr sz="2400" b="0">
-                <a:solidFill>
-                  <a:srgbClr val="222222"/>
-                </a:solidFill>
-                <a:latin typeface="Meiryo"/>
-                <a:ea typeface="Meiryo"/>
-                <a:cs typeface="Meiryo"/>
-              </a:rPr>
-              <a:t>人感(赤外線)/超音波(音速 × 時間 ÷ 2)</a:t>
-            </a:r>
-          </a:p>
-        </p:txBody>
-      </p:sp>
-      <p:sp>
-        <p:nvSpPr>
-          <p:cNvPr id="11" name="Rounded Rectangle 10"/>
-          <p:cNvSpPr/>
-          <p:nvPr/>
-        </p:nvSpPr>
-        <p:spPr>
-          <a:xfrm>
-            <a:off x="548640" y="4983480"/>
-            <a:ext cx="2377440" cy="914400"/>
-          </a:xfrm>
-          <a:prstGeom prst="roundRect">
-            <a:avLst/>
-          </a:prstGeom>
-          <a:solidFill>
-            <a:srgbClr val="1F6FB2"/>
-          </a:solidFill>
-          <a:ln w="19050">
-            <a:solidFill>
-              <a:srgbClr val="1F6FB2"/>
-            </a:solidFill>
-          </a:ln>
-          <a:effectLst/>
-        </p:spPr>
-        <p:style>
-          <a:lnRef idx="1">
-            <a:schemeClr val="accent1"/>
-          </a:lnRef>
-          <a:fillRef idx="3">
-            <a:schemeClr val="accent1"/>
-          </a:fillRef>
-          <a:effectRef idx="2">
-            <a:schemeClr val="accent1"/>
-          </a:effectRef>
-          <a:fontRef idx="minor">
-            <a:schemeClr val="lt1"/>
-          </a:fontRef>
-        </p:style>
-        <p:txBody>
-          <a:bodyPr rtlCol="0" anchor="ctr" wrap="square"/>
-          <a:lstStyle/>
-          <a:p>
-            <a:pPr algn="ctr"/>
-            <a:r>
-              <a:rPr sz="2400" b="1">
-                <a:solidFill>
-                  <a:srgbClr val="FFFFFF"/>
-                </a:solidFill>
-                <a:latin typeface="Meiryo"/>
-                <a:ea typeface="Meiryo"/>
-                <a:cs typeface="Meiryo"/>
-              </a:rPr>
-              <a:t>ボタン</a:t>
-            </a:r>
-          </a:p>
-        </p:txBody>
-      </p:sp>
-      <p:sp>
-        <p:nvSpPr>
-          <p:cNvPr id="12" name="TextBox 11"/>
-          <p:cNvSpPr txBox="1"/>
-          <p:nvPr/>
-        </p:nvSpPr>
-        <p:spPr>
-          <a:xfrm>
-            <a:off x="3200400" y="4983480"/>
-            <a:ext cx="8442655" cy="914400"/>
-          </a:xfrm>
-          <a:prstGeom prst="rect">
-            <a:avLst/>
-          </a:prstGeom>
-          <a:noFill/>
-        </p:spPr>
-        <p:txBody>
-          <a:bodyPr wrap="square" anchor="ctr">
-            <a:spAutoFit/>
-          </a:bodyPr>
-          <a:lstStyle/>
-          <a:p>
-            <a:pPr algn="l">
-              <a:spcAft>
-                <a:spcPts val="600"/>
-              </a:spcAft>
-            </a:pPr>
-            <a:r>
-              <a:rPr sz="2400" b="0">
-                <a:solidFill>
-                  <a:srgbClr val="222222"/>
-                </a:solidFill>
-                <a:latin typeface="Meiryo"/>
-                <a:ea typeface="Meiryo"/>
-                <a:cs typeface="Meiryo"/>
-              </a:rPr>
-              <a:t>ポーリングと割り込み</a:t>
+              <a:t>  ▼</a:t>
+            </a:r>
+          </a:p>
+          <a:p>
+            <a:pPr algn="l">
+              <a:lnSpc>
+                <a:spcPts val="2200"/>
+              </a:lnSpc>
+            </a:pPr>
+            <a:r>
+              <a:rPr sz="1800" b="0">
+                <a:solidFill>
+                  <a:srgbClr val="222222"/>
+                </a:solidFill>
+                <a:latin typeface="Consolas"/>
+                <a:ea typeface="BIZ UDGothic"/>
+                <a:cs typeface="BIZ UDGothic"/>
+              </a:rPr>
+              <a:t>  y (0〜63)</a:t>
             </a:r>
           </a:p>
         </p:txBody>
@@ -39077,7 +39552,7 @@
                 <a:ea typeface="Meiryo"/>
                 <a:cs typeface="Meiryo"/>
               </a:rPr>
-              <a:t>チャレンジ課題</a:t>
+              <a:t>ライブラリを入れよう(Thonny)</a:t>
             </a:r>
           </a:p>
         </p:txBody>
@@ -39162,7 +39637,4095 @@
                 <a:ea typeface="Meiryo"/>
                 <a:cs typeface="Meiryo"/>
               </a:rPr>
-              <a:t>第7部 まとめ  |  52</a:t>
+              <a:t>第7部 OLED(発展)  |  52</a:t>
+            </a:r>
+          </a:p>
+        </p:txBody>
+      </p:sp>
+      <p:sp>
+        <p:nvSpPr>
+          <p:cNvPr id="5" name="Oval 4"/>
+          <p:cNvSpPr/>
+          <p:nvPr/>
+        </p:nvSpPr>
+        <p:spPr>
+          <a:xfrm>
+            <a:off x="548640" y="1508760"/>
+            <a:ext cx="822960" cy="822960"/>
+          </a:xfrm>
+          <a:prstGeom prst="ellipse">
+            <a:avLst/>
+          </a:prstGeom>
+          <a:solidFill>
+            <a:srgbClr val="1F6FB2"/>
+          </a:solidFill>
+          <a:ln w="19050">
+            <a:solidFill>
+              <a:srgbClr val="1F6FB2"/>
+            </a:solidFill>
+          </a:ln>
+          <a:effectLst/>
+        </p:spPr>
+        <p:style>
+          <a:lnRef idx="1">
+            <a:schemeClr val="accent1"/>
+          </a:lnRef>
+          <a:fillRef idx="3">
+            <a:schemeClr val="accent1"/>
+          </a:fillRef>
+          <a:effectRef idx="2">
+            <a:schemeClr val="accent1"/>
+          </a:effectRef>
+          <a:fontRef idx="minor">
+            <a:schemeClr val="lt1"/>
+          </a:fontRef>
+        </p:style>
+        <p:txBody>
+          <a:bodyPr rtlCol="0" anchor="ctr" wrap="square"/>
+          <a:lstStyle/>
+          <a:p>
+            <a:pPr algn="ctr"/>
+            <a:r>
+              <a:rPr sz="2800" b="1">
+                <a:solidFill>
+                  <a:srgbClr val="FFFFFF"/>
+                </a:solidFill>
+                <a:latin typeface="Meiryo"/>
+                <a:ea typeface="Meiryo"/>
+                <a:cs typeface="Meiryo"/>
+              </a:rPr>
+              <a:t>1</a:t>
+            </a:r>
+          </a:p>
+        </p:txBody>
+      </p:sp>
+      <p:sp>
+        <p:nvSpPr>
+          <p:cNvPr id="6" name="TextBox 5"/>
+          <p:cNvSpPr txBox="1"/>
+          <p:nvPr/>
+        </p:nvSpPr>
+        <p:spPr>
+          <a:xfrm>
+            <a:off x="1645920" y="1508760"/>
+            <a:ext cx="9997135" cy="822960"/>
+          </a:xfrm>
+          <a:prstGeom prst="rect">
+            <a:avLst/>
+          </a:prstGeom>
+          <a:noFill/>
+        </p:spPr>
+        <p:txBody>
+          <a:bodyPr wrap="square" anchor="ctr">
+            <a:spAutoFit/>
+          </a:bodyPr>
+          <a:lstStyle/>
+          <a:p>
+            <a:pPr algn="l">
+              <a:spcAft>
+                <a:spcPts val="600"/>
+              </a:spcAft>
+            </a:pPr>
+            <a:r>
+              <a:rPr sz="2400" b="0">
+                <a:solidFill>
+                  <a:srgbClr val="222222"/>
+                </a:solidFill>
+                <a:latin typeface="Meiryo"/>
+                <a:ea typeface="Meiryo"/>
+                <a:cs typeface="Meiryo"/>
+              </a:rPr>
+              <a:t>メニューの </a:t>
+            </a:r>
+            <a:r>
+              <a:rPr sz="2400" b="1">
+                <a:solidFill>
+                  <a:srgbClr val="1F6FB2"/>
+                </a:solidFill>
+                <a:latin typeface="Meiryo"/>
+                <a:ea typeface="Meiryo"/>
+                <a:cs typeface="Meiryo"/>
+              </a:rPr>
+              <a:t>ツール → パッケージを管理…</a:t>
+            </a:r>
+            <a:r>
+              <a:rPr sz="2400" b="0">
+                <a:solidFill>
+                  <a:srgbClr val="222222"/>
+                </a:solidFill>
+                <a:latin typeface="Meiryo"/>
+                <a:ea typeface="Meiryo"/>
+                <a:cs typeface="Meiryo"/>
+              </a:rPr>
+              <a:t> を開く</a:t>
+            </a:r>
+          </a:p>
+        </p:txBody>
+      </p:sp>
+      <p:sp>
+        <p:nvSpPr>
+          <p:cNvPr id="7" name="Oval 6"/>
+          <p:cNvSpPr/>
+          <p:nvPr/>
+        </p:nvSpPr>
+        <p:spPr>
+          <a:xfrm>
+            <a:off x="548640" y="2697480"/>
+            <a:ext cx="822960" cy="822960"/>
+          </a:xfrm>
+          <a:prstGeom prst="ellipse">
+            <a:avLst/>
+          </a:prstGeom>
+          <a:solidFill>
+            <a:srgbClr val="1F6FB2"/>
+          </a:solidFill>
+          <a:ln w="19050">
+            <a:solidFill>
+              <a:srgbClr val="1F6FB2"/>
+            </a:solidFill>
+          </a:ln>
+          <a:effectLst/>
+        </p:spPr>
+        <p:style>
+          <a:lnRef idx="1">
+            <a:schemeClr val="accent1"/>
+          </a:lnRef>
+          <a:fillRef idx="3">
+            <a:schemeClr val="accent1"/>
+          </a:fillRef>
+          <a:effectRef idx="2">
+            <a:schemeClr val="accent1"/>
+          </a:effectRef>
+          <a:fontRef idx="minor">
+            <a:schemeClr val="lt1"/>
+          </a:fontRef>
+        </p:style>
+        <p:txBody>
+          <a:bodyPr rtlCol="0" anchor="ctr" wrap="square"/>
+          <a:lstStyle/>
+          <a:p>
+            <a:pPr algn="ctr"/>
+            <a:r>
+              <a:rPr sz="2800" b="1">
+                <a:solidFill>
+                  <a:srgbClr val="FFFFFF"/>
+                </a:solidFill>
+                <a:latin typeface="Meiryo"/>
+                <a:ea typeface="Meiryo"/>
+                <a:cs typeface="Meiryo"/>
+              </a:rPr>
+              <a:t>2</a:t>
+            </a:r>
+          </a:p>
+        </p:txBody>
+      </p:sp>
+      <p:sp>
+        <p:nvSpPr>
+          <p:cNvPr id="8" name="TextBox 7"/>
+          <p:cNvSpPr txBox="1"/>
+          <p:nvPr/>
+        </p:nvSpPr>
+        <p:spPr>
+          <a:xfrm>
+            <a:off x="1645920" y="2697480"/>
+            <a:ext cx="9997135" cy="822960"/>
+          </a:xfrm>
+          <a:prstGeom prst="rect">
+            <a:avLst/>
+          </a:prstGeom>
+          <a:noFill/>
+        </p:spPr>
+        <p:txBody>
+          <a:bodyPr wrap="square" anchor="ctr">
+            <a:spAutoFit/>
+          </a:bodyPr>
+          <a:lstStyle/>
+          <a:p>
+            <a:pPr algn="l">
+              <a:spcAft>
+                <a:spcPts val="600"/>
+              </a:spcAft>
+            </a:pPr>
+            <a:r>
+              <a:rPr sz="2400" b="0">
+                <a:solidFill>
+                  <a:srgbClr val="C62828"/>
+                </a:solidFill>
+                <a:latin typeface="Consolas"/>
+                <a:ea typeface="BIZ UDGothic"/>
+                <a:cs typeface="BIZ UDGothic"/>
+              </a:rPr>
+              <a:t>ssd1306</a:t>
+            </a:r>
+            <a:r>
+              <a:rPr sz="2400" b="0">
+                <a:solidFill>
+                  <a:srgbClr val="222222"/>
+                </a:solidFill>
+                <a:latin typeface="Meiryo"/>
+                <a:ea typeface="Meiryo"/>
+                <a:cs typeface="Meiryo"/>
+              </a:rPr>
+              <a:t> で検索し、</a:t>
+            </a:r>
+            <a:r>
+              <a:rPr sz="2400" b="1">
+                <a:solidFill>
+                  <a:srgbClr val="1F6FB2"/>
+                </a:solidFill>
+                <a:latin typeface="Meiryo"/>
+                <a:ea typeface="Meiryo"/>
+                <a:cs typeface="Meiryo"/>
+              </a:rPr>
+              <a:t>micropython-ssd1306</a:t>
+            </a:r>
+            <a:r>
+              <a:rPr sz="2400" b="0">
+                <a:solidFill>
+                  <a:srgbClr val="222222"/>
+                </a:solidFill>
+                <a:latin typeface="Meiryo"/>
+                <a:ea typeface="Meiryo"/>
+                <a:cs typeface="Meiryo"/>
+              </a:rPr>
+              <a:t> を </a:t>
+            </a:r>
+            <a:r>
+              <a:rPr sz="2400" b="1">
+                <a:solidFill>
+                  <a:srgbClr val="1F6FB2"/>
+                </a:solidFill>
+                <a:latin typeface="Meiryo"/>
+                <a:ea typeface="Meiryo"/>
+                <a:cs typeface="Meiryo"/>
+              </a:rPr>
+              <a:t>インストール</a:t>
+            </a:r>
+          </a:p>
+        </p:txBody>
+      </p:sp>
+      <p:sp>
+        <p:nvSpPr>
+          <p:cNvPr id="9" name="Oval 8"/>
+          <p:cNvSpPr/>
+          <p:nvPr/>
+        </p:nvSpPr>
+        <p:spPr>
+          <a:xfrm>
+            <a:off x="548640" y="3886200"/>
+            <a:ext cx="822960" cy="822960"/>
+          </a:xfrm>
+          <a:prstGeom prst="ellipse">
+            <a:avLst/>
+          </a:prstGeom>
+          <a:solidFill>
+            <a:srgbClr val="1F6FB2"/>
+          </a:solidFill>
+          <a:ln w="19050">
+            <a:solidFill>
+              <a:srgbClr val="1F6FB2"/>
+            </a:solidFill>
+          </a:ln>
+          <a:effectLst/>
+        </p:spPr>
+        <p:style>
+          <a:lnRef idx="1">
+            <a:schemeClr val="accent1"/>
+          </a:lnRef>
+          <a:fillRef idx="3">
+            <a:schemeClr val="accent1"/>
+          </a:fillRef>
+          <a:effectRef idx="2">
+            <a:schemeClr val="accent1"/>
+          </a:effectRef>
+          <a:fontRef idx="minor">
+            <a:schemeClr val="lt1"/>
+          </a:fontRef>
+        </p:style>
+        <p:txBody>
+          <a:bodyPr rtlCol="0" anchor="ctr" wrap="square"/>
+          <a:lstStyle/>
+          <a:p>
+            <a:pPr algn="ctr"/>
+            <a:r>
+              <a:rPr sz="2800" b="1">
+                <a:solidFill>
+                  <a:srgbClr val="FFFFFF"/>
+                </a:solidFill>
+                <a:latin typeface="Meiryo"/>
+                <a:ea typeface="Meiryo"/>
+                <a:cs typeface="Meiryo"/>
+              </a:rPr>
+              <a:t>3</a:t>
+            </a:r>
+          </a:p>
+        </p:txBody>
+      </p:sp>
+      <p:sp>
+        <p:nvSpPr>
+          <p:cNvPr id="10" name="TextBox 9"/>
+          <p:cNvSpPr txBox="1"/>
+          <p:nvPr/>
+        </p:nvSpPr>
+        <p:spPr>
+          <a:xfrm>
+            <a:off x="1645920" y="3886200"/>
+            <a:ext cx="9997135" cy="822960"/>
+          </a:xfrm>
+          <a:prstGeom prst="rect">
+            <a:avLst/>
+          </a:prstGeom>
+          <a:noFill/>
+        </p:spPr>
+        <p:txBody>
+          <a:bodyPr wrap="square" anchor="ctr">
+            <a:spAutoFit/>
+          </a:bodyPr>
+          <a:lstStyle/>
+          <a:p>
+            <a:pPr algn="l">
+              <a:spcAft>
+                <a:spcPts val="600"/>
+              </a:spcAft>
+            </a:pPr>
+            <a:r>
+              <a:rPr sz="2400" b="0">
+                <a:solidFill>
+                  <a:srgbClr val="222222"/>
+                </a:solidFill>
+                <a:latin typeface="Meiryo"/>
+                <a:ea typeface="Meiryo"/>
+                <a:cs typeface="Meiryo"/>
+              </a:rPr>
+              <a:t>Pico の中に </a:t>
+            </a:r>
+            <a:r>
+              <a:rPr sz="2400" b="0">
+                <a:solidFill>
+                  <a:srgbClr val="C62828"/>
+                </a:solidFill>
+                <a:latin typeface="Consolas"/>
+                <a:ea typeface="BIZ UDGothic"/>
+                <a:cs typeface="BIZ UDGothic"/>
+              </a:rPr>
+              <a:t>lib/ssd1306.py</a:t>
+            </a:r>
+            <a:r>
+              <a:rPr sz="2400" b="0">
+                <a:solidFill>
+                  <a:srgbClr val="222222"/>
+                </a:solidFill>
+                <a:latin typeface="Meiryo"/>
+                <a:ea typeface="Meiryo"/>
+                <a:cs typeface="Meiryo"/>
+              </a:rPr>
+              <a:t> ができていれば OK</a:t>
+            </a:r>
+          </a:p>
+        </p:txBody>
+      </p:sp>
+      <p:sp>
+        <p:nvSpPr>
+          <p:cNvPr id="11" name="Rounded Rectangle 10"/>
+          <p:cNvSpPr/>
+          <p:nvPr/>
+        </p:nvSpPr>
+        <p:spPr>
+          <a:xfrm>
+            <a:off x="548640" y="5120640"/>
+            <a:ext cx="11094415" cy="640080"/>
+          </a:xfrm>
+          <a:prstGeom prst="roundRect">
+            <a:avLst/>
+          </a:prstGeom>
+          <a:solidFill>
+            <a:srgbClr val="E8F1FB"/>
+          </a:solidFill>
+          <a:ln w="19050">
+            <a:solidFill>
+              <a:srgbClr val="1F6FB2"/>
+            </a:solidFill>
+          </a:ln>
+          <a:effectLst/>
+        </p:spPr>
+        <p:style>
+          <a:lnRef idx="1">
+            <a:schemeClr val="accent1"/>
+          </a:lnRef>
+          <a:fillRef idx="3">
+            <a:schemeClr val="accent1"/>
+          </a:fillRef>
+          <a:effectRef idx="2">
+            <a:schemeClr val="accent1"/>
+          </a:effectRef>
+          <a:fontRef idx="minor">
+            <a:schemeClr val="lt1"/>
+          </a:fontRef>
+        </p:style>
+        <p:txBody>
+          <a:bodyPr rtlCol="0" anchor="ctr" wrap="square" lIns="182880"/>
+          <a:lstStyle/>
+          <a:p>
+            <a:pPr algn="ctr"/>
+            <a:r>
+              <a:rPr sz="2200" b="0">
+                <a:solidFill>
+                  <a:srgbClr val="222222"/>
+                </a:solidFill>
+                <a:latin typeface="Meiryo"/>
+                <a:ea typeface="Meiryo"/>
+                <a:cs typeface="Meiryo"/>
+              </a:rPr>
+              <a:t>★ Pico をつないだ状態(右下が MicroPython)でインストールしよう</a:t>
+            </a:r>
+          </a:p>
+        </p:txBody>
+      </p:sp>
+    </p:spTree>
+  </p:cSld>
+  <p:clrMapOvr>
+    <a:masterClrMapping/>
+  </p:clrMapOvr>
+</p:sld>
+</file>
+
+<file path=ppt/slides/slide53.xml><?xml version="1.0" encoding="utf-8"?>
+<p:sld xmlns:a="http://schemas.openxmlformats.org/drawingml/2006/main" xmlns:p="http://schemas.openxmlformats.org/presentationml/2006/main" xmlns:r="http://schemas.openxmlformats.org/officeDocument/2006/relationships">
+  <p:cSld>
+    <p:bg>
+      <p:bgPr>
+        <a:solidFill>
+          <a:srgbClr val="FFFFFF"/>
+        </a:solidFill>
+        <a:effectLst/>
+      </p:bgPr>
+    </p:bg>
+    <p:spTree>
+      <p:nvGrpSpPr>
+        <p:cNvPr id="1" name=""/>
+        <p:cNvGrpSpPr/>
+        <p:nvPr/>
+      </p:nvGrpSpPr>
+      <p:grpSpPr/>
+      <p:sp>
+        <p:nvSpPr>
+          <p:cNvPr id="2" name="TextBox 1"/>
+          <p:cNvSpPr txBox="1"/>
+          <p:nvPr/>
+        </p:nvSpPr>
+        <p:spPr>
+          <a:xfrm>
+            <a:off x="548640" y="228600"/>
+            <a:ext cx="11094415" cy="731520"/>
+          </a:xfrm>
+          <a:prstGeom prst="rect">
+            <a:avLst/>
+          </a:prstGeom>
+          <a:noFill/>
+        </p:spPr>
+        <p:txBody>
+          <a:bodyPr wrap="square" anchor="ctr">
+            <a:spAutoFit/>
+          </a:bodyPr>
+          <a:lstStyle/>
+          <a:p>
+            <a:pPr algn="l">
+              <a:spcAft>
+                <a:spcPts val="600"/>
+              </a:spcAft>
+            </a:pPr>
+            <a:r>
+              <a:rPr sz="3200" b="1">
+                <a:solidFill>
+                  <a:srgbClr val="222222"/>
+                </a:solidFill>
+                <a:latin typeface="Meiryo"/>
+                <a:ea typeface="Meiryo"/>
+                <a:cs typeface="Meiryo"/>
+              </a:rPr>
+              <a:t>OLED の配線</a:t>
+            </a:r>
+          </a:p>
+        </p:txBody>
+      </p:sp>
+      <p:sp>
+        <p:nvSpPr>
+          <p:cNvPr id="3" name="Rectangle 2"/>
+          <p:cNvSpPr/>
+          <p:nvPr/>
+        </p:nvSpPr>
+        <p:spPr>
+          <a:xfrm>
+            <a:off x="548640" y="987552"/>
+            <a:ext cx="11094415" cy="38100"/>
+          </a:xfrm>
+          <a:prstGeom prst="rect">
+            <a:avLst/>
+          </a:prstGeom>
+          <a:solidFill>
+            <a:srgbClr val="1F6FB2"/>
+          </a:solidFill>
+          <a:ln>
+            <a:noFill/>
+          </a:ln>
+          <a:effectLst/>
+        </p:spPr>
+        <p:style>
+          <a:lnRef idx="1">
+            <a:schemeClr val="accent1"/>
+          </a:lnRef>
+          <a:fillRef idx="3">
+            <a:schemeClr val="accent1"/>
+          </a:fillRef>
+          <a:effectRef idx="2">
+            <a:schemeClr val="accent1"/>
+          </a:effectRef>
+          <a:fontRef idx="minor">
+            <a:schemeClr val="lt1"/>
+          </a:fontRef>
+        </p:style>
+        <p:txBody>
+          <a:bodyPr rtlCol="0" anchor="ctr"/>
+          <a:lstStyle/>
+          <a:p>
+            <a:pPr algn="ctr"/>
+          </a:p>
+        </p:txBody>
+      </p:sp>
+      <p:sp>
+        <p:nvSpPr>
+          <p:cNvPr id="4" name="TextBox 3"/>
+          <p:cNvSpPr txBox="1"/>
+          <p:nvPr/>
+        </p:nvSpPr>
+        <p:spPr>
+          <a:xfrm>
+            <a:off x="548640" y="6446520"/>
+            <a:ext cx="11094415" cy="320040"/>
+          </a:xfrm>
+          <a:prstGeom prst="rect">
+            <a:avLst/>
+          </a:prstGeom>
+          <a:noFill/>
+        </p:spPr>
+        <p:txBody>
+          <a:bodyPr wrap="square" anchor="t">
+            <a:spAutoFit/>
+          </a:bodyPr>
+          <a:lstStyle/>
+          <a:p>
+            <a:pPr algn="r">
+              <a:spcAft>
+                <a:spcPts val="600"/>
+              </a:spcAft>
+            </a:pPr>
+            <a:r>
+              <a:rPr sz="1200" b="0">
+                <a:solidFill>
+                  <a:srgbClr val="666666"/>
+                </a:solidFill>
+                <a:latin typeface="Meiryo"/>
+                <a:ea typeface="Meiryo"/>
+                <a:cs typeface="Meiryo"/>
+              </a:rPr>
+              <a:t>第7部 OLED(発展)  |  53</a:t>
+            </a:r>
+          </a:p>
+        </p:txBody>
+      </p:sp>
+      <p:sp>
+        <p:nvSpPr>
+          <p:cNvPr id="5" name="Rounded Rectangle 4"/>
+          <p:cNvSpPr/>
+          <p:nvPr/>
+        </p:nvSpPr>
+        <p:spPr>
+          <a:xfrm>
+            <a:off x="548640" y="1371600"/>
+            <a:ext cx="2377440" cy="365760"/>
+          </a:xfrm>
+          <a:prstGeom prst="roundRect">
+            <a:avLst/>
+          </a:prstGeom>
+          <a:noFill/>
+          <a:ln>
+            <a:noFill/>
+          </a:ln>
+          <a:effectLst/>
+        </p:spPr>
+        <p:style>
+          <a:lnRef idx="1">
+            <a:schemeClr val="accent1"/>
+          </a:lnRef>
+          <a:fillRef idx="3">
+            <a:schemeClr val="accent1"/>
+          </a:fillRef>
+          <a:effectRef idx="2">
+            <a:schemeClr val="accent1"/>
+          </a:effectRef>
+          <a:fontRef idx="minor">
+            <a:schemeClr val="lt1"/>
+          </a:fontRef>
+        </p:style>
+        <p:txBody>
+          <a:bodyPr rtlCol="0" anchor="ctr" wrap="square"/>
+          <a:lstStyle/>
+          <a:p>
+            <a:pPr algn="ctr"/>
+            <a:r>
+              <a:rPr sz="1800" b="1">
+                <a:solidFill>
+                  <a:srgbClr val="666666"/>
+                </a:solidFill>
+                <a:latin typeface="Meiryo"/>
+                <a:ea typeface="Meiryo"/>
+                <a:cs typeface="Meiryo"/>
+              </a:rPr>
+              <a:t>Pico</a:t>
+            </a:r>
+          </a:p>
+        </p:txBody>
+      </p:sp>
+      <p:sp>
+        <p:nvSpPr>
+          <p:cNvPr id="6" name="Rounded Rectangle 5"/>
+          <p:cNvSpPr/>
+          <p:nvPr/>
+        </p:nvSpPr>
+        <p:spPr>
+          <a:xfrm>
+            <a:off x="4754880" y="1371600"/>
+            <a:ext cx="2377440" cy="365760"/>
+          </a:xfrm>
+          <a:prstGeom prst="roundRect">
+            <a:avLst/>
+          </a:prstGeom>
+          <a:noFill/>
+          <a:ln>
+            <a:noFill/>
+          </a:ln>
+          <a:effectLst/>
+        </p:spPr>
+        <p:style>
+          <a:lnRef idx="1">
+            <a:schemeClr val="accent1"/>
+          </a:lnRef>
+          <a:fillRef idx="3">
+            <a:schemeClr val="accent1"/>
+          </a:fillRef>
+          <a:effectRef idx="2">
+            <a:schemeClr val="accent1"/>
+          </a:effectRef>
+          <a:fontRef idx="minor">
+            <a:schemeClr val="lt1"/>
+          </a:fontRef>
+        </p:style>
+        <p:txBody>
+          <a:bodyPr rtlCol="0" anchor="ctr" wrap="square"/>
+          <a:lstStyle/>
+          <a:p>
+            <a:pPr algn="ctr"/>
+            <a:r>
+              <a:rPr sz="1800" b="1">
+                <a:solidFill>
+                  <a:srgbClr val="666666"/>
+                </a:solidFill>
+                <a:latin typeface="Meiryo"/>
+                <a:ea typeface="Meiryo"/>
+                <a:cs typeface="Meiryo"/>
+              </a:rPr>
+              <a:t>SSD1306</a:t>
+            </a:r>
+          </a:p>
+        </p:txBody>
+      </p:sp>
+      <p:sp>
+        <p:nvSpPr>
+          <p:cNvPr id="7" name="Rounded Rectangle 6"/>
+          <p:cNvSpPr/>
+          <p:nvPr/>
+        </p:nvSpPr>
+        <p:spPr>
+          <a:xfrm>
+            <a:off x="548640" y="1783080"/>
+            <a:ext cx="2377440" cy="2542032"/>
+          </a:xfrm>
+          <a:prstGeom prst="roundRect">
+            <a:avLst/>
+          </a:prstGeom>
+          <a:solidFill>
+            <a:srgbClr val="E8F5E9"/>
+          </a:solidFill>
+          <a:ln w="19050">
+            <a:solidFill>
+              <a:srgbClr val="2E7D32"/>
+            </a:solidFill>
+          </a:ln>
+          <a:effectLst/>
+        </p:spPr>
+        <p:style>
+          <a:lnRef idx="1">
+            <a:schemeClr val="accent1"/>
+          </a:lnRef>
+          <a:fillRef idx="3">
+            <a:schemeClr val="accent1"/>
+          </a:fillRef>
+          <a:effectRef idx="2">
+            <a:schemeClr val="accent1"/>
+          </a:effectRef>
+          <a:fontRef idx="minor">
+            <a:schemeClr val="lt1"/>
+          </a:fontRef>
+        </p:style>
+        <p:txBody>
+          <a:bodyPr rtlCol="0" anchor="ctr"/>
+          <a:lstStyle/>
+          <a:p>
+            <a:pPr algn="ctr"/>
+          </a:p>
+        </p:txBody>
+      </p:sp>
+      <p:sp>
+        <p:nvSpPr>
+          <p:cNvPr id="8" name="Rounded Rectangle 7"/>
+          <p:cNvSpPr/>
+          <p:nvPr/>
+        </p:nvSpPr>
+        <p:spPr>
+          <a:xfrm>
+            <a:off x="4754880" y="1783080"/>
+            <a:ext cx="2377440" cy="2542032"/>
+          </a:xfrm>
+          <a:prstGeom prst="roundRect">
+            <a:avLst/>
+          </a:prstGeom>
+          <a:solidFill>
+            <a:srgbClr val="F3F3F3"/>
+          </a:solidFill>
+          <a:ln w="19050">
+            <a:solidFill>
+              <a:srgbClr val="666666"/>
+            </a:solidFill>
+          </a:ln>
+          <a:effectLst/>
+        </p:spPr>
+        <p:style>
+          <a:lnRef idx="1">
+            <a:schemeClr val="accent1"/>
+          </a:lnRef>
+          <a:fillRef idx="3">
+            <a:schemeClr val="accent1"/>
+          </a:fillRef>
+          <a:effectRef idx="2">
+            <a:schemeClr val="accent1"/>
+          </a:effectRef>
+          <a:fontRef idx="minor">
+            <a:schemeClr val="lt1"/>
+          </a:fontRef>
+        </p:style>
+        <p:txBody>
+          <a:bodyPr rtlCol="0" anchor="ctr"/>
+          <a:lstStyle/>
+          <a:p>
+            <a:pPr algn="ctr"/>
+          </a:p>
+        </p:txBody>
+      </p:sp>
+      <p:sp>
+        <p:nvSpPr>
+          <p:cNvPr id="9" name="TextBox 8"/>
+          <p:cNvSpPr txBox="1"/>
+          <p:nvPr/>
+        </p:nvSpPr>
+        <p:spPr>
+          <a:xfrm>
+            <a:off x="548640" y="1920240"/>
+            <a:ext cx="2377440" cy="566928"/>
+          </a:xfrm>
+          <a:prstGeom prst="rect">
+            <a:avLst/>
+          </a:prstGeom>
+          <a:noFill/>
+        </p:spPr>
+        <p:txBody>
+          <a:bodyPr wrap="square" anchor="ctr">
+            <a:spAutoFit/>
+          </a:bodyPr>
+          <a:lstStyle/>
+          <a:p>
+            <a:pPr algn="ctr">
+              <a:spcAft>
+                <a:spcPts val="600"/>
+              </a:spcAft>
+            </a:pPr>
+            <a:r>
+              <a:rPr sz="1800" b="0">
+                <a:solidFill>
+                  <a:srgbClr val="222222"/>
+                </a:solidFill>
+                <a:latin typeface="Meiryo"/>
+                <a:ea typeface="Meiryo"/>
+                <a:cs typeface="Meiryo"/>
+              </a:rPr>
+              <a:t>GND(物理23)</a:t>
+            </a:r>
+          </a:p>
+        </p:txBody>
+      </p:sp>
+      <p:sp>
+        <p:nvSpPr>
+          <p:cNvPr id="10" name="TextBox 9"/>
+          <p:cNvSpPr txBox="1"/>
+          <p:nvPr/>
+        </p:nvSpPr>
+        <p:spPr>
+          <a:xfrm>
+            <a:off x="4754880" y="1920240"/>
+            <a:ext cx="2377440" cy="566928"/>
+          </a:xfrm>
+          <a:prstGeom prst="rect">
+            <a:avLst/>
+          </a:prstGeom>
+          <a:noFill/>
+        </p:spPr>
+        <p:txBody>
+          <a:bodyPr wrap="square" anchor="ctr">
+            <a:spAutoFit/>
+          </a:bodyPr>
+          <a:lstStyle/>
+          <a:p>
+            <a:pPr algn="ctr">
+              <a:spcAft>
+                <a:spcPts val="600"/>
+              </a:spcAft>
+            </a:pPr>
+            <a:r>
+              <a:rPr sz="1800" b="0">
+                <a:solidFill>
+                  <a:srgbClr val="222222"/>
+                </a:solidFill>
+                <a:latin typeface="Meiryo"/>
+                <a:ea typeface="Meiryo"/>
+                <a:cs typeface="Meiryo"/>
+              </a:rPr>
+              <a:t>GND</a:t>
+            </a:r>
+          </a:p>
+        </p:txBody>
+      </p:sp>
+      <p:cxnSp>
+        <p:nvCxnSpPr>
+          <p:cNvPr id="11" name="Connector 10"/>
+          <p:cNvCxnSpPr/>
+          <p:nvPr/>
+        </p:nvCxnSpPr>
+        <p:spPr>
+          <a:xfrm>
+            <a:off x="2926080" y="2203704"/>
+            <a:ext cx="1828800" cy="0"/>
+          </a:xfrm>
+          <a:prstGeom prst="line">
+            <a:avLst/>
+          </a:prstGeom>
+          <a:ln w="38100">
+            <a:solidFill>
+              <a:srgbClr val="222222"/>
+            </a:solidFill>
+          </a:ln>
+        </p:spPr>
+        <p:style>
+          <a:lnRef idx="2">
+            <a:schemeClr val="accent1"/>
+          </a:lnRef>
+          <a:fillRef idx="0">
+            <a:schemeClr val="accent1"/>
+          </a:fillRef>
+          <a:effectRef idx="1">
+            <a:schemeClr val="accent1"/>
+          </a:effectRef>
+          <a:fontRef idx="minor">
+            <a:schemeClr val="tx1"/>
+          </a:fontRef>
+        </p:style>
+      </p:cxnSp>
+      <p:sp>
+        <p:nvSpPr>
+          <p:cNvPr id="12" name="TextBox 11"/>
+          <p:cNvSpPr txBox="1"/>
+          <p:nvPr/>
+        </p:nvSpPr>
+        <p:spPr>
+          <a:xfrm>
+            <a:off x="548640" y="2487168"/>
+            <a:ext cx="2377440" cy="566928"/>
+          </a:xfrm>
+          <a:prstGeom prst="rect">
+            <a:avLst/>
+          </a:prstGeom>
+          <a:noFill/>
+        </p:spPr>
+        <p:txBody>
+          <a:bodyPr wrap="square" anchor="ctr">
+            <a:spAutoFit/>
+          </a:bodyPr>
+          <a:lstStyle/>
+          <a:p>
+            <a:pPr algn="ctr">
+              <a:spcAft>
+                <a:spcPts val="600"/>
+              </a:spcAft>
+            </a:pPr>
+            <a:r>
+              <a:rPr sz="1800" b="0">
+                <a:solidFill>
+                  <a:srgbClr val="222222"/>
+                </a:solidFill>
+                <a:latin typeface="Meiryo"/>
+                <a:ea typeface="Meiryo"/>
+                <a:cs typeface="Meiryo"/>
+              </a:rPr>
+              <a:t>3V3(物理36)</a:t>
+            </a:r>
+          </a:p>
+        </p:txBody>
+      </p:sp>
+      <p:sp>
+        <p:nvSpPr>
+          <p:cNvPr id="13" name="TextBox 12"/>
+          <p:cNvSpPr txBox="1"/>
+          <p:nvPr/>
+        </p:nvSpPr>
+        <p:spPr>
+          <a:xfrm>
+            <a:off x="4754880" y="2487168"/>
+            <a:ext cx="2377440" cy="566928"/>
+          </a:xfrm>
+          <a:prstGeom prst="rect">
+            <a:avLst/>
+          </a:prstGeom>
+          <a:noFill/>
+        </p:spPr>
+        <p:txBody>
+          <a:bodyPr wrap="square" anchor="ctr">
+            <a:spAutoFit/>
+          </a:bodyPr>
+          <a:lstStyle/>
+          <a:p>
+            <a:pPr algn="ctr">
+              <a:spcAft>
+                <a:spcPts val="600"/>
+              </a:spcAft>
+            </a:pPr>
+            <a:r>
+              <a:rPr sz="1800" b="0">
+                <a:solidFill>
+                  <a:srgbClr val="222222"/>
+                </a:solidFill>
+                <a:latin typeface="Meiryo"/>
+                <a:ea typeface="Meiryo"/>
+                <a:cs typeface="Meiryo"/>
+              </a:rPr>
+              <a:t>VCC</a:t>
+            </a:r>
+          </a:p>
+        </p:txBody>
+      </p:sp>
+      <p:cxnSp>
+        <p:nvCxnSpPr>
+          <p:cNvPr id="14" name="Connector 13"/>
+          <p:cNvCxnSpPr/>
+          <p:nvPr/>
+        </p:nvCxnSpPr>
+        <p:spPr>
+          <a:xfrm>
+            <a:off x="2926080" y="2770632"/>
+            <a:ext cx="1828800" cy="0"/>
+          </a:xfrm>
+          <a:prstGeom prst="line">
+            <a:avLst/>
+          </a:prstGeom>
+          <a:ln w="38100">
+            <a:solidFill>
+              <a:srgbClr val="222222"/>
+            </a:solidFill>
+          </a:ln>
+        </p:spPr>
+        <p:style>
+          <a:lnRef idx="2">
+            <a:schemeClr val="accent1"/>
+          </a:lnRef>
+          <a:fillRef idx="0">
+            <a:schemeClr val="accent1"/>
+          </a:fillRef>
+          <a:effectRef idx="1">
+            <a:schemeClr val="accent1"/>
+          </a:effectRef>
+          <a:fontRef idx="minor">
+            <a:schemeClr val="tx1"/>
+          </a:fontRef>
+        </p:style>
+      </p:cxnSp>
+      <p:sp>
+        <p:nvSpPr>
+          <p:cNvPr id="15" name="TextBox 14"/>
+          <p:cNvSpPr txBox="1"/>
+          <p:nvPr/>
+        </p:nvSpPr>
+        <p:spPr>
+          <a:xfrm>
+            <a:off x="548640" y="3054096"/>
+            <a:ext cx="2377440" cy="566928"/>
+          </a:xfrm>
+          <a:prstGeom prst="rect">
+            <a:avLst/>
+          </a:prstGeom>
+          <a:noFill/>
+        </p:spPr>
+        <p:txBody>
+          <a:bodyPr wrap="square" anchor="ctr">
+            <a:spAutoFit/>
+          </a:bodyPr>
+          <a:lstStyle/>
+          <a:p>
+            <a:pPr algn="ctr">
+              <a:spcAft>
+                <a:spcPts val="600"/>
+              </a:spcAft>
+            </a:pPr>
+            <a:r>
+              <a:rPr sz="1800" b="0">
+                <a:solidFill>
+                  <a:srgbClr val="222222"/>
+                </a:solidFill>
+                <a:latin typeface="Meiryo"/>
+                <a:ea typeface="Meiryo"/>
+                <a:cs typeface="Meiryo"/>
+              </a:rPr>
+              <a:t>GP19(物理25)</a:t>
+            </a:r>
+          </a:p>
+        </p:txBody>
+      </p:sp>
+      <p:sp>
+        <p:nvSpPr>
+          <p:cNvPr id="16" name="TextBox 15"/>
+          <p:cNvSpPr txBox="1"/>
+          <p:nvPr/>
+        </p:nvSpPr>
+        <p:spPr>
+          <a:xfrm>
+            <a:off x="4754880" y="3054096"/>
+            <a:ext cx="2377440" cy="566928"/>
+          </a:xfrm>
+          <a:prstGeom prst="rect">
+            <a:avLst/>
+          </a:prstGeom>
+          <a:noFill/>
+        </p:spPr>
+        <p:txBody>
+          <a:bodyPr wrap="square" anchor="ctr">
+            <a:spAutoFit/>
+          </a:bodyPr>
+          <a:lstStyle/>
+          <a:p>
+            <a:pPr algn="ctr">
+              <a:spcAft>
+                <a:spcPts val="600"/>
+              </a:spcAft>
+            </a:pPr>
+            <a:r>
+              <a:rPr sz="1800" b="0">
+                <a:solidFill>
+                  <a:srgbClr val="222222"/>
+                </a:solidFill>
+                <a:latin typeface="Meiryo"/>
+                <a:ea typeface="Meiryo"/>
+                <a:cs typeface="Meiryo"/>
+              </a:rPr>
+              <a:t>SCL</a:t>
+            </a:r>
+          </a:p>
+        </p:txBody>
+      </p:sp>
+      <p:cxnSp>
+        <p:nvCxnSpPr>
+          <p:cNvPr id="17" name="Connector 16"/>
+          <p:cNvCxnSpPr/>
+          <p:nvPr/>
+        </p:nvCxnSpPr>
+        <p:spPr>
+          <a:xfrm>
+            <a:off x="2926080" y="3337560"/>
+            <a:ext cx="1828800" cy="0"/>
+          </a:xfrm>
+          <a:prstGeom prst="line">
+            <a:avLst/>
+          </a:prstGeom>
+          <a:ln w="38100">
+            <a:solidFill>
+              <a:srgbClr val="222222"/>
+            </a:solidFill>
+          </a:ln>
+        </p:spPr>
+        <p:style>
+          <a:lnRef idx="2">
+            <a:schemeClr val="accent1"/>
+          </a:lnRef>
+          <a:fillRef idx="0">
+            <a:schemeClr val="accent1"/>
+          </a:fillRef>
+          <a:effectRef idx="1">
+            <a:schemeClr val="accent1"/>
+          </a:effectRef>
+          <a:fontRef idx="minor">
+            <a:schemeClr val="tx1"/>
+          </a:fontRef>
+        </p:style>
+      </p:cxnSp>
+      <p:sp>
+        <p:nvSpPr>
+          <p:cNvPr id="18" name="TextBox 17"/>
+          <p:cNvSpPr txBox="1"/>
+          <p:nvPr/>
+        </p:nvSpPr>
+        <p:spPr>
+          <a:xfrm>
+            <a:off x="548640" y="3621024"/>
+            <a:ext cx="2377440" cy="566928"/>
+          </a:xfrm>
+          <a:prstGeom prst="rect">
+            <a:avLst/>
+          </a:prstGeom>
+          <a:noFill/>
+        </p:spPr>
+        <p:txBody>
+          <a:bodyPr wrap="square" anchor="ctr">
+            <a:spAutoFit/>
+          </a:bodyPr>
+          <a:lstStyle/>
+          <a:p>
+            <a:pPr algn="ctr">
+              <a:spcAft>
+                <a:spcPts val="600"/>
+              </a:spcAft>
+            </a:pPr>
+            <a:r>
+              <a:rPr sz="1800" b="0">
+                <a:solidFill>
+                  <a:srgbClr val="222222"/>
+                </a:solidFill>
+                <a:latin typeface="Meiryo"/>
+                <a:ea typeface="Meiryo"/>
+                <a:cs typeface="Meiryo"/>
+              </a:rPr>
+              <a:t>GP18(物理24)</a:t>
+            </a:r>
+          </a:p>
+        </p:txBody>
+      </p:sp>
+      <p:sp>
+        <p:nvSpPr>
+          <p:cNvPr id="19" name="TextBox 18"/>
+          <p:cNvSpPr txBox="1"/>
+          <p:nvPr/>
+        </p:nvSpPr>
+        <p:spPr>
+          <a:xfrm>
+            <a:off x="4754880" y="3621024"/>
+            <a:ext cx="2377440" cy="566928"/>
+          </a:xfrm>
+          <a:prstGeom prst="rect">
+            <a:avLst/>
+          </a:prstGeom>
+          <a:noFill/>
+        </p:spPr>
+        <p:txBody>
+          <a:bodyPr wrap="square" anchor="ctr">
+            <a:spAutoFit/>
+          </a:bodyPr>
+          <a:lstStyle/>
+          <a:p>
+            <a:pPr algn="ctr">
+              <a:spcAft>
+                <a:spcPts val="600"/>
+              </a:spcAft>
+            </a:pPr>
+            <a:r>
+              <a:rPr sz="1800" b="0">
+                <a:solidFill>
+                  <a:srgbClr val="222222"/>
+                </a:solidFill>
+                <a:latin typeface="Meiryo"/>
+                <a:ea typeface="Meiryo"/>
+                <a:cs typeface="Meiryo"/>
+              </a:rPr>
+              <a:t>SDA</a:t>
+            </a:r>
+          </a:p>
+        </p:txBody>
+      </p:sp>
+      <p:cxnSp>
+        <p:nvCxnSpPr>
+          <p:cNvPr id="20" name="Connector 19"/>
+          <p:cNvCxnSpPr/>
+          <p:nvPr/>
+        </p:nvCxnSpPr>
+        <p:spPr>
+          <a:xfrm>
+            <a:off x="2926080" y="3904488"/>
+            <a:ext cx="1828800" cy="0"/>
+          </a:xfrm>
+          <a:prstGeom prst="line">
+            <a:avLst/>
+          </a:prstGeom>
+          <a:ln w="38100">
+            <a:solidFill>
+              <a:srgbClr val="222222"/>
+            </a:solidFill>
+          </a:ln>
+        </p:spPr>
+        <p:style>
+          <a:lnRef idx="2">
+            <a:schemeClr val="accent1"/>
+          </a:lnRef>
+          <a:fillRef idx="0">
+            <a:schemeClr val="accent1"/>
+          </a:fillRef>
+          <a:effectRef idx="1">
+            <a:schemeClr val="accent1"/>
+          </a:effectRef>
+          <a:fontRef idx="minor">
+            <a:schemeClr val="tx1"/>
+          </a:fontRef>
+        </p:style>
+      </p:cxnSp>
+      <p:sp>
+        <p:nvSpPr>
+          <p:cNvPr id="21" name="TextBox 20"/>
+          <p:cNvSpPr txBox="1"/>
+          <p:nvPr/>
+        </p:nvSpPr>
+        <p:spPr>
+          <a:xfrm>
+            <a:off x="7589520" y="1600200"/>
+            <a:ext cx="4023360" cy="2743200"/>
+          </a:xfrm>
+          <a:prstGeom prst="rect">
+            <a:avLst/>
+          </a:prstGeom>
+          <a:noFill/>
+        </p:spPr>
+        <p:txBody>
+          <a:bodyPr wrap="square" anchor="t">
+            <a:spAutoFit/>
+          </a:bodyPr>
+          <a:lstStyle/>
+          <a:p>
+            <a:pPr algn="l">
+              <a:spcAft>
+                <a:spcPts val="1000"/>
+              </a:spcAft>
+            </a:pPr>
+            <a:r>
+              <a:rPr sz="2200" b="0">
+                <a:solidFill>
+                  <a:srgbClr val="222222"/>
+                </a:solidFill>
+                <a:latin typeface="Meiryo"/>
+                <a:ea typeface="Meiryo"/>
+                <a:cs typeface="Meiryo"/>
+              </a:rPr>
+              <a:t>・VCC は </a:t>
+            </a:r>
+            <a:r>
+              <a:rPr sz="2200" b="1">
+                <a:solidFill>
+                  <a:srgbClr val="1F6FB2"/>
+                </a:solidFill>
+                <a:latin typeface="Meiryo"/>
+                <a:ea typeface="Meiryo"/>
+                <a:cs typeface="Meiryo"/>
+              </a:rPr>
+              <a:t>3V3</a:t>
+            </a:r>
+            <a:r>
+              <a:rPr sz="2200" b="0">
+                <a:solidFill>
+                  <a:srgbClr val="222222"/>
+                </a:solidFill>
+                <a:latin typeface="Meiryo"/>
+                <a:ea typeface="Meiryo"/>
+                <a:cs typeface="Meiryo"/>
+              </a:rPr>
+              <a:t> につなぐ</a:t>
+            </a:r>
+          </a:p>
+          <a:p>
+            <a:pPr algn="l">
+              <a:spcAft>
+                <a:spcPts val="1000"/>
+              </a:spcAft>
+            </a:pPr>
+            <a:r>
+              <a:rPr sz="2200" b="0">
+                <a:solidFill>
+                  <a:srgbClr val="222222"/>
+                </a:solidFill>
+                <a:latin typeface="Meiryo"/>
+                <a:ea typeface="Meiryo"/>
+                <a:cs typeface="Meiryo"/>
+              </a:rPr>
+              <a:t>・</a:t>
+            </a:r>
+            <a:r>
+              <a:rPr sz="2200" b="1">
+                <a:solidFill>
+                  <a:srgbClr val="1F6FB2"/>
+                </a:solidFill>
+                <a:latin typeface="Meiryo"/>
+                <a:ea typeface="Meiryo"/>
+                <a:cs typeface="Meiryo"/>
+              </a:rPr>
+              <a:t>I2C1</a:t>
+            </a:r>
+            <a:r>
+              <a:rPr sz="2200" b="0">
+                <a:solidFill>
+                  <a:srgbClr val="222222"/>
+                </a:solidFill>
+                <a:latin typeface="Meiryo"/>
+                <a:ea typeface="Meiryo"/>
+                <a:cs typeface="Meiryo"/>
+              </a:rPr>
+              <a:t>(GP18・GP19)を使う</a:t>
+            </a:r>
+          </a:p>
+          <a:p>
+            <a:pPr algn="l">
+              <a:spcAft>
+                <a:spcPts val="1000"/>
+              </a:spcAft>
+            </a:pPr>
+            <a:r>
+              <a:rPr sz="2200" b="0">
+                <a:solidFill>
+                  <a:srgbClr val="222222"/>
+                </a:solidFill>
+                <a:latin typeface="Meiryo"/>
+                <a:ea typeface="Meiryo"/>
+                <a:cs typeface="Meiryo"/>
+              </a:rPr>
+              <a:t>・並びは </a:t>
+            </a:r>
+            <a:r>
+              <a:rPr sz="2200" b="1">
+                <a:solidFill>
+                  <a:srgbClr val="1F6FB2"/>
+                </a:solidFill>
+                <a:latin typeface="Meiryo"/>
+                <a:ea typeface="Meiryo"/>
+                <a:cs typeface="Meiryo"/>
+              </a:rPr>
+              <a:t>製品ごとにちがう</a:t>
+            </a:r>
+          </a:p>
+        </p:txBody>
+      </p:sp>
+      <p:sp>
+        <p:nvSpPr>
+          <p:cNvPr id="22" name="Rounded Rectangle 21"/>
+          <p:cNvSpPr/>
+          <p:nvPr/>
+        </p:nvSpPr>
+        <p:spPr>
+          <a:xfrm>
+            <a:off x="548640" y="5303520"/>
+            <a:ext cx="11094415" cy="548640"/>
+          </a:xfrm>
+          <a:prstGeom prst="roundRect">
+            <a:avLst/>
+          </a:prstGeom>
+          <a:solidFill>
+            <a:srgbClr val="E8F1FB"/>
+          </a:solidFill>
+          <a:ln w="19050">
+            <a:solidFill>
+              <a:srgbClr val="1F6FB2"/>
+            </a:solidFill>
+          </a:ln>
+          <a:effectLst/>
+        </p:spPr>
+        <p:style>
+          <a:lnRef idx="1">
+            <a:schemeClr val="accent1"/>
+          </a:lnRef>
+          <a:fillRef idx="3">
+            <a:schemeClr val="accent1"/>
+          </a:fillRef>
+          <a:effectRef idx="2">
+            <a:schemeClr val="accent1"/>
+          </a:effectRef>
+          <a:fontRef idx="minor">
+            <a:schemeClr val="lt1"/>
+          </a:fontRef>
+        </p:style>
+        <p:txBody>
+          <a:bodyPr rtlCol="0" anchor="ctr" wrap="square" lIns="182880"/>
+          <a:lstStyle/>
+          <a:p>
+            <a:pPr algn="ctr"/>
+            <a:r>
+              <a:rPr sz="2000" b="0">
+                <a:solidFill>
+                  <a:srgbClr val="222222"/>
+                </a:solidFill>
+                <a:latin typeface="Meiryo"/>
+                <a:ea typeface="Meiryo"/>
+                <a:cs typeface="Meiryo"/>
+              </a:rPr>
+              <a:t>★ 配布したピン配置図で、GP番号と物理ピン番号の両方を確かめよう</a:t>
+            </a:r>
+          </a:p>
+        </p:txBody>
+      </p:sp>
+    </p:spTree>
+  </p:cSld>
+  <p:clrMapOvr>
+    <a:masterClrMapping/>
+  </p:clrMapOvr>
+</p:sld>
+</file>
+
+<file path=ppt/slides/slide54.xml><?xml version="1.0" encoding="utf-8"?>
+<p:sld xmlns:a="http://schemas.openxmlformats.org/drawingml/2006/main" xmlns:p="http://schemas.openxmlformats.org/presentationml/2006/main" xmlns:r="http://schemas.openxmlformats.org/officeDocument/2006/relationships">
+  <p:cSld>
+    <p:bg>
+      <p:bgPr>
+        <a:solidFill>
+          <a:srgbClr val="FFFFFF"/>
+        </a:solidFill>
+        <a:effectLst/>
+      </p:bgPr>
+    </p:bg>
+    <p:spTree>
+      <p:nvGrpSpPr>
+        <p:cNvPr id="1" name=""/>
+        <p:cNvGrpSpPr/>
+        <p:nvPr/>
+      </p:nvGrpSpPr>
+      <p:grpSpPr/>
+      <p:sp>
+        <p:nvSpPr>
+          <p:cNvPr id="2" name="TextBox 1"/>
+          <p:cNvSpPr txBox="1"/>
+          <p:nvPr/>
+        </p:nvSpPr>
+        <p:spPr>
+          <a:xfrm>
+            <a:off x="548640" y="228600"/>
+            <a:ext cx="11094415" cy="731520"/>
+          </a:xfrm>
+          <a:prstGeom prst="rect">
+            <a:avLst/>
+          </a:prstGeom>
+          <a:noFill/>
+        </p:spPr>
+        <p:txBody>
+          <a:bodyPr wrap="square" anchor="ctr">
+            <a:spAutoFit/>
+          </a:bodyPr>
+          <a:lstStyle/>
+          <a:p>
+            <a:pPr algn="l">
+              <a:spcAft>
+                <a:spcPts val="600"/>
+              </a:spcAft>
+            </a:pPr>
+            <a:r>
+              <a:rPr sz="3200" b="1">
+                <a:solidFill>
+                  <a:srgbClr val="222222"/>
+                </a:solidFill>
+                <a:latin typeface="Meiryo"/>
+                <a:ea typeface="Meiryo"/>
+                <a:cs typeface="Meiryo"/>
+              </a:rPr>
+              <a:t>OLED のコード(1/2)</a:t>
+            </a:r>
+          </a:p>
+        </p:txBody>
+      </p:sp>
+      <p:sp>
+        <p:nvSpPr>
+          <p:cNvPr id="3" name="Rectangle 2"/>
+          <p:cNvSpPr/>
+          <p:nvPr/>
+        </p:nvSpPr>
+        <p:spPr>
+          <a:xfrm>
+            <a:off x="548640" y="987552"/>
+            <a:ext cx="11094415" cy="38100"/>
+          </a:xfrm>
+          <a:prstGeom prst="rect">
+            <a:avLst/>
+          </a:prstGeom>
+          <a:solidFill>
+            <a:srgbClr val="1F6FB2"/>
+          </a:solidFill>
+          <a:ln>
+            <a:noFill/>
+          </a:ln>
+          <a:effectLst/>
+        </p:spPr>
+        <p:style>
+          <a:lnRef idx="1">
+            <a:schemeClr val="accent1"/>
+          </a:lnRef>
+          <a:fillRef idx="3">
+            <a:schemeClr val="accent1"/>
+          </a:fillRef>
+          <a:effectRef idx="2">
+            <a:schemeClr val="accent1"/>
+          </a:effectRef>
+          <a:fontRef idx="minor">
+            <a:schemeClr val="lt1"/>
+          </a:fontRef>
+        </p:style>
+        <p:txBody>
+          <a:bodyPr rtlCol="0" anchor="ctr"/>
+          <a:lstStyle/>
+          <a:p>
+            <a:pPr algn="ctr"/>
+          </a:p>
+        </p:txBody>
+      </p:sp>
+      <p:sp>
+        <p:nvSpPr>
+          <p:cNvPr id="4" name="TextBox 3"/>
+          <p:cNvSpPr txBox="1"/>
+          <p:nvPr/>
+        </p:nvSpPr>
+        <p:spPr>
+          <a:xfrm>
+            <a:off x="548640" y="6446520"/>
+            <a:ext cx="11094415" cy="320040"/>
+          </a:xfrm>
+          <a:prstGeom prst="rect">
+            <a:avLst/>
+          </a:prstGeom>
+          <a:noFill/>
+        </p:spPr>
+        <p:txBody>
+          <a:bodyPr wrap="square" anchor="t">
+            <a:spAutoFit/>
+          </a:bodyPr>
+          <a:lstStyle/>
+          <a:p>
+            <a:pPr algn="r">
+              <a:spcAft>
+                <a:spcPts val="600"/>
+              </a:spcAft>
+            </a:pPr>
+            <a:r>
+              <a:rPr sz="1200" b="0">
+                <a:solidFill>
+                  <a:srgbClr val="666666"/>
+                </a:solidFill>
+                <a:latin typeface="Meiryo"/>
+                <a:ea typeface="Meiryo"/>
+                <a:cs typeface="Meiryo"/>
+              </a:rPr>
+              <a:t>第7部 OLED(発展)  |  54</a:t>
+            </a:r>
+          </a:p>
+        </p:txBody>
+      </p:sp>
+      <p:sp>
+        <p:nvSpPr>
+          <p:cNvPr id="5" name="Rectangle 4"/>
+          <p:cNvSpPr/>
+          <p:nvPr/>
+        </p:nvSpPr>
+        <p:spPr>
+          <a:xfrm>
+            <a:off x="274320" y="1234440"/>
+            <a:ext cx="11643055" cy="4978400"/>
+          </a:xfrm>
+          <a:prstGeom prst="rect">
+            <a:avLst/>
+          </a:prstGeom>
+          <a:solidFill>
+            <a:srgbClr val="F4F6F8"/>
+          </a:solidFill>
+          <a:ln w="12700">
+            <a:solidFill>
+              <a:srgbClr val="D0D7DE"/>
+            </a:solidFill>
+          </a:ln>
+          <a:effectLst/>
+        </p:spPr>
+        <p:style>
+          <a:lnRef idx="1">
+            <a:schemeClr val="accent1"/>
+          </a:lnRef>
+          <a:fillRef idx="3">
+            <a:schemeClr val="accent1"/>
+          </a:fillRef>
+          <a:effectRef idx="2">
+            <a:schemeClr val="accent1"/>
+          </a:effectRef>
+          <a:fontRef idx="minor">
+            <a:schemeClr val="lt1"/>
+          </a:fontRef>
+        </p:style>
+        <p:txBody>
+          <a:bodyPr rtlCol="0" anchor="ctr"/>
+          <a:lstStyle/>
+          <a:p>
+            <a:pPr algn="ctr"/>
+          </a:p>
+        </p:txBody>
+      </p:sp>
+      <p:sp>
+        <p:nvSpPr>
+          <p:cNvPr id="6" name="TextBox 5"/>
+          <p:cNvSpPr txBox="1"/>
+          <p:nvPr/>
+        </p:nvSpPr>
+        <p:spPr>
+          <a:xfrm>
+            <a:off x="274320" y="1234440"/>
+            <a:ext cx="11643055" cy="4978400"/>
+          </a:xfrm>
+          <a:prstGeom prst="rect">
+            <a:avLst/>
+          </a:prstGeom>
+          <a:noFill/>
+        </p:spPr>
+        <p:txBody>
+          <a:bodyPr wrap="square" lIns="137160" rIns="137160" tIns="109728" bIns="109728">
+            <a:spAutoFit/>
+          </a:bodyPr>
+          <a:lstStyle/>
+          <a:p>
+            <a:pPr algn="l">
+              <a:lnSpc>
+                <a:spcPts val="2200"/>
+              </a:lnSpc>
+            </a:pPr>
+            <a:r>
+              <a:rPr sz="1800" b="0">
+                <a:solidFill>
+                  <a:srgbClr val="2E7D32"/>
+                </a:solidFill>
+                <a:latin typeface="Consolas"/>
+                <a:ea typeface="BIZ UDGothic"/>
+                <a:cs typeface="BIZ UDGothic"/>
+              </a:rPr>
+              <a:t># ---- 必要な道具を読み込む ----</a:t>
+            </a:r>
+          </a:p>
+          <a:p>
+            <a:pPr algn="l">
+              <a:lnSpc>
+                <a:spcPts val="2200"/>
+              </a:lnSpc>
+            </a:pPr>
+            <a:r>
+              <a:rPr sz="1800" b="0">
+                <a:solidFill>
+                  <a:srgbClr val="2E7D32"/>
+                </a:solidFill>
+                <a:latin typeface="Consolas"/>
+                <a:ea typeface="BIZ UDGothic"/>
+                <a:cs typeface="BIZ UDGothic"/>
+              </a:rPr>
+              <a:t># I2C:2本の線(SDA・SCL)で部品とやりとりするしくみ</a:t>
+            </a:r>
+          </a:p>
+          <a:p>
+            <a:pPr algn="l">
+              <a:lnSpc>
+                <a:spcPts val="2200"/>
+              </a:lnSpc>
+            </a:pPr>
+            <a:r>
+              <a:rPr sz="1800" b="0">
+                <a:solidFill>
+                  <a:srgbClr val="222222"/>
+                </a:solidFill>
+                <a:latin typeface="Consolas"/>
+                <a:ea typeface="BIZ UDGothic"/>
+                <a:cs typeface="BIZ UDGothic"/>
+              </a:rPr>
+              <a:t>from machine import Pin, I2C</a:t>
+            </a:r>
+          </a:p>
+          <a:p>
+            <a:pPr algn="l">
+              <a:lnSpc>
+                <a:spcPts val="2200"/>
+              </a:lnSpc>
+            </a:pPr>
+            <a:r>
+              <a:rPr sz="1800" b="0">
+                <a:solidFill>
+                  <a:srgbClr val="222222"/>
+                </a:solidFill>
+                <a:latin typeface="Consolas"/>
+                <a:ea typeface="BIZ UDGothic"/>
+                <a:cs typeface="BIZ UDGothic"/>
+              </a:rPr>
+              <a:t>import ssd1306            </a:t>
+            </a:r>
+            <a:r>
+              <a:rPr sz="1800" b="0">
+                <a:solidFill>
+                  <a:srgbClr val="2E7D32"/>
+                </a:solidFill>
+                <a:latin typeface="Consolas"/>
+                <a:ea typeface="BIZ UDGothic"/>
+                <a:cs typeface="BIZ UDGothic"/>
+              </a:rPr>
+              <a:t># OLED(SSD1306)を動かすライブラリ(Thonny で入れておく)</a:t>
+            </a:r>
+          </a:p>
+          <a:p>
+            <a:pPr algn="l">
+              <a:lnSpc>
+                <a:spcPts val="2200"/>
+              </a:lnSpc>
+            </a:pPr>
+            <a:r>
+              <a:rPr sz="1800" b="0">
+                <a:solidFill>
+                  <a:srgbClr val="222222"/>
+                </a:solidFill>
+                <a:latin typeface="Consolas"/>
+                <a:ea typeface="BIZ UDGothic"/>
+                <a:cs typeface="BIZ UDGothic"/>
+              </a:rPr>
+              <a:t>import time</a:t>
+            </a:r>
+          </a:p>
+          <a:p>
+            <a:pPr algn="l">
+              <a:lnSpc>
+                <a:spcPts val="2200"/>
+              </a:lnSpc>
+            </a:pPr>
+            <a:r>
+              <a:rPr sz="1800" b="0">
+                <a:solidFill>
+                  <a:srgbClr val="222222"/>
+                </a:solidFill>
+                <a:latin typeface="Consolas"/>
+                <a:ea typeface="BIZ UDGothic"/>
+                <a:cs typeface="BIZ UDGothic"/>
+              </a:rPr>
+              <a:t> </a:t>
+            </a:r>
+          </a:p>
+          <a:p>
+            <a:pPr algn="l">
+              <a:lnSpc>
+                <a:spcPts val="2200"/>
+              </a:lnSpc>
+            </a:pPr>
+            <a:r>
+              <a:rPr sz="1800" b="0">
+                <a:solidFill>
+                  <a:srgbClr val="2E7D32"/>
+                </a:solidFill>
+                <a:latin typeface="Consolas"/>
+                <a:ea typeface="BIZ UDGothic"/>
+                <a:cs typeface="BIZ UDGothic"/>
+              </a:rPr>
+              <a:t># ---- I2C と OLED の設定 ----</a:t>
+            </a:r>
+          </a:p>
+          <a:p>
+            <a:pPr algn="l">
+              <a:lnSpc>
+                <a:spcPts val="2200"/>
+              </a:lnSpc>
+            </a:pPr>
+            <a:r>
+              <a:rPr sz="1800" b="0">
+                <a:solidFill>
+                  <a:srgbClr val="222222"/>
+                </a:solidFill>
+                <a:latin typeface="Consolas"/>
+                <a:ea typeface="BIZ UDGothic"/>
+                <a:cs typeface="BIZ UDGothic"/>
+              </a:rPr>
+              <a:t>i2c = I2C(1, sda=Pin(18), scl=Pin(19), freq=400000)   </a:t>
+            </a:r>
+            <a:r>
+              <a:rPr sz="1800" b="0">
+                <a:solidFill>
+                  <a:srgbClr val="2E7D32"/>
+                </a:solidFill>
+                <a:latin typeface="Consolas"/>
+                <a:ea typeface="BIZ UDGothic"/>
+                <a:cs typeface="BIZ UDGothic"/>
+              </a:rPr>
+              <a:t># I2C1:SDA=GP18、SCL=GP19</a:t>
+            </a:r>
+          </a:p>
+          <a:p>
+            <a:pPr algn="l">
+              <a:lnSpc>
+                <a:spcPts val="2200"/>
+              </a:lnSpc>
+            </a:pPr>
+            <a:r>
+              <a:rPr sz="1800" b="0">
+                <a:solidFill>
+                  <a:srgbClr val="222222"/>
+                </a:solidFill>
+                <a:latin typeface="Consolas"/>
+                <a:ea typeface="BIZ UDGothic"/>
+                <a:cs typeface="BIZ UDGothic"/>
+              </a:rPr>
+              <a:t>print("見つかった部品:", i2c.scan())   </a:t>
+            </a:r>
+            <a:r>
+              <a:rPr sz="1800" b="0">
+                <a:solidFill>
+                  <a:srgbClr val="2E7D32"/>
+                </a:solidFill>
+                <a:latin typeface="Consolas"/>
+                <a:ea typeface="BIZ UDGothic"/>
+                <a:cs typeface="BIZ UDGothic"/>
+              </a:rPr>
+              <a:t># [60] と出れば OK(60 = 0x3C)</a:t>
+            </a:r>
+          </a:p>
+          <a:p>
+            <a:pPr algn="l">
+              <a:lnSpc>
+                <a:spcPts val="2200"/>
+              </a:lnSpc>
+            </a:pPr>
+            <a:r>
+              <a:rPr sz="1800" b="0">
+                <a:solidFill>
+                  <a:srgbClr val="222222"/>
+                </a:solidFill>
+                <a:latin typeface="Consolas"/>
+                <a:ea typeface="BIZ UDGothic"/>
+                <a:cs typeface="BIZ UDGothic"/>
+              </a:rPr>
+              <a:t> </a:t>
+            </a:r>
+          </a:p>
+          <a:p>
+            <a:pPr algn="l">
+              <a:lnSpc>
+                <a:spcPts val="2200"/>
+              </a:lnSpc>
+            </a:pPr>
+            <a:r>
+              <a:rPr sz="1800" b="0">
+                <a:solidFill>
+                  <a:srgbClr val="222222"/>
+                </a:solidFill>
+                <a:latin typeface="Consolas"/>
+                <a:ea typeface="BIZ UDGothic"/>
+                <a:cs typeface="BIZ UDGothic"/>
+              </a:rPr>
+              <a:t>oled = ssd1306.SSD1306_I2C(128, 64, i2c)   </a:t>
+            </a:r>
+            <a:r>
+              <a:rPr sz="1800" b="0">
+                <a:solidFill>
+                  <a:srgbClr val="2E7D32"/>
+                </a:solidFill>
+                <a:latin typeface="Consolas"/>
+                <a:ea typeface="BIZ UDGothic"/>
+                <a:cs typeface="BIZ UDGothic"/>
+              </a:rPr>
+              <a:t># 横128 × 縦64 ドットの画面</a:t>
+            </a:r>
+          </a:p>
+          <a:p>
+            <a:pPr algn="l">
+              <a:lnSpc>
+                <a:spcPts val="2200"/>
+              </a:lnSpc>
+            </a:pPr>
+            <a:r>
+              <a:rPr sz="1800" b="0">
+                <a:solidFill>
+                  <a:srgbClr val="222222"/>
+                </a:solidFill>
+                <a:latin typeface="Consolas"/>
+                <a:ea typeface="BIZ UDGothic"/>
+                <a:cs typeface="BIZ UDGothic"/>
+              </a:rPr>
+              <a:t> </a:t>
+            </a:r>
+          </a:p>
+          <a:p>
+            <a:pPr algn="l">
+              <a:lnSpc>
+                <a:spcPts val="2200"/>
+              </a:lnSpc>
+            </a:pPr>
+            <a:r>
+              <a:rPr sz="1800" b="0">
+                <a:solidFill>
+                  <a:srgbClr val="2E7D32"/>
+                </a:solidFill>
+                <a:latin typeface="Consolas"/>
+                <a:ea typeface="BIZ UDGothic"/>
+                <a:cs typeface="BIZ UDGothic"/>
+              </a:rPr>
+              <a:t># ---- 最初のあいさつ ----</a:t>
+            </a:r>
+          </a:p>
+          <a:p>
+            <a:pPr algn="l">
+              <a:lnSpc>
+                <a:spcPts val="2200"/>
+              </a:lnSpc>
+            </a:pPr>
+            <a:r>
+              <a:rPr sz="1800" b="0">
+                <a:solidFill>
+                  <a:srgbClr val="222222"/>
+                </a:solidFill>
+                <a:latin typeface="Consolas"/>
+                <a:ea typeface="BIZ UDGothic"/>
+                <a:cs typeface="BIZ UDGothic"/>
+              </a:rPr>
+              <a:t>oled.fill(0)                      </a:t>
+            </a:r>
+            <a:r>
+              <a:rPr sz="1800" b="0">
+                <a:solidFill>
+                  <a:srgbClr val="2E7D32"/>
+                </a:solidFill>
+                <a:latin typeface="Consolas"/>
+                <a:ea typeface="BIZ UDGothic"/>
+                <a:cs typeface="BIZ UDGothic"/>
+              </a:rPr>
+              <a:t># 画面を全部消す(0 = 黒)</a:t>
+            </a:r>
+          </a:p>
+          <a:p>
+            <a:pPr algn="l">
+              <a:lnSpc>
+                <a:spcPts val="2200"/>
+              </a:lnSpc>
+            </a:pPr>
+            <a:r>
+              <a:rPr sz="1800" b="0">
+                <a:solidFill>
+                  <a:srgbClr val="222222"/>
+                </a:solidFill>
+                <a:latin typeface="Consolas"/>
+                <a:ea typeface="BIZ UDGothic"/>
+                <a:cs typeface="BIZ UDGothic"/>
+              </a:rPr>
+              <a:t>oled.text("Hello Pico!", 0, 0)    </a:t>
+            </a:r>
+            <a:r>
+              <a:rPr sz="1800" b="0">
+                <a:solidFill>
+                  <a:srgbClr val="2E7D32"/>
+                </a:solidFill>
+                <a:latin typeface="Consolas"/>
+                <a:ea typeface="BIZ UDGothic"/>
+                <a:cs typeface="BIZ UDGothic"/>
+              </a:rPr>
+              <a:t># 文字, x(横), y(縦)</a:t>
+            </a:r>
+          </a:p>
+          <a:p>
+            <a:pPr algn="l">
+              <a:lnSpc>
+                <a:spcPts val="2200"/>
+              </a:lnSpc>
+            </a:pPr>
+            <a:r>
+              <a:rPr sz="1800" b="0">
+                <a:solidFill>
+                  <a:srgbClr val="222222"/>
+                </a:solidFill>
+                <a:latin typeface="Consolas"/>
+                <a:ea typeface="BIZ UDGothic"/>
+                <a:cs typeface="BIZ UDGothic"/>
+              </a:rPr>
+              <a:t>oled.text("SSD1306 OLED", 0, 16)</a:t>
+            </a:r>
+          </a:p>
+          <a:p>
+            <a:pPr algn="l">
+              <a:lnSpc>
+                <a:spcPts val="2200"/>
+              </a:lnSpc>
+            </a:pPr>
+            <a:r>
+              <a:rPr sz="1800" b="0">
+                <a:solidFill>
+                  <a:srgbClr val="222222"/>
+                </a:solidFill>
+                <a:latin typeface="Consolas"/>
+                <a:ea typeface="BIZ UDGothic"/>
+                <a:cs typeface="BIZ UDGothic"/>
+              </a:rPr>
+              <a:t>oled.rect(0, 40, 128, 20, 1)      </a:t>
+            </a:r>
+            <a:r>
+              <a:rPr sz="1800" b="0">
+                <a:solidFill>
+                  <a:srgbClr val="2E7D32"/>
+                </a:solidFill>
+                <a:latin typeface="Consolas"/>
+                <a:ea typeface="BIZ UDGothic"/>
+                <a:cs typeface="BIZ UDGothic"/>
+              </a:rPr>
+              <a:t># 四角の枠:x, y, 幅, 高さ, 色(1 = 白)</a:t>
+            </a:r>
+          </a:p>
+        </p:txBody>
+      </p:sp>
+      <p:sp>
+        <p:nvSpPr>
+          <p:cNvPr id="7" name="TextBox 6"/>
+          <p:cNvSpPr txBox="1"/>
+          <p:nvPr/>
+        </p:nvSpPr>
+        <p:spPr>
+          <a:xfrm>
+            <a:off x="548640" y="6446520"/>
+            <a:ext cx="8534095" cy="320040"/>
+          </a:xfrm>
+          <a:prstGeom prst="rect">
+            <a:avLst/>
+          </a:prstGeom>
+          <a:noFill/>
+        </p:spPr>
+        <p:txBody>
+          <a:bodyPr wrap="square" anchor="t">
+            <a:spAutoFit/>
+          </a:bodyPr>
+          <a:lstStyle/>
+          <a:p>
+            <a:pPr algn="r">
+              <a:spcAft>
+                <a:spcPts val="600"/>
+              </a:spcAft>
+            </a:pPr>
+            <a:r>
+              <a:rPr sz="1200" b="0">
+                <a:solidFill>
+                  <a:srgbClr val="666666"/>
+                </a:solidFill>
+                <a:latin typeface="Meiryo"/>
+                <a:ea typeface="Meiryo"/>
+                <a:cs typeface="Meiryo"/>
+              </a:rPr>
+              <a:t>→ 次のスライドに続く</a:t>
+            </a:r>
+          </a:p>
+        </p:txBody>
+      </p:sp>
+    </p:spTree>
+  </p:cSld>
+  <p:clrMapOvr>
+    <a:masterClrMapping/>
+  </p:clrMapOvr>
+</p:sld>
+</file>
+
+<file path=ppt/slides/slide55.xml><?xml version="1.0" encoding="utf-8"?>
+<p:sld xmlns:a="http://schemas.openxmlformats.org/drawingml/2006/main" xmlns:p="http://schemas.openxmlformats.org/presentationml/2006/main" xmlns:r="http://schemas.openxmlformats.org/officeDocument/2006/relationships">
+  <p:cSld>
+    <p:bg>
+      <p:bgPr>
+        <a:solidFill>
+          <a:srgbClr val="FFFFFF"/>
+        </a:solidFill>
+        <a:effectLst/>
+      </p:bgPr>
+    </p:bg>
+    <p:spTree>
+      <p:nvGrpSpPr>
+        <p:cNvPr id="1" name=""/>
+        <p:cNvGrpSpPr/>
+        <p:nvPr/>
+      </p:nvGrpSpPr>
+      <p:grpSpPr/>
+      <p:sp>
+        <p:nvSpPr>
+          <p:cNvPr id="2" name="TextBox 1"/>
+          <p:cNvSpPr txBox="1"/>
+          <p:nvPr/>
+        </p:nvSpPr>
+        <p:spPr>
+          <a:xfrm>
+            <a:off x="548640" y="228600"/>
+            <a:ext cx="11094415" cy="731520"/>
+          </a:xfrm>
+          <a:prstGeom prst="rect">
+            <a:avLst/>
+          </a:prstGeom>
+          <a:noFill/>
+        </p:spPr>
+        <p:txBody>
+          <a:bodyPr wrap="square" anchor="ctr">
+            <a:spAutoFit/>
+          </a:bodyPr>
+          <a:lstStyle/>
+          <a:p>
+            <a:pPr algn="l">
+              <a:spcAft>
+                <a:spcPts val="600"/>
+              </a:spcAft>
+            </a:pPr>
+            <a:r>
+              <a:rPr sz="3200" b="1">
+                <a:solidFill>
+                  <a:srgbClr val="222222"/>
+                </a:solidFill>
+                <a:latin typeface="Meiryo"/>
+                <a:ea typeface="Meiryo"/>
+                <a:cs typeface="Meiryo"/>
+              </a:rPr>
+              <a:t>OLED のコード(2/2)</a:t>
+            </a:r>
+          </a:p>
+        </p:txBody>
+      </p:sp>
+      <p:sp>
+        <p:nvSpPr>
+          <p:cNvPr id="3" name="Rectangle 2"/>
+          <p:cNvSpPr/>
+          <p:nvPr/>
+        </p:nvSpPr>
+        <p:spPr>
+          <a:xfrm>
+            <a:off x="548640" y="987552"/>
+            <a:ext cx="11094415" cy="38100"/>
+          </a:xfrm>
+          <a:prstGeom prst="rect">
+            <a:avLst/>
+          </a:prstGeom>
+          <a:solidFill>
+            <a:srgbClr val="1F6FB2"/>
+          </a:solidFill>
+          <a:ln>
+            <a:noFill/>
+          </a:ln>
+          <a:effectLst/>
+        </p:spPr>
+        <p:style>
+          <a:lnRef idx="1">
+            <a:schemeClr val="accent1"/>
+          </a:lnRef>
+          <a:fillRef idx="3">
+            <a:schemeClr val="accent1"/>
+          </a:fillRef>
+          <a:effectRef idx="2">
+            <a:schemeClr val="accent1"/>
+          </a:effectRef>
+          <a:fontRef idx="minor">
+            <a:schemeClr val="lt1"/>
+          </a:fontRef>
+        </p:style>
+        <p:txBody>
+          <a:bodyPr rtlCol="0" anchor="ctr"/>
+          <a:lstStyle/>
+          <a:p>
+            <a:pPr algn="ctr"/>
+          </a:p>
+        </p:txBody>
+      </p:sp>
+      <p:sp>
+        <p:nvSpPr>
+          <p:cNvPr id="4" name="TextBox 3"/>
+          <p:cNvSpPr txBox="1"/>
+          <p:nvPr/>
+        </p:nvSpPr>
+        <p:spPr>
+          <a:xfrm>
+            <a:off x="548640" y="6446520"/>
+            <a:ext cx="11094415" cy="320040"/>
+          </a:xfrm>
+          <a:prstGeom prst="rect">
+            <a:avLst/>
+          </a:prstGeom>
+          <a:noFill/>
+        </p:spPr>
+        <p:txBody>
+          <a:bodyPr wrap="square" anchor="t">
+            <a:spAutoFit/>
+          </a:bodyPr>
+          <a:lstStyle/>
+          <a:p>
+            <a:pPr algn="r">
+              <a:spcAft>
+                <a:spcPts val="600"/>
+              </a:spcAft>
+            </a:pPr>
+            <a:r>
+              <a:rPr sz="1200" b="0">
+                <a:solidFill>
+                  <a:srgbClr val="666666"/>
+                </a:solidFill>
+                <a:latin typeface="Meiryo"/>
+                <a:ea typeface="Meiryo"/>
+                <a:cs typeface="Meiryo"/>
+              </a:rPr>
+              <a:t>第7部 OLED(発展)  |  55</a:t>
+            </a:r>
+          </a:p>
+        </p:txBody>
+      </p:sp>
+      <p:sp>
+        <p:nvSpPr>
+          <p:cNvPr id="5" name="TextBox 4"/>
+          <p:cNvSpPr txBox="1"/>
+          <p:nvPr/>
+        </p:nvSpPr>
+        <p:spPr>
+          <a:xfrm>
+            <a:off x="548640" y="6400800"/>
+            <a:ext cx="1280160" cy="365760"/>
+          </a:xfrm>
+          <a:prstGeom prst="rect">
+            <a:avLst/>
+          </a:prstGeom>
+          <a:noFill/>
+        </p:spPr>
+        <p:txBody>
+          <a:bodyPr wrap="square" anchor="ctr">
+            <a:spAutoFit/>
+          </a:bodyPr>
+          <a:lstStyle/>
+          <a:p>
+            <a:pPr algn="l">
+              <a:spcAft>
+                <a:spcPts val="600"/>
+              </a:spcAft>
+            </a:pPr>
+            <a:r>
+              <a:rPr sz="1200" b="0">
+                <a:solidFill>
+                  <a:srgbClr val="666666"/>
+                </a:solidFill>
+                <a:latin typeface="Meiryo"/>
+                <a:ea typeface="Meiryo"/>
+                <a:cs typeface="Meiryo"/>
+              </a:rPr>
+              <a:t>色付き枠:</a:t>
+            </a:r>
+          </a:p>
+        </p:txBody>
+      </p:sp>
+      <p:sp>
+        <p:nvSpPr>
+          <p:cNvPr id="6" name="Rounded Rectangle 5"/>
+          <p:cNvSpPr/>
+          <p:nvPr/>
+        </p:nvSpPr>
+        <p:spPr>
+          <a:xfrm>
+            <a:off x="1737360" y="6419088"/>
+            <a:ext cx="822960" cy="329184"/>
+          </a:xfrm>
+          <a:prstGeom prst="roundRect">
+            <a:avLst/>
+          </a:prstGeom>
+          <a:solidFill>
+            <a:srgbClr val="FFFFFF"/>
+          </a:solidFill>
+          <a:ln w="19050">
+            <a:solidFill>
+              <a:srgbClr val="8E24AA"/>
+            </a:solidFill>
+          </a:ln>
+          <a:effectLst/>
+        </p:spPr>
+        <p:style>
+          <a:lnRef idx="1">
+            <a:schemeClr val="accent1"/>
+          </a:lnRef>
+          <a:fillRef idx="3">
+            <a:schemeClr val="accent1"/>
+          </a:fillRef>
+          <a:effectRef idx="2">
+            <a:schemeClr val="accent1"/>
+          </a:effectRef>
+          <a:fontRef idx="minor">
+            <a:schemeClr val="lt1"/>
+          </a:fontRef>
+        </p:style>
+        <p:txBody>
+          <a:bodyPr rtlCol="0" anchor="ctr" wrap="square"/>
+          <a:lstStyle/>
+          <a:p>
+            <a:pPr algn="ctr"/>
+            <a:r>
+              <a:rPr sz="1200" b="1">
+                <a:solidFill>
+                  <a:srgbClr val="8E24AA"/>
+                </a:solidFill>
+                <a:latin typeface="Meiryo"/>
+                <a:ea typeface="Meiryo"/>
+                <a:cs typeface="Meiryo"/>
+              </a:rPr>
+              <a:t>while</a:t>
+            </a:r>
+          </a:p>
+        </p:txBody>
+      </p:sp>
+      <p:sp>
+        <p:nvSpPr>
+          <p:cNvPr id="7" name="Rectangle 6"/>
+          <p:cNvSpPr/>
+          <p:nvPr/>
+        </p:nvSpPr>
+        <p:spPr>
+          <a:xfrm>
+            <a:off x="274320" y="1234440"/>
+            <a:ext cx="11643055" cy="3581400"/>
+          </a:xfrm>
+          <a:prstGeom prst="rect">
+            <a:avLst/>
+          </a:prstGeom>
+          <a:solidFill>
+            <a:srgbClr val="F4F6F8"/>
+          </a:solidFill>
+          <a:ln w="12700">
+            <a:solidFill>
+              <a:srgbClr val="D0D7DE"/>
+            </a:solidFill>
+          </a:ln>
+          <a:effectLst/>
+        </p:spPr>
+        <p:style>
+          <a:lnRef idx="1">
+            <a:schemeClr val="accent1"/>
+          </a:lnRef>
+          <a:fillRef idx="3">
+            <a:schemeClr val="accent1"/>
+          </a:fillRef>
+          <a:effectRef idx="2">
+            <a:schemeClr val="accent1"/>
+          </a:effectRef>
+          <a:fontRef idx="minor">
+            <a:schemeClr val="lt1"/>
+          </a:fontRef>
+        </p:style>
+        <p:txBody>
+          <a:bodyPr rtlCol="0" anchor="ctr"/>
+          <a:lstStyle/>
+          <a:p>
+            <a:pPr algn="ctr"/>
+          </a:p>
+        </p:txBody>
+      </p:sp>
+      <p:sp>
+        <p:nvSpPr>
+          <p:cNvPr id="8" name="TextBox 7"/>
+          <p:cNvSpPr txBox="1"/>
+          <p:nvPr/>
+        </p:nvSpPr>
+        <p:spPr>
+          <a:xfrm>
+            <a:off x="274320" y="1234440"/>
+            <a:ext cx="11643055" cy="3581400"/>
+          </a:xfrm>
+          <a:prstGeom prst="rect">
+            <a:avLst/>
+          </a:prstGeom>
+          <a:noFill/>
+        </p:spPr>
+        <p:txBody>
+          <a:bodyPr wrap="square" lIns="137160" rIns="137160" tIns="109728" bIns="109728">
+            <a:spAutoFit/>
+          </a:bodyPr>
+          <a:lstStyle/>
+          <a:p>
+            <a:pPr algn="l">
+              <a:lnSpc>
+                <a:spcPts val="2200"/>
+              </a:lnSpc>
+            </a:pPr>
+            <a:r>
+              <a:rPr sz="1800" b="0">
+                <a:solidFill>
+                  <a:srgbClr val="222222"/>
+                </a:solidFill>
+                <a:latin typeface="Consolas"/>
+                <a:ea typeface="BIZ UDGothic"/>
+                <a:cs typeface="BIZ UDGothic"/>
+              </a:rPr>
+              <a:t>oled.show()                       </a:t>
+            </a:r>
+            <a:r>
+              <a:rPr sz="1800" b="0">
+                <a:solidFill>
+                  <a:srgbClr val="2E7D32"/>
+                </a:solidFill>
+                <a:latin typeface="Consolas"/>
+                <a:ea typeface="BIZ UDGothic"/>
+                <a:cs typeface="BIZ UDGothic"/>
+              </a:rPr>
+              <a:t># ← show() を呼んで、はじめて画面に出る</a:t>
+            </a:r>
+          </a:p>
+          <a:p>
+            <a:pPr algn="l">
+              <a:lnSpc>
+                <a:spcPts val="2200"/>
+              </a:lnSpc>
+            </a:pPr>
+            <a:r>
+              <a:rPr sz="1800" b="0">
+                <a:solidFill>
+                  <a:srgbClr val="222222"/>
+                </a:solidFill>
+                <a:latin typeface="Consolas"/>
+                <a:ea typeface="BIZ UDGothic"/>
+                <a:cs typeface="BIZ UDGothic"/>
+              </a:rPr>
+              <a:t>time.sleep(2)</a:t>
+            </a:r>
+          </a:p>
+          <a:p>
+            <a:pPr algn="l">
+              <a:lnSpc>
+                <a:spcPts val="2200"/>
+              </a:lnSpc>
+            </a:pPr>
+            <a:r>
+              <a:rPr sz="1800" b="0">
+                <a:solidFill>
+                  <a:srgbClr val="222222"/>
+                </a:solidFill>
+                <a:latin typeface="Consolas"/>
+                <a:ea typeface="BIZ UDGothic"/>
+                <a:cs typeface="BIZ UDGothic"/>
+              </a:rPr>
+              <a:t> </a:t>
+            </a:r>
+          </a:p>
+          <a:p>
+            <a:pPr algn="l">
+              <a:lnSpc>
+                <a:spcPts val="2200"/>
+              </a:lnSpc>
+            </a:pPr>
+            <a:r>
+              <a:rPr sz="1800" b="0">
+                <a:solidFill>
+                  <a:srgbClr val="2E7D32"/>
+                </a:solidFill>
+                <a:latin typeface="Consolas"/>
+                <a:ea typeface="BIZ UDGothic"/>
+                <a:cs typeface="BIZ UDGothic"/>
+              </a:rPr>
+              <a:t># ---- メインの繰り返し:数を数えて表示 ----</a:t>
+            </a:r>
+          </a:p>
+          <a:p>
+            <a:pPr algn="l">
+              <a:lnSpc>
+                <a:spcPts val="2200"/>
+              </a:lnSpc>
+            </a:pPr>
+            <a:r>
+              <a:rPr sz="1800" b="0">
+                <a:solidFill>
+                  <a:srgbClr val="222222"/>
+                </a:solidFill>
+                <a:latin typeface="Consolas"/>
+                <a:ea typeface="BIZ UDGothic"/>
+                <a:cs typeface="BIZ UDGothic"/>
+              </a:rPr>
+              <a:t>n = 0</a:t>
+            </a:r>
+          </a:p>
+          <a:p>
+            <a:pPr algn="l">
+              <a:lnSpc>
+                <a:spcPts val="2200"/>
+              </a:lnSpc>
+            </a:pPr>
+            <a:r>
+              <a:rPr sz="1800" b="0">
+                <a:solidFill>
+                  <a:srgbClr val="222222"/>
+                </a:solidFill>
+                <a:latin typeface="Consolas"/>
+                <a:ea typeface="BIZ UDGothic"/>
+                <a:cs typeface="BIZ UDGothic"/>
+              </a:rPr>
+              <a:t>while True:</a:t>
+            </a:r>
+          </a:p>
+          <a:p>
+            <a:pPr algn="l">
+              <a:lnSpc>
+                <a:spcPts val="2200"/>
+              </a:lnSpc>
+            </a:pPr>
+            <a:r>
+              <a:rPr sz="1800" b="0">
+                <a:solidFill>
+                  <a:srgbClr val="222222"/>
+                </a:solidFill>
+                <a:latin typeface="Consolas"/>
+                <a:ea typeface="BIZ UDGothic"/>
+                <a:cs typeface="BIZ UDGothic"/>
+              </a:rPr>
+              <a:t>    oled.fill(0)                  </a:t>
+            </a:r>
+            <a:r>
+              <a:rPr sz="1800" b="0">
+                <a:solidFill>
+                  <a:srgbClr val="2E7D32"/>
+                </a:solidFill>
+                <a:latin typeface="Consolas"/>
+                <a:ea typeface="BIZ UDGothic"/>
+                <a:cs typeface="BIZ UDGothic"/>
+              </a:rPr>
+              <a:t># 前の表示を消す</a:t>
+            </a:r>
+          </a:p>
+          <a:p>
+            <a:pPr algn="l">
+              <a:lnSpc>
+                <a:spcPts val="2200"/>
+              </a:lnSpc>
+            </a:pPr>
+            <a:r>
+              <a:rPr sz="1800" b="0">
+                <a:solidFill>
+                  <a:srgbClr val="222222"/>
+                </a:solidFill>
+                <a:latin typeface="Consolas"/>
+                <a:ea typeface="BIZ UDGothic"/>
+                <a:cs typeface="BIZ UDGothic"/>
+              </a:rPr>
+              <a:t>    oled.text("count:", 0, 0)</a:t>
+            </a:r>
+          </a:p>
+          <a:p>
+            <a:pPr algn="l">
+              <a:lnSpc>
+                <a:spcPts val="2200"/>
+              </a:lnSpc>
+            </a:pPr>
+            <a:r>
+              <a:rPr sz="1800" b="0">
+                <a:solidFill>
+                  <a:srgbClr val="222222"/>
+                </a:solidFill>
+                <a:latin typeface="Consolas"/>
+                <a:ea typeface="BIZ UDGothic"/>
+                <a:cs typeface="BIZ UDGothic"/>
+              </a:rPr>
+              <a:t>    oled.text(str(n), 0, 16)      </a:t>
+            </a:r>
+            <a:r>
+              <a:rPr sz="1800" b="0">
+                <a:solidFill>
+                  <a:srgbClr val="2E7D32"/>
+                </a:solidFill>
+                <a:latin typeface="Consolas"/>
+                <a:ea typeface="BIZ UDGothic"/>
+                <a:cs typeface="BIZ UDGothic"/>
+              </a:rPr>
+              <a:t># 数は str() で文字に変えてから表示</a:t>
+            </a:r>
+          </a:p>
+          <a:p>
+            <a:pPr algn="l">
+              <a:lnSpc>
+                <a:spcPts val="2200"/>
+              </a:lnSpc>
+            </a:pPr>
+            <a:r>
+              <a:rPr sz="1800" b="0">
+                <a:solidFill>
+                  <a:srgbClr val="222222"/>
+                </a:solidFill>
+                <a:latin typeface="Consolas"/>
+                <a:ea typeface="BIZ UDGothic"/>
+                <a:cs typeface="BIZ UDGothic"/>
+              </a:rPr>
+              <a:t>    oled.show()</a:t>
+            </a:r>
+          </a:p>
+          <a:p>
+            <a:pPr algn="l">
+              <a:lnSpc>
+                <a:spcPts val="2200"/>
+              </a:lnSpc>
+            </a:pPr>
+            <a:r>
+              <a:rPr sz="1800" b="0">
+                <a:solidFill>
+                  <a:srgbClr val="222222"/>
+                </a:solidFill>
+                <a:latin typeface="Consolas"/>
+                <a:ea typeface="BIZ UDGothic"/>
+                <a:cs typeface="BIZ UDGothic"/>
+              </a:rPr>
+              <a:t>    n = n + 1</a:t>
+            </a:r>
+          </a:p>
+          <a:p>
+            <a:pPr algn="l">
+              <a:lnSpc>
+                <a:spcPts val="2200"/>
+              </a:lnSpc>
+            </a:pPr>
+            <a:r>
+              <a:rPr sz="1800" b="0">
+                <a:solidFill>
+                  <a:srgbClr val="222222"/>
+                </a:solidFill>
+                <a:latin typeface="Consolas"/>
+                <a:ea typeface="BIZ UDGothic"/>
+                <a:cs typeface="BIZ UDGothic"/>
+              </a:rPr>
+              <a:t>    time.sleep_ms(500)            </a:t>
+            </a:r>
+            <a:r>
+              <a:rPr sz="1800" b="0">
+                <a:solidFill>
+                  <a:srgbClr val="2E7D32"/>
+                </a:solidFill>
+                <a:latin typeface="Consolas"/>
+                <a:ea typeface="BIZ UDGothic"/>
+                <a:cs typeface="BIZ UDGothic"/>
+              </a:rPr>
+              <a:t># 0.5秒ごとに数える</a:t>
+            </a:r>
+          </a:p>
+        </p:txBody>
+      </p:sp>
+      <p:sp>
+        <p:nvSpPr>
+          <p:cNvPr id="9" name="Rounded Rectangle 8"/>
+          <p:cNvSpPr/>
+          <p:nvPr/>
+        </p:nvSpPr>
+        <p:spPr>
+          <a:xfrm>
+            <a:off x="365760" y="2728468"/>
+            <a:ext cx="1474470" cy="292100"/>
+          </a:xfrm>
+          <a:prstGeom prst="roundRect">
+            <a:avLst/>
+          </a:prstGeom>
+          <a:noFill/>
+          <a:ln w="25400">
+            <a:solidFill>
+              <a:srgbClr val="8E24AA"/>
+            </a:solidFill>
+          </a:ln>
+          <a:effectLst/>
+        </p:spPr>
+        <p:style>
+          <a:lnRef idx="1">
+            <a:schemeClr val="accent1"/>
+          </a:lnRef>
+          <a:fillRef idx="3">
+            <a:schemeClr val="accent1"/>
+          </a:fillRef>
+          <a:effectRef idx="2">
+            <a:schemeClr val="accent1"/>
+          </a:effectRef>
+          <a:fontRef idx="minor">
+            <a:schemeClr val="lt1"/>
+          </a:fontRef>
+        </p:style>
+        <p:txBody>
+          <a:bodyPr rtlCol="0" anchor="ctr"/>
+          <a:lstStyle/>
+          <a:p>
+            <a:pPr algn="ctr"/>
+          </a:p>
+        </p:txBody>
+      </p:sp>
+    </p:spTree>
+  </p:cSld>
+  <p:clrMapOvr>
+    <a:masterClrMapping/>
+  </p:clrMapOvr>
+</p:sld>
+</file>
+
+<file path=ppt/slides/slide56.xml><?xml version="1.0" encoding="utf-8"?>
+<p:sld xmlns:a="http://schemas.openxmlformats.org/drawingml/2006/main" xmlns:p="http://schemas.openxmlformats.org/presentationml/2006/main" xmlns:r="http://schemas.openxmlformats.org/officeDocument/2006/relationships">
+  <p:cSld>
+    <p:bg>
+      <p:bgPr>
+        <a:solidFill>
+          <a:srgbClr val="FFFFFF"/>
+        </a:solidFill>
+        <a:effectLst/>
+      </p:bgPr>
+    </p:bg>
+    <p:spTree>
+      <p:nvGrpSpPr>
+        <p:cNvPr id="1" name=""/>
+        <p:cNvGrpSpPr/>
+        <p:nvPr/>
+      </p:nvGrpSpPr>
+      <p:grpSpPr/>
+      <p:sp>
+        <p:nvSpPr>
+          <p:cNvPr id="2" name="TextBox 1"/>
+          <p:cNvSpPr txBox="1"/>
+          <p:nvPr/>
+        </p:nvSpPr>
+        <p:spPr>
+          <a:xfrm>
+            <a:off x="548640" y="228600"/>
+            <a:ext cx="11094415" cy="731520"/>
+          </a:xfrm>
+          <a:prstGeom prst="rect">
+            <a:avLst/>
+          </a:prstGeom>
+          <a:noFill/>
+        </p:spPr>
+        <p:txBody>
+          <a:bodyPr wrap="square" anchor="ctr">
+            <a:spAutoFit/>
+          </a:bodyPr>
+          <a:lstStyle/>
+          <a:p>
+            <a:pPr algn="l">
+              <a:spcAft>
+                <a:spcPts val="600"/>
+              </a:spcAft>
+            </a:pPr>
+            <a:r>
+              <a:rPr sz="3200" b="1">
+                <a:solidFill>
+                  <a:srgbClr val="222222"/>
+                </a:solidFill>
+                <a:latin typeface="Meiryo"/>
+                <a:ea typeface="Meiryo"/>
+                <a:cs typeface="Meiryo"/>
+              </a:rPr>
+              <a:t>OLED コードの読み解き</a:t>
+            </a:r>
+          </a:p>
+        </p:txBody>
+      </p:sp>
+      <p:sp>
+        <p:nvSpPr>
+          <p:cNvPr id="3" name="Rectangle 2"/>
+          <p:cNvSpPr/>
+          <p:nvPr/>
+        </p:nvSpPr>
+        <p:spPr>
+          <a:xfrm>
+            <a:off x="548640" y="987552"/>
+            <a:ext cx="11094415" cy="38100"/>
+          </a:xfrm>
+          <a:prstGeom prst="rect">
+            <a:avLst/>
+          </a:prstGeom>
+          <a:solidFill>
+            <a:srgbClr val="1F6FB2"/>
+          </a:solidFill>
+          <a:ln>
+            <a:noFill/>
+          </a:ln>
+          <a:effectLst/>
+        </p:spPr>
+        <p:style>
+          <a:lnRef idx="1">
+            <a:schemeClr val="accent1"/>
+          </a:lnRef>
+          <a:fillRef idx="3">
+            <a:schemeClr val="accent1"/>
+          </a:fillRef>
+          <a:effectRef idx="2">
+            <a:schemeClr val="accent1"/>
+          </a:effectRef>
+          <a:fontRef idx="minor">
+            <a:schemeClr val="lt1"/>
+          </a:fontRef>
+        </p:style>
+        <p:txBody>
+          <a:bodyPr rtlCol="0" anchor="ctr"/>
+          <a:lstStyle/>
+          <a:p>
+            <a:pPr algn="ctr"/>
+          </a:p>
+        </p:txBody>
+      </p:sp>
+      <p:sp>
+        <p:nvSpPr>
+          <p:cNvPr id="4" name="TextBox 3"/>
+          <p:cNvSpPr txBox="1"/>
+          <p:nvPr/>
+        </p:nvSpPr>
+        <p:spPr>
+          <a:xfrm>
+            <a:off x="548640" y="6446520"/>
+            <a:ext cx="11094415" cy="320040"/>
+          </a:xfrm>
+          <a:prstGeom prst="rect">
+            <a:avLst/>
+          </a:prstGeom>
+          <a:noFill/>
+        </p:spPr>
+        <p:txBody>
+          <a:bodyPr wrap="square" anchor="t">
+            <a:spAutoFit/>
+          </a:bodyPr>
+          <a:lstStyle/>
+          <a:p>
+            <a:pPr algn="r">
+              <a:spcAft>
+                <a:spcPts val="600"/>
+              </a:spcAft>
+            </a:pPr>
+            <a:r>
+              <a:rPr sz="1200" b="0">
+                <a:solidFill>
+                  <a:srgbClr val="666666"/>
+                </a:solidFill>
+                <a:latin typeface="Meiryo"/>
+                <a:ea typeface="Meiryo"/>
+                <a:cs typeface="Meiryo"/>
+              </a:rPr>
+              <a:t>第7部 OLED(発展)  |  56</a:t>
+            </a:r>
+          </a:p>
+        </p:txBody>
+      </p:sp>
+      <p:graphicFrame>
+        <p:nvGraphicFramePr>
+          <p:cNvPr id="5" name="Table 4"/>
+          <p:cNvGraphicFramePr>
+            <a:graphicFrameLocks noGrp="1"/>
+          </p:cNvGraphicFramePr>
+          <p:nvPr/>
+        </p:nvGraphicFramePr>
+        <p:xfrm>
+          <a:off x="548640" y="1325880"/>
+          <a:ext cx="11094414" cy="3566160"/>
+        </p:xfrm>
+        <a:graphic>
+          <a:graphicData uri="http://schemas.openxmlformats.org/drawingml/2006/table">
+            <a:tbl>
+              <a:tblPr firstRow="1" bandRow="1">
+                <a:tableStyleId>{5C22544A-7EE6-4342-B048-85BDC9FD1C3A}</a:tableStyleId>
+              </a:tblPr>
+              <a:tblGrid>
+                <a:gridCol w="4807579"/>
+                <a:gridCol w="6286835"/>
+              </a:tblGrid>
+              <a:tr h="594360">
+                <a:tc>
+                  <a:txBody>
+                    <a:bodyPr/>
+                    <a:lstStyle/>
+                    <a:p>
+                      <a:r>
+                        <a:rPr sz="2000" b="1">
+                          <a:solidFill>
+                            <a:srgbClr val="FFFFFF"/>
+                          </a:solidFill>
+                          <a:latin typeface="Meiryo"/>
+                          <a:ea typeface="Meiryo"/>
+                          <a:cs typeface="Meiryo"/>
+                        </a:rPr>
+                        <a:t>コード</a:t>
+                      </a:r>
+                    </a:p>
+                  </a:txBody>
+                  <a:tcPr anchor="ctr">
+                    <a:solidFill>
+                      <a:srgbClr val="1F6FB2"/>
+                    </a:solidFill>
+                  </a:tcPr>
+                </a:tc>
+                <a:tc>
+                  <a:txBody>
+                    <a:bodyPr/>
+                    <a:lstStyle/>
+                    <a:p>
+                      <a:r>
+                        <a:rPr sz="2000" b="1">
+                          <a:solidFill>
+                            <a:srgbClr val="FFFFFF"/>
+                          </a:solidFill>
+                          <a:latin typeface="Meiryo"/>
+                          <a:ea typeface="Meiryo"/>
+                          <a:cs typeface="Meiryo"/>
+                        </a:rPr>
+                        <a:t>意味</a:t>
+                      </a:r>
+                    </a:p>
+                  </a:txBody>
+                  <a:tcPr anchor="ctr">
+                    <a:solidFill>
+                      <a:srgbClr val="1F6FB2"/>
+                    </a:solidFill>
+                  </a:tcPr>
+                </a:tc>
+              </a:tr>
+              <a:tr h="594360">
+                <a:tc>
+                  <a:txBody>
+                    <a:bodyPr/>
+                    <a:lstStyle/>
+                    <a:p>
+                      <a:r>
+                        <a:rPr sz="2000" b="0">
+                          <a:solidFill>
+                            <a:srgbClr val="C62828"/>
+                          </a:solidFill>
+                          <a:latin typeface="Consolas"/>
+                          <a:ea typeface="BIZ UDGothic"/>
+                          <a:cs typeface="BIZ UDGothic"/>
+                        </a:rPr>
+                        <a:t>i2c.scan()</a:t>
+                      </a:r>
+                    </a:p>
+                  </a:txBody>
+                  <a:tcPr anchor="ctr">
+                    <a:solidFill>
+                      <a:srgbClr val="FFFFFF"/>
+                    </a:solidFill>
+                  </a:tcPr>
+                </a:tc>
+                <a:tc>
+                  <a:txBody>
+                    <a:bodyPr/>
+                    <a:lstStyle/>
+                    <a:p>
+                      <a:r>
+                        <a:rPr sz="2000" b="0">
+                          <a:solidFill>
+                            <a:srgbClr val="222222"/>
+                          </a:solidFill>
+                          <a:latin typeface="Meiryo"/>
+                          <a:ea typeface="Meiryo"/>
+                          <a:cs typeface="Meiryo"/>
+                        </a:rPr>
+                        <a:t>つながっている部品のアドレス。</a:t>
+                      </a:r>
+                      <a:r>
+                        <a:rPr sz="2000" b="1">
+                          <a:solidFill>
+                            <a:srgbClr val="1F6FB2"/>
+                          </a:solidFill>
+                          <a:latin typeface="Meiryo"/>
+                          <a:ea typeface="Meiryo"/>
+                          <a:cs typeface="Meiryo"/>
+                        </a:rPr>
+                        <a:t>[60]</a:t>
+                      </a:r>
+                      <a:r>
+                        <a:rPr sz="2000" b="0">
+                          <a:solidFill>
+                            <a:srgbClr val="222222"/>
+                          </a:solidFill>
+                          <a:latin typeface="Meiryo"/>
+                          <a:ea typeface="Meiryo"/>
+                          <a:cs typeface="Meiryo"/>
+                        </a:rPr>
+                        <a:t> なら OK</a:t>
+                      </a:r>
+                    </a:p>
+                  </a:txBody>
+                  <a:tcPr anchor="ctr">
+                    <a:solidFill>
+                      <a:srgbClr val="FFFFFF"/>
+                    </a:solidFill>
+                  </a:tcPr>
+                </a:tc>
+              </a:tr>
+              <a:tr h="594360">
+                <a:tc>
+                  <a:txBody>
+                    <a:bodyPr/>
+                    <a:lstStyle/>
+                    <a:p>
+                      <a:r>
+                        <a:rPr sz="2000" b="0">
+                          <a:solidFill>
+                            <a:srgbClr val="C62828"/>
+                          </a:solidFill>
+                          <a:latin typeface="Consolas"/>
+                          <a:ea typeface="BIZ UDGothic"/>
+                          <a:cs typeface="BIZ UDGothic"/>
+                        </a:rPr>
+                        <a:t>oled.fill(0)</a:t>
+                      </a:r>
+                    </a:p>
+                  </a:txBody>
+                  <a:tcPr anchor="ctr">
+                    <a:solidFill>
+                      <a:srgbClr val="F2F6FB"/>
+                    </a:solidFill>
+                  </a:tcPr>
+                </a:tc>
+                <a:tc>
+                  <a:txBody>
+                    <a:bodyPr/>
+                    <a:lstStyle/>
+                    <a:p>
+                      <a:r>
+                        <a:rPr sz="2000" b="0">
+                          <a:solidFill>
+                            <a:srgbClr val="222222"/>
+                          </a:solidFill>
+                          <a:latin typeface="Meiryo"/>
+                          <a:ea typeface="Meiryo"/>
+                          <a:cs typeface="Meiryo"/>
+                        </a:rPr>
+                        <a:t>画面を全部消す(0 = 黒、1 = 白)</a:t>
+                      </a:r>
+                    </a:p>
+                  </a:txBody>
+                  <a:tcPr anchor="ctr">
+                    <a:solidFill>
+                      <a:srgbClr val="F2F6FB"/>
+                    </a:solidFill>
+                  </a:tcPr>
+                </a:tc>
+              </a:tr>
+              <a:tr h="594360">
+                <a:tc>
+                  <a:txBody>
+                    <a:bodyPr/>
+                    <a:lstStyle/>
+                    <a:p>
+                      <a:r>
+                        <a:rPr sz="2000" b="0">
+                          <a:solidFill>
+                            <a:srgbClr val="C62828"/>
+                          </a:solidFill>
+                          <a:latin typeface="Consolas"/>
+                          <a:ea typeface="BIZ UDGothic"/>
+                          <a:cs typeface="BIZ UDGothic"/>
+                        </a:rPr>
+                        <a:t>oled.text("文字", x, y)</a:t>
+                      </a:r>
+                    </a:p>
+                  </a:txBody>
+                  <a:tcPr anchor="ctr">
+                    <a:solidFill>
+                      <a:srgbClr val="FFFFFF"/>
+                    </a:solidFill>
+                  </a:tcPr>
+                </a:tc>
+                <a:tc>
+                  <a:txBody>
+                    <a:bodyPr/>
+                    <a:lstStyle/>
+                    <a:p>
+                      <a:r>
+                        <a:rPr sz="2000" b="0">
+                          <a:solidFill>
+                            <a:srgbClr val="222222"/>
+                          </a:solidFill>
+                          <a:latin typeface="Meiryo"/>
+                          <a:ea typeface="Meiryo"/>
+                          <a:cs typeface="Meiryo"/>
+                        </a:rPr>
+                        <a:t>文字を描く(下書き)</a:t>
+                      </a:r>
+                    </a:p>
+                  </a:txBody>
+                  <a:tcPr anchor="ctr">
+                    <a:solidFill>
+                      <a:srgbClr val="FFFFFF"/>
+                    </a:solidFill>
+                  </a:tcPr>
+                </a:tc>
+              </a:tr>
+              <a:tr h="594360">
+                <a:tc>
+                  <a:txBody>
+                    <a:bodyPr/>
+                    <a:lstStyle/>
+                    <a:p>
+                      <a:r>
+                        <a:rPr sz="2000" b="0">
+                          <a:solidFill>
+                            <a:srgbClr val="C62828"/>
+                          </a:solidFill>
+                          <a:latin typeface="Consolas"/>
+                          <a:ea typeface="BIZ UDGothic"/>
+                          <a:cs typeface="BIZ UDGothic"/>
+                        </a:rPr>
+                        <a:t>oled.show()</a:t>
+                      </a:r>
+                    </a:p>
+                  </a:txBody>
+                  <a:tcPr anchor="ctr">
+                    <a:solidFill>
+                      <a:srgbClr val="F2F6FB"/>
+                    </a:solidFill>
+                  </a:tcPr>
+                </a:tc>
+                <a:tc>
+                  <a:txBody>
+                    <a:bodyPr/>
+                    <a:lstStyle/>
+                    <a:p>
+                      <a:r>
+                        <a:rPr sz="2000" b="0">
+                          <a:solidFill>
+                            <a:srgbClr val="222222"/>
+                          </a:solidFill>
+                          <a:latin typeface="Meiryo"/>
+                          <a:ea typeface="Meiryo"/>
+                          <a:cs typeface="Meiryo"/>
+                        </a:rPr>
+                        <a:t>下書きを </a:t>
+                      </a:r>
+                      <a:r>
+                        <a:rPr sz="2000" b="1">
+                          <a:solidFill>
+                            <a:srgbClr val="1F6FB2"/>
+                          </a:solidFill>
+                          <a:latin typeface="Meiryo"/>
+                          <a:ea typeface="Meiryo"/>
+                          <a:cs typeface="Meiryo"/>
+                        </a:rPr>
+                        <a:t>画面に送る</a:t>
+                      </a:r>
+                    </a:p>
+                  </a:txBody>
+                  <a:tcPr anchor="ctr">
+                    <a:solidFill>
+                      <a:srgbClr val="F2F6FB"/>
+                    </a:solidFill>
+                  </a:tcPr>
+                </a:tc>
+              </a:tr>
+              <a:tr h="594360">
+                <a:tc>
+                  <a:txBody>
+                    <a:bodyPr/>
+                    <a:lstStyle/>
+                    <a:p>
+                      <a:r>
+                        <a:rPr sz="2000" b="0">
+                          <a:solidFill>
+                            <a:srgbClr val="C62828"/>
+                          </a:solidFill>
+                          <a:latin typeface="Consolas"/>
+                          <a:ea typeface="BIZ UDGothic"/>
+                          <a:cs typeface="BIZ UDGothic"/>
+                        </a:rPr>
+                        <a:t>str(n)</a:t>
+                      </a:r>
+                    </a:p>
+                  </a:txBody>
+                  <a:tcPr anchor="ctr">
+                    <a:solidFill>
+                      <a:srgbClr val="FFFFFF"/>
+                    </a:solidFill>
+                  </a:tcPr>
+                </a:tc>
+                <a:tc>
+                  <a:txBody>
+                    <a:bodyPr/>
+                    <a:lstStyle/>
+                    <a:p>
+                      <a:r>
+                        <a:rPr sz="2000" b="0">
+                          <a:solidFill>
+                            <a:srgbClr val="222222"/>
+                          </a:solidFill>
+                          <a:latin typeface="Meiryo"/>
+                          <a:ea typeface="Meiryo"/>
+                          <a:cs typeface="Meiryo"/>
+                        </a:rPr>
+                        <a:t>数を文字に変える</a:t>
+                      </a:r>
+                    </a:p>
+                  </a:txBody>
+                  <a:tcPr anchor="ctr">
+                    <a:solidFill>
+                      <a:srgbClr val="FFFFFF"/>
+                    </a:solidFill>
+                  </a:tcPr>
+                </a:tc>
+              </a:tr>
+            </a:tbl>
+          </a:graphicData>
+        </a:graphic>
+      </p:graphicFrame>
+      <p:sp>
+        <p:nvSpPr>
+          <p:cNvPr id="6" name="Rounded Rectangle 5"/>
+          <p:cNvSpPr/>
+          <p:nvPr/>
+        </p:nvSpPr>
+        <p:spPr>
+          <a:xfrm>
+            <a:off x="548640" y="5120640"/>
+            <a:ext cx="11094415" cy="731520"/>
+          </a:xfrm>
+          <a:prstGeom prst="roundRect">
+            <a:avLst/>
+          </a:prstGeom>
+          <a:solidFill>
+            <a:srgbClr val="FFF4E0"/>
+          </a:solidFill>
+          <a:ln w="19050">
+            <a:solidFill>
+              <a:srgbClr val="D96C00"/>
+            </a:solidFill>
+          </a:ln>
+          <a:effectLst/>
+        </p:spPr>
+        <p:style>
+          <a:lnRef idx="1">
+            <a:schemeClr val="accent1"/>
+          </a:lnRef>
+          <a:fillRef idx="3">
+            <a:schemeClr val="accent1"/>
+          </a:fillRef>
+          <a:effectRef idx="2">
+            <a:schemeClr val="accent1"/>
+          </a:effectRef>
+          <a:fontRef idx="minor">
+            <a:schemeClr val="lt1"/>
+          </a:fontRef>
+        </p:style>
+        <p:txBody>
+          <a:bodyPr rtlCol="0" anchor="ctr" wrap="square" lIns="182880"/>
+          <a:lstStyle/>
+          <a:p>
+            <a:pPr algn="ctr"/>
+            <a:r>
+              <a:rPr sz="2200" b="0">
+                <a:solidFill>
+                  <a:srgbClr val="222222"/>
+                </a:solidFill>
+                <a:latin typeface="Meiryo"/>
+                <a:ea typeface="Meiryo"/>
+                <a:cs typeface="Meiryo"/>
+              </a:rPr>
+              <a:t>⚠ </a:t>
+            </a:r>
+            <a:r>
+              <a:rPr sz="2200" b="0">
+                <a:solidFill>
+                  <a:srgbClr val="C62828"/>
+                </a:solidFill>
+                <a:latin typeface="Consolas"/>
+                <a:ea typeface="BIZ UDGothic"/>
+                <a:cs typeface="BIZ UDGothic"/>
+              </a:rPr>
+              <a:t>[]</a:t>
+            </a:r>
+            <a:r>
+              <a:rPr sz="2200" b="0">
+                <a:solidFill>
+                  <a:srgbClr val="222222"/>
+                </a:solidFill>
+                <a:latin typeface="Meiryo"/>
+                <a:ea typeface="Meiryo"/>
+                <a:cs typeface="Meiryo"/>
+              </a:rPr>
+              <a:t> と出たら配線を確認(</a:t>
+            </a:r>
+            <a:r>
+              <a:rPr sz="2200" b="1">
+                <a:solidFill>
+                  <a:srgbClr val="1F6FB2"/>
+                </a:solidFill>
+                <a:latin typeface="Meiryo"/>
+                <a:ea typeface="Meiryo"/>
+                <a:cs typeface="Meiryo"/>
+              </a:rPr>
+              <a:t>SDA と SCL が逆</a:t>
+            </a:r>
+            <a:r>
+              <a:rPr sz="2200" b="0">
+                <a:solidFill>
+                  <a:srgbClr val="222222"/>
+                </a:solidFill>
+                <a:latin typeface="Meiryo"/>
+                <a:ea typeface="Meiryo"/>
+                <a:cs typeface="Meiryo"/>
+              </a:rPr>
+              <a:t> になっていない?)</a:t>
+            </a:r>
+          </a:p>
+        </p:txBody>
+      </p:sp>
+    </p:spTree>
+  </p:cSld>
+  <p:clrMapOvr>
+    <a:masterClrMapping/>
+  </p:clrMapOvr>
+</p:sld>
+</file>
+
+<file path=ppt/slides/slide57.xml><?xml version="1.0" encoding="utf-8"?>
+<p:sld xmlns:a="http://schemas.openxmlformats.org/drawingml/2006/main" xmlns:p="http://schemas.openxmlformats.org/presentationml/2006/main" xmlns:r="http://schemas.openxmlformats.org/officeDocument/2006/relationships">
+  <p:cSld>
+    <p:bg>
+      <p:bgPr>
+        <a:solidFill>
+          <a:srgbClr val="FFFFFF"/>
+        </a:solidFill>
+        <a:effectLst/>
+      </p:bgPr>
+    </p:bg>
+    <p:spTree>
+      <p:nvGrpSpPr>
+        <p:cNvPr id="1" name=""/>
+        <p:cNvGrpSpPr/>
+        <p:nvPr/>
+      </p:nvGrpSpPr>
+      <p:grpSpPr/>
+      <p:sp>
+        <p:nvSpPr>
+          <p:cNvPr id="2" name="TextBox 1"/>
+          <p:cNvSpPr txBox="1"/>
+          <p:nvPr/>
+        </p:nvSpPr>
+        <p:spPr>
+          <a:xfrm>
+            <a:off x="548640" y="228600"/>
+            <a:ext cx="11094415" cy="731520"/>
+          </a:xfrm>
+          <a:prstGeom prst="rect">
+            <a:avLst/>
+          </a:prstGeom>
+          <a:noFill/>
+        </p:spPr>
+        <p:txBody>
+          <a:bodyPr wrap="square" anchor="ctr">
+            <a:spAutoFit/>
+          </a:bodyPr>
+          <a:lstStyle/>
+          <a:p>
+            <a:pPr algn="l">
+              <a:spcAft>
+                <a:spcPts val="600"/>
+              </a:spcAft>
+            </a:pPr>
+            <a:r>
+              <a:rPr sz="3200" b="1">
+                <a:solidFill>
+                  <a:srgbClr val="222222"/>
+                </a:solidFill>
+                <a:latin typeface="Meiryo"/>
+                <a:ea typeface="Meiryo"/>
+                <a:cs typeface="Meiryo"/>
+              </a:rPr>
+              <a:t>今日のまとめ</a:t>
+            </a:r>
+          </a:p>
+        </p:txBody>
+      </p:sp>
+      <p:sp>
+        <p:nvSpPr>
+          <p:cNvPr id="3" name="Rectangle 2"/>
+          <p:cNvSpPr/>
+          <p:nvPr/>
+        </p:nvSpPr>
+        <p:spPr>
+          <a:xfrm>
+            <a:off x="548640" y="987552"/>
+            <a:ext cx="11094415" cy="38100"/>
+          </a:xfrm>
+          <a:prstGeom prst="rect">
+            <a:avLst/>
+          </a:prstGeom>
+          <a:solidFill>
+            <a:srgbClr val="1F6FB2"/>
+          </a:solidFill>
+          <a:ln>
+            <a:noFill/>
+          </a:ln>
+          <a:effectLst/>
+        </p:spPr>
+        <p:style>
+          <a:lnRef idx="1">
+            <a:schemeClr val="accent1"/>
+          </a:lnRef>
+          <a:fillRef idx="3">
+            <a:schemeClr val="accent1"/>
+          </a:fillRef>
+          <a:effectRef idx="2">
+            <a:schemeClr val="accent1"/>
+          </a:effectRef>
+          <a:fontRef idx="minor">
+            <a:schemeClr val="lt1"/>
+          </a:fontRef>
+        </p:style>
+        <p:txBody>
+          <a:bodyPr rtlCol="0" anchor="ctr"/>
+          <a:lstStyle/>
+          <a:p>
+            <a:pPr algn="ctr"/>
+          </a:p>
+        </p:txBody>
+      </p:sp>
+      <p:sp>
+        <p:nvSpPr>
+          <p:cNvPr id="4" name="TextBox 3"/>
+          <p:cNvSpPr txBox="1"/>
+          <p:nvPr/>
+        </p:nvSpPr>
+        <p:spPr>
+          <a:xfrm>
+            <a:off x="548640" y="6446520"/>
+            <a:ext cx="11094415" cy="320040"/>
+          </a:xfrm>
+          <a:prstGeom prst="rect">
+            <a:avLst/>
+          </a:prstGeom>
+          <a:noFill/>
+        </p:spPr>
+        <p:txBody>
+          <a:bodyPr wrap="square" anchor="t">
+            <a:spAutoFit/>
+          </a:bodyPr>
+          <a:lstStyle/>
+          <a:p>
+            <a:pPr algn="r">
+              <a:spcAft>
+                <a:spcPts val="600"/>
+              </a:spcAft>
+            </a:pPr>
+            <a:r>
+              <a:rPr sz="1200" b="0">
+                <a:solidFill>
+                  <a:srgbClr val="666666"/>
+                </a:solidFill>
+                <a:latin typeface="Meiryo"/>
+                <a:ea typeface="Meiryo"/>
+                <a:cs typeface="Meiryo"/>
+              </a:rPr>
+              <a:t>第8部 まとめ  |  57</a:t>
+            </a:r>
+          </a:p>
+        </p:txBody>
+      </p:sp>
+      <p:sp>
+        <p:nvSpPr>
+          <p:cNvPr id="5" name="Rounded Rectangle 4"/>
+          <p:cNvSpPr/>
+          <p:nvPr/>
+        </p:nvSpPr>
+        <p:spPr>
+          <a:xfrm>
+            <a:off x="548640" y="1417320"/>
+            <a:ext cx="2377440" cy="914400"/>
+          </a:xfrm>
+          <a:prstGeom prst="roundRect">
+            <a:avLst/>
+          </a:prstGeom>
+          <a:solidFill>
+            <a:srgbClr val="1F6FB2"/>
+          </a:solidFill>
+          <a:ln w="19050">
+            <a:solidFill>
+              <a:srgbClr val="1F6FB2"/>
+            </a:solidFill>
+          </a:ln>
+          <a:effectLst/>
+        </p:spPr>
+        <p:style>
+          <a:lnRef idx="1">
+            <a:schemeClr val="accent1"/>
+          </a:lnRef>
+          <a:fillRef idx="3">
+            <a:schemeClr val="accent1"/>
+          </a:fillRef>
+          <a:effectRef idx="2">
+            <a:schemeClr val="accent1"/>
+          </a:effectRef>
+          <a:fontRef idx="minor">
+            <a:schemeClr val="lt1"/>
+          </a:fontRef>
+        </p:style>
+        <p:txBody>
+          <a:bodyPr rtlCol="0" anchor="ctr" wrap="square"/>
+          <a:lstStyle/>
+          <a:p>
+            <a:pPr algn="ctr"/>
+            <a:r>
+              <a:rPr sz="2400" b="1">
+                <a:solidFill>
+                  <a:srgbClr val="FFFFFF"/>
+                </a:solidFill>
+                <a:latin typeface="Meiryo"/>
+                <a:ea typeface="Meiryo"/>
+                <a:cs typeface="Meiryo"/>
+              </a:rPr>
+              <a:t>制御構造</a:t>
+            </a:r>
+          </a:p>
+        </p:txBody>
+      </p:sp>
+      <p:sp>
+        <p:nvSpPr>
+          <p:cNvPr id="6" name="TextBox 5"/>
+          <p:cNvSpPr txBox="1"/>
+          <p:nvPr/>
+        </p:nvSpPr>
+        <p:spPr>
+          <a:xfrm>
+            <a:off x="3200400" y="1417320"/>
+            <a:ext cx="8442655" cy="914400"/>
+          </a:xfrm>
+          <a:prstGeom prst="rect">
+            <a:avLst/>
+          </a:prstGeom>
+          <a:noFill/>
+        </p:spPr>
+        <p:txBody>
+          <a:bodyPr wrap="square" anchor="ctr">
+            <a:spAutoFit/>
+          </a:bodyPr>
+          <a:lstStyle/>
+          <a:p>
+            <a:pPr algn="l">
+              <a:spcAft>
+                <a:spcPts val="600"/>
+              </a:spcAft>
+            </a:pPr>
+            <a:r>
+              <a:rPr sz="2400" b="0">
+                <a:solidFill>
+                  <a:srgbClr val="222222"/>
+                </a:solidFill>
+                <a:latin typeface="Meiryo"/>
+                <a:ea typeface="Meiryo"/>
+                <a:cs typeface="Meiryo"/>
+              </a:rPr>
+              <a:t>順次・</a:t>
+            </a:r>
+            <a:r>
+              <a:rPr sz="2400" b="0">
+                <a:solidFill>
+                  <a:srgbClr val="C62828"/>
+                </a:solidFill>
+                <a:latin typeface="Consolas"/>
+                <a:ea typeface="BIZ UDGothic"/>
+                <a:cs typeface="BIZ UDGothic"/>
+              </a:rPr>
+              <a:t>while</a:t>
+            </a:r>
+            <a:r>
+              <a:rPr sz="2400" b="0">
+                <a:solidFill>
+                  <a:srgbClr val="222222"/>
+                </a:solidFill>
+                <a:latin typeface="Meiryo"/>
+                <a:ea typeface="Meiryo"/>
+                <a:cs typeface="Meiryo"/>
+              </a:rPr>
+              <a:t>・</a:t>
+            </a:r>
+            <a:r>
+              <a:rPr sz="2400" b="0">
+                <a:solidFill>
+                  <a:srgbClr val="C62828"/>
+                </a:solidFill>
+                <a:latin typeface="Consolas"/>
+                <a:ea typeface="BIZ UDGothic"/>
+                <a:cs typeface="BIZ UDGothic"/>
+              </a:rPr>
+              <a:t>if</a:t>
+            </a:r>
+            <a:r>
+              <a:rPr sz="2400" b="0">
+                <a:solidFill>
+                  <a:srgbClr val="222222"/>
+                </a:solidFill>
+                <a:latin typeface="Meiryo"/>
+                <a:ea typeface="Meiryo"/>
+                <a:cs typeface="Meiryo"/>
+              </a:rPr>
+              <a:t>・</a:t>
+            </a:r>
+            <a:r>
+              <a:rPr sz="2400" b="0">
+                <a:solidFill>
+                  <a:srgbClr val="C62828"/>
+                </a:solidFill>
+                <a:latin typeface="Consolas"/>
+                <a:ea typeface="BIZ UDGothic"/>
+                <a:cs typeface="BIZ UDGothic"/>
+              </a:rPr>
+              <a:t>for</a:t>
+            </a:r>
+            <a:r>
+              <a:rPr sz="2400" b="0">
+                <a:solidFill>
+                  <a:srgbClr val="222222"/>
+                </a:solidFill>
+                <a:latin typeface="Meiryo"/>
+                <a:ea typeface="Meiryo"/>
+                <a:cs typeface="Meiryo"/>
+              </a:rPr>
+              <a:t>・関数</a:t>
+            </a:r>
+          </a:p>
+        </p:txBody>
+      </p:sp>
+      <p:sp>
+        <p:nvSpPr>
+          <p:cNvPr id="7" name="Rounded Rectangle 6"/>
+          <p:cNvSpPr/>
+          <p:nvPr/>
+        </p:nvSpPr>
+        <p:spPr>
+          <a:xfrm>
+            <a:off x="548640" y="2606040"/>
+            <a:ext cx="2377440" cy="914400"/>
+          </a:xfrm>
+          <a:prstGeom prst="roundRect">
+            <a:avLst/>
+          </a:prstGeom>
+          <a:solidFill>
+            <a:srgbClr val="1F6FB2"/>
+          </a:solidFill>
+          <a:ln w="19050">
+            <a:solidFill>
+              <a:srgbClr val="1F6FB2"/>
+            </a:solidFill>
+          </a:ln>
+          <a:effectLst/>
+        </p:spPr>
+        <p:style>
+          <a:lnRef idx="1">
+            <a:schemeClr val="accent1"/>
+          </a:lnRef>
+          <a:fillRef idx="3">
+            <a:schemeClr val="accent1"/>
+          </a:fillRef>
+          <a:effectRef idx="2">
+            <a:schemeClr val="accent1"/>
+          </a:effectRef>
+          <a:fontRef idx="minor">
+            <a:schemeClr val="lt1"/>
+          </a:fontRef>
+        </p:style>
+        <p:txBody>
+          <a:bodyPr rtlCol="0" anchor="ctr" wrap="square"/>
+          <a:lstStyle/>
+          <a:p>
+            <a:pPr algn="ctr"/>
+            <a:r>
+              <a:rPr sz="2400" b="1">
+                <a:solidFill>
+                  <a:srgbClr val="FFFFFF"/>
+                </a:solidFill>
+                <a:latin typeface="Meiryo"/>
+                <a:ea typeface="Meiryo"/>
+                <a:cs typeface="Meiryo"/>
+              </a:rPr>
+              <a:t>電気の基本</a:t>
+            </a:r>
+          </a:p>
+        </p:txBody>
+      </p:sp>
+      <p:sp>
+        <p:nvSpPr>
+          <p:cNvPr id="8" name="TextBox 7"/>
+          <p:cNvSpPr txBox="1"/>
+          <p:nvPr/>
+        </p:nvSpPr>
+        <p:spPr>
+          <a:xfrm>
+            <a:off x="3200400" y="2606040"/>
+            <a:ext cx="8442655" cy="914400"/>
+          </a:xfrm>
+          <a:prstGeom prst="rect">
+            <a:avLst/>
+          </a:prstGeom>
+          <a:noFill/>
+        </p:spPr>
+        <p:txBody>
+          <a:bodyPr wrap="square" anchor="ctr">
+            <a:spAutoFit/>
+          </a:bodyPr>
+          <a:lstStyle/>
+          <a:p>
+            <a:pPr algn="l">
+              <a:spcAft>
+                <a:spcPts val="600"/>
+              </a:spcAft>
+            </a:pPr>
+            <a:r>
+              <a:rPr sz="2400" b="0">
+                <a:solidFill>
+                  <a:srgbClr val="222222"/>
+                </a:solidFill>
+                <a:latin typeface="Meiryo"/>
+                <a:ea typeface="Meiryo"/>
+                <a:cs typeface="Meiryo"/>
+              </a:rPr>
+              <a:t>LED には電流制限抵抗(220Ω程度)/プルアップ・プルダウン/分圧</a:t>
+            </a:r>
+          </a:p>
+        </p:txBody>
+      </p:sp>
+      <p:sp>
+        <p:nvSpPr>
+          <p:cNvPr id="9" name="Rounded Rectangle 8"/>
+          <p:cNvSpPr/>
+          <p:nvPr/>
+        </p:nvSpPr>
+        <p:spPr>
+          <a:xfrm>
+            <a:off x="548640" y="3794760"/>
+            <a:ext cx="2377440" cy="914400"/>
+          </a:xfrm>
+          <a:prstGeom prst="roundRect">
+            <a:avLst/>
+          </a:prstGeom>
+          <a:solidFill>
+            <a:srgbClr val="1F6FB2"/>
+          </a:solidFill>
+          <a:ln w="19050">
+            <a:solidFill>
+              <a:srgbClr val="1F6FB2"/>
+            </a:solidFill>
+          </a:ln>
+          <a:effectLst/>
+        </p:spPr>
+        <p:style>
+          <a:lnRef idx="1">
+            <a:schemeClr val="accent1"/>
+          </a:lnRef>
+          <a:fillRef idx="3">
+            <a:schemeClr val="accent1"/>
+          </a:fillRef>
+          <a:effectRef idx="2">
+            <a:schemeClr val="accent1"/>
+          </a:effectRef>
+          <a:fontRef idx="minor">
+            <a:schemeClr val="lt1"/>
+          </a:fontRef>
+        </p:style>
+        <p:txBody>
+          <a:bodyPr rtlCol="0" anchor="ctr" wrap="square"/>
+          <a:lstStyle/>
+          <a:p>
+            <a:pPr algn="ctr"/>
+            <a:r>
+              <a:rPr sz="2400" b="1">
+                <a:solidFill>
+                  <a:srgbClr val="FFFFFF"/>
+                </a:solidFill>
+                <a:latin typeface="Meiryo"/>
+                <a:ea typeface="Meiryo"/>
+                <a:cs typeface="Meiryo"/>
+              </a:rPr>
+              <a:t>センサー</a:t>
+            </a:r>
+          </a:p>
+        </p:txBody>
+      </p:sp>
+      <p:sp>
+        <p:nvSpPr>
+          <p:cNvPr id="10" name="TextBox 9"/>
+          <p:cNvSpPr txBox="1"/>
+          <p:nvPr/>
+        </p:nvSpPr>
+        <p:spPr>
+          <a:xfrm>
+            <a:off x="3200400" y="3794760"/>
+            <a:ext cx="8442655" cy="914400"/>
+          </a:xfrm>
+          <a:prstGeom prst="rect">
+            <a:avLst/>
+          </a:prstGeom>
+          <a:noFill/>
+        </p:spPr>
+        <p:txBody>
+          <a:bodyPr wrap="square" anchor="ctr">
+            <a:spAutoFit/>
+          </a:bodyPr>
+          <a:lstStyle/>
+          <a:p>
+            <a:pPr algn="l">
+              <a:spcAft>
+                <a:spcPts val="600"/>
+              </a:spcAft>
+            </a:pPr>
+            <a:r>
+              <a:rPr sz="2400" b="0">
+                <a:solidFill>
+                  <a:srgbClr val="222222"/>
+                </a:solidFill>
+                <a:latin typeface="Meiryo"/>
+                <a:ea typeface="Meiryo"/>
+                <a:cs typeface="Meiryo"/>
+              </a:rPr>
+              <a:t>人感(赤外線)/超音波(音速 × 時間 ÷ 2)</a:t>
+            </a:r>
+          </a:p>
+        </p:txBody>
+      </p:sp>
+      <p:sp>
+        <p:nvSpPr>
+          <p:cNvPr id="11" name="Rounded Rectangle 10"/>
+          <p:cNvSpPr/>
+          <p:nvPr/>
+        </p:nvSpPr>
+        <p:spPr>
+          <a:xfrm>
+            <a:off x="548640" y="4983480"/>
+            <a:ext cx="2377440" cy="914400"/>
+          </a:xfrm>
+          <a:prstGeom prst="roundRect">
+            <a:avLst/>
+          </a:prstGeom>
+          <a:solidFill>
+            <a:srgbClr val="1F6FB2"/>
+          </a:solidFill>
+          <a:ln w="19050">
+            <a:solidFill>
+              <a:srgbClr val="1F6FB2"/>
+            </a:solidFill>
+          </a:ln>
+          <a:effectLst/>
+        </p:spPr>
+        <p:style>
+          <a:lnRef idx="1">
+            <a:schemeClr val="accent1"/>
+          </a:lnRef>
+          <a:fillRef idx="3">
+            <a:schemeClr val="accent1"/>
+          </a:fillRef>
+          <a:effectRef idx="2">
+            <a:schemeClr val="accent1"/>
+          </a:effectRef>
+          <a:fontRef idx="minor">
+            <a:schemeClr val="lt1"/>
+          </a:fontRef>
+        </p:style>
+        <p:txBody>
+          <a:bodyPr rtlCol="0" anchor="ctr" wrap="square"/>
+          <a:lstStyle/>
+          <a:p>
+            <a:pPr algn="ctr"/>
+            <a:r>
+              <a:rPr sz="2400" b="1">
+                <a:solidFill>
+                  <a:srgbClr val="FFFFFF"/>
+                </a:solidFill>
+                <a:latin typeface="Meiryo"/>
+                <a:ea typeface="Meiryo"/>
+                <a:cs typeface="Meiryo"/>
+              </a:rPr>
+              <a:t>ボタン</a:t>
+            </a:r>
+          </a:p>
+        </p:txBody>
+      </p:sp>
+      <p:sp>
+        <p:nvSpPr>
+          <p:cNvPr id="12" name="TextBox 11"/>
+          <p:cNvSpPr txBox="1"/>
+          <p:nvPr/>
+        </p:nvSpPr>
+        <p:spPr>
+          <a:xfrm>
+            <a:off x="3200400" y="4983480"/>
+            <a:ext cx="8442655" cy="914400"/>
+          </a:xfrm>
+          <a:prstGeom prst="rect">
+            <a:avLst/>
+          </a:prstGeom>
+          <a:noFill/>
+        </p:spPr>
+        <p:txBody>
+          <a:bodyPr wrap="square" anchor="ctr">
+            <a:spAutoFit/>
+          </a:bodyPr>
+          <a:lstStyle/>
+          <a:p>
+            <a:pPr algn="l">
+              <a:spcAft>
+                <a:spcPts val="600"/>
+              </a:spcAft>
+            </a:pPr>
+            <a:r>
+              <a:rPr sz="2400" b="0">
+                <a:solidFill>
+                  <a:srgbClr val="222222"/>
+                </a:solidFill>
+                <a:latin typeface="Meiryo"/>
+                <a:ea typeface="Meiryo"/>
+                <a:cs typeface="Meiryo"/>
+              </a:rPr>
+              <a:t>ポーリングと割り込み</a:t>
+            </a:r>
+          </a:p>
+        </p:txBody>
+      </p:sp>
+    </p:spTree>
+  </p:cSld>
+  <p:clrMapOvr>
+    <a:masterClrMapping/>
+  </p:clrMapOvr>
+</p:sld>
+</file>
+
+<file path=ppt/slides/slide58.xml><?xml version="1.0" encoding="utf-8"?>
+<p:sld xmlns:a="http://schemas.openxmlformats.org/drawingml/2006/main" xmlns:p="http://schemas.openxmlformats.org/presentationml/2006/main" xmlns:r="http://schemas.openxmlformats.org/officeDocument/2006/relationships">
+  <p:cSld>
+    <p:bg>
+      <p:bgPr>
+        <a:solidFill>
+          <a:srgbClr val="FFFFFF"/>
+        </a:solidFill>
+        <a:effectLst/>
+      </p:bgPr>
+    </p:bg>
+    <p:spTree>
+      <p:nvGrpSpPr>
+        <p:cNvPr id="1" name=""/>
+        <p:cNvGrpSpPr/>
+        <p:nvPr/>
+      </p:nvGrpSpPr>
+      <p:grpSpPr/>
+      <p:sp>
+        <p:nvSpPr>
+          <p:cNvPr id="2" name="TextBox 1"/>
+          <p:cNvSpPr txBox="1"/>
+          <p:nvPr/>
+        </p:nvSpPr>
+        <p:spPr>
+          <a:xfrm>
+            <a:off x="548640" y="228600"/>
+            <a:ext cx="11094415" cy="731520"/>
+          </a:xfrm>
+          <a:prstGeom prst="rect">
+            <a:avLst/>
+          </a:prstGeom>
+          <a:noFill/>
+        </p:spPr>
+        <p:txBody>
+          <a:bodyPr wrap="square" anchor="ctr">
+            <a:spAutoFit/>
+          </a:bodyPr>
+          <a:lstStyle/>
+          <a:p>
+            <a:pPr algn="l">
+              <a:spcAft>
+                <a:spcPts val="600"/>
+              </a:spcAft>
+            </a:pPr>
+            <a:r>
+              <a:rPr sz="3200" b="1">
+                <a:solidFill>
+                  <a:srgbClr val="222222"/>
+                </a:solidFill>
+                <a:latin typeface="Meiryo"/>
+                <a:ea typeface="Meiryo"/>
+                <a:cs typeface="Meiryo"/>
+              </a:rPr>
+              <a:t>チャレンジ課題</a:t>
+            </a:r>
+          </a:p>
+        </p:txBody>
+      </p:sp>
+      <p:sp>
+        <p:nvSpPr>
+          <p:cNvPr id="3" name="Rectangle 2"/>
+          <p:cNvSpPr/>
+          <p:nvPr/>
+        </p:nvSpPr>
+        <p:spPr>
+          <a:xfrm>
+            <a:off x="548640" y="987552"/>
+            <a:ext cx="11094415" cy="38100"/>
+          </a:xfrm>
+          <a:prstGeom prst="rect">
+            <a:avLst/>
+          </a:prstGeom>
+          <a:solidFill>
+            <a:srgbClr val="1F6FB2"/>
+          </a:solidFill>
+          <a:ln>
+            <a:noFill/>
+          </a:ln>
+          <a:effectLst/>
+        </p:spPr>
+        <p:style>
+          <a:lnRef idx="1">
+            <a:schemeClr val="accent1"/>
+          </a:lnRef>
+          <a:fillRef idx="3">
+            <a:schemeClr val="accent1"/>
+          </a:fillRef>
+          <a:effectRef idx="2">
+            <a:schemeClr val="accent1"/>
+          </a:effectRef>
+          <a:fontRef idx="minor">
+            <a:schemeClr val="lt1"/>
+          </a:fontRef>
+        </p:style>
+        <p:txBody>
+          <a:bodyPr rtlCol="0" anchor="ctr"/>
+          <a:lstStyle/>
+          <a:p>
+            <a:pPr algn="ctr"/>
+          </a:p>
+        </p:txBody>
+      </p:sp>
+      <p:sp>
+        <p:nvSpPr>
+          <p:cNvPr id="4" name="TextBox 3"/>
+          <p:cNvSpPr txBox="1"/>
+          <p:nvPr/>
+        </p:nvSpPr>
+        <p:spPr>
+          <a:xfrm>
+            <a:off x="548640" y="6446520"/>
+            <a:ext cx="11094415" cy="320040"/>
+          </a:xfrm>
+          <a:prstGeom prst="rect">
+            <a:avLst/>
+          </a:prstGeom>
+          <a:noFill/>
+        </p:spPr>
+        <p:txBody>
+          <a:bodyPr wrap="square" anchor="t">
+            <a:spAutoFit/>
+          </a:bodyPr>
+          <a:lstStyle/>
+          <a:p>
+            <a:pPr algn="r">
+              <a:spcAft>
+                <a:spcPts val="600"/>
+              </a:spcAft>
+            </a:pPr>
+            <a:r>
+              <a:rPr sz="1200" b="0">
+                <a:solidFill>
+                  <a:srgbClr val="666666"/>
+                </a:solidFill>
+                <a:latin typeface="Meiryo"/>
+                <a:ea typeface="Meiryo"/>
+                <a:cs typeface="Meiryo"/>
+              </a:rPr>
+              <a:t>第8部 まとめ  |  58</a:t>
             </a:r>
           </a:p>
         </p:txBody>
